--- a/sunumlar/6-sinif-unite1-veri-analiz-DETAYLI.pptx
+++ b/sunumlar/6-sinif-unite1-veri-analiz-DETAYLI.pptx
@@ -521,6 +521,73 @@
               <a:t>Video: 'Veri ve Bilgi Arasındaki Fark' ile başlayın</a:t>
             </a:r>
           </a:p>
+          <a:p/>
+          <a:p>
+            <a:r>
+              <a:t>🎨 GÖRSELLEŞTİRME ÖNERİLERİ:</a:t>
+            </a:r>
+          </a:p>
+          <a:p/>
+          <a:p>
+            <a:r>
+              <a:t>📸 Görsel: CPU, RAM ve anakart fotoğrafları</a:t>
+            </a:r>
+          </a:p>
+          <a:p>
+            <a:r>
+              <a:t>🎬 Video: Bilgisayar donanımı tanıtım videosu (1-2 dk)</a:t>
+            </a:r>
+          </a:p>
+          <a:p>
+            <a:r>
+              <a:t>💡 İnfografik: Bilgisayar bileşenleri şeması</a:t>
+            </a:r>
+          </a:p>
+          <a:p>
+            <a:r>
+              <a:t>📸 Görsel: Scratch arayüzü ekran görüntüsü</a:t>
+            </a:r>
+          </a:p>
+          <a:p>
+            <a:r>
+              <a:t>🎬 Video: Scratch ile basit oyun yapımı (3-5 dk)</a:t>
+            </a:r>
+          </a:p>
+          <a:p>
+            <a:r>
+              <a:t>💡 Ekran kaydı: Adım adım Scratch projesi</a:t>
+            </a:r>
+          </a:p>
+          <a:p>
+            <a:r>
+              <a:t>📸 Görsel: Farklı grafik türleri örnekleri</a:t>
+            </a:r>
+          </a:p>
+          <a:p>
+            <a:r>
+              <a:t>🎬 Video: Veri görselleştirme önemi</a:t>
+            </a:r>
+          </a:p>
+          <a:p>
+            <a:r>
+              <a:t>💡 İnfografik: Grafik türleri ve kullanım alanları</a:t>
+            </a:r>
+          </a:p>
+          <a:p>
+            <a:r>
+              <a:t>📸 Görsel: Excel arayüzü ekran görüntüsü</a:t>
+            </a:r>
+          </a:p>
+          <a:p>
+            <a:r>
+              <a:t>🎬 Video: Excel temel işlemler (2-3 dk)</a:t>
+            </a:r>
+          </a:p>
+          <a:p>
+            <a:r>
+              <a:t>💡 Ekran kaydı: Formül kullanımı demo</a:t>
+            </a:r>
+          </a:p>
         </p:txBody>
       </p:sp>
       <p:sp>
@@ -591,6 +658,98 @@
               <a:t>Gösterim: Canlı olarak Excel'de grafik oluşturun</a:t>
             </a:r>
           </a:p>
+          <a:p/>
+          <a:p>
+            <a:r>
+              <a:t>🎨 GÖRSELLEŞTİRME ÖNERİLERİ:</a:t>
+            </a:r>
+          </a:p>
+          <a:p/>
+          <a:p>
+            <a:r>
+              <a:t>📸 Görsel: Akış şeması örnekleri</a:t>
+            </a:r>
+          </a:p>
+          <a:p>
+            <a:r>
+              <a:t>🎬 Video: Algoritma nedir? Günlük hayattan örnekler</a:t>
+            </a:r>
+          </a:p>
+          <a:p>
+            <a:r>
+              <a:t>💡 İnfografik: Akış şeması sembolleri</a:t>
+            </a:r>
+          </a:p>
+          <a:p>
+            <a:r>
+              <a:t>📸 Görsel: Farklı grafik türleri örnekleri</a:t>
+            </a:r>
+          </a:p>
+          <a:p>
+            <a:r>
+              <a:t>🎬 Video: Veri görselleştirme önemi</a:t>
+            </a:r>
+          </a:p>
+          <a:p>
+            <a:r>
+              <a:t>💡 İnfografik: Grafik türleri ve kullanım alanları</a:t>
+            </a:r>
+          </a:p>
+          <a:p>
+            <a:r>
+              <a:t>📸 Görsel: Excel arayüzü ekran görüntüsü</a:t>
+            </a:r>
+          </a:p>
+          <a:p>
+            <a:r>
+              <a:t>🎬 Video: Excel temel işlemler (2-3 dk)</a:t>
+            </a:r>
+          </a:p>
+          <a:p>
+            <a:r>
+              <a:t>💡 Ekran kaydı: Formül kullanımı demo</a:t>
+            </a:r>
+          </a:p>
+          <a:p>
+            <a:r>
+              <a:t>📸 Görsel: Paint araçları ekran görüntüsü</a:t>
+            </a:r>
+          </a:p>
+          <a:p>
+            <a:r>
+              <a:t>🎬 Video: Paint ile basit çizim teknikleri</a:t>
+            </a:r>
+          </a:p>
+          <a:p>
+            <a:r>
+              <a:t>📸 Görsel: Temel tasarım prensipleri</a:t>
+            </a:r>
+          </a:p>
+          <a:p>
+            <a:r>
+              <a:t>🎬 Video: Dijital tasarıma giriş</a:t>
+            </a:r>
+          </a:p>
+          <a:p>
+            <a:r>
+              <a:t>💡 İnfografik: Renk teorisi ve uyumu</a:t>
+            </a:r>
+          </a:p>
+          <a:p>
+            <a:r>
+              <a:t>📸 Görsel: PowerPoint arayüzü ve araçları</a:t>
+            </a:r>
+          </a:p>
+          <a:p>
+            <a:r>
+              <a:t>🎬 Video: Etkili sunum hazırlama ipuçları</a:t>
+            </a:r>
+          </a:p>
+          <a:p>
+            <a:r>
+              <a:t>💡 Ekran kaydı: PowerPoint temel özellikler</a:t>
+            </a:r>
+          </a:p>
         </p:txBody>
       </p:sp>
       <p:sp>
@@ -661,6 +820,53 @@
               <a:t>Etkinlik: Veri seti verin, ortalama, medyan, mod hesaplasınlar</a:t>
             </a:r>
           </a:p>
+          <a:p/>
+          <a:p>
+            <a:r>
+              <a:t>🎨 GÖRSELLEŞTİRME ÖNERİLERİ:</a:t>
+            </a:r>
+          </a:p>
+          <a:p/>
+          <a:p>
+            <a:r>
+              <a:t>📸 Görsel: LAN ve WAN ağ topolojileri şeması</a:t>
+            </a:r>
+          </a:p>
+          <a:p>
+            <a:r>
+              <a:t>🎬 Video: İnternet nasıl çalışır? Animasyonlu anlatım</a:t>
+            </a:r>
+          </a:p>
+          <a:p>
+            <a:r>
+              <a:t>💡 İnfografik: Ev ağı kurulumu diyagramı</a:t>
+            </a:r>
+          </a:p>
+          <a:p>
+            <a:r>
+              <a:t>📸 Görsel: Döngü mantığı şeması</a:t>
+            </a:r>
+          </a:p>
+          <a:p>
+            <a:r>
+              <a:t>🎬 Video: Döngüler Scratch'te nasıl kullanılır?</a:t>
+            </a:r>
+          </a:p>
+          <a:p>
+            <a:r>
+              <a:t>📸 Görsel: Farklı grafik türleri örnekleri</a:t>
+            </a:r>
+          </a:p>
+          <a:p>
+            <a:r>
+              <a:t>🎬 Video: Veri görselleştirme önemi</a:t>
+            </a:r>
+          </a:p>
+          <a:p>
+            <a:r>
+              <a:t>💡 İnfografik: Grafik türleri ve kullanım alanları</a:t>
+            </a:r>
+          </a:p>
         </p:txBody>
       </p:sp>
       <p:sp>
@@ -731,6 +937,53 @@
               <a:t>Tartışma: Okulda veri ile alınabilecek başka kararlar neler?</a:t>
             </a:r>
           </a:p>
+          <a:p/>
+          <a:p>
+            <a:r>
+              <a:t>🎨 GÖRSELLEŞTİRME ÖNERİLERİ:</a:t>
+            </a:r>
+          </a:p>
+          <a:p/>
+          <a:p>
+            <a:r>
+              <a:t>📸 Görsel: LAN ve WAN ağ topolojileri şeması</a:t>
+            </a:r>
+          </a:p>
+          <a:p>
+            <a:r>
+              <a:t>🎬 Video: İnternet nasıl çalışır? Animasyonlu anlatım</a:t>
+            </a:r>
+          </a:p>
+          <a:p>
+            <a:r>
+              <a:t>💡 İnfografik: Ev ağı kurulumu diyagramı</a:t>
+            </a:r>
+          </a:p>
+          <a:p>
+            <a:r>
+              <a:t>📸 Görsel: Koşullu yapılar akış diyagramı</a:t>
+            </a:r>
+          </a:p>
+          <a:p>
+            <a:r>
+              <a:t>🎬 Video: Koşullu ifadeler Scratch'te</a:t>
+            </a:r>
+          </a:p>
+          <a:p>
+            <a:r>
+              <a:t>📸 Görsel: Farklı grafik türleri örnekleri</a:t>
+            </a:r>
+          </a:p>
+          <a:p>
+            <a:r>
+              <a:t>🎬 Video: Veri görselleştirme önemi</a:t>
+            </a:r>
+          </a:p>
+          <a:p>
+            <a:r>
+              <a:t>💡 İnfografik: Grafik türleri ve kullanım alanları</a:t>
+            </a:r>
+          </a:p>
         </p:txBody>
       </p:sp>
       <p:sp>
@@ -801,6 +1054,53 @@
               <a:t>Tartışma: Sosyal medyada paylaştığınız veriler ne kadar güvenli?</a:t>
             </a:r>
           </a:p>
+          <a:p/>
+          <a:p>
+            <a:r>
+              <a:t>🎨 GÖRSELLEŞTİRME ÖNERİLERİ:</a:t>
+            </a:r>
+          </a:p>
+          <a:p/>
+          <a:p>
+            <a:r>
+              <a:t>📸 Görsel: LAN ve WAN ağ topolojileri şeması</a:t>
+            </a:r>
+          </a:p>
+          <a:p>
+            <a:r>
+              <a:t>🎬 Video: İnternet nasıl çalışır? Animasyonlu anlatım</a:t>
+            </a:r>
+          </a:p>
+          <a:p>
+            <a:r>
+              <a:t>💡 İnfografik: Ev ağı kurulumu diyagramı</a:t>
+            </a:r>
+          </a:p>
+          <a:p>
+            <a:r>
+              <a:t>📸 Görsel: KVKK logosu ve temel ilkeler</a:t>
+            </a:r>
+          </a:p>
+          <a:p>
+            <a:r>
+              <a:t>🎬 Video: Kişisel veri nedir? Animasyon</a:t>
+            </a:r>
+          </a:p>
+          <a:p>
+            <a:r>
+              <a:t>📸 Görsel: Farklı grafik türleri örnekleri</a:t>
+            </a:r>
+          </a:p>
+          <a:p>
+            <a:r>
+              <a:t>🎬 Video: Veri görselleştirme önemi</a:t>
+            </a:r>
+          </a:p>
+          <a:p>
+            <a:r>
+              <a:t>💡 İnfografik: Grafik türleri ve kullanım alanları</a:t>
+            </a:r>
+          </a:p>
         </p:txBody>
       </p:sp>
       <p:sp>
@@ -871,6 +1171,78 @@
               <a:t>Quiz yapın</a:t>
             </a:r>
           </a:p>
+          <a:p/>
+          <a:p>
+            <a:r>
+              <a:t>🎨 GÖRSELLEŞTİRME ÖNERİLERİ:</a:t>
+            </a:r>
+          </a:p>
+          <a:p/>
+          <a:p>
+            <a:r>
+              <a:t>📸 Görsel: CPU, RAM ve anakart fotoğrafları</a:t>
+            </a:r>
+          </a:p>
+          <a:p>
+            <a:r>
+              <a:t>🎬 Video: Bilgisayar donanımı tanıtım videosu (1-2 dk)</a:t>
+            </a:r>
+          </a:p>
+          <a:p>
+            <a:r>
+              <a:t>💡 İnfografik: Bilgisayar bileşenleri şeması</a:t>
+            </a:r>
+          </a:p>
+          <a:p>
+            <a:r>
+              <a:t>📸 Görsel: KVKK logosu ve temel ilkeler</a:t>
+            </a:r>
+          </a:p>
+          <a:p>
+            <a:r>
+              <a:t>🎬 Video: Kişisel veri nedir? Animasyon</a:t>
+            </a:r>
+          </a:p>
+          <a:p>
+            <a:r>
+              <a:t>📸 Görsel: Koşullu yapılar akış diyagramı</a:t>
+            </a:r>
+          </a:p>
+          <a:p>
+            <a:r>
+              <a:t>🎬 Video: Koşullu ifadeler Scratch'te</a:t>
+            </a:r>
+          </a:p>
+          <a:p>
+            <a:r>
+              <a:t>📸 Görsel: Farklı grafik türleri örnekleri</a:t>
+            </a:r>
+          </a:p>
+          <a:p>
+            <a:r>
+              <a:t>🎬 Video: Veri görselleştirme önemi</a:t>
+            </a:r>
+          </a:p>
+          <a:p>
+            <a:r>
+              <a:t>💡 İnfografik: Grafik türleri ve kullanım alanları</a:t>
+            </a:r>
+          </a:p>
+          <a:p>
+            <a:r>
+              <a:t>📸 Görsel: Excel arayüzü ekran görüntüsü</a:t>
+            </a:r>
+          </a:p>
+          <a:p>
+            <a:r>
+              <a:t>🎬 Video: Excel temel işlemler (2-3 dk)</a:t>
+            </a:r>
+          </a:p>
+          <a:p>
+            <a:r>
+              <a:t>💡 Ekran kaydı: Formül kullanımı demo</a:t>
+            </a:r>
+          </a:p>
         </p:txBody>
       </p:sp>
       <p:sp>
@@ -941,6 +1313,225 @@
               <a:t>Tüm kaynakları önceden inceleyin</a:t>
             </a:r>
           </a:p>
+          <a:p/>
+          <a:p>
+            <a:r>
+              <a:t>🎨 GÖRSELLEŞTİRME ÖNERİLERİ:</a:t>
+            </a:r>
+          </a:p>
+          <a:p/>
+          <a:p>
+            <a:r>
+              <a:t>📸 Görsel: Farklı grafik türleri örnekleri</a:t>
+            </a:r>
+          </a:p>
+          <a:p>
+            <a:r>
+              <a:t>🎬 Video: Veri görselleştirme önemi</a:t>
+            </a:r>
+          </a:p>
+          <a:p>
+            <a:r>
+              <a:t>💡 İnfografik: Grafik türleri ve kullanım alanları</a:t>
+            </a:r>
+          </a:p>
+          <a:p>
+            <a:r>
+              <a:t>📸 Görsel: Excel arayüzü ekran görüntüsü</a:t>
+            </a:r>
+          </a:p>
+          <a:p>
+            <a:r>
+              <a:t>🎬 Video: Excel temel işlemler (2-3 dk)</a:t>
+            </a:r>
+          </a:p>
+          <a:p>
+            <a:r>
+              <a:t>💡 Ekran kaydı: Formül kullanımı demo</a:t>
+            </a:r>
+          </a:p>
+        </p:txBody>
+      </p:sp>
+      <p:sp>
+        <p:nvSpPr>
+          <p:cNvPr id="4" name="Slide Number Placeholder 3"/>
+          <p:cNvSpPr>
+            <a:spLocks noGrp="1"/>
+          </p:cNvSpPr>
+          <p:nvPr>
+            <p:ph type="sldNum" idx="5" sz="quarter"/>
+          </p:nvPr>
+        </p:nvSpPr>
+        <p:spPr/>
+      </p:sp>
+    </p:spTree>
+  </p:cSld>
+  <p:clrMapOvr>
+    <a:masterClrMapping/>
+  </p:clrMapOvr>
+</p:notes>
+</file>
+
+<file path=ppt/notesSlides/notesSlide16.xml><?xml version="1.0" encoding="utf-8"?>
+<p:notes xmlns:a="http://schemas.openxmlformats.org/drawingml/2006/main" xmlns:p="http://schemas.openxmlformats.org/presentationml/2006/main" xmlns:r="http://schemas.openxmlformats.org/officeDocument/2006/relationships">
+  <p:cSld>
+    <p:spTree>
+      <p:nvGrpSpPr>
+        <p:cNvPr id="1" name=""/>
+        <p:cNvGrpSpPr/>
+        <p:nvPr/>
+      </p:nvGrpSpPr>
+      <p:grpSpPr>
+        <a:xfrm>
+          <a:off x="0" y="0"/>
+          <a:ext cx="0" cy="0"/>
+          <a:chOff x="0" y="0"/>
+          <a:chExt cx="0" cy="0"/>
+        </a:xfrm>
+      </p:grpSpPr>
+      <p:sp>
+        <p:nvSpPr>
+          <p:cNvPr id="2" name="Slide Image Placeholder 1"/>
+          <p:cNvSpPr>
+            <a:spLocks noGrp="1"/>
+          </p:cNvSpPr>
+          <p:nvPr>
+            <p:ph type="sldImg" idx="2"/>
+          </p:nvPr>
+        </p:nvSpPr>
+        <p:spPr/>
+      </p:sp>
+      <p:sp>
+        <p:nvSpPr>
+          <p:cNvPr id="3" name="Notes Placeholder 2"/>
+          <p:cNvSpPr>
+            <a:spLocks noGrp="1"/>
+          </p:cNvSpPr>
+          <p:nvPr>
+            <p:ph type="body" idx="3" sz="quarter"/>
+          </p:nvPr>
+        </p:nvSpPr>
+        <p:spPr/>
+        <p:txBody>
+          <a:bodyPr/>
+          <a:lstStyle/>
+          <a:p>
+            <a:r>
+              <a:t>🎨 GÖRSELLEŞTİRME ÖNERİLERİ:</a:t>
+            </a:r>
+          </a:p>
+          <a:p/>
+          <a:p>
+            <a:r>
+              <a:t>📸 Görsel: Koşullu yapılar akış diyagramı</a:t>
+            </a:r>
+          </a:p>
+          <a:p>
+            <a:r>
+              <a:t>🎬 Video: Koşullu ifadeler Scratch'te</a:t>
+            </a:r>
+          </a:p>
+          <a:p>
+            <a:r>
+              <a:t>📸 Görsel: Farklı grafik türleri örnekleri</a:t>
+            </a:r>
+          </a:p>
+          <a:p>
+            <a:r>
+              <a:t>🎬 Video: Veri görselleştirme önemi</a:t>
+            </a:r>
+          </a:p>
+          <a:p>
+            <a:r>
+              <a:t>💡 İnfografik: Grafik türleri ve kullanım alanları</a:t>
+            </a:r>
+          </a:p>
+        </p:txBody>
+      </p:sp>
+      <p:sp>
+        <p:nvSpPr>
+          <p:cNvPr id="4" name="Slide Number Placeholder 3"/>
+          <p:cNvSpPr>
+            <a:spLocks noGrp="1"/>
+          </p:cNvSpPr>
+          <p:nvPr>
+            <p:ph type="sldNum" idx="5" sz="quarter"/>
+          </p:nvPr>
+        </p:nvSpPr>
+        <p:spPr/>
+      </p:sp>
+    </p:spTree>
+  </p:cSld>
+  <p:clrMapOvr>
+    <a:masterClrMapping/>
+  </p:clrMapOvr>
+</p:notes>
+</file>
+
+<file path=ppt/notesSlides/notesSlide17.xml><?xml version="1.0" encoding="utf-8"?>
+<p:notes xmlns:a="http://schemas.openxmlformats.org/drawingml/2006/main" xmlns:p="http://schemas.openxmlformats.org/presentationml/2006/main" xmlns:r="http://schemas.openxmlformats.org/officeDocument/2006/relationships">
+  <p:cSld>
+    <p:spTree>
+      <p:nvGrpSpPr>
+        <p:cNvPr id="1" name=""/>
+        <p:cNvGrpSpPr/>
+        <p:nvPr/>
+      </p:nvGrpSpPr>
+      <p:grpSpPr>
+        <a:xfrm>
+          <a:off x="0" y="0"/>
+          <a:ext cx="0" cy="0"/>
+          <a:chOff x="0" y="0"/>
+          <a:chExt cx="0" cy="0"/>
+        </a:xfrm>
+      </p:grpSpPr>
+      <p:sp>
+        <p:nvSpPr>
+          <p:cNvPr id="2" name="Slide Image Placeholder 1"/>
+          <p:cNvSpPr>
+            <a:spLocks noGrp="1"/>
+          </p:cNvSpPr>
+          <p:nvPr>
+            <p:ph type="sldImg" idx="2"/>
+          </p:nvPr>
+        </p:nvSpPr>
+        <p:spPr/>
+      </p:sp>
+      <p:sp>
+        <p:nvSpPr>
+          <p:cNvPr id="3" name="Notes Placeholder 2"/>
+          <p:cNvSpPr>
+            <a:spLocks noGrp="1"/>
+          </p:cNvSpPr>
+          <p:nvPr>
+            <p:ph type="body" idx="3" sz="quarter"/>
+          </p:nvPr>
+        </p:nvSpPr>
+        <p:spPr/>
+        <p:txBody>
+          <a:bodyPr/>
+          <a:lstStyle/>
+          <a:p>
+            <a:r>
+              <a:t>🎨 GÖRSELLEŞTİRME ÖNERİLERİ:</a:t>
+            </a:r>
+          </a:p>
+          <a:p/>
+          <a:p>
+            <a:r>
+              <a:t>📸 Görsel: Farklı grafik türleri örnekleri</a:t>
+            </a:r>
+          </a:p>
+          <a:p>
+            <a:r>
+              <a:t>🎬 Video: Veri görselleştirme önemi</a:t>
+            </a:r>
+          </a:p>
+          <a:p>
+            <a:r>
+              <a:t>💡 İnfografik: Grafik türleri ve kullanım alanları</a:t>
+            </a:r>
+          </a:p>
         </p:txBody>
       </p:sp>
       <p:sp>
@@ -1011,6 +1602,43 @@
               <a:t>Tartışma: Günlük hayattan veri örnekleri verin (fiyatlar, notlar, hava durumu)</a:t>
             </a:r>
           </a:p>
+          <a:p/>
+          <a:p>
+            <a:r>
+              <a:t>🎨 GÖRSELLEŞTİRME ÖNERİLERİ:</a:t>
+            </a:r>
+          </a:p>
+          <a:p/>
+          <a:p>
+            <a:r>
+              <a:t>📸 Görsel: LAN ve WAN ağ topolojileri şeması</a:t>
+            </a:r>
+          </a:p>
+          <a:p>
+            <a:r>
+              <a:t>🎬 Video: İnternet nasıl çalışır? Animasyonlu anlatım</a:t>
+            </a:r>
+          </a:p>
+          <a:p>
+            <a:r>
+              <a:t>💡 İnfografik: Ev ağı kurulumu diyagramı</a:t>
+            </a:r>
+          </a:p>
+          <a:p>
+            <a:r>
+              <a:t>📸 Görsel: Farklı grafik türleri örnekleri</a:t>
+            </a:r>
+          </a:p>
+          <a:p>
+            <a:r>
+              <a:t>🎬 Video: Veri görselleştirme önemi</a:t>
+            </a:r>
+          </a:p>
+          <a:p>
+            <a:r>
+              <a:t>💡 İnfografik: Grafik türleri ve kullanım alanları</a:t>
+            </a:r>
+          </a:p>
         </p:txBody>
       </p:sp>
       <p:sp>
@@ -1081,6 +1709,43 @@
               <a:t>Etkinlik: Sınıfta mini anket yapın (favori ders, hobi, vs.)</a:t>
             </a:r>
           </a:p>
+          <a:p/>
+          <a:p>
+            <a:r>
+              <a:t>🎨 GÖRSELLEŞTİRME ÖNERİLERİ:</a:t>
+            </a:r>
+          </a:p>
+          <a:p/>
+          <a:p>
+            <a:r>
+              <a:t>📸 Görsel: LAN ve WAN ağ topolojileri şeması</a:t>
+            </a:r>
+          </a:p>
+          <a:p>
+            <a:r>
+              <a:t>🎬 Video: İnternet nasıl çalışır? Animasyonlu anlatım</a:t>
+            </a:r>
+          </a:p>
+          <a:p>
+            <a:r>
+              <a:t>💡 İnfografik: Ev ağı kurulumu diyagramı</a:t>
+            </a:r>
+          </a:p>
+          <a:p>
+            <a:r>
+              <a:t>📸 Görsel: Farklı grafik türleri örnekleri</a:t>
+            </a:r>
+          </a:p>
+          <a:p>
+            <a:r>
+              <a:t>🎬 Video: Veri görselleştirme önemi</a:t>
+            </a:r>
+          </a:p>
+          <a:p>
+            <a:r>
+              <a:t>💡 İnfografik: Grafik türleri ve kullanım alanları</a:t>
+            </a:r>
+          </a:p>
         </p:txBody>
       </p:sp>
       <p:sp>
@@ -1151,6 +1816,58 @@
               <a:t>Etkinlik: Öğrencilere veri örnekleri verin, hangi türe ait olduklarını bulsunlar</a:t>
             </a:r>
           </a:p>
+          <a:p/>
+          <a:p>
+            <a:r>
+              <a:t>🎨 GÖRSELLEŞTİRME ÖNERİLERİ:</a:t>
+            </a:r>
+          </a:p>
+          <a:p/>
+          <a:p>
+            <a:r>
+              <a:t>📸 Görsel: LAN ve WAN ağ topolojileri şeması</a:t>
+            </a:r>
+          </a:p>
+          <a:p>
+            <a:r>
+              <a:t>🎬 Video: İnternet nasıl çalışır? Animasyonlu anlatım</a:t>
+            </a:r>
+          </a:p>
+          <a:p>
+            <a:r>
+              <a:t>💡 İnfografik: Ev ağı kurulumu diyagramı</a:t>
+            </a:r>
+          </a:p>
+          <a:p>
+            <a:r>
+              <a:t>📸 Görsel: Farklı grafik türleri örnekleri</a:t>
+            </a:r>
+          </a:p>
+          <a:p>
+            <a:r>
+              <a:t>🎬 Video: Veri görselleştirme önemi</a:t>
+            </a:r>
+          </a:p>
+          <a:p>
+            <a:r>
+              <a:t>💡 İnfografik: Grafik türleri ve kullanım alanları</a:t>
+            </a:r>
+          </a:p>
+          <a:p>
+            <a:r>
+              <a:t>📸 Görsel: Temel tasarım prensipleri</a:t>
+            </a:r>
+          </a:p>
+          <a:p>
+            <a:r>
+              <a:t>🎬 Video: Dijital tasarıma giriş</a:t>
+            </a:r>
+          </a:p>
+          <a:p>
+            <a:r>
+              <a:t>💡 İnfografik: Renk teorisi ve uyumu</a:t>
+            </a:r>
+          </a:p>
         </p:txBody>
       </p:sp>
       <p:sp>
@@ -1221,6 +1938,68 @@
               <a:t>Örnek: Ham veri verin, öğrenciler tablo haline getirsin</a:t>
             </a:r>
           </a:p>
+          <a:p/>
+          <a:p>
+            <a:r>
+              <a:t>🎨 GÖRSELLEŞTİRME ÖNERİLERİ:</a:t>
+            </a:r>
+          </a:p>
+          <a:p/>
+          <a:p>
+            <a:r>
+              <a:t>📸 Görsel: LAN ve WAN ağ topolojileri şeması</a:t>
+            </a:r>
+          </a:p>
+          <a:p>
+            <a:r>
+              <a:t>🎬 Video: İnternet nasıl çalışır? Animasyonlu anlatım</a:t>
+            </a:r>
+          </a:p>
+          <a:p>
+            <a:r>
+              <a:t>💡 İnfografik: Ev ağı kurulumu diyagramı</a:t>
+            </a:r>
+          </a:p>
+          <a:p>
+            <a:r>
+              <a:t>📸 Görsel: Akış şeması örnekleri</a:t>
+            </a:r>
+          </a:p>
+          <a:p>
+            <a:r>
+              <a:t>🎬 Video: Algoritma nedir? Günlük hayattan örnekler</a:t>
+            </a:r>
+          </a:p>
+          <a:p>
+            <a:r>
+              <a:t>💡 İnfografik: Akış şeması sembolleri</a:t>
+            </a:r>
+          </a:p>
+          <a:p>
+            <a:r>
+              <a:t>📸 Görsel: Döngü mantığı şeması</a:t>
+            </a:r>
+          </a:p>
+          <a:p>
+            <a:r>
+              <a:t>🎬 Video: Döngüler Scratch'te nasıl kullanılır?</a:t>
+            </a:r>
+          </a:p>
+          <a:p>
+            <a:r>
+              <a:t>📸 Görsel: Farklı grafik türleri örnekleri</a:t>
+            </a:r>
+          </a:p>
+          <a:p>
+            <a:r>
+              <a:t>🎬 Video: Veri görselleştirme önemi</a:t>
+            </a:r>
+          </a:p>
+          <a:p>
+            <a:r>
+              <a:t>💡 İnfografik: Grafik türleri ve kullanım alanları</a:t>
+            </a:r>
+          </a:p>
         </p:txBody>
       </p:sp>
       <p:sp>
@@ -1291,6 +2070,68 @@
               <a:t>Görsel: Her grafik türünden örnek gösterin</a:t>
             </a:r>
           </a:p>
+          <a:p/>
+          <a:p>
+            <a:r>
+              <a:t>🎨 GÖRSELLEŞTİRME ÖNERİLERİ:</a:t>
+            </a:r>
+          </a:p>
+          <a:p/>
+          <a:p>
+            <a:r>
+              <a:t>📸 Görsel: CPU, RAM ve anakart fotoğrafları</a:t>
+            </a:r>
+          </a:p>
+          <a:p>
+            <a:r>
+              <a:t>🎬 Video: Bilgisayar donanımı tanıtım videosu (1-2 dk)</a:t>
+            </a:r>
+          </a:p>
+          <a:p>
+            <a:r>
+              <a:t>💡 İnfografik: Bilgisayar bileşenleri şeması</a:t>
+            </a:r>
+          </a:p>
+          <a:p>
+            <a:r>
+              <a:t>📸 Görsel: LAN ve WAN ağ topolojileri şeması</a:t>
+            </a:r>
+          </a:p>
+          <a:p>
+            <a:r>
+              <a:t>🎬 Video: İnternet nasıl çalışır? Animasyonlu anlatım</a:t>
+            </a:r>
+          </a:p>
+          <a:p>
+            <a:r>
+              <a:t>💡 İnfografik: Ev ağı kurulumu diyagramı</a:t>
+            </a:r>
+          </a:p>
+          <a:p>
+            <a:r>
+              <a:t>📸 Görsel: Değişken kavramı görselleştirmesi</a:t>
+            </a:r>
+          </a:p>
+          <a:p>
+            <a:r>
+              <a:t>🎬 Video: Scratch'te değişken kullanımı</a:t>
+            </a:r>
+          </a:p>
+          <a:p>
+            <a:r>
+              <a:t>📸 Görsel: Farklı grafik türleri örnekleri</a:t>
+            </a:r>
+          </a:p>
+          <a:p>
+            <a:r>
+              <a:t>🎬 Video: Veri görselleştirme önemi</a:t>
+            </a:r>
+          </a:p>
+          <a:p>
+            <a:r>
+              <a:t>💡 İnfografik: Grafik türleri ve kullanım alanları</a:t>
+            </a:r>
+          </a:p>
         </p:txBody>
       </p:sp>
       <p:sp>
@@ -1361,6 +2202,73 @@
               <a:t>Etkinlik: İyi ve kötü grafik örnekleri gösterin, farkları tartışın</a:t>
             </a:r>
           </a:p>
+          <a:p/>
+          <a:p>
+            <a:r>
+              <a:t>🎨 GÖRSELLEŞTİRME ÖNERİLERİ:</a:t>
+            </a:r>
+          </a:p>
+          <a:p/>
+          <a:p>
+            <a:r>
+              <a:t>📸 Görsel: LAN ve WAN ağ topolojileri şeması</a:t>
+            </a:r>
+          </a:p>
+          <a:p>
+            <a:r>
+              <a:t>🎬 Video: İnternet nasıl çalışır? Animasyonlu anlatım</a:t>
+            </a:r>
+          </a:p>
+          <a:p>
+            <a:r>
+              <a:t>💡 İnfografik: Ev ağı kurulumu diyagramı</a:t>
+            </a:r>
+          </a:p>
+          <a:p>
+            <a:r>
+              <a:t>📸 Görsel: Scratch arayüzü ekran görüntüsü</a:t>
+            </a:r>
+          </a:p>
+          <a:p>
+            <a:r>
+              <a:t>🎬 Video: Scratch ile basit oyun yapımı (3-5 dk)</a:t>
+            </a:r>
+          </a:p>
+          <a:p>
+            <a:r>
+              <a:t>💡 Ekran kaydı: Adım adım Scratch projesi</a:t>
+            </a:r>
+          </a:p>
+          <a:p>
+            <a:r>
+              <a:t>📸 Görsel: Farklı grafik türleri örnekleri</a:t>
+            </a:r>
+          </a:p>
+          <a:p>
+            <a:r>
+              <a:t>🎬 Video: Veri görselleştirme önemi</a:t>
+            </a:r>
+          </a:p>
+          <a:p>
+            <a:r>
+              <a:t>💡 İnfografik: Grafik türleri ve kullanım alanları</a:t>
+            </a:r>
+          </a:p>
+          <a:p>
+            <a:r>
+              <a:t>📸 Görsel: Temel tasarım prensipleri</a:t>
+            </a:r>
+          </a:p>
+          <a:p>
+            <a:r>
+              <a:t>🎬 Video: Dijital tasarıma giriş</a:t>
+            </a:r>
+          </a:p>
+          <a:p>
+            <a:r>
+              <a:t>💡 İnfografik: Renk teorisi ve uyumu</a:t>
+            </a:r>
+          </a:p>
         </p:txBody>
       </p:sp>
       <p:sp>
@@ -1431,6 +2339,118 @@
               <a:t>Gösterim: Excel/Sheets açın, basit tablo oluşturun</a:t>
             </a:r>
           </a:p>
+          <a:p/>
+          <a:p>
+            <a:r>
+              <a:t>🎨 GÖRSELLEŞTİRME ÖNERİLERİ:</a:t>
+            </a:r>
+          </a:p>
+          <a:p/>
+          <a:p>
+            <a:r>
+              <a:t>📸 Görsel: CPU, RAM ve anakart fotoğrafları</a:t>
+            </a:r>
+          </a:p>
+          <a:p>
+            <a:r>
+              <a:t>🎬 Video: Bilgisayar donanımı tanıtım videosu (1-2 dk)</a:t>
+            </a:r>
+          </a:p>
+          <a:p>
+            <a:r>
+              <a:t>💡 İnfografik: Bilgisayar bileşenleri şeması</a:t>
+            </a:r>
+          </a:p>
+          <a:p>
+            <a:r>
+              <a:t>📸 Görsel: LAN ve WAN ağ topolojileri şeması</a:t>
+            </a:r>
+          </a:p>
+          <a:p>
+            <a:r>
+              <a:t>🎬 Video: İnternet nasıl çalışır? Animasyonlu anlatım</a:t>
+            </a:r>
+          </a:p>
+          <a:p>
+            <a:r>
+              <a:t>💡 İnfografik: Ev ağı kurulumu diyagramı</a:t>
+            </a:r>
+          </a:p>
+          <a:p>
+            <a:r>
+              <a:t>📸 Görsel: Scratch arayüzü ekran görüntüsü</a:t>
+            </a:r>
+          </a:p>
+          <a:p>
+            <a:r>
+              <a:t>🎬 Video: Scratch ile basit oyun yapımı (3-5 dk)</a:t>
+            </a:r>
+          </a:p>
+          <a:p>
+            <a:r>
+              <a:t>💡 Ekran kaydı: Adım adım Scratch projesi</a:t>
+            </a:r>
+          </a:p>
+          <a:p>
+            <a:r>
+              <a:t>📸 Görsel: Akış şeması örnekleri</a:t>
+            </a:r>
+          </a:p>
+          <a:p>
+            <a:r>
+              <a:t>🎬 Video: Algoritma nedir? Günlük hayattan örnekler</a:t>
+            </a:r>
+          </a:p>
+          <a:p>
+            <a:r>
+              <a:t>💡 İnfografik: Akış şeması sembolleri</a:t>
+            </a:r>
+          </a:p>
+          <a:p>
+            <a:r>
+              <a:t>📸 Görsel: Farklı grafik türleri örnekleri</a:t>
+            </a:r>
+          </a:p>
+          <a:p>
+            <a:r>
+              <a:t>🎬 Video: Veri görselleştirme önemi</a:t>
+            </a:r>
+          </a:p>
+          <a:p>
+            <a:r>
+              <a:t>💡 İnfografik: Grafik türleri ve kullanım alanları</a:t>
+            </a:r>
+          </a:p>
+          <a:p>
+            <a:r>
+              <a:t>📸 Görsel: Excel arayüzü ekran görüntüsü</a:t>
+            </a:r>
+          </a:p>
+          <a:p>
+            <a:r>
+              <a:t>🎬 Video: Excel temel işlemler (2-3 dk)</a:t>
+            </a:r>
+          </a:p>
+          <a:p>
+            <a:r>
+              <a:t>💡 Ekran kaydı: Formül kullanımı demo</a:t>
+            </a:r>
+          </a:p>
+          <a:p>
+            <a:r>
+              <a:t>📸 Görsel: Temel tasarım prensipleri</a:t>
+            </a:r>
+          </a:p>
+          <a:p>
+            <a:r>
+              <a:t>🎬 Video: Dijital tasarıma giriş</a:t>
+            </a:r>
+          </a:p>
+          <a:p>
+            <a:r>
+              <a:t>💡 İnfografik: Renk teorisi ve uyumu</a:t>
+            </a:r>
+          </a:p>
         </p:txBody>
       </p:sp>
       <p:sp>
@@ -1499,6 +2519,43 @@
           <a:p>
             <a:r>
               <a:t>Etkinlik: Öğrencilere Excel'de formül yazdırın</a:t>
+            </a:r>
+          </a:p>
+          <a:p/>
+          <a:p>
+            <a:r>
+              <a:t>🎨 GÖRSELLEŞTİRME ÖNERİLERİ:</a:t>
+            </a:r>
+          </a:p>
+          <a:p/>
+          <a:p>
+            <a:r>
+              <a:t>📸 Görsel: LAN ve WAN ağ topolojileri şeması</a:t>
+            </a:r>
+          </a:p>
+          <a:p>
+            <a:r>
+              <a:t>🎬 Video: İnternet nasıl çalışır? Animasyonlu anlatım</a:t>
+            </a:r>
+          </a:p>
+          <a:p>
+            <a:r>
+              <a:t>💡 İnfografik: Ev ağı kurulumu diyagramı</a:t>
+            </a:r>
+          </a:p>
+          <a:p>
+            <a:r>
+              <a:t>📸 Görsel: Excel arayüzü ekran görüntüsü</a:t>
+            </a:r>
+          </a:p>
+          <a:p>
+            <a:r>
+              <a:t>🎬 Video: Excel temel işlemler (2-3 dk)</a:t>
+            </a:r>
+          </a:p>
+          <a:p>
+            <a:r>
+              <a:t>💡 Ekran kaydı: Formül kullanımı demo</a:t>
             </a:r>
           </a:p>
         </p:txBody>
@@ -4675,6 +5732,7 @@
               <a:defRPr sz="2000"/>
             </a:pPr>
             <a:r>
+              <a:rPr sz="1600"/>
               <a:t>Excel'de otomatik hesaplama!</a:t>
             </a:r>
           </a:p>
@@ -4694,6 +5752,7 @@
               <a:defRPr sz="2000" b="1"/>
             </a:pPr>
             <a:r>
+              <a:rPr sz="1600"/>
               <a:t>✅ Temel Formüller:</a:t>
             </a:r>
           </a:p>
@@ -4713,6 +5772,7 @@
               <a:defRPr sz="2000"/>
             </a:pPr>
             <a:r>
+              <a:rPr sz="1600"/>
               <a:t>➕ Toplama:</a:t>
             </a:r>
           </a:p>
@@ -4724,6 +5784,7 @@
               <a:defRPr sz="1800"/>
             </a:pPr>
             <a:r>
+              <a:rPr sz="1600"/>
               <a:t>    • =A1+B1</a:t>
             </a:r>
           </a:p>
@@ -4735,6 +5796,7 @@
               <a:defRPr sz="1800"/>
             </a:pPr>
             <a:r>
+              <a:rPr sz="1600"/>
               <a:t>    • =SUM(A1:A10) → A1'den A10'a kadar topla</a:t>
             </a:r>
           </a:p>
@@ -4754,6 +5816,7 @@
               <a:defRPr sz="2000"/>
             </a:pPr>
             <a:r>
+              <a:rPr sz="1600"/>
               <a:t>➗ Ortalama:</a:t>
             </a:r>
           </a:p>
@@ -4765,6 +5828,7 @@
               <a:defRPr sz="1800"/>
             </a:pPr>
             <a:r>
+              <a:rPr sz="1600"/>
               <a:t>    • =AVERAGE(A1:A10)</a:t>
             </a:r>
           </a:p>
@@ -4784,6 +5848,7 @@
               <a:defRPr sz="2000"/>
             </a:pPr>
             <a:r>
+              <a:rPr sz="1600"/>
               <a:t>🔢 Sayma:</a:t>
             </a:r>
           </a:p>
@@ -4795,6 +5860,7 @@
               <a:defRPr sz="1800"/>
             </a:pPr>
             <a:r>
+              <a:rPr sz="1600"/>
               <a:t>    • =COUNT(A1:A10) → Kaç sayı var?</a:t>
             </a:r>
           </a:p>
@@ -4814,6 +5880,7 @@
               <a:defRPr sz="2000"/>
             </a:pPr>
             <a:r>
+              <a:rPr sz="1600"/>
               <a:t>📊 En Büyük/Küçük:</a:t>
             </a:r>
           </a:p>
@@ -4825,6 +5892,7 @@
               <a:defRPr sz="1800"/>
             </a:pPr>
             <a:r>
+              <a:rPr sz="1600"/>
               <a:t>    • =MAX(A1:A10)</a:t>
             </a:r>
           </a:p>
@@ -4836,6 +5904,7 @@
               <a:defRPr sz="1800"/>
             </a:pPr>
             <a:r>
+              <a:rPr sz="1600"/>
               <a:t>    • =MIN(A1:A10)</a:t>
             </a:r>
           </a:p>
@@ -4855,6 +5924,7 @@
               <a:defRPr sz="2000" b="1"/>
             </a:pPr>
             <a:r>
+              <a:rPr sz="1600"/>
               <a:t>📌 Formül Yazma Kuralları:</a:t>
             </a:r>
           </a:p>
@@ -4866,6 +5936,7 @@
               <a:defRPr sz="1800"/>
             </a:pPr>
             <a:r>
+              <a:rPr sz="1600"/>
               <a:t>    • '=' ile başla</a:t>
             </a:r>
           </a:p>
@@ -4877,6 +5948,7 @@
               <a:defRPr sz="1800"/>
             </a:pPr>
             <a:r>
+              <a:rPr sz="1600"/>
               <a:t>    • Hücre adreslerini kullan (A1, B2)</a:t>
             </a:r>
           </a:p>
@@ -4888,6 +5960,7 @@
               <a:defRPr sz="1800"/>
             </a:pPr>
             <a:r>
+              <a:rPr sz="1600"/>
               <a:t>    • Operatörler: +, -, *, /</a:t>
             </a:r>
           </a:p>
@@ -4907,6 +5980,7 @@
               <a:defRPr sz="2000" b="1"/>
             </a:pPr>
             <a:r>
+              <a:rPr sz="1600"/>
               <a:t>💡 Örnek: Not Ortalaması</a:t>
             </a:r>
           </a:p>
@@ -4918,6 +5992,7 @@
               <a:defRPr sz="2000"/>
             </a:pPr>
             <a:r>
+              <a:rPr sz="1600"/>
               <a:t>| Ders       | Not |</a:t>
             </a:r>
           </a:p>
@@ -4929,6 +6004,7 @@
               <a:defRPr sz="2000"/>
             </a:pPr>
             <a:r>
+              <a:rPr sz="1600"/>
               <a:t>| Matematik  | 85  |</a:t>
             </a:r>
           </a:p>
@@ -4940,6 +6016,7 @@
               <a:defRPr sz="2000"/>
             </a:pPr>
             <a:r>
+              <a:rPr sz="1600"/>
               <a:t>| Türkçe     | 90  |</a:t>
             </a:r>
           </a:p>
@@ -4951,6 +6028,7 @@
               <a:defRPr sz="2000"/>
             </a:pPr>
             <a:r>
+              <a:rPr sz="1600"/>
               <a:t>| Fen        | 78  |</a:t>
             </a:r>
           </a:p>
@@ -4962,6 +6040,7 @@
               <a:defRPr sz="2000"/>
             </a:pPr>
             <a:r>
+              <a:rPr sz="1600"/>
               <a:t>| Ortalama   | =AVERAGE(B2:B4) |</a:t>
             </a:r>
           </a:p>
@@ -5060,6 +6139,7 @@
               <a:defRPr sz="2000"/>
             </a:pPr>
             <a:r>
+              <a:rPr sz="1400"/>
               <a:t>Tablodan grafik yapmak çok kolay!</a:t>
             </a:r>
           </a:p>
@@ -5079,6 +6159,7 @@
               <a:defRPr sz="2000" b="1"/>
             </a:pPr>
             <a:r>
+              <a:rPr sz="1400"/>
               <a:t>✅ Grafik Oluşturma Adımları:</a:t>
             </a:r>
           </a:p>
@@ -5098,6 +6179,7 @@
               <a:defRPr sz="2000"/>
             </a:pPr>
             <a:r>
+              <a:rPr sz="1400"/>
               <a:t>1️⃣ Veriyi Seç:</a:t>
             </a:r>
           </a:p>
@@ -5109,6 +6191,7 @@
               <a:defRPr sz="1800"/>
             </a:pPr>
             <a:r>
+              <a:rPr sz="1400"/>
               <a:t>    • Grafik yapılacak hücreleri seç</a:t>
             </a:r>
           </a:p>
@@ -5128,6 +6211,7 @@
               <a:defRPr sz="2000"/>
             </a:pPr>
             <a:r>
+              <a:rPr sz="1400"/>
               <a:t>2️⃣ Ekle → Grafik:</a:t>
             </a:r>
           </a:p>
@@ -5139,6 +6223,7 @@
               <a:defRPr sz="1800"/>
             </a:pPr>
             <a:r>
+              <a:rPr sz="1400"/>
               <a:t>    • Excel: Insert → Chart</a:t>
             </a:r>
           </a:p>
@@ -5150,6 +6235,7 @@
               <a:defRPr sz="1800"/>
             </a:pPr>
             <a:r>
+              <a:rPr sz="1400"/>
               <a:t>    • Sheets: Insert → Chart</a:t>
             </a:r>
           </a:p>
@@ -5169,6 +6255,7 @@
               <a:defRPr sz="2000"/>
             </a:pPr>
             <a:r>
+              <a:rPr sz="1400"/>
               <a:t>3️⃣ Grafik Türünü Seç:</a:t>
             </a:r>
           </a:p>
@@ -5180,6 +6267,7 @@
               <a:defRPr sz="1800"/>
             </a:pPr>
             <a:r>
+              <a:rPr sz="1400"/>
               <a:t>    • Sütun, Çizgi, Pasta...</a:t>
             </a:r>
           </a:p>
@@ -5199,6 +6287,7 @@
               <a:defRPr sz="2000"/>
             </a:pPr>
             <a:r>
+              <a:rPr sz="1400"/>
               <a:t>4️⃣ Özelleştir:</a:t>
             </a:r>
           </a:p>
@@ -5210,6 +6299,7 @@
               <a:defRPr sz="1800"/>
             </a:pPr>
             <a:r>
+              <a:rPr sz="1400"/>
               <a:t>    • Başlık ekle</a:t>
             </a:r>
           </a:p>
@@ -5221,6 +6311,7 @@
               <a:defRPr sz="1800"/>
             </a:pPr>
             <a:r>
+              <a:rPr sz="1400"/>
               <a:t>    • Renkleri değiştir</a:t>
             </a:r>
           </a:p>
@@ -5232,6 +6323,7 @@
               <a:defRPr sz="1800"/>
             </a:pPr>
             <a:r>
+              <a:rPr sz="1400"/>
               <a:t>    • Eksen etiketleri</a:t>
             </a:r>
           </a:p>
@@ -5251,6 +6343,7 @@
               <a:defRPr sz="2000"/>
             </a:pPr>
             <a:r>
+              <a:rPr sz="1400"/>
               <a:t>5️⃣ Kaydet/Paylaş:</a:t>
             </a:r>
           </a:p>
@@ -5262,6 +6355,7 @@
               <a:defRPr sz="1800"/>
             </a:pPr>
             <a:r>
+              <a:rPr sz="1400"/>
               <a:t>    • Resim olarak kaydet</a:t>
             </a:r>
           </a:p>
@@ -5273,6 +6367,7 @@
               <a:defRPr sz="1800"/>
             </a:pPr>
             <a:r>
+              <a:rPr sz="1400"/>
               <a:t>    • Sunuma ekle</a:t>
             </a:r>
           </a:p>
@@ -5292,6 +6387,7 @@
               <a:defRPr sz="2000" b="1"/>
             </a:pPr>
             <a:r>
+              <a:rPr sz="1400"/>
               <a:t>📌 Örnek: Aylık Sıcaklık Grafiği</a:t>
             </a:r>
           </a:p>
@@ -5303,6 +6399,7 @@
               <a:defRPr sz="2000"/>
             </a:pPr>
             <a:r>
+              <a:rPr sz="1400"/>
               <a:t>| Ay      | Sıcaklık |</a:t>
             </a:r>
           </a:p>
@@ -5314,6 +6411,7 @@
               <a:defRPr sz="2000"/>
             </a:pPr>
             <a:r>
+              <a:rPr sz="1400"/>
               <a:t>| Ocak    | 5°C      |</a:t>
             </a:r>
           </a:p>
@@ -5325,6 +6423,7 @@
               <a:defRPr sz="2000"/>
             </a:pPr>
             <a:r>
+              <a:rPr sz="1400"/>
               <a:t>| Şubat   | 7°C      |</a:t>
             </a:r>
           </a:p>
@@ -5336,6 +6435,7 @@
               <a:defRPr sz="2000"/>
             </a:pPr>
             <a:r>
+              <a:rPr sz="1400"/>
               <a:t>| Mart    | 12°C     |</a:t>
             </a:r>
           </a:p>
@@ -5347,6 +6447,7 @@
               <a:defRPr sz="2000"/>
             </a:pPr>
             <a:r>
+              <a:rPr sz="1400"/>
               <a:t>→ Çizgi grafiği yap</a:t>
             </a:r>
           </a:p>
@@ -5445,6 +6546,7 @@
               <a:defRPr sz="2000"/>
             </a:pPr>
             <a:r>
+              <a:rPr sz="1400"/>
               <a:t>Veriyi inceleyip sonuç çıkarmak</a:t>
             </a:r>
           </a:p>
@@ -5464,6 +6566,7 @@
               <a:defRPr sz="2000" b="1"/>
             </a:pPr>
             <a:r>
+              <a:rPr sz="1400"/>
               <a:t>✅ Analiz Soruları:</a:t>
             </a:r>
           </a:p>
@@ -5475,6 +6578,7 @@
               <a:defRPr sz="1800"/>
             </a:pPr>
             <a:r>
+              <a:rPr sz="1400"/>
               <a:t>    • En yüksek değer nedir?</a:t>
             </a:r>
           </a:p>
@@ -5486,6 +6590,7 @@
               <a:defRPr sz="1800"/>
             </a:pPr>
             <a:r>
+              <a:rPr sz="1400"/>
               <a:t>    • En düşük değer nedir?</a:t>
             </a:r>
           </a:p>
@@ -5497,6 +6602,7 @@
               <a:defRPr sz="1800"/>
             </a:pPr>
             <a:r>
+              <a:rPr sz="1400"/>
               <a:t>    • Ortalama nedir?</a:t>
             </a:r>
           </a:p>
@@ -5508,6 +6614,7 @@
               <a:defRPr sz="1800"/>
             </a:pPr>
             <a:r>
+              <a:rPr sz="1400"/>
               <a:t>    • Bir kalıp var mı?</a:t>
             </a:r>
           </a:p>
@@ -5519,6 +6626,7 @@
               <a:defRPr sz="1800"/>
             </a:pPr>
             <a:r>
+              <a:rPr sz="1400"/>
               <a:t>    • İlişki var mı?</a:t>
             </a:r>
           </a:p>
@@ -5538,6 +6646,7 @@
               <a:defRPr sz="2000" b="1"/>
             </a:pPr>
             <a:r>
+              <a:rPr sz="1400"/>
               <a:t>📌 Merkezi Eğilim Ölçüleri:</a:t>
             </a:r>
           </a:p>
@@ -5557,6 +6666,7 @@
               <a:defRPr sz="2000"/>
             </a:pPr>
             <a:r>
+              <a:rPr sz="1400"/>
               <a:t>📊 Ortalama (Mean):</a:t>
             </a:r>
           </a:p>
@@ -5568,6 +6678,7 @@
               <a:defRPr sz="1800"/>
             </a:pPr>
             <a:r>
+              <a:rPr sz="1400"/>
               <a:t>    • Tüm değerleri topla, sayıya böl</a:t>
             </a:r>
           </a:p>
@@ -5579,6 +6690,7 @@
               <a:defRPr sz="1800"/>
             </a:pPr>
             <a:r>
+              <a:rPr sz="1400"/>
               <a:t>    • Örnek: (10+20+30)/3 = 20</a:t>
             </a:r>
           </a:p>
@@ -5598,6 +6710,7 @@
               <a:defRPr sz="2000"/>
             </a:pPr>
             <a:r>
+              <a:rPr sz="1400"/>
               <a:t>📊 Medyan (Median):</a:t>
             </a:r>
           </a:p>
@@ -5609,6 +6722,7 @@
               <a:defRPr sz="1800"/>
             </a:pPr>
             <a:r>
+              <a:rPr sz="1400"/>
               <a:t>    • Ortadaki değer</a:t>
             </a:r>
           </a:p>
@@ -5620,6 +6734,7 @@
               <a:defRPr sz="1800"/>
             </a:pPr>
             <a:r>
+              <a:rPr sz="1400"/>
               <a:t>    • Örnek: 10, 15, 20 → Medyan: 15</a:t>
             </a:r>
           </a:p>
@@ -5639,6 +6754,7 @@
               <a:defRPr sz="2000"/>
             </a:pPr>
             <a:r>
+              <a:rPr sz="1400"/>
               <a:t>📊 Mod (Mode):</a:t>
             </a:r>
           </a:p>
@@ -5650,6 +6766,7 @@
               <a:defRPr sz="1800"/>
             </a:pPr>
             <a:r>
+              <a:rPr sz="1400"/>
               <a:t>    • En çok tekrar eden</a:t>
             </a:r>
           </a:p>
@@ -5661,6 +6778,7 @@
               <a:defRPr sz="1800"/>
             </a:pPr>
             <a:r>
+              <a:rPr sz="1400"/>
               <a:t>    • Örnek: 5, 5, 7, 9 → Mod: 5</a:t>
             </a:r>
           </a:p>
@@ -5680,6 +6798,7 @@
               <a:defRPr sz="2000" b="1"/>
             </a:pPr>
             <a:r>
+              <a:rPr sz="1400"/>
               <a:t>💡 Hangisini Kullan?</a:t>
             </a:r>
           </a:p>
@@ -5691,6 +6810,7 @@
               <a:defRPr sz="1800"/>
             </a:pPr>
             <a:r>
+              <a:rPr sz="1400"/>
               <a:t>    • Genelde → Ortalama</a:t>
             </a:r>
           </a:p>
@@ -5702,6 +6822,7 @@
               <a:defRPr sz="1800"/>
             </a:pPr>
             <a:r>
+              <a:rPr sz="1400"/>
               <a:t>    • Aşırı değerler varsa → Medyan</a:t>
             </a:r>
           </a:p>
@@ -5713,6 +6834,7 @@
               <a:defRPr sz="1800"/>
             </a:pPr>
             <a:r>
+              <a:rPr sz="1400"/>
               <a:t>    • Sıklık önemliyse → Mod</a:t>
             </a:r>
           </a:p>
@@ -5811,6 +6933,7 @@
               <a:defRPr sz="2000"/>
             </a:pPr>
             <a:r>
+              <a:rPr sz="1400"/>
               <a:t>Veriye dayalı kararlar daha sağlıklı!</a:t>
             </a:r>
           </a:p>
@@ -5830,6 +6953,7 @@
               <a:defRPr sz="2000" b="1"/>
             </a:pPr>
             <a:r>
+              <a:rPr sz="1400"/>
               <a:t>✅ Veri Odaklı Karar Örneği:</a:t>
             </a:r>
           </a:p>
@@ -5849,6 +6973,7 @@
               <a:defRPr sz="2000" b="1"/>
             </a:pPr>
             <a:r>
+              <a:rPr sz="1400"/>
               <a:t>📌 Problem:</a:t>
             </a:r>
           </a:p>
@@ -5860,6 +6985,7 @@
               <a:defRPr sz="2000"/>
             </a:pPr>
             <a:r>
+              <a:rPr sz="1400"/>
               <a:t>Okul kütüphanesine hangi kitapları alalım?</a:t>
             </a:r>
           </a:p>
@@ -5879,6 +7005,7 @@
               <a:defRPr sz="2000"/>
             </a:pPr>
             <a:r>
+              <a:rPr sz="1400"/>
               <a:t>📊 Veri Toplama:</a:t>
             </a:r>
           </a:p>
@@ -5890,6 +7017,7 @@
               <a:defRPr sz="1800"/>
             </a:pPr>
             <a:r>
+              <a:rPr sz="1400"/>
               <a:t>    • Anket: En sevilen kitap türü?</a:t>
             </a:r>
           </a:p>
@@ -5901,6 +7029,7 @@
               <a:defRPr sz="1800"/>
             </a:pPr>
             <a:r>
+              <a:rPr sz="1400"/>
               <a:t>    • Gözlem: Hangi kitaplar çok ödünç alınıyor?</a:t>
             </a:r>
           </a:p>
@@ -5912,6 +7041,7 @@
               <a:defRPr sz="1800"/>
             </a:pPr>
             <a:r>
+              <a:rPr sz="1400"/>
               <a:t>    • Kayıt: Rafta eksik ne var?</a:t>
             </a:r>
           </a:p>
@@ -5931,6 +7061,7 @@
               <a:defRPr sz="2000"/>
             </a:pPr>
             <a:r>
+              <a:rPr sz="1400"/>
               <a:t>📈 Analiz:</a:t>
             </a:r>
           </a:p>
@@ -5942,6 +7073,7 @@
               <a:defRPr sz="1800"/>
             </a:pPr>
             <a:r>
+              <a:rPr sz="1400"/>
               <a:t>    • %40 macera</a:t>
             </a:r>
           </a:p>
@@ -5953,6 +7085,7 @@
               <a:defRPr sz="1800"/>
             </a:pPr>
             <a:r>
+              <a:rPr sz="1400"/>
               <a:t>    • %30 bilim kurgu</a:t>
             </a:r>
           </a:p>
@@ -5964,6 +7097,7 @@
               <a:defRPr sz="1800"/>
             </a:pPr>
             <a:r>
+              <a:rPr sz="1400"/>
               <a:t>    • %20 roman</a:t>
             </a:r>
           </a:p>
@@ -5975,6 +7109,7 @@
               <a:defRPr sz="1800"/>
             </a:pPr>
             <a:r>
+              <a:rPr sz="1400"/>
               <a:t>    • %10 diğer</a:t>
             </a:r>
           </a:p>
@@ -5994,6 +7129,7 @@
               <a:defRPr sz="2000" b="1"/>
             </a:pPr>
             <a:r>
+              <a:rPr sz="1400"/>
               <a:t>✅ Karar:</a:t>
             </a:r>
           </a:p>
@@ -6005,6 +7141,7 @@
               <a:defRPr sz="2000"/>
             </a:pPr>
             <a:r>
+              <a:rPr sz="1400"/>
               <a:t>Yeni kitapların %40'ı macera olsun!</a:t>
             </a:r>
           </a:p>
@@ -6024,6 +7161,7 @@
               <a:defRPr sz="2000" b="1"/>
             </a:pPr>
             <a:r>
+              <a:rPr sz="1400"/>
               <a:t>💡 Veriye dayalı karar:</a:t>
             </a:r>
           </a:p>
@@ -6035,6 +7173,7 @@
               <a:defRPr sz="1800"/>
             </a:pPr>
             <a:r>
+              <a:rPr sz="1400"/>
               <a:t>    • Objektif (tarafsız)</a:t>
             </a:r>
           </a:p>
@@ -6046,6 +7185,7 @@
               <a:defRPr sz="1800"/>
             </a:pPr>
             <a:r>
+              <a:rPr sz="1400"/>
               <a:t>    • Kanıta dayalı</a:t>
             </a:r>
           </a:p>
@@ -6057,6 +7197,7 @@
               <a:defRPr sz="1800"/>
             </a:pPr>
             <a:r>
+              <a:rPr sz="1400"/>
               <a:t>    • Savunulabilir</a:t>
             </a:r>
           </a:p>
@@ -6076,6 +7217,7 @@
               <a:defRPr sz="2000"/>
             </a:pPr>
             <a:r>
+              <a:rPr sz="1400"/>
               <a:t>⚠️ Dikkat:</a:t>
             </a:r>
           </a:p>
@@ -6087,6 +7229,7 @@
               <a:defRPr sz="2000"/>
             </a:pPr>
             <a:r>
+              <a:rPr sz="1400"/>
               <a:t>Veri yanlış veya eksikse, karar da yanlış olur!</a:t>
             </a:r>
           </a:p>
@@ -6185,6 +7328,7 @@
               <a:defRPr sz="2000"/>
             </a:pPr>
             <a:r>
+              <a:rPr sz="1400"/>
               <a:t>Veri toplarken/paylaşırken dikkatli ol!</a:t>
             </a:r>
           </a:p>
@@ -6204,6 +7348,7 @@
               <a:defRPr sz="2000" b="1"/>
             </a:pPr>
             <a:r>
+              <a:rPr sz="1400"/>
               <a:t>✅ Kişisel Veri Nedir?</a:t>
             </a:r>
           </a:p>
@@ -6215,6 +7360,7 @@
               <a:defRPr sz="1800"/>
             </a:pPr>
             <a:r>
+              <a:rPr sz="1400"/>
               <a:t>    • İsim, soyisim</a:t>
             </a:r>
           </a:p>
@@ -6226,6 +7372,7 @@
               <a:defRPr sz="1800"/>
             </a:pPr>
             <a:r>
+              <a:rPr sz="1400"/>
               <a:t>    • Doğum tarihi</a:t>
             </a:r>
           </a:p>
@@ -6237,6 +7384,7 @@
               <a:defRPr sz="1800"/>
             </a:pPr>
             <a:r>
+              <a:rPr sz="1400"/>
               <a:t>    • Adres, telefon</a:t>
             </a:r>
           </a:p>
@@ -6248,6 +7396,7 @@
               <a:defRPr sz="1800"/>
             </a:pPr>
             <a:r>
+              <a:rPr sz="1400"/>
               <a:t>    • Fotoğraflar</a:t>
             </a:r>
           </a:p>
@@ -6259,6 +7408,7 @@
               <a:defRPr sz="1800"/>
             </a:pPr>
             <a:r>
+              <a:rPr sz="1400"/>
               <a:t>    • Sağlık bilgileri</a:t>
             </a:r>
           </a:p>
@@ -6278,6 +7428,7 @@
               <a:defRPr sz="2000" b="1"/>
             </a:pPr>
             <a:r>
+              <a:rPr sz="1400"/>
               <a:t>📌 Veri Toplama Etik Kuralları:</a:t>
             </a:r>
           </a:p>
@@ -6297,6 +7448,7 @@
               <a:defRPr sz="2000"/>
             </a:pPr>
             <a:r>
+              <a:rPr sz="1400"/>
               <a:t>🔐 İzin Al:</a:t>
             </a:r>
           </a:p>
@@ -6308,6 +7460,7 @@
               <a:defRPr sz="1800"/>
             </a:pPr>
             <a:r>
+              <a:rPr sz="1400"/>
               <a:t>    • Kişilere sor, onay al</a:t>
             </a:r>
           </a:p>
@@ -6327,6 +7480,7 @@
               <a:defRPr sz="2000"/>
             </a:pPr>
             <a:r>
+              <a:rPr sz="1400"/>
               <a:t>🔒 Gizli Tut:</a:t>
             </a:r>
           </a:p>
@@ -6338,6 +7492,7 @@
               <a:defRPr sz="1800"/>
             </a:pPr>
             <a:r>
+              <a:rPr sz="1400"/>
               <a:t>    • Kişisel verileri paylaşma</a:t>
             </a:r>
           </a:p>
@@ -6357,6 +7512,7 @@
               <a:defRPr sz="2000"/>
             </a:pPr>
             <a:r>
+              <a:rPr sz="1400"/>
               <a:t>📊 Anonim Yap:</a:t>
             </a:r>
           </a:p>
@@ -6368,6 +7524,7 @@
               <a:defRPr sz="1800"/>
             </a:pPr>
             <a:r>
+              <a:rPr sz="1400"/>
               <a:t>    • İsim kullanma, genel göster</a:t>
             </a:r>
           </a:p>
@@ -6379,6 +7536,7 @@
               <a:defRPr sz="1800"/>
             </a:pPr>
             <a:r>
+              <a:rPr sz="1400"/>
               <a:t>    • Örnek: 'Öğrenci 1, Öğrenci 2'</a:t>
             </a:r>
           </a:p>
@@ -6398,6 +7556,7 @@
               <a:defRPr sz="2000" b="1"/>
             </a:pPr>
             <a:r>
+              <a:rPr sz="1400"/>
               <a:t>🎯 Amacını Belirt:</a:t>
             </a:r>
           </a:p>
@@ -6409,6 +7568,7 @@
               <a:defRPr sz="1800"/>
             </a:pPr>
             <a:r>
+              <a:rPr sz="1400"/>
               <a:t>    • Veri ne için kullanılacak?</a:t>
             </a:r>
           </a:p>
@@ -6428,6 +7588,7 @@
               <a:defRPr sz="2000"/>
             </a:pPr>
             <a:r>
+              <a:rPr sz="1400"/>
               <a:t>🗑️ Gereksiz Veri Toplama:</a:t>
             </a:r>
           </a:p>
@@ -6439,6 +7600,7 @@
               <a:defRPr sz="1800"/>
             </a:pPr>
             <a:r>
+              <a:rPr sz="1400"/>
               <a:t>    • Sadece gerekli veriyi topla</a:t>
             </a:r>
           </a:p>
@@ -6458,6 +7620,7 @@
               <a:defRPr sz="2000" b="1"/>
             </a:pPr>
             <a:r>
+              <a:rPr sz="1400"/>
               <a:t>💡 KVKK (Kişisel Verilerin Korunması Kanunu):</a:t>
             </a:r>
           </a:p>
@@ -6469,6 +7632,7 @@
               <a:defRPr sz="2000"/>
             </a:pPr>
             <a:r>
+              <a:rPr sz="1400"/>
               <a:t>Türkiye'de veri güvenliğini koruyan yasa</a:t>
             </a:r>
           </a:p>
@@ -6567,6 +7731,7 @@
               <a:defRPr sz="2000"/>
             </a:pPr>
             <a:r>
+              <a:rPr sz="1400"/>
               <a:t>Bu ünitede neler öğrendik?</a:t>
             </a:r>
           </a:p>
@@ -6586,6 +7751,7 @@
               <a:defRPr sz="2000" b="1"/>
             </a:pPr>
             <a:r>
+              <a:rPr sz="1400"/>
               <a:t>✅ Veri ve bilgi kavramları</a:t>
             </a:r>
           </a:p>
@@ -6597,6 +7763,7 @@
               <a:defRPr sz="2000" b="1"/>
             </a:pPr>
             <a:r>
+              <a:rPr sz="1400"/>
               <a:t>✅ Veri toplama yöntemleri (anket, gözlem, deney)</a:t>
             </a:r>
           </a:p>
@@ -6608,6 +7775,7 @@
               <a:defRPr sz="2000" b="1"/>
             </a:pPr>
             <a:r>
+              <a:rPr sz="1400"/>
               <a:t>✅ Veri türleri (sayısal, kategorik)</a:t>
             </a:r>
           </a:p>
@@ -6619,6 +7787,7 @@
               <a:defRPr sz="2000" b="1"/>
             </a:pPr>
             <a:r>
+              <a:rPr sz="1400"/>
               <a:t>✅ Veri düzenleme ve sıralama</a:t>
             </a:r>
           </a:p>
@@ -6630,6 +7799,7 @@
               <a:defRPr sz="2000" b="1"/>
             </a:pPr>
             <a:r>
+              <a:rPr sz="1400"/>
               <a:t>✅ Grafik türleri (sütun, çizgi, pasta)</a:t>
             </a:r>
           </a:p>
@@ -6641,6 +7811,7 @@
               <a:defRPr sz="2000" b="1"/>
             </a:pPr>
             <a:r>
+              <a:rPr sz="1400"/>
               <a:t>✅ Veri görselleştirme</a:t>
             </a:r>
           </a:p>
@@ -6652,6 +7823,7 @@
               <a:defRPr sz="2000" b="1"/>
             </a:pPr>
             <a:r>
+              <a:rPr sz="1400"/>
               <a:t>✅ Excel/Sheets ile tablo oluşturma</a:t>
             </a:r>
           </a:p>
@@ -6663,6 +7835,7 @@
               <a:defRPr sz="2000" b="1"/>
             </a:pPr>
             <a:r>
+              <a:rPr sz="1400"/>
               <a:t>✅ Formüller ve fonksiyonlar</a:t>
             </a:r>
           </a:p>
@@ -6674,6 +7847,7 @@
               <a:defRPr sz="2000" b="1"/>
             </a:pPr>
             <a:r>
+              <a:rPr sz="1400"/>
               <a:t>✅ Grafik oluşturma</a:t>
             </a:r>
           </a:p>
@@ -6685,6 +7859,7 @@
               <a:defRPr sz="2000" b="1"/>
             </a:pPr>
             <a:r>
+              <a:rPr sz="1400"/>
               <a:t>✅ Veri analizi (ortalama, medyan, mod)</a:t>
             </a:r>
           </a:p>
@@ -6696,6 +7871,7 @@
               <a:defRPr sz="2000" b="1"/>
             </a:pPr>
             <a:r>
+              <a:rPr sz="1400"/>
               <a:t>✅ Veriye dayalı karar verme</a:t>
             </a:r>
           </a:p>
@@ -6707,6 +7883,7 @@
               <a:defRPr sz="2000" b="1"/>
             </a:pPr>
             <a:r>
+              <a:rPr sz="1400"/>
               <a:t>✅ Veri güvenliği ve gizlilik</a:t>
             </a:r>
           </a:p>
@@ -6726,6 +7903,7 @@
               <a:defRPr sz="2000" b="1"/>
             </a:pPr>
             <a:r>
+              <a:rPr sz="1400"/>
               <a:t>💡 Anahtar Mesaj:</a:t>
             </a:r>
           </a:p>
@@ -6737,6 +7915,7 @@
               <a:defRPr sz="2000"/>
             </a:pPr>
             <a:r>
+              <a:rPr sz="1400"/>
               <a:t>Veri doğru analiz edilirse değerli bilgi haline gelir!</a:t>
             </a:r>
           </a:p>
@@ -6756,6 +7935,7 @@
               <a:defRPr sz="2000" b="1"/>
             </a:pPr>
             <a:r>
+              <a:rPr sz="1400"/>
               <a:t>🎯 Artık veri analisti gibi düşünebilirsin!</a:t>
             </a:r>
           </a:p>
@@ -6767,6 +7947,7 @@
               <a:defRPr sz="2000"/>
             </a:pPr>
             <a:r>
+              <a:rPr sz="1400"/>
               <a:t>📊 Veriyle dünyayı anlayabilirsin!</a:t>
             </a:r>
           </a:p>
@@ -7461,6 +8642,7 @@
               <a:defRPr sz="2000"/>
             </a:pPr>
             <a:r>
+              <a:rPr sz="1600"/>
               <a:t>Veri = Ham bilgi, işlenmemiş gerçekler</a:t>
             </a:r>
           </a:p>
@@ -7480,6 +8662,7 @@
               <a:defRPr sz="2000" b="1"/>
             </a:pPr>
             <a:r>
+              <a:rPr sz="1600"/>
               <a:t>✅ Veri Örnekleri:</a:t>
             </a:r>
           </a:p>
@@ -7491,6 +8674,7 @@
               <a:defRPr sz="1800"/>
             </a:pPr>
             <a:r>
+              <a:rPr sz="1600"/>
               <a:t>    • Sayılar: 15, 23, 42</a:t>
             </a:r>
           </a:p>
@@ -7502,6 +8686,7 @@
               <a:defRPr sz="1800"/>
             </a:pPr>
             <a:r>
+              <a:rPr sz="1600"/>
               <a:t>    • Metinler: 'Ahmet', 'Ankara'</a:t>
             </a:r>
           </a:p>
@@ -7513,6 +8698,7 @@
               <a:defRPr sz="1800"/>
             </a:pPr>
             <a:r>
+              <a:rPr sz="1600"/>
               <a:t>    • Tarihler: 15 Mayıs 2024</a:t>
             </a:r>
           </a:p>
@@ -7524,6 +8710,7 @@
               <a:defRPr sz="1800"/>
             </a:pPr>
             <a:r>
+              <a:rPr sz="1600"/>
               <a:t>    • Ölçümler: 25°C, 1.65m</a:t>
             </a:r>
           </a:p>
@@ -7543,6 +8730,7 @@
               <a:defRPr sz="2000" b="1"/>
             </a:pPr>
             <a:r>
+              <a:rPr sz="1600"/>
               <a:t>📌 Veri vs Bilgi:</a:t>
             </a:r>
           </a:p>
@@ -7562,6 +8750,7 @@
               <a:defRPr sz="2000"/>
             </a:pPr>
             <a:r>
+              <a:rPr sz="1600"/>
               <a:t>📄 Veri (Ham):</a:t>
             </a:r>
           </a:p>
@@ -7573,6 +8762,7 @@
               <a:defRPr sz="1800"/>
             </a:pPr>
             <a:r>
+              <a:rPr sz="1600"/>
               <a:t>    • 15, 18, 12, 20, 16</a:t>
             </a:r>
           </a:p>
@@ -7584,6 +8774,7 @@
               <a:defRPr sz="1800"/>
             </a:pPr>
             <a:r>
+              <a:rPr sz="1600"/>
               <a:t>    • Tek başına anlamsız</a:t>
             </a:r>
           </a:p>
@@ -7603,6 +8794,7 @@
               <a:defRPr sz="2000" b="1"/>
             </a:pPr>
             <a:r>
+              <a:rPr sz="1600"/>
               <a:t>💡 Bilgi (İşlenmiş):</a:t>
             </a:r>
           </a:p>
@@ -7614,6 +8806,7 @@
               <a:defRPr sz="1800"/>
             </a:pPr>
             <a:r>
+              <a:rPr sz="1600"/>
               <a:t>    • 'Sınıf ortalaması: 16.2'</a:t>
             </a:r>
           </a:p>
@@ -7625,6 +8818,7 @@
               <a:defRPr sz="1800"/>
             </a:pPr>
             <a:r>
+              <a:rPr sz="1600"/>
               <a:t>    • Analiz edilmiş, anlamlı</a:t>
             </a:r>
           </a:p>
@@ -7644,6 +8838,7 @@
               <a:defRPr sz="2000" b="1"/>
             </a:pPr>
             <a:r>
+              <a:rPr sz="1600"/>
               <a:t>🎯 Veri → İşleme → Bilgi → Bilgelik</a:t>
             </a:r>
           </a:p>
@@ -7663,6 +8858,7 @@
               <a:defRPr sz="2000" b="1"/>
             </a:pPr>
             <a:r>
+              <a:rPr sz="1600"/>
               <a:t>💡 Gerçek Hayat Örneği:</a:t>
             </a:r>
           </a:p>
@@ -7674,6 +8870,7 @@
               <a:defRPr sz="1800"/>
             </a:pPr>
             <a:r>
+              <a:rPr sz="1600"/>
               <a:t>    • Veri: Günlük sıcaklık kayıtları</a:t>
             </a:r>
           </a:p>
@@ -7685,6 +8882,7 @@
               <a:defRPr sz="1800"/>
             </a:pPr>
             <a:r>
+              <a:rPr sz="1600"/>
               <a:t>    • Bilgi: 'Temmuz en sıcak ay'</a:t>
             </a:r>
           </a:p>
@@ -7696,6 +8894,7 @@
               <a:defRPr sz="1800"/>
             </a:pPr>
             <a:r>
+              <a:rPr sz="1600"/>
               <a:t>    • Bilgelik: 'Klimayı Temmuz'da kullan'</a:t>
             </a:r>
           </a:p>
@@ -7794,6 +8993,7 @@
               <a:defRPr sz="2000"/>
             </a:pPr>
             <a:r>
+              <a:rPr sz="1400"/>
               <a:t>Veriyi nereden ve nasıl toplarız?</a:t>
             </a:r>
           </a:p>
@@ -7813,6 +9013,7 @@
               <a:defRPr sz="2000" b="1"/>
             </a:pPr>
             <a:r>
+              <a:rPr sz="1400"/>
               <a:t>✅ Veri Toplama Yöntemleri:</a:t>
             </a:r>
           </a:p>
@@ -7832,6 +9033,7 @@
               <a:defRPr sz="2000"/>
             </a:pPr>
             <a:r>
+              <a:rPr sz="1400"/>
               <a:t>📋 Anket:</a:t>
             </a:r>
           </a:p>
@@ -7843,6 +9045,7 @@
               <a:defRPr sz="1800"/>
             </a:pPr>
             <a:r>
+              <a:rPr sz="1400"/>
               <a:t>    • Sorular sor, cevapları topla</a:t>
             </a:r>
           </a:p>
@@ -7854,6 +9057,7 @@
               <a:defRPr sz="1800"/>
             </a:pPr>
             <a:r>
+              <a:rPr sz="1400"/>
               <a:t>    • Örnek: 'Favori renginiz nedir?'</a:t>
             </a:r>
           </a:p>
@@ -7873,6 +9077,7 @@
               <a:defRPr sz="2000"/>
             </a:pPr>
             <a:r>
+              <a:rPr sz="1400"/>
               <a:t>👀 Gözlem:</a:t>
             </a:r>
           </a:p>
@@ -7884,6 +9089,7 @@
               <a:defRPr sz="1800"/>
             </a:pPr>
             <a:r>
+              <a:rPr sz="1400"/>
               <a:t>    • İzle ve kaydet</a:t>
             </a:r>
           </a:p>
@@ -7895,6 +9101,7 @@
               <a:defRPr sz="1800"/>
             </a:pPr>
             <a:r>
+              <a:rPr sz="1400"/>
               <a:t>    • Örnek: Trafikteki araç sayısı</a:t>
             </a:r>
           </a:p>
@@ -7914,6 +9121,7 @@
               <a:defRPr sz="2000"/>
             </a:pPr>
             <a:r>
+              <a:rPr sz="1400"/>
               <a:t>🧪 Deney:</a:t>
             </a:r>
           </a:p>
@@ -7925,6 +9133,7 @@
               <a:defRPr sz="1800"/>
             </a:pPr>
             <a:r>
+              <a:rPr sz="1400"/>
               <a:t>    • Test yap, sonuçları kaydet</a:t>
             </a:r>
           </a:p>
@@ -7936,6 +9145,7 @@
               <a:defRPr sz="1800"/>
             </a:pPr>
             <a:r>
+              <a:rPr sz="1400"/>
               <a:t>    • Örnek: Bitki büyümesi ölçümü</a:t>
             </a:r>
           </a:p>
@@ -7955,6 +9165,7 @@
               <a:defRPr sz="2000"/>
             </a:pPr>
             <a:r>
+              <a:rPr sz="1400"/>
               <a:t>📱 Sensörler:</a:t>
             </a:r>
           </a:p>
@@ -7966,6 +9177,7 @@
               <a:defRPr sz="1800"/>
             </a:pPr>
             <a:r>
+              <a:rPr sz="1400"/>
               <a:t>    • Otomatik veri toplama</a:t>
             </a:r>
           </a:p>
@@ -7977,6 +9189,7 @@
               <a:defRPr sz="1800"/>
             </a:pPr>
             <a:r>
+              <a:rPr sz="1400"/>
               <a:t>    • Örnek: Sıcaklık sensörü</a:t>
             </a:r>
           </a:p>
@@ -7996,6 +9209,7 @@
               <a:defRPr sz="2000"/>
             </a:pPr>
             <a:r>
+              <a:rPr sz="1400"/>
               <a:t>🌐 İnternet:</a:t>
             </a:r>
           </a:p>
@@ -8007,6 +9221,7 @@
               <a:defRPr sz="1800"/>
             </a:pPr>
             <a:r>
+              <a:rPr sz="1400"/>
               <a:t>    • Hazır veri setleri</a:t>
             </a:r>
           </a:p>
@@ -8018,6 +9233,7 @@
               <a:defRPr sz="1800"/>
             </a:pPr>
             <a:r>
+              <a:rPr sz="1400"/>
               <a:t>    • Örnek: Hava durumu verileri</a:t>
             </a:r>
           </a:p>
@@ -8037,6 +9253,7 @@
               <a:defRPr sz="2000" b="1"/>
             </a:pPr>
             <a:r>
+              <a:rPr sz="1400"/>
               <a:t>💡 Veri toplama planlı olmalı:</a:t>
             </a:r>
           </a:p>
@@ -8048,6 +9265,7 @@
               <a:defRPr sz="1800"/>
             </a:pPr>
             <a:r>
+              <a:rPr sz="1400"/>
               <a:t>    • Ne öğrenmek istiyorsun?</a:t>
             </a:r>
           </a:p>
@@ -8059,6 +9277,7 @@
               <a:defRPr sz="1800"/>
             </a:pPr>
             <a:r>
+              <a:rPr sz="1400"/>
               <a:t>    • Hangi veriyi toplayacaksın?</a:t>
             </a:r>
           </a:p>
@@ -8070,6 +9289,7 @@
               <a:defRPr sz="1800"/>
             </a:pPr>
             <a:r>
+              <a:rPr sz="1400"/>
               <a:t>    • Nasıl toplayacaksın?</a:t>
             </a:r>
           </a:p>
@@ -8168,6 +9388,7 @@
               <a:defRPr sz="2000"/>
             </a:pPr>
             <a:r>
+              <a:rPr sz="1600"/>
               <a:t>Veriler farklı türlerde olabilir</a:t>
             </a:r>
           </a:p>
@@ -8187,6 +9408,7 @@
               <a:defRPr sz="2000" b="1"/>
             </a:pPr>
             <a:r>
+              <a:rPr sz="1600"/>
               <a:t>✅ 1. Sayısal Veri (Nicel):</a:t>
             </a:r>
           </a:p>
@@ -8206,6 +9428,7 @@
               <a:defRPr sz="2000"/>
             </a:pPr>
             <a:r>
+              <a:rPr sz="1600"/>
               <a:t>🔢 Kesikli Veri:</a:t>
             </a:r>
           </a:p>
@@ -8217,6 +9440,7 @@
               <a:defRPr sz="1800"/>
             </a:pPr>
             <a:r>
+              <a:rPr sz="1600"/>
               <a:t>    • Tamsayılar</a:t>
             </a:r>
           </a:p>
@@ -8228,6 +9452,7 @@
               <a:defRPr sz="1800"/>
             </a:pPr>
             <a:r>
+              <a:rPr sz="1600"/>
               <a:t>    • Örnek: Öğrenci sayısı (25, 30, 28)</a:t>
             </a:r>
           </a:p>
@@ -8247,6 +9472,7 @@
               <a:defRPr sz="2000"/>
             </a:pPr>
             <a:r>
+              <a:rPr sz="1600"/>
               <a:t>📏 Sürekli Veri:</a:t>
             </a:r>
           </a:p>
@@ -8258,6 +9484,7 @@
               <a:defRPr sz="1800"/>
             </a:pPr>
             <a:r>
+              <a:rPr sz="1600"/>
               <a:t>    • Ondalıklı sayılar</a:t>
             </a:r>
           </a:p>
@@ -8269,6 +9496,7 @@
               <a:defRPr sz="1800"/>
             </a:pPr>
             <a:r>
+              <a:rPr sz="1600"/>
               <a:t>    • Örnek: Boy (1.65m), Ağırlık (52.5kg)</a:t>
             </a:r>
           </a:p>
@@ -8288,6 +9516,7 @@
               <a:defRPr sz="2000" b="1"/>
             </a:pPr>
             <a:r>
+              <a:rPr sz="1600"/>
               <a:t>✅ 2. Kategorik Veri (Nitel):</a:t>
             </a:r>
           </a:p>
@@ -8307,6 +9536,7 @@
               <a:defRPr sz="2000"/>
             </a:pPr>
             <a:r>
+              <a:rPr sz="1600"/>
               <a:t>🏷️ İsimsel:</a:t>
             </a:r>
           </a:p>
@@ -8318,6 +9548,7 @@
               <a:defRPr sz="1800"/>
             </a:pPr>
             <a:r>
+              <a:rPr sz="1600"/>
               <a:t>    • Sıralama yok</a:t>
             </a:r>
           </a:p>
@@ -8329,6 +9560,7 @@
               <a:defRPr sz="1800"/>
             </a:pPr>
             <a:r>
+              <a:rPr sz="1600"/>
               <a:t>    • Örnek: Renk (kırmızı, mavi), Cinsiyet</a:t>
             </a:r>
           </a:p>
@@ -8348,6 +9580,7 @@
               <a:defRPr sz="2000"/>
             </a:pPr>
             <a:r>
+              <a:rPr sz="1600"/>
               <a:t>📊 Sıralı:</a:t>
             </a:r>
           </a:p>
@@ -8359,6 +9592,7 @@
               <a:defRPr sz="1800"/>
             </a:pPr>
             <a:r>
+              <a:rPr sz="1600"/>
               <a:t>    • Sıralama var</a:t>
             </a:r>
           </a:p>
@@ -8370,6 +9604,7 @@
               <a:defRPr sz="1800"/>
             </a:pPr>
             <a:r>
+              <a:rPr sz="1600"/>
               <a:t>    • Örnek: Not (Pekiyi, İyi, Orta)</a:t>
             </a:r>
           </a:p>
@@ -8389,6 +9624,7 @@
               <a:defRPr sz="2000" b="1"/>
             </a:pPr>
             <a:r>
+              <a:rPr sz="1600"/>
               <a:t>💡 Neden Önemli?</a:t>
             </a:r>
           </a:p>
@@ -8400,6 +9636,7 @@
               <a:defRPr sz="1800"/>
             </a:pPr>
             <a:r>
+              <a:rPr sz="1600"/>
               <a:t>    • Farklı veri türleri → Farklı analizler</a:t>
             </a:r>
           </a:p>
@@ -8411,6 +9648,7 @@
               <a:defRPr sz="1800"/>
             </a:pPr>
             <a:r>
+              <a:rPr sz="1600"/>
               <a:t>    • Sayısal: Ortalama alınabilir</a:t>
             </a:r>
           </a:p>
@@ -8422,6 +9660,7 @@
               <a:defRPr sz="1800"/>
             </a:pPr>
             <a:r>
+              <a:rPr sz="1600"/>
               <a:t>    • Kategorik: Frekans sayılır</a:t>
             </a:r>
           </a:p>
@@ -8520,6 +9759,7 @@
               <a:defRPr sz="2000"/>
             </a:pPr>
             <a:r>
+              <a:rPr sz="1400"/>
               <a:t>Toplanan veriyi düzenli hale getirmek</a:t>
             </a:r>
           </a:p>
@@ -8539,6 +9779,7 @@
               <a:defRPr sz="2000" b="1"/>
             </a:pPr>
             <a:r>
+              <a:rPr sz="1400"/>
               <a:t>✅ Veri Düzenleme Adımları:</a:t>
             </a:r>
           </a:p>
@@ -8558,6 +9799,7 @@
               <a:defRPr sz="2000"/>
             </a:pPr>
             <a:r>
+              <a:rPr sz="1400"/>
               <a:t>1️⃣ Temizleme:</a:t>
             </a:r>
           </a:p>
@@ -8569,6 +9811,7 @@
               <a:defRPr sz="1800"/>
             </a:pPr>
             <a:r>
+              <a:rPr sz="1400"/>
               <a:t>    • Hatalı verileri bul</a:t>
             </a:r>
           </a:p>
@@ -8580,6 +9823,7 @@
               <a:defRPr sz="1800"/>
             </a:pPr>
             <a:r>
+              <a:rPr sz="1400"/>
               <a:t>    • Eksik verileri tamamla veya çıkar</a:t>
             </a:r>
           </a:p>
@@ -8591,6 +9835,7 @@
               <a:defRPr sz="1800"/>
             </a:pPr>
             <a:r>
+              <a:rPr sz="1400"/>
               <a:t>    • Tekrar edenleri sil</a:t>
             </a:r>
           </a:p>
@@ -8610,6 +9855,7 @@
               <a:defRPr sz="2000"/>
             </a:pPr>
             <a:r>
+              <a:rPr sz="1400"/>
               <a:t>2️⃣ Sıralama:</a:t>
             </a:r>
           </a:p>
@@ -8621,6 +9867,7 @@
               <a:defRPr sz="1800"/>
             </a:pPr>
             <a:r>
+              <a:rPr sz="1400"/>
               <a:t>    • Küçükten büyüğe</a:t>
             </a:r>
           </a:p>
@@ -8632,6 +9879,7 @@
               <a:defRPr sz="1800"/>
             </a:pPr>
             <a:r>
+              <a:rPr sz="1400"/>
               <a:t>    • A'dan Z'ye</a:t>
             </a:r>
           </a:p>
@@ -8651,6 +9899,7 @@
               <a:defRPr sz="2000"/>
             </a:pPr>
             <a:r>
+              <a:rPr sz="1400"/>
               <a:t>3️⃣ Gruplama:</a:t>
             </a:r>
           </a:p>
@@ -8662,6 +9911,7 @@
               <a:defRPr sz="1800"/>
             </a:pPr>
             <a:r>
+              <a:rPr sz="1400"/>
               <a:t>    • Benzer verileri bir araya getir</a:t>
             </a:r>
           </a:p>
@@ -8673,6 +9923,7 @@
               <a:defRPr sz="1800"/>
             </a:pPr>
             <a:r>
+              <a:rPr sz="1400"/>
               <a:t>    • Örnek: Yaş grupları (0-10, 11-20, 21-30)</a:t>
             </a:r>
           </a:p>
@@ -8692,6 +9943,7 @@
               <a:defRPr sz="2000"/>
             </a:pPr>
             <a:r>
+              <a:rPr sz="1400"/>
               <a:t>4️⃣ Tabloya Dönüştürme:</a:t>
             </a:r>
           </a:p>
@@ -8703,6 +9955,7 @@
               <a:defRPr sz="1800"/>
             </a:pPr>
             <a:r>
+              <a:rPr sz="1400"/>
               <a:t>    • Satır ve sütunlar</a:t>
             </a:r>
           </a:p>
@@ -8714,6 +9967,7 @@
               <a:defRPr sz="1800"/>
             </a:pPr>
             <a:r>
+              <a:rPr sz="1400"/>
               <a:t>    • Başlıklar ekle</a:t>
             </a:r>
           </a:p>
@@ -8733,6 +9987,7 @@
               <a:defRPr sz="2000" b="1"/>
             </a:pPr>
             <a:r>
+              <a:rPr sz="1400"/>
               <a:t>📌 Örnek Ham Veri:</a:t>
             </a:r>
           </a:p>
@@ -8744,6 +9999,7 @@
               <a:defRPr sz="2000"/>
             </a:pPr>
             <a:r>
+              <a:rPr sz="1400"/>
               <a:t>Ahmet:15, Ayşe:18, 12, Mehmet:20, ??:16</a:t>
             </a:r>
           </a:p>
@@ -8763,6 +10019,7 @@
               <a:defRPr sz="2000" b="1"/>
             </a:pPr>
             <a:r>
+              <a:rPr sz="1400"/>
               <a:t>📌 Düzenlenmiş:</a:t>
             </a:r>
           </a:p>
@@ -8774,6 +10031,7 @@
               <a:defRPr sz="2000"/>
             </a:pPr>
             <a:r>
+              <a:rPr sz="1400"/>
               <a:t>| İsim   | Yaş |</a:t>
             </a:r>
           </a:p>
@@ -8785,6 +10043,7 @@
               <a:defRPr sz="2000"/>
             </a:pPr>
             <a:r>
+              <a:rPr sz="1400"/>
               <a:t>| Ahmet  | 15  |</a:t>
             </a:r>
           </a:p>
@@ -8796,6 +10055,7 @@
               <a:defRPr sz="2000"/>
             </a:pPr>
             <a:r>
+              <a:rPr sz="1400"/>
               <a:t>| Ayşe   | 18  |</a:t>
             </a:r>
           </a:p>
@@ -8807,6 +10067,7 @@
               <a:defRPr sz="2000"/>
             </a:pPr>
             <a:r>
+              <a:rPr sz="1400"/>
               <a:t>| Mehmet | 20  |</a:t>
             </a:r>
           </a:p>
@@ -8905,6 +10166,7 @@
               <a:defRPr sz="2000"/>
             </a:pPr>
             <a:r>
+              <a:rPr sz="1400"/>
               <a:t>Veriyi görsel olarak göstermek</a:t>
             </a:r>
           </a:p>
@@ -8924,6 +10186,7 @@
               <a:defRPr sz="2000" b="1"/>
             </a:pPr>
             <a:r>
+              <a:rPr sz="1400"/>
               <a:t>✅ Temel Grafik Türleri:</a:t>
             </a:r>
           </a:p>
@@ -8943,6 +10206,7 @@
               <a:defRPr sz="2000"/>
             </a:pPr>
             <a:r>
+              <a:rPr sz="1400"/>
               <a:t>📊 Sütun Grafiği (Bar Chart):</a:t>
             </a:r>
           </a:p>
@@ -8954,6 +10218,7 @@
               <a:defRPr sz="1800"/>
             </a:pPr>
             <a:r>
+              <a:rPr sz="1400"/>
               <a:t>    • Kategorileri karşılaştırma</a:t>
             </a:r>
           </a:p>
@@ -8965,6 +10230,7 @@
               <a:defRPr sz="1800"/>
             </a:pPr>
             <a:r>
+              <a:rPr sz="1400"/>
               <a:t>    • Örnek: Şehirlere göre nüfus</a:t>
             </a:r>
           </a:p>
@@ -8984,6 +10250,7 @@
               <a:defRPr sz="2000"/>
             </a:pPr>
             <a:r>
+              <a:rPr sz="1400"/>
               <a:t>📈 Çizgi Grafiği (Line Chart):</a:t>
             </a:r>
           </a:p>
@@ -8995,6 +10262,7 @@
               <a:defRPr sz="1800"/>
             </a:pPr>
             <a:r>
+              <a:rPr sz="1400"/>
               <a:t>    • Zamana göre değişim</a:t>
             </a:r>
           </a:p>
@@ -9006,6 +10274,7 @@
               <a:defRPr sz="1800"/>
             </a:pPr>
             <a:r>
+              <a:rPr sz="1400"/>
               <a:t>    • Örnek: Aylara göre sıcaklık</a:t>
             </a:r>
           </a:p>
@@ -9025,6 +10294,7 @@
               <a:defRPr sz="2000"/>
             </a:pPr>
             <a:r>
+              <a:rPr sz="1400"/>
               <a:t>🥧 Pasta Grafiği (Pie Chart):</a:t>
             </a:r>
           </a:p>
@@ -9036,6 +10306,7 @@
               <a:defRPr sz="1800"/>
             </a:pPr>
             <a:r>
+              <a:rPr sz="1400"/>
               <a:t>    • Yüzdeler, oranlar</a:t>
             </a:r>
           </a:p>
@@ -9047,6 +10318,7 @@
               <a:defRPr sz="1800"/>
             </a:pPr>
             <a:r>
+              <a:rPr sz="1400"/>
               <a:t>    • Örnek: Bütçe dağılımı</a:t>
             </a:r>
           </a:p>
@@ -9066,6 +10338,7 @@
               <a:defRPr sz="2000"/>
             </a:pPr>
             <a:r>
+              <a:rPr sz="1400"/>
               <a:t>📊 Dağılım Grafiği (Scatter Plot):</a:t>
             </a:r>
           </a:p>
@@ -9077,6 +10350,7 @@
               <a:defRPr sz="1800"/>
             </a:pPr>
             <a:r>
+              <a:rPr sz="1400"/>
               <a:t>    • İki değişken arasındaki ilişki</a:t>
             </a:r>
           </a:p>
@@ -9088,6 +10362,7 @@
               <a:defRPr sz="1800"/>
             </a:pPr>
             <a:r>
+              <a:rPr sz="1400"/>
               <a:t>    • Örnek: Boy-Kilo ilişkisi</a:t>
             </a:r>
           </a:p>
@@ -9107,6 +10382,7 @@
               <a:defRPr sz="2000"/>
             </a:pPr>
             <a:r>
+              <a:rPr sz="1400"/>
               <a:t>📊 Histogram:</a:t>
             </a:r>
           </a:p>
@@ -9118,6 +10394,7 @@
               <a:defRPr sz="1800"/>
             </a:pPr>
             <a:r>
+              <a:rPr sz="1400"/>
               <a:t>    • Veri dağılımı</a:t>
             </a:r>
           </a:p>
@@ -9129,6 +10406,7 @@
               <a:defRPr sz="1800"/>
             </a:pPr>
             <a:r>
+              <a:rPr sz="1400"/>
               <a:t>    • Örnek: Sınav not dağılımı</a:t>
             </a:r>
           </a:p>
@@ -9148,6 +10426,7 @@
               <a:defRPr sz="2000" b="1"/>
             </a:pPr>
             <a:r>
+              <a:rPr sz="1400"/>
               <a:t>💡 Doğru grafik seçimi önemli!</a:t>
             </a:r>
           </a:p>
@@ -9159,6 +10438,7 @@
               <a:defRPr sz="1800"/>
             </a:pPr>
             <a:r>
+              <a:rPr sz="1400"/>
               <a:t>    • Zaman göster → Çizgi</a:t>
             </a:r>
           </a:p>
@@ -9170,6 +10450,7 @@
               <a:defRPr sz="1800"/>
             </a:pPr>
             <a:r>
+              <a:rPr sz="1400"/>
               <a:t>    • Karşılaştır → Sütun</a:t>
             </a:r>
           </a:p>
@@ -9181,6 +10462,7 @@
               <a:defRPr sz="1800"/>
             </a:pPr>
             <a:r>
+              <a:rPr sz="1400"/>
               <a:t>    • Oran göster → Pasta</a:t>
             </a:r>
           </a:p>
@@ -9279,6 +10561,7 @@
               <a:defRPr sz="2000"/>
             </a:pPr>
             <a:r>
+              <a:rPr sz="1400"/>
               <a:t>Neden görselleştirme?</a:t>
             </a:r>
           </a:p>
@@ -9298,6 +10581,7 @@
               <a:defRPr sz="2000" b="1"/>
             </a:pPr>
             <a:r>
+              <a:rPr sz="1400"/>
               <a:t>✅ Görselleştirme Faydaları:</a:t>
             </a:r>
           </a:p>
@@ -9309,6 +10593,7 @@
               <a:defRPr sz="1800"/>
             </a:pPr>
             <a:r>
+              <a:rPr sz="1400"/>
               <a:t>    • Hızlı anlama</a:t>
             </a:r>
           </a:p>
@@ -9320,6 +10605,7 @@
               <a:defRPr sz="1800"/>
             </a:pPr>
             <a:r>
+              <a:rPr sz="1400"/>
               <a:t>    • Kalıpları görme</a:t>
             </a:r>
           </a:p>
@@ -9331,6 +10617,7 @@
               <a:defRPr sz="1800"/>
             </a:pPr>
             <a:r>
+              <a:rPr sz="1400"/>
               <a:t>    • Karşılaştırma kolaylığı</a:t>
             </a:r>
           </a:p>
@@ -9342,6 +10629,7 @@
               <a:defRPr sz="1800"/>
             </a:pPr>
             <a:r>
+              <a:rPr sz="1400"/>
               <a:t>    • İletişim</a:t>
             </a:r>
           </a:p>
@@ -9361,6 +10649,7 @@
               <a:defRPr sz="2000" b="1"/>
             </a:pPr>
             <a:r>
+              <a:rPr sz="1400"/>
               <a:t>📌 İyi Görselleştirme:</a:t>
             </a:r>
           </a:p>
@@ -9380,6 +10669,7 @@
               <a:defRPr sz="2000" b="1"/>
             </a:pPr>
             <a:r>
+              <a:rPr sz="1400"/>
               <a:t>✅ Basit:</a:t>
             </a:r>
           </a:p>
@@ -9391,6 +10681,7 @@
               <a:defRPr sz="1800"/>
             </a:pPr>
             <a:r>
+              <a:rPr sz="1400"/>
               <a:t>    • Karmaşık olmasın</a:t>
             </a:r>
           </a:p>
@@ -9402,6 +10693,7 @@
               <a:defRPr sz="1800"/>
             </a:pPr>
             <a:r>
+              <a:rPr sz="1400"/>
               <a:t>    • Ana mesaj net olsun</a:t>
             </a:r>
           </a:p>
@@ -9421,6 +10713,7 @@
               <a:defRPr sz="2000" b="1"/>
             </a:pPr>
             <a:r>
+              <a:rPr sz="1400"/>
               <a:t>✅ Açık:</a:t>
             </a:r>
           </a:p>
@@ -9432,6 +10725,7 @@
               <a:defRPr sz="1800"/>
             </a:pPr>
             <a:r>
+              <a:rPr sz="1400"/>
               <a:t>    • Başlık var mı?</a:t>
             </a:r>
           </a:p>
@@ -9443,6 +10737,7 @@
               <a:defRPr sz="1800"/>
             </a:pPr>
             <a:r>
+              <a:rPr sz="1400"/>
               <a:t>    • Eksen etiketleri var mı?</a:t>
             </a:r>
           </a:p>
@@ -9454,6 +10749,7 @@
               <a:defRPr sz="1800"/>
             </a:pPr>
             <a:r>
+              <a:rPr sz="1400"/>
               <a:t>    • Lejant (açıklama) var mı?</a:t>
             </a:r>
           </a:p>
@@ -9473,6 +10769,7 @@
               <a:defRPr sz="2000" b="1"/>
             </a:pPr>
             <a:r>
+              <a:rPr sz="1400"/>
               <a:t>✅ Doğru:</a:t>
             </a:r>
           </a:p>
@@ -9484,6 +10781,7 @@
               <a:defRPr sz="1800"/>
             </a:pPr>
             <a:r>
+              <a:rPr sz="1400"/>
               <a:t>    • Yanıltıcı olmasın</a:t>
             </a:r>
           </a:p>
@@ -9495,6 +10793,7 @@
               <a:defRPr sz="1800"/>
             </a:pPr>
             <a:r>
+              <a:rPr sz="1400"/>
               <a:t>    • Ölçek doğru mu?</a:t>
             </a:r>
           </a:p>
@@ -9514,6 +10813,7 @@
               <a:defRPr sz="2000" b="1"/>
             </a:pPr>
             <a:r>
+              <a:rPr sz="1400"/>
               <a:t>✅ Renkli:</a:t>
             </a:r>
           </a:p>
@@ -9525,6 +10825,7 @@
               <a:defRPr sz="1800"/>
             </a:pPr>
             <a:r>
+              <a:rPr sz="1400"/>
               <a:t>    • Renk kodlama kullan</a:t>
             </a:r>
           </a:p>
@@ -9536,6 +10837,7 @@
               <a:defRPr sz="1800"/>
             </a:pPr>
             <a:r>
+              <a:rPr sz="1400"/>
               <a:t>    • Ama çok fazla renk kullanma</a:t>
             </a:r>
           </a:p>
@@ -9555,6 +10857,7 @@
               <a:defRPr sz="2000"/>
             </a:pPr>
             <a:r>
+              <a:rPr sz="1400"/>
               <a:t>❌ Kötü Görselleştirme:</a:t>
             </a:r>
           </a:p>
@@ -9566,6 +10869,7 @@
               <a:defRPr sz="1800"/>
             </a:pPr>
             <a:r>
+              <a:rPr sz="1400"/>
               <a:t>    • 3D efektler (gereksiz)</a:t>
             </a:r>
           </a:p>
@@ -9577,6 +10881,7 @@
               <a:defRPr sz="1800"/>
             </a:pPr>
             <a:r>
+              <a:rPr sz="1400"/>
               <a:t>    • Yanlış grafik türü</a:t>
             </a:r>
           </a:p>
@@ -9588,6 +10893,7 @@
               <a:defRPr sz="1800"/>
             </a:pPr>
             <a:r>
+              <a:rPr sz="1400"/>
               <a:t>    • Eksik etiketler</a:t>
             </a:r>
           </a:p>
@@ -9686,6 +10992,7 @@
               <a:defRPr sz="2000"/>
             </a:pPr>
             <a:r>
+              <a:rPr sz="1400"/>
               <a:t>Tablolama programları veri için çok kullanışlı!</a:t>
             </a:r>
           </a:p>
@@ -9705,6 +11012,7 @@
               <a:defRPr sz="2000" b="1"/>
             </a:pPr>
             <a:r>
+              <a:rPr sz="1400"/>
               <a:t>✅ Temel Kavramlar:</a:t>
             </a:r>
           </a:p>
@@ -9716,6 +11024,7 @@
               <a:defRPr sz="1800"/>
             </a:pPr>
             <a:r>
+              <a:rPr sz="1400"/>
               <a:t>    • Hücre: Tek bir veri kutusu (A1, B2)</a:t>
             </a:r>
           </a:p>
@@ -9727,6 +11036,7 @@
               <a:defRPr sz="1800"/>
             </a:pPr>
             <a:r>
+              <a:rPr sz="1400"/>
               <a:t>    • Satır: Yatay</a:t>
             </a:r>
           </a:p>
@@ -9738,6 +11048,7 @@
               <a:defRPr sz="1800"/>
             </a:pPr>
             <a:r>
+              <a:rPr sz="1400"/>
               <a:t>    • Sütun: Dikey</a:t>
             </a:r>
           </a:p>
@@ -9749,6 +11060,7 @@
               <a:defRPr sz="1800"/>
             </a:pPr>
             <a:r>
+              <a:rPr sz="1400"/>
               <a:t>    • Formül: Hesaplamalar</a:t>
             </a:r>
           </a:p>
@@ -9768,6 +11080,7 @@
               <a:defRPr sz="2000" b="1"/>
             </a:pPr>
             <a:r>
+              <a:rPr sz="1400"/>
               <a:t>📌 Tablo Oluşturma Adımları:</a:t>
             </a:r>
           </a:p>
@@ -9787,6 +11100,7 @@
               <a:defRPr sz="2000"/>
             </a:pPr>
             <a:r>
+              <a:rPr sz="1400"/>
               <a:t>1️⃣ Başlıkları Yaz:</a:t>
             </a:r>
           </a:p>
@@ -9798,6 +11112,7 @@
               <a:defRPr sz="1800"/>
             </a:pPr>
             <a:r>
+              <a:rPr sz="1400"/>
               <a:t>    • İlk satıra sütun adları</a:t>
             </a:r>
           </a:p>
@@ -9817,6 +11132,7 @@
               <a:defRPr sz="2000"/>
             </a:pPr>
             <a:r>
+              <a:rPr sz="1400"/>
               <a:t>2️⃣ Verileri Gir:</a:t>
             </a:r>
           </a:p>
@@ -9828,6 +11144,7 @@
               <a:defRPr sz="1800"/>
             </a:pPr>
             <a:r>
+              <a:rPr sz="1400"/>
               <a:t>    • Her satıra bir kayıt</a:t>
             </a:r>
           </a:p>
@@ -9847,6 +11164,7 @@
               <a:defRPr sz="2000"/>
             </a:pPr>
             <a:r>
+              <a:rPr sz="1400"/>
               <a:t>3️⃣ Biçimlendir:</a:t>
             </a:r>
           </a:p>
@@ -9858,6 +11176,7 @@
               <a:defRPr sz="1800"/>
             </a:pPr>
             <a:r>
+              <a:rPr sz="1400"/>
               <a:t>    • Kalın başlıklar</a:t>
             </a:r>
           </a:p>
@@ -9869,6 +11188,7 @@
               <a:defRPr sz="1800"/>
             </a:pPr>
             <a:r>
+              <a:rPr sz="1400"/>
               <a:t>    • Kenarlıklar ekle</a:t>
             </a:r>
           </a:p>
@@ -9880,6 +11200,7 @@
               <a:defRPr sz="1800"/>
             </a:pPr>
             <a:r>
+              <a:rPr sz="1400"/>
               <a:t>    • Renkler kullan</a:t>
             </a:r>
           </a:p>
@@ -9899,6 +11220,7 @@
               <a:defRPr sz="2000"/>
             </a:pPr>
             <a:r>
+              <a:rPr sz="1400"/>
               <a:t>4️⃣ Sırala:</a:t>
             </a:r>
           </a:p>
@@ -9910,6 +11232,7 @@
               <a:defRPr sz="1800"/>
             </a:pPr>
             <a:r>
+              <a:rPr sz="1400"/>
               <a:t>    • Veri → Sırala</a:t>
             </a:r>
           </a:p>
@@ -9929,6 +11252,7 @@
               <a:defRPr sz="2000"/>
             </a:pPr>
             <a:r>
+              <a:rPr sz="1400"/>
               <a:t>5️⃣ Filtrele:</a:t>
             </a:r>
           </a:p>
@@ -9940,6 +11264,7 @@
               <a:defRPr sz="1800"/>
             </a:pPr>
             <a:r>
+              <a:rPr sz="1400"/>
               <a:t>    • Belirli verileri göster</a:t>
             </a:r>
           </a:p>
@@ -9959,6 +11284,7 @@
               <a:defRPr sz="2000" b="1"/>
             </a:pPr>
             <a:r>
+              <a:rPr sz="1400"/>
               <a:t>💡 Kısayollar:</a:t>
             </a:r>
           </a:p>
@@ -9970,6 +11296,7 @@
               <a:defRPr sz="1800"/>
             </a:pPr>
             <a:r>
+              <a:rPr sz="1400"/>
               <a:t>    • Ctrl+C: Kopyala</a:t>
             </a:r>
           </a:p>
@@ -9981,6 +11308,7 @@
               <a:defRPr sz="1800"/>
             </a:pPr>
             <a:r>
+              <a:rPr sz="1400"/>
               <a:t>    • Ctrl+V: Yapıştır</a:t>
             </a:r>
           </a:p>
@@ -9992,6 +11320,7 @@
               <a:defRPr sz="1800"/>
             </a:pPr>
             <a:r>
+              <a:rPr sz="1400"/>
               <a:t>    • Ctrl+Z: Geri al</a:t>
             </a:r>
           </a:p>

--- a/sunumlar/6-sinif-unite1-veri-analiz-DETAYLI.pptx
+++ b/sunumlar/6-sinif-unite1-veri-analiz-DETAYLI.pptx
@@ -5586,7 +5586,7 @@
           <a:noFill/>
         </p:spPr>
         <p:txBody>
-          <a:bodyPr wrap="none">
+          <a:bodyPr wrap="square">
             <a:spAutoFit/>
           </a:bodyPr>
           <a:lstStyle/>
@@ -5621,7 +5621,7 @@
           <a:noFill/>
         </p:spPr>
         <p:txBody>
-          <a:bodyPr wrap="none">
+          <a:bodyPr wrap="square">
             <a:spAutoFit/>
           </a:bodyPr>
           <a:lstStyle/>
@@ -5669,7 +5669,7 @@
         </p:nvSpPr>
         <p:spPr/>
         <p:txBody>
-          <a:bodyPr/>
+          <a:bodyPr wrap="square"/>
           <a:lstStyle/>
           <a:p>
             <a:pPr>
@@ -5723,324 +5723,420 @@
             <a:spAutoFit/>
           </a:bodyPr>
           <a:lstStyle/>
-          <a:p/>
-          <a:p>
-            <a:pPr>
-              <a:spcAft>
-                <a:spcPts val="1200"/>
-              </a:spcAft>
-              <a:defRPr sz="2000"/>
-            </a:pPr>
-            <a:r>
-              <a:rPr sz="1600"/>
+          <a:p>
+            <a:pPr>
+              <a:lnSpc>
+                <a:spcPct val="90000"/>
+              </a:lnSpc>
+              <a:spcAft>
+                <a:spcPts val="300"/>
+              </a:spcAft>
+            </a:pPr>
+          </a:p>
+          <a:p>
+            <a:pPr>
+              <a:lnSpc>
+                <a:spcPct val="90000"/>
+              </a:lnSpc>
+              <a:spcAft>
+                <a:spcPts val="300"/>
+              </a:spcAft>
+              <a:defRPr sz="2000"/>
+            </a:pPr>
+            <a:r>
+              <a:rPr sz="1400"/>
               <a:t>Excel'de otomatik hesaplama!</a:t>
             </a:r>
           </a:p>
           <a:p>
             <a:pPr>
-              <a:spcAft>
-                <a:spcPts val="1200"/>
-              </a:spcAft>
-              <a:defRPr sz="2000"/>
-            </a:pPr>
-          </a:p>
-          <a:p>
-            <a:pPr>
-              <a:spcAft>
-                <a:spcPts val="1200"/>
+              <a:lnSpc>
+                <a:spcPct val="90000"/>
+              </a:lnSpc>
+              <a:spcAft>
+                <a:spcPts val="300"/>
+              </a:spcAft>
+              <a:defRPr sz="2000"/>
+            </a:pPr>
+          </a:p>
+          <a:p>
+            <a:pPr>
+              <a:lnSpc>
+                <a:spcPct val="90000"/>
+              </a:lnSpc>
+              <a:spcAft>
+                <a:spcPts val="300"/>
               </a:spcAft>
               <a:defRPr sz="2000" b="1"/>
             </a:pPr>
             <a:r>
-              <a:rPr sz="1600"/>
+              <a:rPr sz="1400"/>
               <a:t>✅ Temel Formüller:</a:t>
             </a:r>
           </a:p>
           <a:p>
             <a:pPr>
-              <a:spcAft>
-                <a:spcPts val="1200"/>
-              </a:spcAft>
-              <a:defRPr sz="2000"/>
-            </a:pPr>
-          </a:p>
-          <a:p>
-            <a:pPr>
-              <a:spcAft>
-                <a:spcPts val="1200"/>
-              </a:spcAft>
-              <a:defRPr sz="2000"/>
-            </a:pPr>
-            <a:r>
-              <a:rPr sz="1600"/>
+              <a:lnSpc>
+                <a:spcPct val="90000"/>
+              </a:lnSpc>
+              <a:spcAft>
+                <a:spcPts val="300"/>
+              </a:spcAft>
+              <a:defRPr sz="2000"/>
+            </a:pPr>
+          </a:p>
+          <a:p>
+            <a:pPr>
+              <a:lnSpc>
+                <a:spcPct val="90000"/>
+              </a:lnSpc>
+              <a:spcAft>
+                <a:spcPts val="300"/>
+              </a:spcAft>
+              <a:defRPr sz="2000"/>
+            </a:pPr>
+            <a:r>
+              <a:rPr sz="1400"/>
               <a:t>➕ Toplama:</a:t>
             </a:r>
           </a:p>
           <a:p>
             <a:pPr lvl="1">
-              <a:spcAft>
-                <a:spcPts val="1200"/>
-              </a:spcAft>
-              <a:defRPr sz="1800"/>
-            </a:pPr>
-            <a:r>
-              <a:rPr sz="1600"/>
+              <a:lnSpc>
+                <a:spcPct val="90000"/>
+              </a:lnSpc>
+              <a:spcAft>
+                <a:spcPts val="300"/>
+              </a:spcAft>
+              <a:defRPr sz="1800"/>
+            </a:pPr>
+            <a:r>
+              <a:rPr sz="1400"/>
               <a:t>    • =A1+B1</a:t>
             </a:r>
           </a:p>
           <a:p>
             <a:pPr lvl="1">
-              <a:spcAft>
-                <a:spcPts val="1200"/>
-              </a:spcAft>
-              <a:defRPr sz="1800"/>
-            </a:pPr>
-            <a:r>
-              <a:rPr sz="1600"/>
+              <a:lnSpc>
+                <a:spcPct val="90000"/>
+              </a:lnSpc>
+              <a:spcAft>
+                <a:spcPts val="300"/>
+              </a:spcAft>
+              <a:defRPr sz="1800"/>
+            </a:pPr>
+            <a:r>
+              <a:rPr sz="1400"/>
               <a:t>    • =SUM(A1:A10) → A1'den A10'a kadar topla</a:t>
             </a:r>
           </a:p>
           <a:p>
             <a:pPr>
-              <a:spcAft>
-                <a:spcPts val="1200"/>
-              </a:spcAft>
-              <a:defRPr sz="2000"/>
-            </a:pPr>
-          </a:p>
-          <a:p>
-            <a:pPr>
-              <a:spcAft>
-                <a:spcPts val="1200"/>
-              </a:spcAft>
-              <a:defRPr sz="2000"/>
-            </a:pPr>
-            <a:r>
-              <a:rPr sz="1600"/>
+              <a:lnSpc>
+                <a:spcPct val="90000"/>
+              </a:lnSpc>
+              <a:spcAft>
+                <a:spcPts val="300"/>
+              </a:spcAft>
+              <a:defRPr sz="2000"/>
+            </a:pPr>
+          </a:p>
+          <a:p>
+            <a:pPr>
+              <a:lnSpc>
+                <a:spcPct val="90000"/>
+              </a:lnSpc>
+              <a:spcAft>
+                <a:spcPts val="300"/>
+              </a:spcAft>
+              <a:defRPr sz="2000"/>
+            </a:pPr>
+            <a:r>
+              <a:rPr sz="1400"/>
               <a:t>➗ Ortalama:</a:t>
             </a:r>
           </a:p>
           <a:p>
             <a:pPr lvl="1">
-              <a:spcAft>
-                <a:spcPts val="1200"/>
-              </a:spcAft>
-              <a:defRPr sz="1800"/>
-            </a:pPr>
-            <a:r>
-              <a:rPr sz="1600"/>
+              <a:lnSpc>
+                <a:spcPct val="90000"/>
+              </a:lnSpc>
+              <a:spcAft>
+                <a:spcPts val="300"/>
+              </a:spcAft>
+              <a:defRPr sz="1800"/>
+            </a:pPr>
+            <a:r>
+              <a:rPr sz="1400"/>
               <a:t>    • =AVERAGE(A1:A10)</a:t>
             </a:r>
           </a:p>
           <a:p>
             <a:pPr>
-              <a:spcAft>
-                <a:spcPts val="1200"/>
-              </a:spcAft>
-              <a:defRPr sz="2000"/>
-            </a:pPr>
-          </a:p>
-          <a:p>
-            <a:pPr>
-              <a:spcAft>
-                <a:spcPts val="1200"/>
-              </a:spcAft>
-              <a:defRPr sz="2000"/>
-            </a:pPr>
-            <a:r>
-              <a:rPr sz="1600"/>
+              <a:lnSpc>
+                <a:spcPct val="90000"/>
+              </a:lnSpc>
+              <a:spcAft>
+                <a:spcPts val="300"/>
+              </a:spcAft>
+              <a:defRPr sz="2000"/>
+            </a:pPr>
+          </a:p>
+          <a:p>
+            <a:pPr>
+              <a:lnSpc>
+                <a:spcPct val="90000"/>
+              </a:lnSpc>
+              <a:spcAft>
+                <a:spcPts val="300"/>
+              </a:spcAft>
+              <a:defRPr sz="2000"/>
+            </a:pPr>
+            <a:r>
+              <a:rPr sz="1400"/>
               <a:t>🔢 Sayma:</a:t>
             </a:r>
           </a:p>
           <a:p>
             <a:pPr lvl="1">
-              <a:spcAft>
-                <a:spcPts val="1200"/>
-              </a:spcAft>
-              <a:defRPr sz="1800"/>
-            </a:pPr>
-            <a:r>
-              <a:rPr sz="1600"/>
+              <a:lnSpc>
+                <a:spcPct val="90000"/>
+              </a:lnSpc>
+              <a:spcAft>
+                <a:spcPts val="300"/>
+              </a:spcAft>
+              <a:defRPr sz="1800"/>
+            </a:pPr>
+            <a:r>
+              <a:rPr sz="1400"/>
               <a:t>    • =COUNT(A1:A10) → Kaç sayı var?</a:t>
             </a:r>
           </a:p>
           <a:p>
             <a:pPr>
-              <a:spcAft>
-                <a:spcPts val="1200"/>
-              </a:spcAft>
-              <a:defRPr sz="2000"/>
-            </a:pPr>
-          </a:p>
-          <a:p>
-            <a:pPr>
-              <a:spcAft>
-                <a:spcPts val="1200"/>
-              </a:spcAft>
-              <a:defRPr sz="2000"/>
-            </a:pPr>
-            <a:r>
-              <a:rPr sz="1600"/>
+              <a:lnSpc>
+                <a:spcPct val="90000"/>
+              </a:lnSpc>
+              <a:spcAft>
+                <a:spcPts val="300"/>
+              </a:spcAft>
+              <a:defRPr sz="2000"/>
+            </a:pPr>
+          </a:p>
+          <a:p>
+            <a:pPr>
+              <a:lnSpc>
+                <a:spcPct val="90000"/>
+              </a:lnSpc>
+              <a:spcAft>
+                <a:spcPts val="300"/>
+              </a:spcAft>
+              <a:defRPr sz="2000"/>
+            </a:pPr>
+            <a:r>
+              <a:rPr sz="1400"/>
               <a:t>📊 En Büyük/Küçük:</a:t>
             </a:r>
           </a:p>
           <a:p>
             <a:pPr lvl="1">
-              <a:spcAft>
-                <a:spcPts val="1200"/>
-              </a:spcAft>
-              <a:defRPr sz="1800"/>
-            </a:pPr>
-            <a:r>
-              <a:rPr sz="1600"/>
+              <a:lnSpc>
+                <a:spcPct val="90000"/>
+              </a:lnSpc>
+              <a:spcAft>
+                <a:spcPts val="300"/>
+              </a:spcAft>
+              <a:defRPr sz="1800"/>
+            </a:pPr>
+            <a:r>
+              <a:rPr sz="1400"/>
               <a:t>    • =MAX(A1:A10)</a:t>
             </a:r>
           </a:p>
           <a:p>
             <a:pPr lvl="1">
-              <a:spcAft>
-                <a:spcPts val="1200"/>
-              </a:spcAft>
-              <a:defRPr sz="1800"/>
-            </a:pPr>
-            <a:r>
-              <a:rPr sz="1600"/>
+              <a:lnSpc>
+                <a:spcPct val="90000"/>
+              </a:lnSpc>
+              <a:spcAft>
+                <a:spcPts val="300"/>
+              </a:spcAft>
+              <a:defRPr sz="1800"/>
+            </a:pPr>
+            <a:r>
+              <a:rPr sz="1400"/>
               <a:t>    • =MIN(A1:A10)</a:t>
             </a:r>
           </a:p>
           <a:p>
             <a:pPr>
-              <a:spcAft>
-                <a:spcPts val="1200"/>
-              </a:spcAft>
-              <a:defRPr sz="2000"/>
-            </a:pPr>
-          </a:p>
-          <a:p>
-            <a:pPr>
-              <a:spcAft>
-                <a:spcPts val="1200"/>
+              <a:lnSpc>
+                <a:spcPct val="90000"/>
+              </a:lnSpc>
+              <a:spcAft>
+                <a:spcPts val="300"/>
+              </a:spcAft>
+              <a:defRPr sz="2000"/>
+            </a:pPr>
+          </a:p>
+          <a:p>
+            <a:pPr>
+              <a:lnSpc>
+                <a:spcPct val="90000"/>
+              </a:lnSpc>
+              <a:spcAft>
+                <a:spcPts val="300"/>
               </a:spcAft>
               <a:defRPr sz="2000" b="1"/>
             </a:pPr>
             <a:r>
-              <a:rPr sz="1600"/>
+              <a:rPr sz="1400"/>
               <a:t>📌 Formül Yazma Kuralları:</a:t>
             </a:r>
           </a:p>
           <a:p>
             <a:pPr lvl="1">
-              <a:spcAft>
-                <a:spcPts val="1200"/>
-              </a:spcAft>
-              <a:defRPr sz="1800"/>
-            </a:pPr>
-            <a:r>
-              <a:rPr sz="1600"/>
+              <a:lnSpc>
+                <a:spcPct val="90000"/>
+              </a:lnSpc>
+              <a:spcAft>
+                <a:spcPts val="300"/>
+              </a:spcAft>
+              <a:defRPr sz="1800"/>
+            </a:pPr>
+            <a:r>
+              <a:rPr sz="1400"/>
               <a:t>    • '=' ile başla</a:t>
             </a:r>
           </a:p>
           <a:p>
             <a:pPr lvl="1">
-              <a:spcAft>
-                <a:spcPts val="1200"/>
-              </a:spcAft>
-              <a:defRPr sz="1800"/>
-            </a:pPr>
-            <a:r>
-              <a:rPr sz="1600"/>
+              <a:lnSpc>
+                <a:spcPct val="90000"/>
+              </a:lnSpc>
+              <a:spcAft>
+                <a:spcPts val="300"/>
+              </a:spcAft>
+              <a:defRPr sz="1800"/>
+            </a:pPr>
+            <a:r>
+              <a:rPr sz="1400"/>
               <a:t>    • Hücre adreslerini kullan (A1, B2)</a:t>
             </a:r>
           </a:p>
           <a:p>
             <a:pPr lvl="1">
-              <a:spcAft>
-                <a:spcPts val="1200"/>
-              </a:spcAft>
-              <a:defRPr sz="1800"/>
-            </a:pPr>
-            <a:r>
-              <a:rPr sz="1600"/>
+              <a:lnSpc>
+                <a:spcPct val="90000"/>
+              </a:lnSpc>
+              <a:spcAft>
+                <a:spcPts val="300"/>
+              </a:spcAft>
+              <a:defRPr sz="1800"/>
+            </a:pPr>
+            <a:r>
+              <a:rPr sz="1400"/>
               <a:t>    • Operatörler: +, -, *, /</a:t>
             </a:r>
           </a:p>
           <a:p>
             <a:pPr>
-              <a:spcAft>
-                <a:spcPts val="1200"/>
-              </a:spcAft>
-              <a:defRPr sz="2000"/>
-            </a:pPr>
-          </a:p>
-          <a:p>
-            <a:pPr>
-              <a:spcAft>
-                <a:spcPts val="1200"/>
+              <a:lnSpc>
+                <a:spcPct val="90000"/>
+              </a:lnSpc>
+              <a:spcAft>
+                <a:spcPts val="300"/>
+              </a:spcAft>
+              <a:defRPr sz="2000"/>
+            </a:pPr>
+          </a:p>
+          <a:p>
+            <a:pPr>
+              <a:lnSpc>
+                <a:spcPct val="90000"/>
+              </a:lnSpc>
+              <a:spcAft>
+                <a:spcPts val="300"/>
               </a:spcAft>
               <a:defRPr sz="2000" b="1"/>
             </a:pPr>
             <a:r>
-              <a:rPr sz="1600"/>
+              <a:rPr sz="1400"/>
               <a:t>💡 Örnek: Not Ortalaması</a:t>
             </a:r>
           </a:p>
           <a:p>
             <a:pPr>
-              <a:spcAft>
-                <a:spcPts val="1200"/>
-              </a:spcAft>
-              <a:defRPr sz="2000"/>
-            </a:pPr>
-            <a:r>
-              <a:rPr sz="1600"/>
+              <a:lnSpc>
+                <a:spcPct val="90000"/>
+              </a:lnSpc>
+              <a:spcAft>
+                <a:spcPts val="300"/>
+              </a:spcAft>
+              <a:defRPr sz="2000"/>
+            </a:pPr>
+            <a:r>
+              <a:rPr sz="1400"/>
               <a:t>| Ders       | Not |</a:t>
             </a:r>
           </a:p>
           <a:p>
             <a:pPr>
-              <a:spcAft>
-                <a:spcPts val="1200"/>
-              </a:spcAft>
-              <a:defRPr sz="2000"/>
-            </a:pPr>
-            <a:r>
-              <a:rPr sz="1600"/>
+              <a:lnSpc>
+                <a:spcPct val="90000"/>
+              </a:lnSpc>
+              <a:spcAft>
+                <a:spcPts val="300"/>
+              </a:spcAft>
+              <a:defRPr sz="2000"/>
+            </a:pPr>
+            <a:r>
+              <a:rPr sz="1400"/>
               <a:t>| Matematik  | 85  |</a:t>
             </a:r>
           </a:p>
           <a:p>
             <a:pPr>
-              <a:spcAft>
-                <a:spcPts val="1200"/>
-              </a:spcAft>
-              <a:defRPr sz="2000"/>
-            </a:pPr>
-            <a:r>
-              <a:rPr sz="1600"/>
+              <a:lnSpc>
+                <a:spcPct val="90000"/>
+              </a:lnSpc>
+              <a:spcAft>
+                <a:spcPts val="300"/>
+              </a:spcAft>
+              <a:defRPr sz="2000"/>
+            </a:pPr>
+            <a:r>
+              <a:rPr sz="1400"/>
               <a:t>| Türkçe     | 90  |</a:t>
             </a:r>
           </a:p>
           <a:p>
             <a:pPr>
-              <a:spcAft>
-                <a:spcPts val="1200"/>
-              </a:spcAft>
-              <a:defRPr sz="2000"/>
-            </a:pPr>
-            <a:r>
-              <a:rPr sz="1600"/>
+              <a:lnSpc>
+                <a:spcPct val="90000"/>
+              </a:lnSpc>
+              <a:spcAft>
+                <a:spcPts val="300"/>
+              </a:spcAft>
+              <a:defRPr sz="2000"/>
+            </a:pPr>
+            <a:r>
+              <a:rPr sz="1400"/>
               <a:t>| Fen        | 78  |</a:t>
             </a:r>
           </a:p>
           <a:p>
             <a:pPr>
-              <a:spcAft>
-                <a:spcPts val="1200"/>
-              </a:spcAft>
-              <a:defRPr sz="2000"/>
-            </a:pPr>
-            <a:r>
-              <a:rPr sz="1600"/>
+              <a:lnSpc>
+                <a:spcPct val="90000"/>
+              </a:lnSpc>
+              <a:spcAft>
+                <a:spcPts val="300"/>
+              </a:spcAft>
+              <a:defRPr sz="2000"/>
+            </a:pPr>
+            <a:r>
+              <a:rPr sz="1400"/>
               <a:t>| Ortalama   | =AVERAGE(B2:B4) |</a:t>
             </a:r>
           </a:p>
@@ -6076,7 +6172,7 @@
         </p:nvSpPr>
         <p:spPr/>
         <p:txBody>
-          <a:bodyPr/>
+          <a:bodyPr wrap="square"/>
           <a:lstStyle/>
           <a:p>
             <a:pPr>
@@ -6130,324 +6226,420 @@
             <a:spAutoFit/>
           </a:bodyPr>
           <a:lstStyle/>
-          <a:p/>
-          <a:p>
-            <a:pPr>
-              <a:spcAft>
-                <a:spcPts val="1200"/>
-              </a:spcAft>
-              <a:defRPr sz="2000"/>
-            </a:pPr>
-            <a:r>
-              <a:rPr sz="1400"/>
+          <a:p>
+            <a:pPr>
+              <a:lnSpc>
+                <a:spcPct val="90000"/>
+              </a:lnSpc>
+              <a:spcAft>
+                <a:spcPts val="300"/>
+              </a:spcAft>
+            </a:pPr>
+          </a:p>
+          <a:p>
+            <a:pPr>
+              <a:lnSpc>
+                <a:spcPct val="90000"/>
+              </a:lnSpc>
+              <a:spcAft>
+                <a:spcPts val="300"/>
+              </a:spcAft>
+              <a:defRPr sz="2000"/>
+            </a:pPr>
+            <a:r>
+              <a:rPr sz="1300"/>
               <a:t>Tablodan grafik yapmak çok kolay!</a:t>
             </a:r>
           </a:p>
           <a:p>
             <a:pPr>
-              <a:spcAft>
-                <a:spcPts val="1200"/>
-              </a:spcAft>
-              <a:defRPr sz="2000"/>
-            </a:pPr>
-          </a:p>
-          <a:p>
-            <a:pPr>
-              <a:spcAft>
-                <a:spcPts val="1200"/>
+              <a:lnSpc>
+                <a:spcPct val="90000"/>
+              </a:lnSpc>
+              <a:spcAft>
+                <a:spcPts val="300"/>
+              </a:spcAft>
+              <a:defRPr sz="2000"/>
+            </a:pPr>
+          </a:p>
+          <a:p>
+            <a:pPr>
+              <a:lnSpc>
+                <a:spcPct val="90000"/>
+              </a:lnSpc>
+              <a:spcAft>
+                <a:spcPts val="300"/>
               </a:spcAft>
               <a:defRPr sz="2000" b="1"/>
             </a:pPr>
             <a:r>
-              <a:rPr sz="1400"/>
+              <a:rPr sz="1300"/>
               <a:t>✅ Grafik Oluşturma Adımları:</a:t>
             </a:r>
           </a:p>
           <a:p>
             <a:pPr>
-              <a:spcAft>
-                <a:spcPts val="1200"/>
-              </a:spcAft>
-              <a:defRPr sz="2000"/>
-            </a:pPr>
-          </a:p>
-          <a:p>
-            <a:pPr>
-              <a:spcAft>
-                <a:spcPts val="1200"/>
-              </a:spcAft>
-              <a:defRPr sz="2000"/>
-            </a:pPr>
-            <a:r>
-              <a:rPr sz="1400"/>
+              <a:lnSpc>
+                <a:spcPct val="90000"/>
+              </a:lnSpc>
+              <a:spcAft>
+                <a:spcPts val="300"/>
+              </a:spcAft>
+              <a:defRPr sz="2000"/>
+            </a:pPr>
+          </a:p>
+          <a:p>
+            <a:pPr>
+              <a:lnSpc>
+                <a:spcPct val="90000"/>
+              </a:lnSpc>
+              <a:spcAft>
+                <a:spcPts val="300"/>
+              </a:spcAft>
+              <a:defRPr sz="2000"/>
+            </a:pPr>
+            <a:r>
+              <a:rPr sz="1300"/>
               <a:t>1️⃣ Veriyi Seç:</a:t>
             </a:r>
           </a:p>
           <a:p>
             <a:pPr lvl="1">
-              <a:spcAft>
-                <a:spcPts val="1200"/>
-              </a:spcAft>
-              <a:defRPr sz="1800"/>
-            </a:pPr>
-            <a:r>
-              <a:rPr sz="1400"/>
+              <a:lnSpc>
+                <a:spcPct val="90000"/>
+              </a:lnSpc>
+              <a:spcAft>
+                <a:spcPts val="300"/>
+              </a:spcAft>
+              <a:defRPr sz="1800"/>
+            </a:pPr>
+            <a:r>
+              <a:rPr sz="1300"/>
               <a:t>    • Grafik yapılacak hücreleri seç</a:t>
             </a:r>
           </a:p>
           <a:p>
             <a:pPr>
-              <a:spcAft>
-                <a:spcPts val="1200"/>
-              </a:spcAft>
-              <a:defRPr sz="2000"/>
-            </a:pPr>
-          </a:p>
-          <a:p>
-            <a:pPr>
-              <a:spcAft>
-                <a:spcPts val="1200"/>
-              </a:spcAft>
-              <a:defRPr sz="2000"/>
-            </a:pPr>
-            <a:r>
-              <a:rPr sz="1400"/>
+              <a:lnSpc>
+                <a:spcPct val="90000"/>
+              </a:lnSpc>
+              <a:spcAft>
+                <a:spcPts val="300"/>
+              </a:spcAft>
+              <a:defRPr sz="2000"/>
+            </a:pPr>
+          </a:p>
+          <a:p>
+            <a:pPr>
+              <a:lnSpc>
+                <a:spcPct val="90000"/>
+              </a:lnSpc>
+              <a:spcAft>
+                <a:spcPts val="300"/>
+              </a:spcAft>
+              <a:defRPr sz="2000"/>
+            </a:pPr>
+            <a:r>
+              <a:rPr sz="1300"/>
               <a:t>2️⃣ Ekle → Grafik:</a:t>
             </a:r>
           </a:p>
           <a:p>
             <a:pPr lvl="1">
-              <a:spcAft>
-                <a:spcPts val="1200"/>
-              </a:spcAft>
-              <a:defRPr sz="1800"/>
-            </a:pPr>
-            <a:r>
-              <a:rPr sz="1400"/>
+              <a:lnSpc>
+                <a:spcPct val="90000"/>
+              </a:lnSpc>
+              <a:spcAft>
+                <a:spcPts val="300"/>
+              </a:spcAft>
+              <a:defRPr sz="1800"/>
+            </a:pPr>
+            <a:r>
+              <a:rPr sz="1300"/>
               <a:t>    • Excel: Insert → Chart</a:t>
             </a:r>
           </a:p>
           <a:p>
             <a:pPr lvl="1">
-              <a:spcAft>
-                <a:spcPts val="1200"/>
-              </a:spcAft>
-              <a:defRPr sz="1800"/>
-            </a:pPr>
-            <a:r>
-              <a:rPr sz="1400"/>
+              <a:lnSpc>
+                <a:spcPct val="90000"/>
+              </a:lnSpc>
+              <a:spcAft>
+                <a:spcPts val="300"/>
+              </a:spcAft>
+              <a:defRPr sz="1800"/>
+            </a:pPr>
+            <a:r>
+              <a:rPr sz="1300"/>
               <a:t>    • Sheets: Insert → Chart</a:t>
             </a:r>
           </a:p>
           <a:p>
             <a:pPr>
-              <a:spcAft>
-                <a:spcPts val="1200"/>
-              </a:spcAft>
-              <a:defRPr sz="2000"/>
-            </a:pPr>
-          </a:p>
-          <a:p>
-            <a:pPr>
-              <a:spcAft>
-                <a:spcPts val="1200"/>
-              </a:spcAft>
-              <a:defRPr sz="2000"/>
-            </a:pPr>
-            <a:r>
-              <a:rPr sz="1400"/>
+              <a:lnSpc>
+                <a:spcPct val="90000"/>
+              </a:lnSpc>
+              <a:spcAft>
+                <a:spcPts val="300"/>
+              </a:spcAft>
+              <a:defRPr sz="2000"/>
+            </a:pPr>
+          </a:p>
+          <a:p>
+            <a:pPr>
+              <a:lnSpc>
+                <a:spcPct val="90000"/>
+              </a:lnSpc>
+              <a:spcAft>
+                <a:spcPts val="300"/>
+              </a:spcAft>
+              <a:defRPr sz="2000"/>
+            </a:pPr>
+            <a:r>
+              <a:rPr sz="1300"/>
               <a:t>3️⃣ Grafik Türünü Seç:</a:t>
             </a:r>
           </a:p>
           <a:p>
             <a:pPr lvl="1">
-              <a:spcAft>
-                <a:spcPts val="1200"/>
-              </a:spcAft>
-              <a:defRPr sz="1800"/>
-            </a:pPr>
-            <a:r>
-              <a:rPr sz="1400"/>
+              <a:lnSpc>
+                <a:spcPct val="90000"/>
+              </a:lnSpc>
+              <a:spcAft>
+                <a:spcPts val="300"/>
+              </a:spcAft>
+              <a:defRPr sz="1800"/>
+            </a:pPr>
+            <a:r>
+              <a:rPr sz="1300"/>
               <a:t>    • Sütun, Çizgi, Pasta...</a:t>
             </a:r>
           </a:p>
           <a:p>
             <a:pPr>
-              <a:spcAft>
-                <a:spcPts val="1200"/>
-              </a:spcAft>
-              <a:defRPr sz="2000"/>
-            </a:pPr>
-          </a:p>
-          <a:p>
-            <a:pPr>
-              <a:spcAft>
-                <a:spcPts val="1200"/>
-              </a:spcAft>
-              <a:defRPr sz="2000"/>
-            </a:pPr>
-            <a:r>
-              <a:rPr sz="1400"/>
+              <a:lnSpc>
+                <a:spcPct val="90000"/>
+              </a:lnSpc>
+              <a:spcAft>
+                <a:spcPts val="300"/>
+              </a:spcAft>
+              <a:defRPr sz="2000"/>
+            </a:pPr>
+          </a:p>
+          <a:p>
+            <a:pPr>
+              <a:lnSpc>
+                <a:spcPct val="90000"/>
+              </a:lnSpc>
+              <a:spcAft>
+                <a:spcPts val="300"/>
+              </a:spcAft>
+              <a:defRPr sz="2000"/>
+            </a:pPr>
+            <a:r>
+              <a:rPr sz="1300"/>
               <a:t>4️⃣ Özelleştir:</a:t>
             </a:r>
           </a:p>
           <a:p>
             <a:pPr lvl="1">
-              <a:spcAft>
-                <a:spcPts val="1200"/>
-              </a:spcAft>
-              <a:defRPr sz="1800"/>
-            </a:pPr>
-            <a:r>
-              <a:rPr sz="1400"/>
+              <a:lnSpc>
+                <a:spcPct val="90000"/>
+              </a:lnSpc>
+              <a:spcAft>
+                <a:spcPts val="300"/>
+              </a:spcAft>
+              <a:defRPr sz="1800"/>
+            </a:pPr>
+            <a:r>
+              <a:rPr sz="1300"/>
               <a:t>    • Başlık ekle</a:t>
             </a:r>
           </a:p>
           <a:p>
             <a:pPr lvl="1">
-              <a:spcAft>
-                <a:spcPts val="1200"/>
-              </a:spcAft>
-              <a:defRPr sz="1800"/>
-            </a:pPr>
-            <a:r>
-              <a:rPr sz="1400"/>
+              <a:lnSpc>
+                <a:spcPct val="90000"/>
+              </a:lnSpc>
+              <a:spcAft>
+                <a:spcPts val="300"/>
+              </a:spcAft>
+              <a:defRPr sz="1800"/>
+            </a:pPr>
+            <a:r>
+              <a:rPr sz="1300"/>
               <a:t>    • Renkleri değiştir</a:t>
             </a:r>
           </a:p>
           <a:p>
             <a:pPr lvl="1">
-              <a:spcAft>
-                <a:spcPts val="1200"/>
-              </a:spcAft>
-              <a:defRPr sz="1800"/>
-            </a:pPr>
-            <a:r>
-              <a:rPr sz="1400"/>
+              <a:lnSpc>
+                <a:spcPct val="90000"/>
+              </a:lnSpc>
+              <a:spcAft>
+                <a:spcPts val="300"/>
+              </a:spcAft>
+              <a:defRPr sz="1800"/>
+            </a:pPr>
+            <a:r>
+              <a:rPr sz="1300"/>
               <a:t>    • Eksen etiketleri</a:t>
             </a:r>
           </a:p>
           <a:p>
             <a:pPr>
-              <a:spcAft>
-                <a:spcPts val="1200"/>
-              </a:spcAft>
-              <a:defRPr sz="2000"/>
-            </a:pPr>
-          </a:p>
-          <a:p>
-            <a:pPr>
-              <a:spcAft>
-                <a:spcPts val="1200"/>
-              </a:spcAft>
-              <a:defRPr sz="2000"/>
-            </a:pPr>
-            <a:r>
-              <a:rPr sz="1400"/>
+              <a:lnSpc>
+                <a:spcPct val="90000"/>
+              </a:lnSpc>
+              <a:spcAft>
+                <a:spcPts val="300"/>
+              </a:spcAft>
+              <a:defRPr sz="2000"/>
+            </a:pPr>
+          </a:p>
+          <a:p>
+            <a:pPr>
+              <a:lnSpc>
+                <a:spcPct val="90000"/>
+              </a:lnSpc>
+              <a:spcAft>
+                <a:spcPts val="300"/>
+              </a:spcAft>
+              <a:defRPr sz="2000"/>
+            </a:pPr>
+            <a:r>
+              <a:rPr sz="1300"/>
               <a:t>5️⃣ Kaydet/Paylaş:</a:t>
             </a:r>
           </a:p>
           <a:p>
             <a:pPr lvl="1">
-              <a:spcAft>
-                <a:spcPts val="1200"/>
-              </a:spcAft>
-              <a:defRPr sz="1800"/>
-            </a:pPr>
-            <a:r>
-              <a:rPr sz="1400"/>
+              <a:lnSpc>
+                <a:spcPct val="90000"/>
+              </a:lnSpc>
+              <a:spcAft>
+                <a:spcPts val="300"/>
+              </a:spcAft>
+              <a:defRPr sz="1800"/>
+            </a:pPr>
+            <a:r>
+              <a:rPr sz="1300"/>
               <a:t>    • Resim olarak kaydet</a:t>
             </a:r>
           </a:p>
           <a:p>
             <a:pPr lvl="1">
-              <a:spcAft>
-                <a:spcPts val="1200"/>
-              </a:spcAft>
-              <a:defRPr sz="1800"/>
-            </a:pPr>
-            <a:r>
-              <a:rPr sz="1400"/>
+              <a:lnSpc>
+                <a:spcPct val="90000"/>
+              </a:lnSpc>
+              <a:spcAft>
+                <a:spcPts val="300"/>
+              </a:spcAft>
+              <a:defRPr sz="1800"/>
+            </a:pPr>
+            <a:r>
+              <a:rPr sz="1300"/>
               <a:t>    • Sunuma ekle</a:t>
             </a:r>
           </a:p>
           <a:p>
             <a:pPr>
-              <a:spcAft>
-                <a:spcPts val="1200"/>
-              </a:spcAft>
-              <a:defRPr sz="2000"/>
-            </a:pPr>
-          </a:p>
-          <a:p>
-            <a:pPr>
-              <a:spcAft>
-                <a:spcPts val="1200"/>
+              <a:lnSpc>
+                <a:spcPct val="90000"/>
+              </a:lnSpc>
+              <a:spcAft>
+                <a:spcPts val="300"/>
+              </a:spcAft>
+              <a:defRPr sz="2000"/>
+            </a:pPr>
+          </a:p>
+          <a:p>
+            <a:pPr>
+              <a:lnSpc>
+                <a:spcPct val="90000"/>
+              </a:lnSpc>
+              <a:spcAft>
+                <a:spcPts val="300"/>
               </a:spcAft>
               <a:defRPr sz="2000" b="1"/>
             </a:pPr>
             <a:r>
-              <a:rPr sz="1400"/>
+              <a:rPr sz="1300"/>
               <a:t>📌 Örnek: Aylık Sıcaklık Grafiği</a:t>
             </a:r>
           </a:p>
           <a:p>
             <a:pPr>
-              <a:spcAft>
-                <a:spcPts val="1200"/>
-              </a:spcAft>
-              <a:defRPr sz="2000"/>
-            </a:pPr>
-            <a:r>
-              <a:rPr sz="1400"/>
+              <a:lnSpc>
+                <a:spcPct val="90000"/>
+              </a:lnSpc>
+              <a:spcAft>
+                <a:spcPts val="300"/>
+              </a:spcAft>
+              <a:defRPr sz="2000"/>
+            </a:pPr>
+            <a:r>
+              <a:rPr sz="1300"/>
               <a:t>| Ay      | Sıcaklık |</a:t>
             </a:r>
           </a:p>
           <a:p>
             <a:pPr>
-              <a:spcAft>
-                <a:spcPts val="1200"/>
-              </a:spcAft>
-              <a:defRPr sz="2000"/>
-            </a:pPr>
-            <a:r>
-              <a:rPr sz="1400"/>
+              <a:lnSpc>
+                <a:spcPct val="90000"/>
+              </a:lnSpc>
+              <a:spcAft>
+                <a:spcPts val="300"/>
+              </a:spcAft>
+              <a:defRPr sz="2000"/>
+            </a:pPr>
+            <a:r>
+              <a:rPr sz="1300"/>
               <a:t>| Ocak    | 5°C      |</a:t>
             </a:r>
           </a:p>
           <a:p>
             <a:pPr>
-              <a:spcAft>
-                <a:spcPts val="1200"/>
-              </a:spcAft>
-              <a:defRPr sz="2000"/>
-            </a:pPr>
-            <a:r>
-              <a:rPr sz="1400"/>
+              <a:lnSpc>
+                <a:spcPct val="90000"/>
+              </a:lnSpc>
+              <a:spcAft>
+                <a:spcPts val="300"/>
+              </a:spcAft>
+              <a:defRPr sz="2000"/>
+            </a:pPr>
+            <a:r>
+              <a:rPr sz="1300"/>
               <a:t>| Şubat   | 7°C      |</a:t>
             </a:r>
           </a:p>
           <a:p>
             <a:pPr>
-              <a:spcAft>
-                <a:spcPts val="1200"/>
-              </a:spcAft>
-              <a:defRPr sz="2000"/>
-            </a:pPr>
-            <a:r>
-              <a:rPr sz="1400"/>
+              <a:lnSpc>
+                <a:spcPct val="90000"/>
+              </a:lnSpc>
+              <a:spcAft>
+                <a:spcPts val="300"/>
+              </a:spcAft>
+              <a:defRPr sz="2000"/>
+            </a:pPr>
+            <a:r>
+              <a:rPr sz="1300"/>
               <a:t>| Mart    | 12°C     |</a:t>
             </a:r>
           </a:p>
           <a:p>
             <a:pPr>
-              <a:spcAft>
-                <a:spcPts val="1200"/>
-              </a:spcAft>
-              <a:defRPr sz="2000"/>
-            </a:pPr>
-            <a:r>
-              <a:rPr sz="1400"/>
+              <a:lnSpc>
+                <a:spcPct val="90000"/>
+              </a:lnSpc>
+              <a:spcAft>
+                <a:spcPts val="300"/>
+              </a:spcAft>
+              <a:defRPr sz="2000"/>
+            </a:pPr>
+            <a:r>
+              <a:rPr sz="1300"/>
               <a:t>→ Çizgi grafiği yap</a:t>
             </a:r>
           </a:p>
@@ -6483,7 +6675,7 @@
         </p:nvSpPr>
         <p:spPr/>
         <p:txBody>
-          <a:bodyPr/>
+          <a:bodyPr wrap="square"/>
           <a:lstStyle/>
           <a:p>
             <a:pPr>
@@ -6537,304 +6729,394 @@
             <a:spAutoFit/>
           </a:bodyPr>
           <a:lstStyle/>
-          <a:p/>
-          <a:p>
-            <a:pPr>
-              <a:spcAft>
-                <a:spcPts val="1200"/>
-              </a:spcAft>
-              <a:defRPr sz="2000"/>
-            </a:pPr>
-            <a:r>
-              <a:rPr sz="1400"/>
+          <a:p>
+            <a:pPr>
+              <a:lnSpc>
+                <a:spcPct val="90000"/>
+              </a:lnSpc>
+              <a:spcAft>
+                <a:spcPts val="300"/>
+              </a:spcAft>
+            </a:pPr>
+          </a:p>
+          <a:p>
+            <a:pPr>
+              <a:lnSpc>
+                <a:spcPct val="90000"/>
+              </a:lnSpc>
+              <a:spcAft>
+                <a:spcPts val="300"/>
+              </a:spcAft>
+              <a:defRPr sz="2000"/>
+            </a:pPr>
+            <a:r>
+              <a:rPr sz="1300"/>
               <a:t>Veriyi inceleyip sonuç çıkarmak</a:t>
             </a:r>
           </a:p>
           <a:p>
             <a:pPr>
-              <a:spcAft>
-                <a:spcPts val="1200"/>
-              </a:spcAft>
-              <a:defRPr sz="2000"/>
-            </a:pPr>
-          </a:p>
-          <a:p>
-            <a:pPr>
-              <a:spcAft>
-                <a:spcPts val="1200"/>
+              <a:lnSpc>
+                <a:spcPct val="90000"/>
+              </a:lnSpc>
+              <a:spcAft>
+                <a:spcPts val="300"/>
+              </a:spcAft>
+              <a:defRPr sz="2000"/>
+            </a:pPr>
+          </a:p>
+          <a:p>
+            <a:pPr>
+              <a:lnSpc>
+                <a:spcPct val="90000"/>
+              </a:lnSpc>
+              <a:spcAft>
+                <a:spcPts val="300"/>
               </a:spcAft>
               <a:defRPr sz="2000" b="1"/>
             </a:pPr>
             <a:r>
-              <a:rPr sz="1400"/>
+              <a:rPr sz="1300"/>
               <a:t>✅ Analiz Soruları:</a:t>
             </a:r>
           </a:p>
           <a:p>
             <a:pPr lvl="1">
-              <a:spcAft>
-                <a:spcPts val="1200"/>
-              </a:spcAft>
-              <a:defRPr sz="1800"/>
-            </a:pPr>
-            <a:r>
-              <a:rPr sz="1400"/>
+              <a:lnSpc>
+                <a:spcPct val="90000"/>
+              </a:lnSpc>
+              <a:spcAft>
+                <a:spcPts val="300"/>
+              </a:spcAft>
+              <a:defRPr sz="1800"/>
+            </a:pPr>
+            <a:r>
+              <a:rPr sz="1300"/>
               <a:t>    • En yüksek değer nedir?</a:t>
             </a:r>
           </a:p>
           <a:p>
             <a:pPr lvl="1">
-              <a:spcAft>
-                <a:spcPts val="1200"/>
-              </a:spcAft>
-              <a:defRPr sz="1800"/>
-            </a:pPr>
-            <a:r>
-              <a:rPr sz="1400"/>
+              <a:lnSpc>
+                <a:spcPct val="90000"/>
+              </a:lnSpc>
+              <a:spcAft>
+                <a:spcPts val="300"/>
+              </a:spcAft>
+              <a:defRPr sz="1800"/>
+            </a:pPr>
+            <a:r>
+              <a:rPr sz="1300"/>
               <a:t>    • En düşük değer nedir?</a:t>
             </a:r>
           </a:p>
           <a:p>
             <a:pPr lvl="1">
-              <a:spcAft>
-                <a:spcPts val="1200"/>
-              </a:spcAft>
-              <a:defRPr sz="1800"/>
-            </a:pPr>
-            <a:r>
-              <a:rPr sz="1400"/>
+              <a:lnSpc>
+                <a:spcPct val="90000"/>
+              </a:lnSpc>
+              <a:spcAft>
+                <a:spcPts val="300"/>
+              </a:spcAft>
+              <a:defRPr sz="1800"/>
+            </a:pPr>
+            <a:r>
+              <a:rPr sz="1300"/>
               <a:t>    • Ortalama nedir?</a:t>
             </a:r>
           </a:p>
           <a:p>
             <a:pPr lvl="1">
-              <a:spcAft>
-                <a:spcPts val="1200"/>
-              </a:spcAft>
-              <a:defRPr sz="1800"/>
-            </a:pPr>
-            <a:r>
-              <a:rPr sz="1400"/>
+              <a:lnSpc>
+                <a:spcPct val="90000"/>
+              </a:lnSpc>
+              <a:spcAft>
+                <a:spcPts val="300"/>
+              </a:spcAft>
+              <a:defRPr sz="1800"/>
+            </a:pPr>
+            <a:r>
+              <a:rPr sz="1300"/>
               <a:t>    • Bir kalıp var mı?</a:t>
             </a:r>
           </a:p>
           <a:p>
             <a:pPr lvl="1">
-              <a:spcAft>
-                <a:spcPts val="1200"/>
-              </a:spcAft>
-              <a:defRPr sz="1800"/>
-            </a:pPr>
-            <a:r>
-              <a:rPr sz="1400"/>
+              <a:lnSpc>
+                <a:spcPct val="90000"/>
+              </a:lnSpc>
+              <a:spcAft>
+                <a:spcPts val="300"/>
+              </a:spcAft>
+              <a:defRPr sz="1800"/>
+            </a:pPr>
+            <a:r>
+              <a:rPr sz="1300"/>
               <a:t>    • İlişki var mı?</a:t>
             </a:r>
           </a:p>
           <a:p>
             <a:pPr>
-              <a:spcAft>
-                <a:spcPts val="1200"/>
-              </a:spcAft>
-              <a:defRPr sz="2000"/>
-            </a:pPr>
-          </a:p>
-          <a:p>
-            <a:pPr>
-              <a:spcAft>
-                <a:spcPts val="1200"/>
+              <a:lnSpc>
+                <a:spcPct val="90000"/>
+              </a:lnSpc>
+              <a:spcAft>
+                <a:spcPts val="300"/>
+              </a:spcAft>
+              <a:defRPr sz="2000"/>
+            </a:pPr>
+          </a:p>
+          <a:p>
+            <a:pPr>
+              <a:lnSpc>
+                <a:spcPct val="90000"/>
+              </a:lnSpc>
+              <a:spcAft>
+                <a:spcPts val="300"/>
               </a:spcAft>
               <a:defRPr sz="2000" b="1"/>
             </a:pPr>
             <a:r>
-              <a:rPr sz="1400"/>
+              <a:rPr sz="1300"/>
               <a:t>📌 Merkezi Eğilim Ölçüleri:</a:t>
             </a:r>
           </a:p>
           <a:p>
             <a:pPr>
-              <a:spcAft>
-                <a:spcPts val="1200"/>
-              </a:spcAft>
-              <a:defRPr sz="2000"/>
-            </a:pPr>
-          </a:p>
-          <a:p>
-            <a:pPr>
-              <a:spcAft>
-                <a:spcPts val="1200"/>
-              </a:spcAft>
-              <a:defRPr sz="2000"/>
-            </a:pPr>
-            <a:r>
-              <a:rPr sz="1400"/>
+              <a:lnSpc>
+                <a:spcPct val="90000"/>
+              </a:lnSpc>
+              <a:spcAft>
+                <a:spcPts val="300"/>
+              </a:spcAft>
+              <a:defRPr sz="2000"/>
+            </a:pPr>
+          </a:p>
+          <a:p>
+            <a:pPr>
+              <a:lnSpc>
+                <a:spcPct val="90000"/>
+              </a:lnSpc>
+              <a:spcAft>
+                <a:spcPts val="300"/>
+              </a:spcAft>
+              <a:defRPr sz="2000"/>
+            </a:pPr>
+            <a:r>
+              <a:rPr sz="1300"/>
               <a:t>📊 Ortalama (Mean):</a:t>
             </a:r>
           </a:p>
           <a:p>
             <a:pPr lvl="1">
-              <a:spcAft>
-                <a:spcPts val="1200"/>
-              </a:spcAft>
-              <a:defRPr sz="1800"/>
-            </a:pPr>
-            <a:r>
-              <a:rPr sz="1400"/>
+              <a:lnSpc>
+                <a:spcPct val="90000"/>
+              </a:lnSpc>
+              <a:spcAft>
+                <a:spcPts val="300"/>
+              </a:spcAft>
+              <a:defRPr sz="1800"/>
+            </a:pPr>
+            <a:r>
+              <a:rPr sz="1300"/>
               <a:t>    • Tüm değerleri topla, sayıya böl</a:t>
             </a:r>
           </a:p>
           <a:p>
             <a:pPr lvl="1">
-              <a:spcAft>
-                <a:spcPts val="1200"/>
-              </a:spcAft>
-              <a:defRPr sz="1800"/>
-            </a:pPr>
-            <a:r>
-              <a:rPr sz="1400"/>
+              <a:lnSpc>
+                <a:spcPct val="90000"/>
+              </a:lnSpc>
+              <a:spcAft>
+                <a:spcPts val="300"/>
+              </a:spcAft>
+              <a:defRPr sz="1800"/>
+            </a:pPr>
+            <a:r>
+              <a:rPr sz="1300"/>
               <a:t>    • Örnek: (10+20+30)/3 = 20</a:t>
             </a:r>
           </a:p>
           <a:p>
             <a:pPr>
-              <a:spcAft>
-                <a:spcPts val="1200"/>
-              </a:spcAft>
-              <a:defRPr sz="2000"/>
-            </a:pPr>
-          </a:p>
-          <a:p>
-            <a:pPr>
-              <a:spcAft>
-                <a:spcPts val="1200"/>
-              </a:spcAft>
-              <a:defRPr sz="2000"/>
-            </a:pPr>
-            <a:r>
-              <a:rPr sz="1400"/>
+              <a:lnSpc>
+                <a:spcPct val="90000"/>
+              </a:lnSpc>
+              <a:spcAft>
+                <a:spcPts val="300"/>
+              </a:spcAft>
+              <a:defRPr sz="2000"/>
+            </a:pPr>
+          </a:p>
+          <a:p>
+            <a:pPr>
+              <a:lnSpc>
+                <a:spcPct val="90000"/>
+              </a:lnSpc>
+              <a:spcAft>
+                <a:spcPts val="300"/>
+              </a:spcAft>
+              <a:defRPr sz="2000"/>
+            </a:pPr>
+            <a:r>
+              <a:rPr sz="1300"/>
               <a:t>📊 Medyan (Median):</a:t>
             </a:r>
           </a:p>
           <a:p>
             <a:pPr lvl="1">
-              <a:spcAft>
-                <a:spcPts val="1200"/>
-              </a:spcAft>
-              <a:defRPr sz="1800"/>
-            </a:pPr>
-            <a:r>
-              <a:rPr sz="1400"/>
+              <a:lnSpc>
+                <a:spcPct val="90000"/>
+              </a:lnSpc>
+              <a:spcAft>
+                <a:spcPts val="300"/>
+              </a:spcAft>
+              <a:defRPr sz="1800"/>
+            </a:pPr>
+            <a:r>
+              <a:rPr sz="1300"/>
               <a:t>    • Ortadaki değer</a:t>
             </a:r>
           </a:p>
           <a:p>
             <a:pPr lvl="1">
-              <a:spcAft>
-                <a:spcPts val="1200"/>
-              </a:spcAft>
-              <a:defRPr sz="1800"/>
-            </a:pPr>
-            <a:r>
-              <a:rPr sz="1400"/>
+              <a:lnSpc>
+                <a:spcPct val="90000"/>
+              </a:lnSpc>
+              <a:spcAft>
+                <a:spcPts val="300"/>
+              </a:spcAft>
+              <a:defRPr sz="1800"/>
+            </a:pPr>
+            <a:r>
+              <a:rPr sz="1300"/>
               <a:t>    • Örnek: 10, 15, 20 → Medyan: 15</a:t>
             </a:r>
           </a:p>
           <a:p>
             <a:pPr>
-              <a:spcAft>
-                <a:spcPts val="1200"/>
-              </a:spcAft>
-              <a:defRPr sz="2000"/>
-            </a:pPr>
-          </a:p>
-          <a:p>
-            <a:pPr>
-              <a:spcAft>
-                <a:spcPts val="1200"/>
-              </a:spcAft>
-              <a:defRPr sz="2000"/>
-            </a:pPr>
-            <a:r>
-              <a:rPr sz="1400"/>
+              <a:lnSpc>
+                <a:spcPct val="90000"/>
+              </a:lnSpc>
+              <a:spcAft>
+                <a:spcPts val="300"/>
+              </a:spcAft>
+              <a:defRPr sz="2000"/>
+            </a:pPr>
+          </a:p>
+          <a:p>
+            <a:pPr>
+              <a:lnSpc>
+                <a:spcPct val="90000"/>
+              </a:lnSpc>
+              <a:spcAft>
+                <a:spcPts val="300"/>
+              </a:spcAft>
+              <a:defRPr sz="2000"/>
+            </a:pPr>
+            <a:r>
+              <a:rPr sz="1300"/>
               <a:t>📊 Mod (Mode):</a:t>
             </a:r>
           </a:p>
           <a:p>
             <a:pPr lvl="1">
-              <a:spcAft>
-                <a:spcPts val="1200"/>
-              </a:spcAft>
-              <a:defRPr sz="1800"/>
-            </a:pPr>
-            <a:r>
-              <a:rPr sz="1400"/>
+              <a:lnSpc>
+                <a:spcPct val="90000"/>
+              </a:lnSpc>
+              <a:spcAft>
+                <a:spcPts val="300"/>
+              </a:spcAft>
+              <a:defRPr sz="1800"/>
+            </a:pPr>
+            <a:r>
+              <a:rPr sz="1300"/>
               <a:t>    • En çok tekrar eden</a:t>
             </a:r>
           </a:p>
           <a:p>
             <a:pPr lvl="1">
-              <a:spcAft>
-                <a:spcPts val="1200"/>
-              </a:spcAft>
-              <a:defRPr sz="1800"/>
-            </a:pPr>
-            <a:r>
-              <a:rPr sz="1400"/>
+              <a:lnSpc>
+                <a:spcPct val="90000"/>
+              </a:lnSpc>
+              <a:spcAft>
+                <a:spcPts val="300"/>
+              </a:spcAft>
+              <a:defRPr sz="1800"/>
+            </a:pPr>
+            <a:r>
+              <a:rPr sz="1300"/>
               <a:t>    • Örnek: 5, 5, 7, 9 → Mod: 5</a:t>
             </a:r>
           </a:p>
           <a:p>
             <a:pPr>
-              <a:spcAft>
-                <a:spcPts val="1200"/>
-              </a:spcAft>
-              <a:defRPr sz="2000"/>
-            </a:pPr>
-          </a:p>
-          <a:p>
-            <a:pPr>
-              <a:spcAft>
-                <a:spcPts val="1200"/>
+              <a:lnSpc>
+                <a:spcPct val="90000"/>
+              </a:lnSpc>
+              <a:spcAft>
+                <a:spcPts val="300"/>
+              </a:spcAft>
+              <a:defRPr sz="2000"/>
+            </a:pPr>
+          </a:p>
+          <a:p>
+            <a:pPr>
+              <a:lnSpc>
+                <a:spcPct val="90000"/>
+              </a:lnSpc>
+              <a:spcAft>
+                <a:spcPts val="300"/>
               </a:spcAft>
               <a:defRPr sz="2000" b="1"/>
             </a:pPr>
             <a:r>
-              <a:rPr sz="1400"/>
+              <a:rPr sz="1300"/>
               <a:t>💡 Hangisini Kullan?</a:t>
             </a:r>
           </a:p>
           <a:p>
             <a:pPr lvl="1">
-              <a:spcAft>
-                <a:spcPts val="1200"/>
-              </a:spcAft>
-              <a:defRPr sz="1800"/>
-            </a:pPr>
-            <a:r>
-              <a:rPr sz="1400"/>
+              <a:lnSpc>
+                <a:spcPct val="90000"/>
+              </a:lnSpc>
+              <a:spcAft>
+                <a:spcPts val="300"/>
+              </a:spcAft>
+              <a:defRPr sz="1800"/>
+            </a:pPr>
+            <a:r>
+              <a:rPr sz="1300"/>
               <a:t>    • Genelde → Ortalama</a:t>
             </a:r>
           </a:p>
           <a:p>
             <a:pPr lvl="1">
-              <a:spcAft>
-                <a:spcPts val="1200"/>
-              </a:spcAft>
-              <a:defRPr sz="1800"/>
-            </a:pPr>
-            <a:r>
-              <a:rPr sz="1400"/>
+              <a:lnSpc>
+                <a:spcPct val="90000"/>
+              </a:lnSpc>
+              <a:spcAft>
+                <a:spcPts val="300"/>
+              </a:spcAft>
+              <a:defRPr sz="1800"/>
+            </a:pPr>
+            <a:r>
+              <a:rPr sz="1300"/>
               <a:t>    • Aşırı değerler varsa → Medyan</a:t>
             </a:r>
           </a:p>
           <a:p>
             <a:pPr lvl="1">
-              <a:spcAft>
-                <a:spcPts val="1200"/>
-              </a:spcAft>
-              <a:defRPr sz="1800"/>
-            </a:pPr>
-            <a:r>
-              <a:rPr sz="1400"/>
+              <a:lnSpc>
+                <a:spcPct val="90000"/>
+              </a:lnSpc>
+              <a:spcAft>
+                <a:spcPts val="300"/>
+              </a:spcAft>
+              <a:defRPr sz="1800"/>
+            </a:pPr>
+            <a:r>
+              <a:rPr sz="1300"/>
               <a:t>    • Sıklık önemliyse → Mod</a:t>
             </a:r>
           </a:p>
@@ -6870,7 +7152,7 @@
         </p:nvSpPr>
         <p:spPr/>
         <p:txBody>
-          <a:bodyPr/>
+          <a:bodyPr wrap="square"/>
           <a:lstStyle/>
           <a:p>
             <a:pPr>
@@ -6924,312 +7206,405 @@
             <a:spAutoFit/>
           </a:bodyPr>
           <a:lstStyle/>
-          <a:p/>
-          <a:p>
-            <a:pPr>
-              <a:spcAft>
-                <a:spcPts val="1200"/>
-              </a:spcAft>
-              <a:defRPr sz="2000"/>
-            </a:pPr>
-            <a:r>
-              <a:rPr sz="1400"/>
+          <a:p>
+            <a:pPr>
+              <a:lnSpc>
+                <a:spcPct val="90000"/>
+              </a:lnSpc>
+              <a:spcAft>
+                <a:spcPts val="300"/>
+              </a:spcAft>
+            </a:pPr>
+          </a:p>
+          <a:p>
+            <a:pPr>
+              <a:lnSpc>
+                <a:spcPct val="90000"/>
+              </a:lnSpc>
+              <a:spcAft>
+                <a:spcPts val="300"/>
+              </a:spcAft>
+              <a:defRPr sz="2000"/>
+            </a:pPr>
+            <a:r>
+              <a:rPr sz="1300"/>
               <a:t>Veriye dayalı kararlar daha sağlıklı!</a:t>
             </a:r>
           </a:p>
           <a:p>
             <a:pPr>
-              <a:spcAft>
-                <a:spcPts val="1200"/>
-              </a:spcAft>
-              <a:defRPr sz="2000"/>
-            </a:pPr>
-          </a:p>
-          <a:p>
-            <a:pPr>
-              <a:spcAft>
-                <a:spcPts val="1200"/>
+              <a:lnSpc>
+                <a:spcPct val="90000"/>
+              </a:lnSpc>
+              <a:spcAft>
+                <a:spcPts val="300"/>
+              </a:spcAft>
+              <a:defRPr sz="2000"/>
+            </a:pPr>
+          </a:p>
+          <a:p>
+            <a:pPr>
+              <a:lnSpc>
+                <a:spcPct val="90000"/>
+              </a:lnSpc>
+              <a:spcAft>
+                <a:spcPts val="300"/>
               </a:spcAft>
               <a:defRPr sz="2000" b="1"/>
             </a:pPr>
             <a:r>
-              <a:rPr sz="1400"/>
+              <a:rPr sz="1300"/>
               <a:t>✅ Veri Odaklı Karar Örneği:</a:t>
             </a:r>
           </a:p>
           <a:p>
             <a:pPr>
-              <a:spcAft>
-                <a:spcPts val="1200"/>
-              </a:spcAft>
-              <a:defRPr sz="2000"/>
-            </a:pPr>
-          </a:p>
-          <a:p>
-            <a:pPr>
-              <a:spcAft>
-                <a:spcPts val="1200"/>
+              <a:lnSpc>
+                <a:spcPct val="90000"/>
+              </a:lnSpc>
+              <a:spcAft>
+                <a:spcPts val="300"/>
+              </a:spcAft>
+              <a:defRPr sz="2000"/>
+            </a:pPr>
+          </a:p>
+          <a:p>
+            <a:pPr>
+              <a:lnSpc>
+                <a:spcPct val="90000"/>
+              </a:lnSpc>
+              <a:spcAft>
+                <a:spcPts val="300"/>
               </a:spcAft>
               <a:defRPr sz="2000" b="1"/>
             </a:pPr>
             <a:r>
-              <a:rPr sz="1400"/>
+              <a:rPr sz="1300"/>
               <a:t>📌 Problem:</a:t>
             </a:r>
           </a:p>
           <a:p>
             <a:pPr>
-              <a:spcAft>
-                <a:spcPts val="1200"/>
-              </a:spcAft>
-              <a:defRPr sz="2000"/>
-            </a:pPr>
-            <a:r>
-              <a:rPr sz="1400"/>
+              <a:lnSpc>
+                <a:spcPct val="90000"/>
+              </a:lnSpc>
+              <a:spcAft>
+                <a:spcPts val="300"/>
+              </a:spcAft>
+              <a:defRPr sz="2000"/>
+            </a:pPr>
+            <a:r>
+              <a:rPr sz="1300"/>
               <a:t>Okul kütüphanesine hangi kitapları alalım?</a:t>
             </a:r>
           </a:p>
           <a:p>
             <a:pPr>
-              <a:spcAft>
-                <a:spcPts val="1200"/>
-              </a:spcAft>
-              <a:defRPr sz="2000"/>
-            </a:pPr>
-          </a:p>
-          <a:p>
-            <a:pPr>
-              <a:spcAft>
-                <a:spcPts val="1200"/>
-              </a:spcAft>
-              <a:defRPr sz="2000"/>
-            </a:pPr>
-            <a:r>
-              <a:rPr sz="1400"/>
+              <a:lnSpc>
+                <a:spcPct val="90000"/>
+              </a:lnSpc>
+              <a:spcAft>
+                <a:spcPts val="300"/>
+              </a:spcAft>
+              <a:defRPr sz="2000"/>
+            </a:pPr>
+          </a:p>
+          <a:p>
+            <a:pPr>
+              <a:lnSpc>
+                <a:spcPct val="90000"/>
+              </a:lnSpc>
+              <a:spcAft>
+                <a:spcPts val="300"/>
+              </a:spcAft>
+              <a:defRPr sz="2000"/>
+            </a:pPr>
+            <a:r>
+              <a:rPr sz="1300"/>
               <a:t>📊 Veri Toplama:</a:t>
             </a:r>
           </a:p>
           <a:p>
             <a:pPr lvl="1">
-              <a:spcAft>
-                <a:spcPts val="1200"/>
-              </a:spcAft>
-              <a:defRPr sz="1800"/>
-            </a:pPr>
-            <a:r>
-              <a:rPr sz="1400"/>
+              <a:lnSpc>
+                <a:spcPct val="90000"/>
+              </a:lnSpc>
+              <a:spcAft>
+                <a:spcPts val="300"/>
+              </a:spcAft>
+              <a:defRPr sz="1800"/>
+            </a:pPr>
+            <a:r>
+              <a:rPr sz="1300"/>
               <a:t>    • Anket: En sevilen kitap türü?</a:t>
             </a:r>
           </a:p>
           <a:p>
             <a:pPr lvl="1">
-              <a:spcAft>
-                <a:spcPts val="1200"/>
-              </a:spcAft>
-              <a:defRPr sz="1800"/>
-            </a:pPr>
-            <a:r>
-              <a:rPr sz="1400"/>
+              <a:lnSpc>
+                <a:spcPct val="90000"/>
+              </a:lnSpc>
+              <a:spcAft>
+                <a:spcPts val="300"/>
+              </a:spcAft>
+              <a:defRPr sz="1800"/>
+            </a:pPr>
+            <a:r>
+              <a:rPr sz="1300"/>
               <a:t>    • Gözlem: Hangi kitaplar çok ödünç alınıyor?</a:t>
             </a:r>
           </a:p>
           <a:p>
             <a:pPr lvl="1">
-              <a:spcAft>
-                <a:spcPts val="1200"/>
-              </a:spcAft>
-              <a:defRPr sz="1800"/>
-            </a:pPr>
-            <a:r>
-              <a:rPr sz="1400"/>
+              <a:lnSpc>
+                <a:spcPct val="90000"/>
+              </a:lnSpc>
+              <a:spcAft>
+                <a:spcPts val="300"/>
+              </a:spcAft>
+              <a:defRPr sz="1800"/>
+            </a:pPr>
+            <a:r>
+              <a:rPr sz="1300"/>
               <a:t>    • Kayıt: Rafta eksik ne var?</a:t>
             </a:r>
           </a:p>
           <a:p>
             <a:pPr>
-              <a:spcAft>
-                <a:spcPts val="1200"/>
-              </a:spcAft>
-              <a:defRPr sz="2000"/>
-            </a:pPr>
-          </a:p>
-          <a:p>
-            <a:pPr>
-              <a:spcAft>
-                <a:spcPts val="1200"/>
-              </a:spcAft>
-              <a:defRPr sz="2000"/>
-            </a:pPr>
-            <a:r>
-              <a:rPr sz="1400"/>
+              <a:lnSpc>
+                <a:spcPct val="90000"/>
+              </a:lnSpc>
+              <a:spcAft>
+                <a:spcPts val="300"/>
+              </a:spcAft>
+              <a:defRPr sz="2000"/>
+            </a:pPr>
+          </a:p>
+          <a:p>
+            <a:pPr>
+              <a:lnSpc>
+                <a:spcPct val="90000"/>
+              </a:lnSpc>
+              <a:spcAft>
+                <a:spcPts val="300"/>
+              </a:spcAft>
+              <a:defRPr sz="2000"/>
+            </a:pPr>
+            <a:r>
+              <a:rPr sz="1300"/>
               <a:t>📈 Analiz:</a:t>
             </a:r>
           </a:p>
           <a:p>
             <a:pPr lvl="1">
-              <a:spcAft>
-                <a:spcPts val="1200"/>
-              </a:spcAft>
-              <a:defRPr sz="1800"/>
-            </a:pPr>
-            <a:r>
-              <a:rPr sz="1400"/>
+              <a:lnSpc>
+                <a:spcPct val="90000"/>
+              </a:lnSpc>
+              <a:spcAft>
+                <a:spcPts val="300"/>
+              </a:spcAft>
+              <a:defRPr sz="1800"/>
+            </a:pPr>
+            <a:r>
+              <a:rPr sz="1300"/>
               <a:t>    • %40 macera</a:t>
             </a:r>
           </a:p>
           <a:p>
             <a:pPr lvl="1">
-              <a:spcAft>
-                <a:spcPts val="1200"/>
-              </a:spcAft>
-              <a:defRPr sz="1800"/>
-            </a:pPr>
-            <a:r>
-              <a:rPr sz="1400"/>
+              <a:lnSpc>
+                <a:spcPct val="90000"/>
+              </a:lnSpc>
+              <a:spcAft>
+                <a:spcPts val="300"/>
+              </a:spcAft>
+              <a:defRPr sz="1800"/>
+            </a:pPr>
+            <a:r>
+              <a:rPr sz="1300"/>
               <a:t>    • %30 bilim kurgu</a:t>
             </a:r>
           </a:p>
           <a:p>
             <a:pPr lvl="1">
-              <a:spcAft>
-                <a:spcPts val="1200"/>
-              </a:spcAft>
-              <a:defRPr sz="1800"/>
-            </a:pPr>
-            <a:r>
-              <a:rPr sz="1400"/>
+              <a:lnSpc>
+                <a:spcPct val="90000"/>
+              </a:lnSpc>
+              <a:spcAft>
+                <a:spcPts val="300"/>
+              </a:spcAft>
+              <a:defRPr sz="1800"/>
+            </a:pPr>
+            <a:r>
+              <a:rPr sz="1300"/>
               <a:t>    • %20 roman</a:t>
             </a:r>
           </a:p>
           <a:p>
             <a:pPr lvl="1">
-              <a:spcAft>
-                <a:spcPts val="1200"/>
-              </a:spcAft>
-              <a:defRPr sz="1800"/>
-            </a:pPr>
-            <a:r>
-              <a:rPr sz="1400"/>
+              <a:lnSpc>
+                <a:spcPct val="90000"/>
+              </a:lnSpc>
+              <a:spcAft>
+                <a:spcPts val="300"/>
+              </a:spcAft>
+              <a:defRPr sz="1800"/>
+            </a:pPr>
+            <a:r>
+              <a:rPr sz="1300"/>
               <a:t>    • %10 diğer</a:t>
             </a:r>
           </a:p>
           <a:p>
             <a:pPr>
-              <a:spcAft>
-                <a:spcPts val="1200"/>
-              </a:spcAft>
-              <a:defRPr sz="2000"/>
-            </a:pPr>
-          </a:p>
-          <a:p>
-            <a:pPr>
-              <a:spcAft>
-                <a:spcPts val="1200"/>
+              <a:lnSpc>
+                <a:spcPct val="90000"/>
+              </a:lnSpc>
+              <a:spcAft>
+                <a:spcPts val="300"/>
+              </a:spcAft>
+              <a:defRPr sz="2000"/>
+            </a:pPr>
+          </a:p>
+          <a:p>
+            <a:pPr>
+              <a:lnSpc>
+                <a:spcPct val="90000"/>
+              </a:lnSpc>
+              <a:spcAft>
+                <a:spcPts val="300"/>
               </a:spcAft>
               <a:defRPr sz="2000" b="1"/>
             </a:pPr>
             <a:r>
-              <a:rPr sz="1400"/>
+              <a:rPr sz="1300"/>
               <a:t>✅ Karar:</a:t>
             </a:r>
           </a:p>
           <a:p>
             <a:pPr>
-              <a:spcAft>
-                <a:spcPts val="1200"/>
-              </a:spcAft>
-              <a:defRPr sz="2000"/>
-            </a:pPr>
-            <a:r>
-              <a:rPr sz="1400"/>
+              <a:lnSpc>
+                <a:spcPct val="90000"/>
+              </a:lnSpc>
+              <a:spcAft>
+                <a:spcPts val="300"/>
+              </a:spcAft>
+              <a:defRPr sz="2000"/>
+            </a:pPr>
+            <a:r>
+              <a:rPr sz="1300"/>
               <a:t>Yeni kitapların %40'ı macera olsun!</a:t>
             </a:r>
           </a:p>
           <a:p>
             <a:pPr>
-              <a:spcAft>
-                <a:spcPts val="1200"/>
-              </a:spcAft>
-              <a:defRPr sz="2000"/>
-            </a:pPr>
-          </a:p>
-          <a:p>
-            <a:pPr>
-              <a:spcAft>
-                <a:spcPts val="1200"/>
+              <a:lnSpc>
+                <a:spcPct val="90000"/>
+              </a:lnSpc>
+              <a:spcAft>
+                <a:spcPts val="300"/>
+              </a:spcAft>
+              <a:defRPr sz="2000"/>
+            </a:pPr>
+          </a:p>
+          <a:p>
+            <a:pPr>
+              <a:lnSpc>
+                <a:spcPct val="90000"/>
+              </a:lnSpc>
+              <a:spcAft>
+                <a:spcPts val="300"/>
               </a:spcAft>
               <a:defRPr sz="2000" b="1"/>
             </a:pPr>
             <a:r>
-              <a:rPr sz="1400"/>
+              <a:rPr sz="1300"/>
               <a:t>💡 Veriye dayalı karar:</a:t>
             </a:r>
           </a:p>
           <a:p>
             <a:pPr lvl="1">
-              <a:spcAft>
-                <a:spcPts val="1200"/>
-              </a:spcAft>
-              <a:defRPr sz="1800"/>
-            </a:pPr>
-            <a:r>
-              <a:rPr sz="1400"/>
+              <a:lnSpc>
+                <a:spcPct val="90000"/>
+              </a:lnSpc>
+              <a:spcAft>
+                <a:spcPts val="300"/>
+              </a:spcAft>
+              <a:defRPr sz="1800"/>
+            </a:pPr>
+            <a:r>
+              <a:rPr sz="1300"/>
               <a:t>    • Objektif (tarafsız)</a:t>
             </a:r>
           </a:p>
           <a:p>
             <a:pPr lvl="1">
-              <a:spcAft>
-                <a:spcPts val="1200"/>
-              </a:spcAft>
-              <a:defRPr sz="1800"/>
-            </a:pPr>
-            <a:r>
-              <a:rPr sz="1400"/>
+              <a:lnSpc>
+                <a:spcPct val="90000"/>
+              </a:lnSpc>
+              <a:spcAft>
+                <a:spcPts val="300"/>
+              </a:spcAft>
+              <a:defRPr sz="1800"/>
+            </a:pPr>
+            <a:r>
+              <a:rPr sz="1300"/>
               <a:t>    • Kanıta dayalı</a:t>
             </a:r>
           </a:p>
           <a:p>
             <a:pPr lvl="1">
-              <a:spcAft>
-                <a:spcPts val="1200"/>
-              </a:spcAft>
-              <a:defRPr sz="1800"/>
-            </a:pPr>
-            <a:r>
-              <a:rPr sz="1400"/>
+              <a:lnSpc>
+                <a:spcPct val="90000"/>
+              </a:lnSpc>
+              <a:spcAft>
+                <a:spcPts val="300"/>
+              </a:spcAft>
+              <a:defRPr sz="1800"/>
+            </a:pPr>
+            <a:r>
+              <a:rPr sz="1300"/>
               <a:t>    • Savunulabilir</a:t>
             </a:r>
           </a:p>
           <a:p>
             <a:pPr>
-              <a:spcAft>
-                <a:spcPts val="1200"/>
-              </a:spcAft>
-              <a:defRPr sz="2000"/>
-            </a:pPr>
-          </a:p>
-          <a:p>
-            <a:pPr>
-              <a:spcAft>
-                <a:spcPts val="1200"/>
-              </a:spcAft>
-              <a:defRPr sz="2000"/>
-            </a:pPr>
-            <a:r>
-              <a:rPr sz="1400"/>
+              <a:lnSpc>
+                <a:spcPct val="90000"/>
+              </a:lnSpc>
+              <a:spcAft>
+                <a:spcPts val="300"/>
+              </a:spcAft>
+              <a:defRPr sz="2000"/>
+            </a:pPr>
+          </a:p>
+          <a:p>
+            <a:pPr>
+              <a:lnSpc>
+                <a:spcPct val="90000"/>
+              </a:lnSpc>
+              <a:spcAft>
+                <a:spcPts val="300"/>
+              </a:spcAft>
+              <a:defRPr sz="2000"/>
+            </a:pPr>
+            <a:r>
+              <a:rPr sz="1300"/>
               <a:t>⚠️ Dikkat:</a:t>
             </a:r>
           </a:p>
           <a:p>
             <a:pPr>
-              <a:spcAft>
-                <a:spcPts val="1200"/>
-              </a:spcAft>
-              <a:defRPr sz="2000"/>
-            </a:pPr>
-            <a:r>
-              <a:rPr sz="1400"/>
+              <a:lnSpc>
+                <a:spcPct val="90000"/>
+              </a:lnSpc>
+              <a:spcAft>
+                <a:spcPts val="300"/>
+              </a:spcAft>
+              <a:defRPr sz="2000"/>
+            </a:pPr>
+            <a:r>
+              <a:rPr sz="1300"/>
               <a:t>Veri yanlış veya eksikse, karar da yanlış olur!</a:t>
             </a:r>
           </a:p>
@@ -7265,7 +7640,7 @@
         </p:nvSpPr>
         <p:spPr/>
         <p:txBody>
-          <a:bodyPr/>
+          <a:bodyPr wrap="square"/>
           <a:lstStyle/>
           <a:p>
             <a:pPr>
@@ -7319,320 +7694,416 @@
             <a:spAutoFit/>
           </a:bodyPr>
           <a:lstStyle/>
-          <a:p/>
-          <a:p>
-            <a:pPr>
-              <a:spcAft>
-                <a:spcPts val="1200"/>
-              </a:spcAft>
-              <a:defRPr sz="2000"/>
-            </a:pPr>
-            <a:r>
-              <a:rPr sz="1400"/>
+          <a:p>
+            <a:pPr>
+              <a:lnSpc>
+                <a:spcPct val="90000"/>
+              </a:lnSpc>
+              <a:spcAft>
+                <a:spcPts val="300"/>
+              </a:spcAft>
+            </a:pPr>
+          </a:p>
+          <a:p>
+            <a:pPr>
+              <a:lnSpc>
+                <a:spcPct val="90000"/>
+              </a:lnSpc>
+              <a:spcAft>
+                <a:spcPts val="300"/>
+              </a:spcAft>
+              <a:defRPr sz="2000"/>
+            </a:pPr>
+            <a:r>
+              <a:rPr sz="1300"/>
               <a:t>Veri toplarken/paylaşırken dikkatli ol!</a:t>
             </a:r>
           </a:p>
           <a:p>
             <a:pPr>
-              <a:spcAft>
-                <a:spcPts val="1200"/>
-              </a:spcAft>
-              <a:defRPr sz="2000"/>
-            </a:pPr>
-          </a:p>
-          <a:p>
-            <a:pPr>
-              <a:spcAft>
-                <a:spcPts val="1200"/>
+              <a:lnSpc>
+                <a:spcPct val="90000"/>
+              </a:lnSpc>
+              <a:spcAft>
+                <a:spcPts val="300"/>
+              </a:spcAft>
+              <a:defRPr sz="2000"/>
+            </a:pPr>
+          </a:p>
+          <a:p>
+            <a:pPr>
+              <a:lnSpc>
+                <a:spcPct val="90000"/>
+              </a:lnSpc>
+              <a:spcAft>
+                <a:spcPts val="300"/>
               </a:spcAft>
               <a:defRPr sz="2000" b="1"/>
             </a:pPr>
             <a:r>
-              <a:rPr sz="1400"/>
+              <a:rPr sz="1300"/>
               <a:t>✅ Kişisel Veri Nedir?</a:t>
             </a:r>
           </a:p>
           <a:p>
             <a:pPr lvl="1">
-              <a:spcAft>
-                <a:spcPts val="1200"/>
-              </a:spcAft>
-              <a:defRPr sz="1800"/>
-            </a:pPr>
-            <a:r>
-              <a:rPr sz="1400"/>
+              <a:lnSpc>
+                <a:spcPct val="90000"/>
+              </a:lnSpc>
+              <a:spcAft>
+                <a:spcPts val="300"/>
+              </a:spcAft>
+              <a:defRPr sz="1800"/>
+            </a:pPr>
+            <a:r>
+              <a:rPr sz="1300"/>
               <a:t>    • İsim, soyisim</a:t>
             </a:r>
           </a:p>
           <a:p>
             <a:pPr lvl="1">
-              <a:spcAft>
-                <a:spcPts val="1200"/>
-              </a:spcAft>
-              <a:defRPr sz="1800"/>
-            </a:pPr>
-            <a:r>
-              <a:rPr sz="1400"/>
+              <a:lnSpc>
+                <a:spcPct val="90000"/>
+              </a:lnSpc>
+              <a:spcAft>
+                <a:spcPts val="300"/>
+              </a:spcAft>
+              <a:defRPr sz="1800"/>
+            </a:pPr>
+            <a:r>
+              <a:rPr sz="1300"/>
               <a:t>    • Doğum tarihi</a:t>
             </a:r>
           </a:p>
           <a:p>
             <a:pPr lvl="1">
-              <a:spcAft>
-                <a:spcPts val="1200"/>
-              </a:spcAft>
-              <a:defRPr sz="1800"/>
-            </a:pPr>
-            <a:r>
-              <a:rPr sz="1400"/>
+              <a:lnSpc>
+                <a:spcPct val="90000"/>
+              </a:lnSpc>
+              <a:spcAft>
+                <a:spcPts val="300"/>
+              </a:spcAft>
+              <a:defRPr sz="1800"/>
+            </a:pPr>
+            <a:r>
+              <a:rPr sz="1300"/>
               <a:t>    • Adres, telefon</a:t>
             </a:r>
           </a:p>
           <a:p>
             <a:pPr lvl="1">
-              <a:spcAft>
-                <a:spcPts val="1200"/>
-              </a:spcAft>
-              <a:defRPr sz="1800"/>
-            </a:pPr>
-            <a:r>
-              <a:rPr sz="1400"/>
+              <a:lnSpc>
+                <a:spcPct val="90000"/>
+              </a:lnSpc>
+              <a:spcAft>
+                <a:spcPts val="300"/>
+              </a:spcAft>
+              <a:defRPr sz="1800"/>
+            </a:pPr>
+            <a:r>
+              <a:rPr sz="1300"/>
               <a:t>    • Fotoğraflar</a:t>
             </a:r>
           </a:p>
           <a:p>
             <a:pPr lvl="1">
-              <a:spcAft>
-                <a:spcPts val="1200"/>
-              </a:spcAft>
-              <a:defRPr sz="1800"/>
-            </a:pPr>
-            <a:r>
-              <a:rPr sz="1400"/>
+              <a:lnSpc>
+                <a:spcPct val="90000"/>
+              </a:lnSpc>
+              <a:spcAft>
+                <a:spcPts val="300"/>
+              </a:spcAft>
+              <a:defRPr sz="1800"/>
+            </a:pPr>
+            <a:r>
+              <a:rPr sz="1300"/>
               <a:t>    • Sağlık bilgileri</a:t>
             </a:r>
           </a:p>
           <a:p>
             <a:pPr>
-              <a:spcAft>
-                <a:spcPts val="1200"/>
-              </a:spcAft>
-              <a:defRPr sz="2000"/>
-            </a:pPr>
-          </a:p>
-          <a:p>
-            <a:pPr>
-              <a:spcAft>
-                <a:spcPts val="1200"/>
+              <a:lnSpc>
+                <a:spcPct val="90000"/>
+              </a:lnSpc>
+              <a:spcAft>
+                <a:spcPts val="300"/>
+              </a:spcAft>
+              <a:defRPr sz="2000"/>
+            </a:pPr>
+          </a:p>
+          <a:p>
+            <a:pPr>
+              <a:lnSpc>
+                <a:spcPct val="90000"/>
+              </a:lnSpc>
+              <a:spcAft>
+                <a:spcPts val="300"/>
               </a:spcAft>
               <a:defRPr sz="2000" b="1"/>
             </a:pPr>
             <a:r>
-              <a:rPr sz="1400"/>
+              <a:rPr sz="1300"/>
               <a:t>📌 Veri Toplama Etik Kuralları:</a:t>
             </a:r>
           </a:p>
           <a:p>
             <a:pPr>
-              <a:spcAft>
-                <a:spcPts val="1200"/>
-              </a:spcAft>
-              <a:defRPr sz="2000"/>
-            </a:pPr>
-          </a:p>
-          <a:p>
-            <a:pPr>
-              <a:spcAft>
-                <a:spcPts val="1200"/>
-              </a:spcAft>
-              <a:defRPr sz="2000"/>
-            </a:pPr>
-            <a:r>
-              <a:rPr sz="1400"/>
+              <a:lnSpc>
+                <a:spcPct val="90000"/>
+              </a:lnSpc>
+              <a:spcAft>
+                <a:spcPts val="300"/>
+              </a:spcAft>
+              <a:defRPr sz="2000"/>
+            </a:pPr>
+          </a:p>
+          <a:p>
+            <a:pPr>
+              <a:lnSpc>
+                <a:spcPct val="90000"/>
+              </a:lnSpc>
+              <a:spcAft>
+                <a:spcPts val="300"/>
+              </a:spcAft>
+              <a:defRPr sz="2000"/>
+            </a:pPr>
+            <a:r>
+              <a:rPr sz="1300"/>
               <a:t>🔐 İzin Al:</a:t>
             </a:r>
           </a:p>
           <a:p>
             <a:pPr lvl="1">
-              <a:spcAft>
-                <a:spcPts val="1200"/>
-              </a:spcAft>
-              <a:defRPr sz="1800"/>
-            </a:pPr>
-            <a:r>
-              <a:rPr sz="1400"/>
+              <a:lnSpc>
+                <a:spcPct val="90000"/>
+              </a:lnSpc>
+              <a:spcAft>
+                <a:spcPts val="300"/>
+              </a:spcAft>
+              <a:defRPr sz="1800"/>
+            </a:pPr>
+            <a:r>
+              <a:rPr sz="1300"/>
               <a:t>    • Kişilere sor, onay al</a:t>
             </a:r>
           </a:p>
           <a:p>
             <a:pPr>
-              <a:spcAft>
-                <a:spcPts val="1200"/>
-              </a:spcAft>
-              <a:defRPr sz="2000"/>
-            </a:pPr>
-          </a:p>
-          <a:p>
-            <a:pPr>
-              <a:spcAft>
-                <a:spcPts val="1200"/>
-              </a:spcAft>
-              <a:defRPr sz="2000"/>
-            </a:pPr>
-            <a:r>
-              <a:rPr sz="1400"/>
+              <a:lnSpc>
+                <a:spcPct val="90000"/>
+              </a:lnSpc>
+              <a:spcAft>
+                <a:spcPts val="300"/>
+              </a:spcAft>
+              <a:defRPr sz="2000"/>
+            </a:pPr>
+          </a:p>
+          <a:p>
+            <a:pPr>
+              <a:lnSpc>
+                <a:spcPct val="90000"/>
+              </a:lnSpc>
+              <a:spcAft>
+                <a:spcPts val="300"/>
+              </a:spcAft>
+              <a:defRPr sz="2000"/>
+            </a:pPr>
+            <a:r>
+              <a:rPr sz="1300"/>
               <a:t>🔒 Gizli Tut:</a:t>
             </a:r>
           </a:p>
           <a:p>
             <a:pPr lvl="1">
-              <a:spcAft>
-                <a:spcPts val="1200"/>
-              </a:spcAft>
-              <a:defRPr sz="1800"/>
-            </a:pPr>
-            <a:r>
-              <a:rPr sz="1400"/>
+              <a:lnSpc>
+                <a:spcPct val="90000"/>
+              </a:lnSpc>
+              <a:spcAft>
+                <a:spcPts val="300"/>
+              </a:spcAft>
+              <a:defRPr sz="1800"/>
+            </a:pPr>
+            <a:r>
+              <a:rPr sz="1300"/>
               <a:t>    • Kişisel verileri paylaşma</a:t>
             </a:r>
           </a:p>
           <a:p>
             <a:pPr>
-              <a:spcAft>
-                <a:spcPts val="1200"/>
-              </a:spcAft>
-              <a:defRPr sz="2000"/>
-            </a:pPr>
-          </a:p>
-          <a:p>
-            <a:pPr>
-              <a:spcAft>
-                <a:spcPts val="1200"/>
-              </a:spcAft>
-              <a:defRPr sz="2000"/>
-            </a:pPr>
-            <a:r>
-              <a:rPr sz="1400"/>
+              <a:lnSpc>
+                <a:spcPct val="90000"/>
+              </a:lnSpc>
+              <a:spcAft>
+                <a:spcPts val="300"/>
+              </a:spcAft>
+              <a:defRPr sz="2000"/>
+            </a:pPr>
+          </a:p>
+          <a:p>
+            <a:pPr>
+              <a:lnSpc>
+                <a:spcPct val="90000"/>
+              </a:lnSpc>
+              <a:spcAft>
+                <a:spcPts val="300"/>
+              </a:spcAft>
+              <a:defRPr sz="2000"/>
+            </a:pPr>
+            <a:r>
+              <a:rPr sz="1300"/>
               <a:t>📊 Anonim Yap:</a:t>
             </a:r>
           </a:p>
           <a:p>
             <a:pPr lvl="1">
-              <a:spcAft>
-                <a:spcPts val="1200"/>
-              </a:spcAft>
-              <a:defRPr sz="1800"/>
-            </a:pPr>
-            <a:r>
-              <a:rPr sz="1400"/>
+              <a:lnSpc>
+                <a:spcPct val="90000"/>
+              </a:lnSpc>
+              <a:spcAft>
+                <a:spcPts val="300"/>
+              </a:spcAft>
+              <a:defRPr sz="1800"/>
+            </a:pPr>
+            <a:r>
+              <a:rPr sz="1300"/>
               <a:t>    • İsim kullanma, genel göster</a:t>
             </a:r>
           </a:p>
           <a:p>
             <a:pPr lvl="1">
-              <a:spcAft>
-                <a:spcPts val="1200"/>
-              </a:spcAft>
-              <a:defRPr sz="1800"/>
-            </a:pPr>
-            <a:r>
-              <a:rPr sz="1400"/>
+              <a:lnSpc>
+                <a:spcPct val="90000"/>
+              </a:lnSpc>
+              <a:spcAft>
+                <a:spcPts val="300"/>
+              </a:spcAft>
+              <a:defRPr sz="1800"/>
+            </a:pPr>
+            <a:r>
+              <a:rPr sz="1300"/>
               <a:t>    • Örnek: 'Öğrenci 1, Öğrenci 2'</a:t>
             </a:r>
           </a:p>
           <a:p>
             <a:pPr>
-              <a:spcAft>
-                <a:spcPts val="1200"/>
-              </a:spcAft>
-              <a:defRPr sz="2000"/>
-            </a:pPr>
-          </a:p>
-          <a:p>
-            <a:pPr>
-              <a:spcAft>
-                <a:spcPts val="1200"/>
+              <a:lnSpc>
+                <a:spcPct val="90000"/>
+              </a:lnSpc>
+              <a:spcAft>
+                <a:spcPts val="300"/>
+              </a:spcAft>
+              <a:defRPr sz="2000"/>
+            </a:pPr>
+          </a:p>
+          <a:p>
+            <a:pPr>
+              <a:lnSpc>
+                <a:spcPct val="90000"/>
+              </a:lnSpc>
+              <a:spcAft>
+                <a:spcPts val="300"/>
               </a:spcAft>
               <a:defRPr sz="2000" b="1"/>
             </a:pPr>
             <a:r>
-              <a:rPr sz="1400"/>
+              <a:rPr sz="1300"/>
               <a:t>🎯 Amacını Belirt:</a:t>
             </a:r>
           </a:p>
           <a:p>
             <a:pPr lvl="1">
-              <a:spcAft>
-                <a:spcPts val="1200"/>
-              </a:spcAft>
-              <a:defRPr sz="1800"/>
-            </a:pPr>
-            <a:r>
-              <a:rPr sz="1400"/>
+              <a:lnSpc>
+                <a:spcPct val="90000"/>
+              </a:lnSpc>
+              <a:spcAft>
+                <a:spcPts val="300"/>
+              </a:spcAft>
+              <a:defRPr sz="1800"/>
+            </a:pPr>
+            <a:r>
+              <a:rPr sz="1300"/>
               <a:t>    • Veri ne için kullanılacak?</a:t>
             </a:r>
           </a:p>
           <a:p>
             <a:pPr>
-              <a:spcAft>
-                <a:spcPts val="1200"/>
-              </a:spcAft>
-              <a:defRPr sz="2000"/>
-            </a:pPr>
-          </a:p>
-          <a:p>
-            <a:pPr>
-              <a:spcAft>
-                <a:spcPts val="1200"/>
-              </a:spcAft>
-              <a:defRPr sz="2000"/>
-            </a:pPr>
-            <a:r>
-              <a:rPr sz="1400"/>
+              <a:lnSpc>
+                <a:spcPct val="90000"/>
+              </a:lnSpc>
+              <a:spcAft>
+                <a:spcPts val="300"/>
+              </a:spcAft>
+              <a:defRPr sz="2000"/>
+            </a:pPr>
+          </a:p>
+          <a:p>
+            <a:pPr>
+              <a:lnSpc>
+                <a:spcPct val="90000"/>
+              </a:lnSpc>
+              <a:spcAft>
+                <a:spcPts val="300"/>
+              </a:spcAft>
+              <a:defRPr sz="2000"/>
+            </a:pPr>
+            <a:r>
+              <a:rPr sz="1300"/>
               <a:t>🗑️ Gereksiz Veri Toplama:</a:t>
             </a:r>
           </a:p>
           <a:p>
             <a:pPr lvl="1">
-              <a:spcAft>
-                <a:spcPts val="1200"/>
-              </a:spcAft>
-              <a:defRPr sz="1800"/>
-            </a:pPr>
-            <a:r>
-              <a:rPr sz="1400"/>
+              <a:lnSpc>
+                <a:spcPct val="90000"/>
+              </a:lnSpc>
+              <a:spcAft>
+                <a:spcPts val="300"/>
+              </a:spcAft>
+              <a:defRPr sz="1800"/>
+            </a:pPr>
+            <a:r>
+              <a:rPr sz="1300"/>
               <a:t>    • Sadece gerekli veriyi topla</a:t>
             </a:r>
           </a:p>
           <a:p>
             <a:pPr>
-              <a:spcAft>
-                <a:spcPts val="1200"/>
-              </a:spcAft>
-              <a:defRPr sz="2000"/>
-            </a:pPr>
-          </a:p>
-          <a:p>
-            <a:pPr>
-              <a:spcAft>
-                <a:spcPts val="1200"/>
+              <a:lnSpc>
+                <a:spcPct val="90000"/>
+              </a:lnSpc>
+              <a:spcAft>
+                <a:spcPts val="300"/>
+              </a:spcAft>
+              <a:defRPr sz="2000"/>
+            </a:pPr>
+          </a:p>
+          <a:p>
+            <a:pPr>
+              <a:lnSpc>
+                <a:spcPct val="90000"/>
+              </a:lnSpc>
+              <a:spcAft>
+                <a:spcPts val="300"/>
               </a:spcAft>
               <a:defRPr sz="2000" b="1"/>
             </a:pPr>
             <a:r>
-              <a:rPr sz="1400"/>
+              <a:rPr sz="1300"/>
               <a:t>💡 KVKK (Kişisel Verilerin Korunması Kanunu):</a:t>
             </a:r>
           </a:p>
           <a:p>
             <a:pPr>
-              <a:spcAft>
-                <a:spcPts val="1200"/>
-              </a:spcAft>
-              <a:defRPr sz="2000"/>
-            </a:pPr>
-            <a:r>
-              <a:rPr sz="1400"/>
+              <a:lnSpc>
+                <a:spcPct val="90000"/>
+              </a:lnSpc>
+              <a:spcAft>
+                <a:spcPts val="300"/>
+              </a:spcAft>
+              <a:defRPr sz="2000"/>
+            </a:pPr>
+            <a:r>
+              <a:rPr sz="1300"/>
               <a:t>Türkiye'de veri güvenliğini koruyan yasa</a:t>
             </a:r>
           </a:p>
@@ -7668,7 +8139,7 @@
         </p:nvSpPr>
         <p:spPr/>
         <p:txBody>
-          <a:bodyPr/>
+          <a:bodyPr wrap="square"/>
           <a:lstStyle/>
           <a:p>
             <a:pPr>
@@ -7722,232 +8193,301 @@
             <a:spAutoFit/>
           </a:bodyPr>
           <a:lstStyle/>
-          <a:p/>
-          <a:p>
-            <a:pPr>
-              <a:spcAft>
-                <a:spcPts val="1200"/>
-              </a:spcAft>
-              <a:defRPr sz="2000"/>
-            </a:pPr>
-            <a:r>
-              <a:rPr sz="1400"/>
+          <a:p>
+            <a:pPr>
+              <a:lnSpc>
+                <a:spcPct val="90000"/>
+              </a:lnSpc>
+              <a:spcAft>
+                <a:spcPts val="300"/>
+              </a:spcAft>
+            </a:pPr>
+          </a:p>
+          <a:p>
+            <a:pPr>
+              <a:lnSpc>
+                <a:spcPct val="90000"/>
+              </a:lnSpc>
+              <a:spcAft>
+                <a:spcPts val="300"/>
+              </a:spcAft>
+              <a:defRPr sz="2000"/>
+            </a:pPr>
+            <a:r>
+              <a:rPr sz="1300"/>
               <a:t>Bu ünitede neler öğrendik?</a:t>
             </a:r>
           </a:p>
           <a:p>
             <a:pPr>
-              <a:spcAft>
-                <a:spcPts val="1200"/>
-              </a:spcAft>
-              <a:defRPr sz="2000"/>
-            </a:pPr>
-          </a:p>
-          <a:p>
-            <a:pPr>
-              <a:spcAft>
-                <a:spcPts val="1200"/>
+              <a:lnSpc>
+                <a:spcPct val="90000"/>
+              </a:lnSpc>
+              <a:spcAft>
+                <a:spcPts val="300"/>
+              </a:spcAft>
+              <a:defRPr sz="2000"/>
+            </a:pPr>
+          </a:p>
+          <a:p>
+            <a:pPr>
+              <a:lnSpc>
+                <a:spcPct val="90000"/>
+              </a:lnSpc>
+              <a:spcAft>
+                <a:spcPts val="300"/>
               </a:spcAft>
               <a:defRPr sz="2000" b="1"/>
             </a:pPr>
             <a:r>
-              <a:rPr sz="1400"/>
+              <a:rPr sz="1300"/>
               <a:t>✅ Veri ve bilgi kavramları</a:t>
             </a:r>
           </a:p>
           <a:p>
             <a:pPr>
-              <a:spcAft>
-                <a:spcPts val="1200"/>
+              <a:lnSpc>
+                <a:spcPct val="90000"/>
+              </a:lnSpc>
+              <a:spcAft>
+                <a:spcPts val="300"/>
               </a:spcAft>
               <a:defRPr sz="2000" b="1"/>
             </a:pPr>
             <a:r>
-              <a:rPr sz="1400"/>
+              <a:rPr sz="1300"/>
               <a:t>✅ Veri toplama yöntemleri (anket, gözlem, deney)</a:t>
             </a:r>
           </a:p>
           <a:p>
             <a:pPr>
-              <a:spcAft>
-                <a:spcPts val="1200"/>
+              <a:lnSpc>
+                <a:spcPct val="90000"/>
+              </a:lnSpc>
+              <a:spcAft>
+                <a:spcPts val="300"/>
               </a:spcAft>
               <a:defRPr sz="2000" b="1"/>
             </a:pPr>
             <a:r>
-              <a:rPr sz="1400"/>
+              <a:rPr sz="1300"/>
               <a:t>✅ Veri türleri (sayısal, kategorik)</a:t>
             </a:r>
           </a:p>
           <a:p>
             <a:pPr>
-              <a:spcAft>
-                <a:spcPts val="1200"/>
+              <a:lnSpc>
+                <a:spcPct val="90000"/>
+              </a:lnSpc>
+              <a:spcAft>
+                <a:spcPts val="300"/>
               </a:spcAft>
               <a:defRPr sz="2000" b="1"/>
             </a:pPr>
             <a:r>
-              <a:rPr sz="1400"/>
+              <a:rPr sz="1300"/>
               <a:t>✅ Veri düzenleme ve sıralama</a:t>
             </a:r>
           </a:p>
           <a:p>
             <a:pPr>
-              <a:spcAft>
-                <a:spcPts val="1200"/>
+              <a:lnSpc>
+                <a:spcPct val="90000"/>
+              </a:lnSpc>
+              <a:spcAft>
+                <a:spcPts val="300"/>
               </a:spcAft>
               <a:defRPr sz="2000" b="1"/>
             </a:pPr>
             <a:r>
-              <a:rPr sz="1400"/>
+              <a:rPr sz="1300"/>
               <a:t>✅ Grafik türleri (sütun, çizgi, pasta)</a:t>
             </a:r>
           </a:p>
           <a:p>
             <a:pPr>
-              <a:spcAft>
-                <a:spcPts val="1200"/>
+              <a:lnSpc>
+                <a:spcPct val="90000"/>
+              </a:lnSpc>
+              <a:spcAft>
+                <a:spcPts val="300"/>
               </a:spcAft>
               <a:defRPr sz="2000" b="1"/>
             </a:pPr>
             <a:r>
-              <a:rPr sz="1400"/>
+              <a:rPr sz="1300"/>
               <a:t>✅ Veri görselleştirme</a:t>
             </a:r>
           </a:p>
           <a:p>
             <a:pPr>
-              <a:spcAft>
-                <a:spcPts val="1200"/>
+              <a:lnSpc>
+                <a:spcPct val="90000"/>
+              </a:lnSpc>
+              <a:spcAft>
+                <a:spcPts val="300"/>
               </a:spcAft>
               <a:defRPr sz="2000" b="1"/>
             </a:pPr>
             <a:r>
-              <a:rPr sz="1400"/>
+              <a:rPr sz="1300"/>
               <a:t>✅ Excel/Sheets ile tablo oluşturma</a:t>
             </a:r>
           </a:p>
           <a:p>
             <a:pPr>
-              <a:spcAft>
-                <a:spcPts val="1200"/>
+              <a:lnSpc>
+                <a:spcPct val="90000"/>
+              </a:lnSpc>
+              <a:spcAft>
+                <a:spcPts val="300"/>
               </a:spcAft>
               <a:defRPr sz="2000" b="1"/>
             </a:pPr>
             <a:r>
-              <a:rPr sz="1400"/>
+              <a:rPr sz="1300"/>
               <a:t>✅ Formüller ve fonksiyonlar</a:t>
             </a:r>
           </a:p>
           <a:p>
             <a:pPr>
-              <a:spcAft>
-                <a:spcPts val="1200"/>
+              <a:lnSpc>
+                <a:spcPct val="90000"/>
+              </a:lnSpc>
+              <a:spcAft>
+                <a:spcPts val="300"/>
               </a:spcAft>
               <a:defRPr sz="2000" b="1"/>
             </a:pPr>
             <a:r>
-              <a:rPr sz="1400"/>
+              <a:rPr sz="1300"/>
               <a:t>✅ Grafik oluşturma</a:t>
             </a:r>
           </a:p>
           <a:p>
             <a:pPr>
-              <a:spcAft>
-                <a:spcPts val="1200"/>
+              <a:lnSpc>
+                <a:spcPct val="90000"/>
+              </a:lnSpc>
+              <a:spcAft>
+                <a:spcPts val="300"/>
               </a:spcAft>
               <a:defRPr sz="2000" b="1"/>
             </a:pPr>
             <a:r>
-              <a:rPr sz="1400"/>
+              <a:rPr sz="1300"/>
               <a:t>✅ Veri analizi (ortalama, medyan, mod)</a:t>
             </a:r>
           </a:p>
           <a:p>
             <a:pPr>
-              <a:spcAft>
-                <a:spcPts val="1200"/>
+              <a:lnSpc>
+                <a:spcPct val="90000"/>
+              </a:lnSpc>
+              <a:spcAft>
+                <a:spcPts val="300"/>
               </a:spcAft>
               <a:defRPr sz="2000" b="1"/>
             </a:pPr>
             <a:r>
-              <a:rPr sz="1400"/>
+              <a:rPr sz="1300"/>
               <a:t>✅ Veriye dayalı karar verme</a:t>
             </a:r>
           </a:p>
           <a:p>
             <a:pPr>
-              <a:spcAft>
-                <a:spcPts val="1200"/>
+              <a:lnSpc>
+                <a:spcPct val="90000"/>
+              </a:lnSpc>
+              <a:spcAft>
+                <a:spcPts val="300"/>
               </a:spcAft>
               <a:defRPr sz="2000" b="1"/>
             </a:pPr>
             <a:r>
-              <a:rPr sz="1400"/>
+              <a:rPr sz="1300"/>
               <a:t>✅ Veri güvenliği ve gizlilik</a:t>
             </a:r>
           </a:p>
           <a:p>
             <a:pPr>
-              <a:spcAft>
-                <a:spcPts val="1200"/>
-              </a:spcAft>
-              <a:defRPr sz="2000"/>
-            </a:pPr>
-          </a:p>
-          <a:p>
-            <a:pPr>
-              <a:spcAft>
-                <a:spcPts val="1200"/>
+              <a:lnSpc>
+                <a:spcPct val="90000"/>
+              </a:lnSpc>
+              <a:spcAft>
+                <a:spcPts val="300"/>
+              </a:spcAft>
+              <a:defRPr sz="2000"/>
+            </a:pPr>
+          </a:p>
+          <a:p>
+            <a:pPr>
+              <a:lnSpc>
+                <a:spcPct val="90000"/>
+              </a:lnSpc>
+              <a:spcAft>
+                <a:spcPts val="300"/>
               </a:spcAft>
               <a:defRPr sz="2000" b="1"/>
             </a:pPr>
             <a:r>
-              <a:rPr sz="1400"/>
+              <a:rPr sz="1300"/>
               <a:t>💡 Anahtar Mesaj:</a:t>
             </a:r>
           </a:p>
           <a:p>
             <a:pPr>
-              <a:spcAft>
-                <a:spcPts val="1200"/>
-              </a:spcAft>
-              <a:defRPr sz="2000"/>
-            </a:pPr>
-            <a:r>
-              <a:rPr sz="1400"/>
+              <a:lnSpc>
+                <a:spcPct val="90000"/>
+              </a:lnSpc>
+              <a:spcAft>
+                <a:spcPts val="300"/>
+              </a:spcAft>
+              <a:defRPr sz="2000"/>
+            </a:pPr>
+            <a:r>
+              <a:rPr sz="1300"/>
               <a:t>Veri doğru analiz edilirse değerli bilgi haline gelir!</a:t>
             </a:r>
           </a:p>
           <a:p>
             <a:pPr>
-              <a:spcAft>
-                <a:spcPts val="1200"/>
-              </a:spcAft>
-              <a:defRPr sz="2000"/>
-            </a:pPr>
-          </a:p>
-          <a:p>
-            <a:pPr>
-              <a:spcAft>
-                <a:spcPts val="1200"/>
+              <a:lnSpc>
+                <a:spcPct val="90000"/>
+              </a:lnSpc>
+              <a:spcAft>
+                <a:spcPts val="300"/>
+              </a:spcAft>
+              <a:defRPr sz="2000"/>
+            </a:pPr>
+          </a:p>
+          <a:p>
+            <a:pPr>
+              <a:lnSpc>
+                <a:spcPct val="90000"/>
+              </a:lnSpc>
+              <a:spcAft>
+                <a:spcPts val="300"/>
               </a:spcAft>
               <a:defRPr sz="2000" b="1"/>
             </a:pPr>
             <a:r>
-              <a:rPr sz="1400"/>
+              <a:rPr sz="1300"/>
               <a:t>🎯 Artık veri analisti gibi düşünebilirsin!</a:t>
             </a:r>
           </a:p>
           <a:p>
             <a:pPr>
-              <a:spcAft>
-                <a:spcPts val="1200"/>
-              </a:spcAft>
-              <a:defRPr sz="2000"/>
-            </a:pPr>
-            <a:r>
-              <a:rPr sz="1400"/>
+              <a:lnSpc>
+                <a:spcPct val="90000"/>
+              </a:lnSpc>
+              <a:spcAft>
+                <a:spcPts val="300"/>
+              </a:spcAft>
+              <a:defRPr sz="2000"/>
+            </a:pPr>
+            <a:r>
+              <a:rPr sz="1300"/>
               <a:t>📊 Veriyle dünyayı anlayabilirsin!</a:t>
             </a:r>
           </a:p>
@@ -7983,7 +8523,7 @@
         </p:nvSpPr>
         <p:spPr/>
         <p:txBody>
-          <a:bodyPr/>
+          <a:bodyPr wrap="square"/>
           <a:lstStyle/>
           <a:p>
             <a:pPr>
@@ -8037,160 +8577,226 @@
             <a:spAutoFit/>
           </a:bodyPr>
           <a:lstStyle/>
-          <a:p/>
-          <a:p>
-            <a:pPr>
-              <a:spcAft>
-                <a:spcPts val="1200"/>
-              </a:spcAft>
-              <a:defRPr sz="2000"/>
-            </a:pPr>
-            <a:r>
+          <a:p>
+            <a:pPr>
+              <a:lnSpc>
+                <a:spcPct val="90000"/>
+              </a:lnSpc>
+              <a:spcAft>
+                <a:spcPts val="300"/>
+              </a:spcAft>
+            </a:pPr>
+          </a:p>
+          <a:p>
+            <a:pPr>
+              <a:lnSpc>
+                <a:spcPct val="90000"/>
+              </a:lnSpc>
+              <a:spcAft>
+                <a:spcPts val="300"/>
+              </a:spcAft>
+              <a:defRPr sz="2000"/>
+            </a:pPr>
+            <a:r>
+              <a:rPr sz="1500"/>
               <a:t>🎥 İzlenecek Videolar:</a:t>
             </a:r>
           </a:p>
           <a:p>
             <a:pPr lvl="1">
-              <a:spcAft>
-                <a:spcPts val="1200"/>
-              </a:spcAft>
-              <a:defRPr sz="1800"/>
-            </a:pPr>
-            <a:r>
+              <a:lnSpc>
+                <a:spcPct val="90000"/>
+              </a:lnSpc>
+              <a:spcAft>
+                <a:spcPts val="300"/>
+              </a:spcAft>
+              <a:defRPr sz="1800"/>
+            </a:pPr>
+            <a:r>
+              <a:rPr sz="1500"/>
               <a:t>    • 'Veri Nedir?' - TRT Okul</a:t>
             </a:r>
           </a:p>
           <a:p>
             <a:pPr lvl="1">
-              <a:spcAft>
-                <a:spcPts val="1200"/>
-              </a:spcAft>
-              <a:defRPr sz="1800"/>
-            </a:pPr>
-            <a:r>
+              <a:lnSpc>
+                <a:spcPct val="90000"/>
+              </a:lnSpc>
+              <a:spcAft>
+                <a:spcPts val="300"/>
+              </a:spcAft>
+              <a:defRPr sz="1800"/>
+            </a:pPr>
+            <a:r>
+              <a:rPr sz="1500"/>
               <a:t>    • 'Excel Eğitimi' - Temel</a:t>
             </a:r>
           </a:p>
           <a:p>
             <a:pPr lvl="1">
-              <a:spcAft>
-                <a:spcPts val="1200"/>
-              </a:spcAft>
-              <a:defRPr sz="1800"/>
-            </a:pPr>
-            <a:r>
+              <a:lnSpc>
+                <a:spcPct val="90000"/>
+              </a:lnSpc>
+              <a:spcAft>
+                <a:spcPts val="300"/>
+              </a:spcAft>
+              <a:defRPr sz="1800"/>
+            </a:pPr>
+            <a:r>
+              <a:rPr sz="1500"/>
               <a:t>    • 'Grafik Türleri' - Animasyon</a:t>
             </a:r>
           </a:p>
           <a:p>
             <a:pPr>
-              <a:spcAft>
-                <a:spcPts val="1200"/>
-              </a:spcAft>
-              <a:defRPr sz="2000"/>
-            </a:pPr>
-          </a:p>
-          <a:p>
-            <a:pPr>
-              <a:spcAft>
-                <a:spcPts val="1200"/>
-              </a:spcAft>
-              <a:defRPr sz="2000"/>
-            </a:pPr>
-            <a:r>
+              <a:lnSpc>
+                <a:spcPct val="90000"/>
+              </a:lnSpc>
+              <a:spcAft>
+                <a:spcPts val="300"/>
+              </a:spcAft>
+              <a:defRPr sz="2000"/>
+            </a:pPr>
+          </a:p>
+          <a:p>
+            <a:pPr>
+              <a:lnSpc>
+                <a:spcPct val="90000"/>
+              </a:lnSpc>
+              <a:spcAft>
+                <a:spcPts val="300"/>
+              </a:spcAft>
+              <a:defRPr sz="2000"/>
+            </a:pPr>
+            <a:r>
+              <a:rPr sz="1500"/>
               <a:t>🌐 Keşfedilecek Siteler:</a:t>
             </a:r>
           </a:p>
           <a:p>
             <a:pPr lvl="1">
-              <a:spcAft>
-                <a:spcPts val="1200"/>
-              </a:spcAft>
-              <a:defRPr sz="1800"/>
-            </a:pPr>
-            <a:r>
+              <a:lnSpc>
+                <a:spcPct val="90000"/>
+              </a:lnSpc>
+              <a:spcAft>
+                <a:spcPts val="300"/>
+              </a:spcAft>
+              <a:defRPr sz="1800"/>
+            </a:pPr>
+            <a:r>
+              <a:rPr sz="1500"/>
               <a:t>    • Google Sheets (ücretsiz)</a:t>
             </a:r>
           </a:p>
           <a:p>
             <a:pPr lvl="1">
-              <a:spcAft>
-                <a:spcPts val="1200"/>
-              </a:spcAft>
-              <a:defRPr sz="1800"/>
-            </a:pPr>
-            <a:r>
+              <a:lnSpc>
+                <a:spcPct val="90000"/>
+              </a:lnSpc>
+              <a:spcAft>
+                <a:spcPts val="300"/>
+              </a:spcAft>
+              <a:defRPr sz="1800"/>
+            </a:pPr>
+            <a:r>
+              <a:rPr sz="1500"/>
               <a:t>    • https://data.gov.tr - Açık veri</a:t>
             </a:r>
           </a:p>
           <a:p>
             <a:pPr>
-              <a:spcAft>
-                <a:spcPts val="1200"/>
-              </a:spcAft>
-              <a:defRPr sz="2000"/>
-            </a:pPr>
-          </a:p>
-          <a:p>
-            <a:pPr>
-              <a:spcAft>
-                <a:spcPts val="1200"/>
-              </a:spcAft>
-              <a:defRPr sz="2000"/>
-            </a:pPr>
-            <a:r>
+              <a:lnSpc>
+                <a:spcPct val="90000"/>
+              </a:lnSpc>
+              <a:spcAft>
+                <a:spcPts val="300"/>
+              </a:spcAft>
+              <a:defRPr sz="2000"/>
+            </a:pPr>
+          </a:p>
+          <a:p>
+            <a:pPr>
+              <a:lnSpc>
+                <a:spcPct val="90000"/>
+              </a:lnSpc>
+              <a:spcAft>
+                <a:spcPts val="300"/>
+              </a:spcAft>
+              <a:defRPr sz="2000"/>
+            </a:pPr>
+            <a:r>
+              <a:rPr sz="1500"/>
               <a:t>📖 Projeler:</a:t>
             </a:r>
           </a:p>
           <a:p>
             <a:pPr lvl="1">
-              <a:spcAft>
-                <a:spcPts val="1200"/>
-              </a:spcAft>
-              <a:defRPr sz="1800"/>
-            </a:pPr>
-            <a:r>
+              <a:lnSpc>
+                <a:spcPct val="90000"/>
+              </a:lnSpc>
+              <a:spcAft>
+                <a:spcPts val="300"/>
+              </a:spcAft>
+              <a:defRPr sz="1800"/>
+            </a:pPr>
+            <a:r>
+              <a:rPr sz="1500"/>
               <a:t>    • Sınıf anketi yap, analiz et</a:t>
             </a:r>
           </a:p>
           <a:p>
             <a:pPr lvl="1">
-              <a:spcAft>
-                <a:spcPts val="1200"/>
-              </a:spcAft>
-              <a:defRPr sz="1800"/>
-            </a:pPr>
-            <a:r>
+              <a:lnSpc>
+                <a:spcPct val="90000"/>
+              </a:lnSpc>
+              <a:spcAft>
+                <a:spcPts val="300"/>
+              </a:spcAft>
+              <a:defRPr sz="1800"/>
+            </a:pPr>
+            <a:r>
+              <a:rPr sz="1500"/>
               <a:t>    • Hava durumu verileri topla, grafik yap</a:t>
             </a:r>
           </a:p>
           <a:p>
             <a:pPr lvl="1">
-              <a:spcAft>
-                <a:spcPts val="1200"/>
-              </a:spcAft>
-              <a:defRPr sz="1800"/>
-            </a:pPr>
-            <a:r>
+              <a:lnSpc>
+                <a:spcPct val="90000"/>
+              </a:lnSpc>
+              <a:spcAft>
+                <a:spcPts val="300"/>
+              </a:spcAft>
+              <a:defRPr sz="1800"/>
+            </a:pPr>
+            <a:r>
+              <a:rPr sz="1500"/>
               <a:t>    • Favori konular anketi</a:t>
             </a:r>
           </a:p>
           <a:p>
             <a:pPr>
-              <a:spcAft>
-                <a:spcPts val="1200"/>
-              </a:spcAft>
-              <a:defRPr sz="2000"/>
-            </a:pPr>
-          </a:p>
-          <a:p>
-            <a:pPr>
-              <a:spcAft>
-                <a:spcPts val="1200"/>
+              <a:lnSpc>
+                <a:spcPct val="90000"/>
+              </a:lnSpc>
+              <a:spcAft>
+                <a:spcPts val="300"/>
+              </a:spcAft>
+              <a:defRPr sz="2000"/>
+            </a:pPr>
+          </a:p>
+          <a:p>
+            <a:pPr>
+              <a:lnSpc>
+                <a:spcPct val="90000"/>
+              </a:lnSpc>
+              <a:spcAft>
+                <a:spcPts val="300"/>
               </a:spcAft>
               <a:defRPr sz="2000" b="1"/>
             </a:pPr>
             <a:r>
+              <a:rPr sz="1500"/>
               <a:t>💡 Veri ile dünyayı keşfet!</a:t>
             </a:r>
           </a:p>
@@ -8239,7 +8845,7 @@
           <a:noFill/>
         </p:spPr>
         <p:txBody>
-          <a:bodyPr wrap="none">
+          <a:bodyPr wrap="square">
             <a:spAutoFit/>
           </a:bodyPr>
           <a:lstStyle/>
@@ -8274,7 +8880,7 @@
           <a:noFill/>
         </p:spPr>
         <p:txBody>
-          <a:bodyPr wrap="none">
+          <a:bodyPr wrap="square">
             <a:spAutoFit/>
           </a:bodyPr>
           <a:lstStyle/>
@@ -8322,7 +8928,7 @@
         </p:nvSpPr>
         <p:spPr/>
         <p:txBody>
-          <a:bodyPr/>
+          <a:bodyPr wrap="square"/>
           <a:lstStyle/>
           <a:p>
             <a:pPr>
@@ -8376,174 +8982,245 @@
             <a:spAutoFit/>
           </a:bodyPr>
           <a:lstStyle/>
-          <a:p/>
-          <a:p>
-            <a:pPr>
-              <a:spcAft>
-                <a:spcPts val="1200"/>
-              </a:spcAft>
-              <a:defRPr sz="2000"/>
-            </a:pPr>
-            <a:r>
+          <a:p>
+            <a:pPr>
+              <a:lnSpc>
+                <a:spcPct val="90000"/>
+              </a:lnSpc>
+              <a:spcAft>
+                <a:spcPts val="300"/>
+              </a:spcAft>
+            </a:pPr>
+          </a:p>
+          <a:p>
+            <a:pPr>
+              <a:lnSpc>
+                <a:spcPct val="90000"/>
+              </a:lnSpc>
+              <a:spcAft>
+                <a:spcPts val="300"/>
+              </a:spcAft>
+              <a:defRPr sz="2000"/>
+            </a:pPr>
+            <a:r>
+              <a:rPr sz="1500"/>
               <a:t>Bu ünitede neler öğreneceğiz?</a:t>
             </a:r>
           </a:p>
           <a:p>
             <a:pPr>
-              <a:spcAft>
-                <a:spcPts val="1200"/>
-              </a:spcAft>
-              <a:defRPr sz="2000"/>
-            </a:pPr>
-          </a:p>
-          <a:p>
-            <a:pPr>
-              <a:spcAft>
-                <a:spcPts val="1200"/>
+              <a:lnSpc>
+                <a:spcPct val="90000"/>
+              </a:lnSpc>
+              <a:spcAft>
+                <a:spcPts val="300"/>
+              </a:spcAft>
+              <a:defRPr sz="2000"/>
+            </a:pPr>
+          </a:p>
+          <a:p>
+            <a:pPr>
+              <a:lnSpc>
+                <a:spcPct val="90000"/>
+              </a:lnSpc>
+              <a:spcAft>
+                <a:spcPts val="300"/>
               </a:spcAft>
               <a:defRPr sz="2000" b="1"/>
             </a:pPr>
             <a:r>
+              <a:rPr sz="1500"/>
               <a:t>✅ 1. Veri Nedir?</a:t>
             </a:r>
           </a:p>
           <a:p>
             <a:pPr>
-              <a:spcAft>
-                <a:spcPts val="1200"/>
+              <a:lnSpc>
+                <a:spcPct val="90000"/>
+              </a:lnSpc>
+              <a:spcAft>
+                <a:spcPts val="300"/>
               </a:spcAft>
               <a:defRPr sz="2000" b="1"/>
             </a:pPr>
             <a:r>
+              <a:rPr sz="1500"/>
               <a:t>✅ 2. Bilgi vs Veri</a:t>
             </a:r>
           </a:p>
           <a:p>
             <a:pPr>
-              <a:spcAft>
-                <a:spcPts val="1200"/>
+              <a:lnSpc>
+                <a:spcPct val="90000"/>
+              </a:lnSpc>
+              <a:spcAft>
+                <a:spcPts val="300"/>
               </a:spcAft>
               <a:defRPr sz="2000" b="1"/>
             </a:pPr>
             <a:r>
+              <a:rPr sz="1500"/>
               <a:t>✅ 3. Veri Toplama Yöntemleri</a:t>
             </a:r>
           </a:p>
           <a:p>
             <a:pPr>
-              <a:spcAft>
-                <a:spcPts val="1200"/>
+              <a:lnSpc>
+                <a:spcPct val="90000"/>
+              </a:lnSpc>
+              <a:spcAft>
+                <a:spcPts val="300"/>
               </a:spcAft>
               <a:defRPr sz="2000" b="1"/>
             </a:pPr>
             <a:r>
+              <a:rPr sz="1500"/>
               <a:t>✅ 4. Veri Türleri (Sayısal, Kategorik)</a:t>
             </a:r>
           </a:p>
           <a:p>
             <a:pPr>
-              <a:spcAft>
-                <a:spcPts val="1200"/>
+              <a:lnSpc>
+                <a:spcPct val="90000"/>
+              </a:lnSpc>
+              <a:spcAft>
+                <a:spcPts val="300"/>
               </a:spcAft>
               <a:defRPr sz="2000" b="1"/>
             </a:pPr>
             <a:r>
+              <a:rPr sz="1500"/>
               <a:t>✅ 5. Veri Düzenleme ve Sıralama</a:t>
             </a:r>
           </a:p>
           <a:p>
             <a:pPr>
-              <a:spcAft>
-                <a:spcPts val="1200"/>
+              <a:lnSpc>
+                <a:spcPct val="90000"/>
+              </a:lnSpc>
+              <a:spcAft>
+                <a:spcPts val="300"/>
               </a:spcAft>
               <a:defRPr sz="2000" b="1"/>
             </a:pPr>
             <a:r>
+              <a:rPr sz="1500"/>
               <a:t>✅ 6. Grafik Türleri</a:t>
             </a:r>
           </a:p>
           <a:p>
             <a:pPr>
-              <a:spcAft>
-                <a:spcPts val="1200"/>
+              <a:lnSpc>
+                <a:spcPct val="90000"/>
+              </a:lnSpc>
+              <a:spcAft>
+                <a:spcPts val="300"/>
               </a:spcAft>
               <a:defRPr sz="2000" b="1"/>
             </a:pPr>
             <a:r>
+              <a:rPr sz="1500"/>
               <a:t>✅ 7. Veri Görselleştirme</a:t>
             </a:r>
           </a:p>
           <a:p>
             <a:pPr>
-              <a:spcAft>
-                <a:spcPts val="1200"/>
+              <a:lnSpc>
+                <a:spcPct val="90000"/>
+              </a:lnSpc>
+              <a:spcAft>
+                <a:spcPts val="300"/>
               </a:spcAft>
               <a:defRPr sz="2000" b="1"/>
             </a:pPr>
             <a:r>
+              <a:rPr sz="1500"/>
               <a:t>✅ 8. Tablo ve Grafik Oluşturma</a:t>
             </a:r>
           </a:p>
           <a:p>
             <a:pPr>
-              <a:spcAft>
-                <a:spcPts val="1200"/>
+              <a:lnSpc>
+                <a:spcPct val="90000"/>
+              </a:lnSpc>
+              <a:spcAft>
+                <a:spcPts val="300"/>
               </a:spcAft>
               <a:defRPr sz="2000" b="1"/>
             </a:pPr>
             <a:r>
+              <a:rPr sz="1500"/>
               <a:t>✅ 9. Veri Analizi</a:t>
             </a:r>
           </a:p>
           <a:p>
             <a:pPr>
-              <a:spcAft>
-                <a:spcPts val="1200"/>
+              <a:lnSpc>
+                <a:spcPct val="90000"/>
+              </a:lnSpc>
+              <a:spcAft>
+                <a:spcPts val="300"/>
               </a:spcAft>
               <a:defRPr sz="2000" b="1"/>
             </a:pPr>
             <a:r>
+              <a:rPr sz="1500"/>
               <a:t>✅ 10. Ortalama, Medyan, Mod</a:t>
             </a:r>
           </a:p>
           <a:p>
             <a:pPr>
-              <a:spcAft>
-                <a:spcPts val="1200"/>
+              <a:lnSpc>
+                <a:spcPct val="90000"/>
+              </a:lnSpc>
+              <a:spcAft>
+                <a:spcPts val="300"/>
               </a:spcAft>
               <a:defRPr sz="2000" b="1"/>
             </a:pPr>
             <a:r>
+              <a:rPr sz="1500"/>
               <a:t>✅ 11. Tablolama Programları (Excel, Sheets)</a:t>
             </a:r>
           </a:p>
           <a:p>
             <a:pPr>
-              <a:spcAft>
-                <a:spcPts val="1200"/>
-              </a:spcAft>
-              <a:defRPr sz="2000"/>
-            </a:pPr>
-          </a:p>
-          <a:p>
-            <a:pPr>
-              <a:spcAft>
-                <a:spcPts val="1200"/>
-              </a:spcAft>
-              <a:defRPr sz="2000"/>
-            </a:pPr>
-            <a:r>
+              <a:lnSpc>
+                <a:spcPct val="90000"/>
+              </a:lnSpc>
+              <a:spcAft>
+                <a:spcPts val="300"/>
+              </a:spcAft>
+              <a:defRPr sz="2000"/>
+            </a:pPr>
+          </a:p>
+          <a:p>
+            <a:pPr>
+              <a:lnSpc>
+                <a:spcPct val="90000"/>
+              </a:lnSpc>
+              <a:spcAft>
+                <a:spcPts val="300"/>
+              </a:spcAft>
+              <a:defRPr sz="2000"/>
+            </a:pPr>
+            <a:r>
+              <a:rPr sz="1500"/>
               <a:t>⏰ Süre: 4 Hafta</a:t>
             </a:r>
           </a:p>
           <a:p>
             <a:pPr>
-              <a:spcAft>
-                <a:spcPts val="1200"/>
+              <a:lnSpc>
+                <a:spcPct val="90000"/>
+              </a:lnSpc>
+              <a:spcAft>
+                <a:spcPts val="300"/>
               </a:spcAft>
               <a:defRPr sz="2000" b="1"/>
             </a:pPr>
             <a:r>
+              <a:rPr sz="1500"/>
               <a:t>🎯 Amaç: Veriyi analiz edip anlamlı sonuçlar çıkarmak!</a:t>
             </a:r>
           </a:p>
@@ -8579,7 +9256,7 @@
         </p:nvSpPr>
         <p:spPr/>
         <p:txBody>
-          <a:bodyPr/>
+          <a:bodyPr wrap="square"/>
           <a:lstStyle/>
           <a:p>
             <a:pPr>
@@ -8633,268 +9310,349 @@
             <a:spAutoFit/>
           </a:bodyPr>
           <a:lstStyle/>
-          <a:p/>
-          <a:p>
-            <a:pPr>
-              <a:spcAft>
-                <a:spcPts val="1200"/>
-              </a:spcAft>
-              <a:defRPr sz="2000"/>
-            </a:pPr>
-            <a:r>
-              <a:rPr sz="1600"/>
+          <a:p>
+            <a:pPr>
+              <a:lnSpc>
+                <a:spcPct val="90000"/>
+              </a:lnSpc>
+              <a:spcAft>
+                <a:spcPts val="300"/>
+              </a:spcAft>
+            </a:pPr>
+          </a:p>
+          <a:p>
+            <a:pPr>
+              <a:lnSpc>
+                <a:spcPct val="90000"/>
+              </a:lnSpc>
+              <a:spcAft>
+                <a:spcPts val="300"/>
+              </a:spcAft>
+              <a:defRPr sz="2000"/>
+            </a:pPr>
+            <a:r>
+              <a:rPr sz="1400"/>
               <a:t>Veri = Ham bilgi, işlenmemiş gerçekler</a:t>
             </a:r>
           </a:p>
           <a:p>
             <a:pPr>
-              <a:spcAft>
-                <a:spcPts val="1200"/>
-              </a:spcAft>
-              <a:defRPr sz="2000"/>
-            </a:pPr>
-          </a:p>
-          <a:p>
-            <a:pPr>
-              <a:spcAft>
-                <a:spcPts val="1200"/>
+              <a:lnSpc>
+                <a:spcPct val="90000"/>
+              </a:lnSpc>
+              <a:spcAft>
+                <a:spcPts val="300"/>
+              </a:spcAft>
+              <a:defRPr sz="2000"/>
+            </a:pPr>
+          </a:p>
+          <a:p>
+            <a:pPr>
+              <a:lnSpc>
+                <a:spcPct val="90000"/>
+              </a:lnSpc>
+              <a:spcAft>
+                <a:spcPts val="300"/>
               </a:spcAft>
               <a:defRPr sz="2000" b="1"/>
             </a:pPr>
             <a:r>
-              <a:rPr sz="1600"/>
+              <a:rPr sz="1400"/>
               <a:t>✅ Veri Örnekleri:</a:t>
             </a:r>
           </a:p>
           <a:p>
             <a:pPr lvl="1">
-              <a:spcAft>
-                <a:spcPts val="1200"/>
-              </a:spcAft>
-              <a:defRPr sz="1800"/>
-            </a:pPr>
-            <a:r>
-              <a:rPr sz="1600"/>
+              <a:lnSpc>
+                <a:spcPct val="90000"/>
+              </a:lnSpc>
+              <a:spcAft>
+                <a:spcPts val="300"/>
+              </a:spcAft>
+              <a:defRPr sz="1800"/>
+            </a:pPr>
+            <a:r>
+              <a:rPr sz="1400"/>
               <a:t>    • Sayılar: 15, 23, 42</a:t>
             </a:r>
           </a:p>
           <a:p>
             <a:pPr lvl="1">
-              <a:spcAft>
-                <a:spcPts val="1200"/>
-              </a:spcAft>
-              <a:defRPr sz="1800"/>
-            </a:pPr>
-            <a:r>
-              <a:rPr sz="1600"/>
+              <a:lnSpc>
+                <a:spcPct val="90000"/>
+              </a:lnSpc>
+              <a:spcAft>
+                <a:spcPts val="300"/>
+              </a:spcAft>
+              <a:defRPr sz="1800"/>
+            </a:pPr>
+            <a:r>
+              <a:rPr sz="1400"/>
               <a:t>    • Metinler: 'Ahmet', 'Ankara'</a:t>
             </a:r>
           </a:p>
           <a:p>
             <a:pPr lvl="1">
-              <a:spcAft>
-                <a:spcPts val="1200"/>
-              </a:spcAft>
-              <a:defRPr sz="1800"/>
-            </a:pPr>
-            <a:r>
-              <a:rPr sz="1600"/>
+              <a:lnSpc>
+                <a:spcPct val="90000"/>
+              </a:lnSpc>
+              <a:spcAft>
+                <a:spcPts val="300"/>
+              </a:spcAft>
+              <a:defRPr sz="1800"/>
+            </a:pPr>
+            <a:r>
+              <a:rPr sz="1400"/>
               <a:t>    • Tarihler: 15 Mayıs 2024</a:t>
             </a:r>
           </a:p>
           <a:p>
             <a:pPr lvl="1">
-              <a:spcAft>
-                <a:spcPts val="1200"/>
-              </a:spcAft>
-              <a:defRPr sz="1800"/>
-            </a:pPr>
-            <a:r>
-              <a:rPr sz="1600"/>
+              <a:lnSpc>
+                <a:spcPct val="90000"/>
+              </a:lnSpc>
+              <a:spcAft>
+                <a:spcPts val="300"/>
+              </a:spcAft>
+              <a:defRPr sz="1800"/>
+            </a:pPr>
+            <a:r>
+              <a:rPr sz="1400"/>
               <a:t>    • Ölçümler: 25°C, 1.65m</a:t>
             </a:r>
           </a:p>
           <a:p>
             <a:pPr>
-              <a:spcAft>
-                <a:spcPts val="1200"/>
-              </a:spcAft>
-              <a:defRPr sz="2000"/>
-            </a:pPr>
-          </a:p>
-          <a:p>
-            <a:pPr>
-              <a:spcAft>
-                <a:spcPts val="1200"/>
+              <a:lnSpc>
+                <a:spcPct val="90000"/>
+              </a:lnSpc>
+              <a:spcAft>
+                <a:spcPts val="300"/>
+              </a:spcAft>
+              <a:defRPr sz="2000"/>
+            </a:pPr>
+          </a:p>
+          <a:p>
+            <a:pPr>
+              <a:lnSpc>
+                <a:spcPct val="90000"/>
+              </a:lnSpc>
+              <a:spcAft>
+                <a:spcPts val="300"/>
               </a:spcAft>
               <a:defRPr sz="2000" b="1"/>
             </a:pPr>
             <a:r>
-              <a:rPr sz="1600"/>
+              <a:rPr sz="1400"/>
               <a:t>📌 Veri vs Bilgi:</a:t>
             </a:r>
           </a:p>
           <a:p>
             <a:pPr>
-              <a:spcAft>
-                <a:spcPts val="1200"/>
-              </a:spcAft>
-              <a:defRPr sz="2000"/>
-            </a:pPr>
-          </a:p>
-          <a:p>
-            <a:pPr>
-              <a:spcAft>
-                <a:spcPts val="1200"/>
-              </a:spcAft>
-              <a:defRPr sz="2000"/>
-            </a:pPr>
-            <a:r>
-              <a:rPr sz="1600"/>
+              <a:lnSpc>
+                <a:spcPct val="90000"/>
+              </a:lnSpc>
+              <a:spcAft>
+                <a:spcPts val="300"/>
+              </a:spcAft>
+              <a:defRPr sz="2000"/>
+            </a:pPr>
+          </a:p>
+          <a:p>
+            <a:pPr>
+              <a:lnSpc>
+                <a:spcPct val="90000"/>
+              </a:lnSpc>
+              <a:spcAft>
+                <a:spcPts val="300"/>
+              </a:spcAft>
+              <a:defRPr sz="2000"/>
+            </a:pPr>
+            <a:r>
+              <a:rPr sz="1400"/>
               <a:t>📄 Veri (Ham):</a:t>
             </a:r>
           </a:p>
           <a:p>
             <a:pPr lvl="1">
-              <a:spcAft>
-                <a:spcPts val="1200"/>
-              </a:spcAft>
-              <a:defRPr sz="1800"/>
-            </a:pPr>
-            <a:r>
-              <a:rPr sz="1600"/>
+              <a:lnSpc>
+                <a:spcPct val="90000"/>
+              </a:lnSpc>
+              <a:spcAft>
+                <a:spcPts val="300"/>
+              </a:spcAft>
+              <a:defRPr sz="1800"/>
+            </a:pPr>
+            <a:r>
+              <a:rPr sz="1400"/>
               <a:t>    • 15, 18, 12, 20, 16</a:t>
             </a:r>
           </a:p>
           <a:p>
             <a:pPr lvl="1">
-              <a:spcAft>
-                <a:spcPts val="1200"/>
-              </a:spcAft>
-              <a:defRPr sz="1800"/>
-            </a:pPr>
-            <a:r>
-              <a:rPr sz="1600"/>
+              <a:lnSpc>
+                <a:spcPct val="90000"/>
+              </a:lnSpc>
+              <a:spcAft>
+                <a:spcPts val="300"/>
+              </a:spcAft>
+              <a:defRPr sz="1800"/>
+            </a:pPr>
+            <a:r>
+              <a:rPr sz="1400"/>
               <a:t>    • Tek başına anlamsız</a:t>
             </a:r>
           </a:p>
           <a:p>
             <a:pPr>
-              <a:spcAft>
-                <a:spcPts val="1200"/>
-              </a:spcAft>
-              <a:defRPr sz="2000"/>
-            </a:pPr>
-          </a:p>
-          <a:p>
-            <a:pPr>
-              <a:spcAft>
-                <a:spcPts val="1200"/>
+              <a:lnSpc>
+                <a:spcPct val="90000"/>
+              </a:lnSpc>
+              <a:spcAft>
+                <a:spcPts val="300"/>
+              </a:spcAft>
+              <a:defRPr sz="2000"/>
+            </a:pPr>
+          </a:p>
+          <a:p>
+            <a:pPr>
+              <a:lnSpc>
+                <a:spcPct val="90000"/>
+              </a:lnSpc>
+              <a:spcAft>
+                <a:spcPts val="300"/>
               </a:spcAft>
               <a:defRPr sz="2000" b="1"/>
             </a:pPr>
             <a:r>
-              <a:rPr sz="1600"/>
+              <a:rPr sz="1400"/>
               <a:t>💡 Bilgi (İşlenmiş):</a:t>
             </a:r>
           </a:p>
           <a:p>
             <a:pPr lvl="1">
-              <a:spcAft>
-                <a:spcPts val="1200"/>
-              </a:spcAft>
-              <a:defRPr sz="1800"/>
-            </a:pPr>
-            <a:r>
-              <a:rPr sz="1600"/>
+              <a:lnSpc>
+                <a:spcPct val="90000"/>
+              </a:lnSpc>
+              <a:spcAft>
+                <a:spcPts val="300"/>
+              </a:spcAft>
+              <a:defRPr sz="1800"/>
+            </a:pPr>
+            <a:r>
+              <a:rPr sz="1400"/>
               <a:t>    • 'Sınıf ortalaması: 16.2'</a:t>
             </a:r>
           </a:p>
           <a:p>
             <a:pPr lvl="1">
-              <a:spcAft>
-                <a:spcPts val="1200"/>
-              </a:spcAft>
-              <a:defRPr sz="1800"/>
-            </a:pPr>
-            <a:r>
-              <a:rPr sz="1600"/>
+              <a:lnSpc>
+                <a:spcPct val="90000"/>
+              </a:lnSpc>
+              <a:spcAft>
+                <a:spcPts val="300"/>
+              </a:spcAft>
+              <a:defRPr sz="1800"/>
+            </a:pPr>
+            <a:r>
+              <a:rPr sz="1400"/>
               <a:t>    • Analiz edilmiş, anlamlı</a:t>
             </a:r>
           </a:p>
           <a:p>
             <a:pPr>
-              <a:spcAft>
-                <a:spcPts val="1200"/>
-              </a:spcAft>
-              <a:defRPr sz="2000"/>
-            </a:pPr>
-          </a:p>
-          <a:p>
-            <a:pPr>
-              <a:spcAft>
-                <a:spcPts val="1200"/>
+              <a:lnSpc>
+                <a:spcPct val="90000"/>
+              </a:lnSpc>
+              <a:spcAft>
+                <a:spcPts val="300"/>
+              </a:spcAft>
+              <a:defRPr sz="2000"/>
+            </a:pPr>
+          </a:p>
+          <a:p>
+            <a:pPr>
+              <a:lnSpc>
+                <a:spcPct val="90000"/>
+              </a:lnSpc>
+              <a:spcAft>
+                <a:spcPts val="300"/>
               </a:spcAft>
               <a:defRPr sz="2000" b="1"/>
             </a:pPr>
             <a:r>
-              <a:rPr sz="1600"/>
+              <a:rPr sz="1400"/>
               <a:t>🎯 Veri → İşleme → Bilgi → Bilgelik</a:t>
             </a:r>
           </a:p>
           <a:p>
             <a:pPr>
-              <a:spcAft>
-                <a:spcPts val="1200"/>
-              </a:spcAft>
-              <a:defRPr sz="2000"/>
-            </a:pPr>
-          </a:p>
-          <a:p>
-            <a:pPr>
-              <a:spcAft>
-                <a:spcPts val="1200"/>
+              <a:lnSpc>
+                <a:spcPct val="90000"/>
+              </a:lnSpc>
+              <a:spcAft>
+                <a:spcPts val="300"/>
+              </a:spcAft>
+              <a:defRPr sz="2000"/>
+            </a:pPr>
+          </a:p>
+          <a:p>
+            <a:pPr>
+              <a:lnSpc>
+                <a:spcPct val="90000"/>
+              </a:lnSpc>
+              <a:spcAft>
+                <a:spcPts val="300"/>
               </a:spcAft>
               <a:defRPr sz="2000" b="1"/>
             </a:pPr>
             <a:r>
-              <a:rPr sz="1600"/>
+              <a:rPr sz="1400"/>
               <a:t>💡 Gerçek Hayat Örneği:</a:t>
             </a:r>
           </a:p>
           <a:p>
             <a:pPr lvl="1">
-              <a:spcAft>
-                <a:spcPts val="1200"/>
-              </a:spcAft>
-              <a:defRPr sz="1800"/>
-            </a:pPr>
-            <a:r>
-              <a:rPr sz="1600"/>
+              <a:lnSpc>
+                <a:spcPct val="90000"/>
+              </a:lnSpc>
+              <a:spcAft>
+                <a:spcPts val="300"/>
+              </a:spcAft>
+              <a:defRPr sz="1800"/>
+            </a:pPr>
+            <a:r>
+              <a:rPr sz="1400"/>
               <a:t>    • Veri: Günlük sıcaklık kayıtları</a:t>
             </a:r>
           </a:p>
           <a:p>
             <a:pPr lvl="1">
-              <a:spcAft>
-                <a:spcPts val="1200"/>
-              </a:spcAft>
-              <a:defRPr sz="1800"/>
-            </a:pPr>
-            <a:r>
-              <a:rPr sz="1600"/>
+              <a:lnSpc>
+                <a:spcPct val="90000"/>
+              </a:lnSpc>
+              <a:spcAft>
+                <a:spcPts val="300"/>
+              </a:spcAft>
+              <a:defRPr sz="1800"/>
+            </a:pPr>
+            <a:r>
+              <a:rPr sz="1400"/>
               <a:t>    • Bilgi: 'Temmuz en sıcak ay'</a:t>
             </a:r>
           </a:p>
           <a:p>
             <a:pPr lvl="1">
-              <a:spcAft>
-                <a:spcPts val="1200"/>
-              </a:spcAft>
-              <a:defRPr sz="1800"/>
-            </a:pPr>
-            <a:r>
-              <a:rPr sz="1600"/>
+              <a:lnSpc>
+                <a:spcPct val="90000"/>
+              </a:lnSpc>
+              <a:spcAft>
+                <a:spcPts val="300"/>
+              </a:spcAft>
+              <a:defRPr sz="1800"/>
+            </a:pPr>
+            <a:r>
+              <a:rPr sz="1400"/>
               <a:t>    • Bilgelik: 'Klimayı Temmuz'da kullan'</a:t>
             </a:r>
           </a:p>
@@ -8930,7 +9688,7 @@
         </p:nvSpPr>
         <p:spPr/>
         <p:txBody>
-          <a:bodyPr/>
+          <a:bodyPr wrap="square"/>
           <a:lstStyle/>
           <a:p>
             <a:pPr>
@@ -8984,312 +9742,405 @@
             <a:spAutoFit/>
           </a:bodyPr>
           <a:lstStyle/>
-          <a:p/>
-          <a:p>
-            <a:pPr>
-              <a:spcAft>
-                <a:spcPts val="1200"/>
-              </a:spcAft>
-              <a:defRPr sz="2000"/>
-            </a:pPr>
-            <a:r>
-              <a:rPr sz="1400"/>
+          <a:p>
+            <a:pPr>
+              <a:lnSpc>
+                <a:spcPct val="90000"/>
+              </a:lnSpc>
+              <a:spcAft>
+                <a:spcPts val="300"/>
+              </a:spcAft>
+            </a:pPr>
+          </a:p>
+          <a:p>
+            <a:pPr>
+              <a:lnSpc>
+                <a:spcPct val="90000"/>
+              </a:lnSpc>
+              <a:spcAft>
+                <a:spcPts val="300"/>
+              </a:spcAft>
+              <a:defRPr sz="2000"/>
+            </a:pPr>
+            <a:r>
+              <a:rPr sz="1300"/>
               <a:t>Veriyi nereden ve nasıl toplarız?</a:t>
             </a:r>
           </a:p>
           <a:p>
             <a:pPr>
-              <a:spcAft>
-                <a:spcPts val="1200"/>
-              </a:spcAft>
-              <a:defRPr sz="2000"/>
-            </a:pPr>
-          </a:p>
-          <a:p>
-            <a:pPr>
-              <a:spcAft>
-                <a:spcPts val="1200"/>
+              <a:lnSpc>
+                <a:spcPct val="90000"/>
+              </a:lnSpc>
+              <a:spcAft>
+                <a:spcPts val="300"/>
+              </a:spcAft>
+              <a:defRPr sz="2000"/>
+            </a:pPr>
+          </a:p>
+          <a:p>
+            <a:pPr>
+              <a:lnSpc>
+                <a:spcPct val="90000"/>
+              </a:lnSpc>
+              <a:spcAft>
+                <a:spcPts val="300"/>
               </a:spcAft>
               <a:defRPr sz="2000" b="1"/>
             </a:pPr>
             <a:r>
-              <a:rPr sz="1400"/>
+              <a:rPr sz="1300"/>
               <a:t>✅ Veri Toplama Yöntemleri:</a:t>
             </a:r>
           </a:p>
           <a:p>
             <a:pPr>
-              <a:spcAft>
-                <a:spcPts val="1200"/>
-              </a:spcAft>
-              <a:defRPr sz="2000"/>
-            </a:pPr>
-          </a:p>
-          <a:p>
-            <a:pPr>
-              <a:spcAft>
-                <a:spcPts val="1200"/>
-              </a:spcAft>
-              <a:defRPr sz="2000"/>
-            </a:pPr>
-            <a:r>
-              <a:rPr sz="1400"/>
+              <a:lnSpc>
+                <a:spcPct val="90000"/>
+              </a:lnSpc>
+              <a:spcAft>
+                <a:spcPts val="300"/>
+              </a:spcAft>
+              <a:defRPr sz="2000"/>
+            </a:pPr>
+          </a:p>
+          <a:p>
+            <a:pPr>
+              <a:lnSpc>
+                <a:spcPct val="90000"/>
+              </a:lnSpc>
+              <a:spcAft>
+                <a:spcPts val="300"/>
+              </a:spcAft>
+              <a:defRPr sz="2000"/>
+            </a:pPr>
+            <a:r>
+              <a:rPr sz="1300"/>
               <a:t>📋 Anket:</a:t>
             </a:r>
           </a:p>
           <a:p>
             <a:pPr lvl="1">
-              <a:spcAft>
-                <a:spcPts val="1200"/>
-              </a:spcAft>
-              <a:defRPr sz="1800"/>
-            </a:pPr>
-            <a:r>
-              <a:rPr sz="1400"/>
+              <a:lnSpc>
+                <a:spcPct val="90000"/>
+              </a:lnSpc>
+              <a:spcAft>
+                <a:spcPts val="300"/>
+              </a:spcAft>
+              <a:defRPr sz="1800"/>
+            </a:pPr>
+            <a:r>
+              <a:rPr sz="1300"/>
               <a:t>    • Sorular sor, cevapları topla</a:t>
             </a:r>
           </a:p>
           <a:p>
             <a:pPr lvl="1">
-              <a:spcAft>
-                <a:spcPts val="1200"/>
-              </a:spcAft>
-              <a:defRPr sz="1800"/>
-            </a:pPr>
-            <a:r>
-              <a:rPr sz="1400"/>
+              <a:lnSpc>
+                <a:spcPct val="90000"/>
+              </a:lnSpc>
+              <a:spcAft>
+                <a:spcPts val="300"/>
+              </a:spcAft>
+              <a:defRPr sz="1800"/>
+            </a:pPr>
+            <a:r>
+              <a:rPr sz="1300"/>
               <a:t>    • Örnek: 'Favori renginiz nedir?'</a:t>
             </a:r>
           </a:p>
           <a:p>
             <a:pPr>
-              <a:spcAft>
-                <a:spcPts val="1200"/>
-              </a:spcAft>
-              <a:defRPr sz="2000"/>
-            </a:pPr>
-          </a:p>
-          <a:p>
-            <a:pPr>
-              <a:spcAft>
-                <a:spcPts val="1200"/>
-              </a:spcAft>
-              <a:defRPr sz="2000"/>
-            </a:pPr>
-            <a:r>
-              <a:rPr sz="1400"/>
+              <a:lnSpc>
+                <a:spcPct val="90000"/>
+              </a:lnSpc>
+              <a:spcAft>
+                <a:spcPts val="300"/>
+              </a:spcAft>
+              <a:defRPr sz="2000"/>
+            </a:pPr>
+          </a:p>
+          <a:p>
+            <a:pPr>
+              <a:lnSpc>
+                <a:spcPct val="90000"/>
+              </a:lnSpc>
+              <a:spcAft>
+                <a:spcPts val="300"/>
+              </a:spcAft>
+              <a:defRPr sz="2000"/>
+            </a:pPr>
+            <a:r>
+              <a:rPr sz="1300"/>
               <a:t>👀 Gözlem:</a:t>
             </a:r>
           </a:p>
           <a:p>
             <a:pPr lvl="1">
-              <a:spcAft>
-                <a:spcPts val="1200"/>
-              </a:spcAft>
-              <a:defRPr sz="1800"/>
-            </a:pPr>
-            <a:r>
-              <a:rPr sz="1400"/>
+              <a:lnSpc>
+                <a:spcPct val="90000"/>
+              </a:lnSpc>
+              <a:spcAft>
+                <a:spcPts val="300"/>
+              </a:spcAft>
+              <a:defRPr sz="1800"/>
+            </a:pPr>
+            <a:r>
+              <a:rPr sz="1300"/>
               <a:t>    • İzle ve kaydet</a:t>
             </a:r>
           </a:p>
           <a:p>
             <a:pPr lvl="1">
-              <a:spcAft>
-                <a:spcPts val="1200"/>
-              </a:spcAft>
-              <a:defRPr sz="1800"/>
-            </a:pPr>
-            <a:r>
-              <a:rPr sz="1400"/>
+              <a:lnSpc>
+                <a:spcPct val="90000"/>
+              </a:lnSpc>
+              <a:spcAft>
+                <a:spcPts val="300"/>
+              </a:spcAft>
+              <a:defRPr sz="1800"/>
+            </a:pPr>
+            <a:r>
+              <a:rPr sz="1300"/>
               <a:t>    • Örnek: Trafikteki araç sayısı</a:t>
             </a:r>
           </a:p>
           <a:p>
             <a:pPr>
-              <a:spcAft>
-                <a:spcPts val="1200"/>
-              </a:spcAft>
-              <a:defRPr sz="2000"/>
-            </a:pPr>
-          </a:p>
-          <a:p>
-            <a:pPr>
-              <a:spcAft>
-                <a:spcPts val="1200"/>
-              </a:spcAft>
-              <a:defRPr sz="2000"/>
-            </a:pPr>
-            <a:r>
-              <a:rPr sz="1400"/>
+              <a:lnSpc>
+                <a:spcPct val="90000"/>
+              </a:lnSpc>
+              <a:spcAft>
+                <a:spcPts val="300"/>
+              </a:spcAft>
+              <a:defRPr sz="2000"/>
+            </a:pPr>
+          </a:p>
+          <a:p>
+            <a:pPr>
+              <a:lnSpc>
+                <a:spcPct val="90000"/>
+              </a:lnSpc>
+              <a:spcAft>
+                <a:spcPts val="300"/>
+              </a:spcAft>
+              <a:defRPr sz="2000"/>
+            </a:pPr>
+            <a:r>
+              <a:rPr sz="1300"/>
               <a:t>🧪 Deney:</a:t>
             </a:r>
           </a:p>
           <a:p>
             <a:pPr lvl="1">
-              <a:spcAft>
-                <a:spcPts val="1200"/>
-              </a:spcAft>
-              <a:defRPr sz="1800"/>
-            </a:pPr>
-            <a:r>
-              <a:rPr sz="1400"/>
+              <a:lnSpc>
+                <a:spcPct val="90000"/>
+              </a:lnSpc>
+              <a:spcAft>
+                <a:spcPts val="300"/>
+              </a:spcAft>
+              <a:defRPr sz="1800"/>
+            </a:pPr>
+            <a:r>
+              <a:rPr sz="1300"/>
               <a:t>    • Test yap, sonuçları kaydet</a:t>
             </a:r>
           </a:p>
           <a:p>
             <a:pPr lvl="1">
-              <a:spcAft>
-                <a:spcPts val="1200"/>
-              </a:spcAft>
-              <a:defRPr sz="1800"/>
-            </a:pPr>
-            <a:r>
-              <a:rPr sz="1400"/>
+              <a:lnSpc>
+                <a:spcPct val="90000"/>
+              </a:lnSpc>
+              <a:spcAft>
+                <a:spcPts val="300"/>
+              </a:spcAft>
+              <a:defRPr sz="1800"/>
+            </a:pPr>
+            <a:r>
+              <a:rPr sz="1300"/>
               <a:t>    • Örnek: Bitki büyümesi ölçümü</a:t>
             </a:r>
           </a:p>
           <a:p>
             <a:pPr>
-              <a:spcAft>
-                <a:spcPts val="1200"/>
-              </a:spcAft>
-              <a:defRPr sz="2000"/>
-            </a:pPr>
-          </a:p>
-          <a:p>
-            <a:pPr>
-              <a:spcAft>
-                <a:spcPts val="1200"/>
-              </a:spcAft>
-              <a:defRPr sz="2000"/>
-            </a:pPr>
-            <a:r>
-              <a:rPr sz="1400"/>
+              <a:lnSpc>
+                <a:spcPct val="90000"/>
+              </a:lnSpc>
+              <a:spcAft>
+                <a:spcPts val="300"/>
+              </a:spcAft>
+              <a:defRPr sz="2000"/>
+            </a:pPr>
+          </a:p>
+          <a:p>
+            <a:pPr>
+              <a:lnSpc>
+                <a:spcPct val="90000"/>
+              </a:lnSpc>
+              <a:spcAft>
+                <a:spcPts val="300"/>
+              </a:spcAft>
+              <a:defRPr sz="2000"/>
+            </a:pPr>
+            <a:r>
+              <a:rPr sz="1300"/>
               <a:t>📱 Sensörler:</a:t>
             </a:r>
           </a:p>
           <a:p>
             <a:pPr lvl="1">
-              <a:spcAft>
-                <a:spcPts val="1200"/>
-              </a:spcAft>
-              <a:defRPr sz="1800"/>
-            </a:pPr>
-            <a:r>
-              <a:rPr sz="1400"/>
+              <a:lnSpc>
+                <a:spcPct val="90000"/>
+              </a:lnSpc>
+              <a:spcAft>
+                <a:spcPts val="300"/>
+              </a:spcAft>
+              <a:defRPr sz="1800"/>
+            </a:pPr>
+            <a:r>
+              <a:rPr sz="1300"/>
               <a:t>    • Otomatik veri toplama</a:t>
             </a:r>
           </a:p>
           <a:p>
             <a:pPr lvl="1">
-              <a:spcAft>
-                <a:spcPts val="1200"/>
-              </a:spcAft>
-              <a:defRPr sz="1800"/>
-            </a:pPr>
-            <a:r>
-              <a:rPr sz="1400"/>
+              <a:lnSpc>
+                <a:spcPct val="90000"/>
+              </a:lnSpc>
+              <a:spcAft>
+                <a:spcPts val="300"/>
+              </a:spcAft>
+              <a:defRPr sz="1800"/>
+            </a:pPr>
+            <a:r>
+              <a:rPr sz="1300"/>
               <a:t>    • Örnek: Sıcaklık sensörü</a:t>
             </a:r>
           </a:p>
           <a:p>
             <a:pPr>
-              <a:spcAft>
-                <a:spcPts val="1200"/>
-              </a:spcAft>
-              <a:defRPr sz="2000"/>
-            </a:pPr>
-          </a:p>
-          <a:p>
-            <a:pPr>
-              <a:spcAft>
-                <a:spcPts val="1200"/>
-              </a:spcAft>
-              <a:defRPr sz="2000"/>
-            </a:pPr>
-            <a:r>
-              <a:rPr sz="1400"/>
+              <a:lnSpc>
+                <a:spcPct val="90000"/>
+              </a:lnSpc>
+              <a:spcAft>
+                <a:spcPts val="300"/>
+              </a:spcAft>
+              <a:defRPr sz="2000"/>
+            </a:pPr>
+          </a:p>
+          <a:p>
+            <a:pPr>
+              <a:lnSpc>
+                <a:spcPct val="90000"/>
+              </a:lnSpc>
+              <a:spcAft>
+                <a:spcPts val="300"/>
+              </a:spcAft>
+              <a:defRPr sz="2000"/>
+            </a:pPr>
+            <a:r>
+              <a:rPr sz="1300"/>
               <a:t>🌐 İnternet:</a:t>
             </a:r>
           </a:p>
           <a:p>
             <a:pPr lvl="1">
-              <a:spcAft>
-                <a:spcPts val="1200"/>
-              </a:spcAft>
-              <a:defRPr sz="1800"/>
-            </a:pPr>
-            <a:r>
-              <a:rPr sz="1400"/>
+              <a:lnSpc>
+                <a:spcPct val="90000"/>
+              </a:lnSpc>
+              <a:spcAft>
+                <a:spcPts val="300"/>
+              </a:spcAft>
+              <a:defRPr sz="1800"/>
+            </a:pPr>
+            <a:r>
+              <a:rPr sz="1300"/>
               <a:t>    • Hazır veri setleri</a:t>
             </a:r>
           </a:p>
           <a:p>
             <a:pPr lvl="1">
-              <a:spcAft>
-                <a:spcPts val="1200"/>
-              </a:spcAft>
-              <a:defRPr sz="1800"/>
-            </a:pPr>
-            <a:r>
-              <a:rPr sz="1400"/>
+              <a:lnSpc>
+                <a:spcPct val="90000"/>
+              </a:lnSpc>
+              <a:spcAft>
+                <a:spcPts val="300"/>
+              </a:spcAft>
+              <a:defRPr sz="1800"/>
+            </a:pPr>
+            <a:r>
+              <a:rPr sz="1300"/>
               <a:t>    • Örnek: Hava durumu verileri</a:t>
             </a:r>
           </a:p>
           <a:p>
             <a:pPr>
-              <a:spcAft>
-                <a:spcPts val="1200"/>
-              </a:spcAft>
-              <a:defRPr sz="2000"/>
-            </a:pPr>
-          </a:p>
-          <a:p>
-            <a:pPr>
-              <a:spcAft>
-                <a:spcPts val="1200"/>
+              <a:lnSpc>
+                <a:spcPct val="90000"/>
+              </a:lnSpc>
+              <a:spcAft>
+                <a:spcPts val="300"/>
+              </a:spcAft>
+              <a:defRPr sz="2000"/>
+            </a:pPr>
+          </a:p>
+          <a:p>
+            <a:pPr>
+              <a:lnSpc>
+                <a:spcPct val="90000"/>
+              </a:lnSpc>
+              <a:spcAft>
+                <a:spcPts val="300"/>
               </a:spcAft>
               <a:defRPr sz="2000" b="1"/>
             </a:pPr>
             <a:r>
-              <a:rPr sz="1400"/>
+              <a:rPr sz="1300"/>
               <a:t>💡 Veri toplama planlı olmalı:</a:t>
             </a:r>
           </a:p>
           <a:p>
             <a:pPr lvl="1">
-              <a:spcAft>
-                <a:spcPts val="1200"/>
-              </a:spcAft>
-              <a:defRPr sz="1800"/>
-            </a:pPr>
-            <a:r>
-              <a:rPr sz="1400"/>
+              <a:lnSpc>
+                <a:spcPct val="90000"/>
+              </a:lnSpc>
+              <a:spcAft>
+                <a:spcPts val="300"/>
+              </a:spcAft>
+              <a:defRPr sz="1800"/>
+            </a:pPr>
+            <a:r>
+              <a:rPr sz="1300"/>
               <a:t>    • Ne öğrenmek istiyorsun?</a:t>
             </a:r>
           </a:p>
           <a:p>
             <a:pPr lvl="1">
-              <a:spcAft>
-                <a:spcPts val="1200"/>
-              </a:spcAft>
-              <a:defRPr sz="1800"/>
-            </a:pPr>
-            <a:r>
-              <a:rPr sz="1400"/>
+              <a:lnSpc>
+                <a:spcPct val="90000"/>
+              </a:lnSpc>
+              <a:spcAft>
+                <a:spcPts val="300"/>
+              </a:spcAft>
+              <a:defRPr sz="1800"/>
+            </a:pPr>
+            <a:r>
+              <a:rPr sz="1300"/>
               <a:t>    • Hangi veriyi toplayacaksın?</a:t>
             </a:r>
           </a:p>
           <a:p>
             <a:pPr lvl="1">
-              <a:spcAft>
-                <a:spcPts val="1200"/>
-              </a:spcAft>
-              <a:defRPr sz="1800"/>
-            </a:pPr>
-            <a:r>
-              <a:rPr sz="1400"/>
+              <a:lnSpc>
+                <a:spcPct val="90000"/>
+              </a:lnSpc>
+              <a:spcAft>
+                <a:spcPts val="300"/>
+              </a:spcAft>
+              <a:defRPr sz="1800"/>
+            </a:pPr>
+            <a:r>
+              <a:rPr sz="1300"/>
               <a:t>    • Nasıl toplayacaksın?</a:t>
             </a:r>
           </a:p>
@@ -9325,7 +10176,7 @@
         </p:nvSpPr>
         <p:spPr/>
         <p:txBody>
-          <a:bodyPr/>
+          <a:bodyPr wrap="square"/>
           <a:lstStyle/>
           <a:p>
             <a:pPr>
@@ -9379,288 +10230,375 @@
             <a:spAutoFit/>
           </a:bodyPr>
           <a:lstStyle/>
-          <a:p/>
-          <a:p>
-            <a:pPr>
-              <a:spcAft>
-                <a:spcPts val="1200"/>
-              </a:spcAft>
-              <a:defRPr sz="2000"/>
-            </a:pPr>
-            <a:r>
-              <a:rPr sz="1600"/>
+          <a:p>
+            <a:pPr>
+              <a:lnSpc>
+                <a:spcPct val="90000"/>
+              </a:lnSpc>
+              <a:spcAft>
+                <a:spcPts val="300"/>
+              </a:spcAft>
+            </a:pPr>
+          </a:p>
+          <a:p>
+            <a:pPr>
+              <a:lnSpc>
+                <a:spcPct val="90000"/>
+              </a:lnSpc>
+              <a:spcAft>
+                <a:spcPts val="300"/>
+              </a:spcAft>
+              <a:defRPr sz="2000"/>
+            </a:pPr>
+            <a:r>
+              <a:rPr sz="1400"/>
               <a:t>Veriler farklı türlerde olabilir</a:t>
             </a:r>
           </a:p>
           <a:p>
             <a:pPr>
-              <a:spcAft>
-                <a:spcPts val="1200"/>
-              </a:spcAft>
-              <a:defRPr sz="2000"/>
-            </a:pPr>
-          </a:p>
-          <a:p>
-            <a:pPr>
-              <a:spcAft>
-                <a:spcPts val="1200"/>
+              <a:lnSpc>
+                <a:spcPct val="90000"/>
+              </a:lnSpc>
+              <a:spcAft>
+                <a:spcPts val="300"/>
+              </a:spcAft>
+              <a:defRPr sz="2000"/>
+            </a:pPr>
+          </a:p>
+          <a:p>
+            <a:pPr>
+              <a:lnSpc>
+                <a:spcPct val="90000"/>
+              </a:lnSpc>
+              <a:spcAft>
+                <a:spcPts val="300"/>
               </a:spcAft>
               <a:defRPr sz="2000" b="1"/>
             </a:pPr>
             <a:r>
-              <a:rPr sz="1600"/>
+              <a:rPr sz="1400"/>
               <a:t>✅ 1. Sayısal Veri (Nicel):</a:t>
             </a:r>
           </a:p>
           <a:p>
             <a:pPr>
-              <a:spcAft>
-                <a:spcPts val="1200"/>
-              </a:spcAft>
-              <a:defRPr sz="2000"/>
-            </a:pPr>
-          </a:p>
-          <a:p>
-            <a:pPr>
-              <a:spcAft>
-                <a:spcPts val="1200"/>
-              </a:spcAft>
-              <a:defRPr sz="2000"/>
-            </a:pPr>
-            <a:r>
-              <a:rPr sz="1600"/>
+              <a:lnSpc>
+                <a:spcPct val="90000"/>
+              </a:lnSpc>
+              <a:spcAft>
+                <a:spcPts val="300"/>
+              </a:spcAft>
+              <a:defRPr sz="2000"/>
+            </a:pPr>
+          </a:p>
+          <a:p>
+            <a:pPr>
+              <a:lnSpc>
+                <a:spcPct val="90000"/>
+              </a:lnSpc>
+              <a:spcAft>
+                <a:spcPts val="300"/>
+              </a:spcAft>
+              <a:defRPr sz="2000"/>
+            </a:pPr>
+            <a:r>
+              <a:rPr sz="1400"/>
               <a:t>🔢 Kesikli Veri:</a:t>
             </a:r>
           </a:p>
           <a:p>
             <a:pPr lvl="1">
-              <a:spcAft>
-                <a:spcPts val="1200"/>
-              </a:spcAft>
-              <a:defRPr sz="1800"/>
-            </a:pPr>
-            <a:r>
-              <a:rPr sz="1600"/>
+              <a:lnSpc>
+                <a:spcPct val="90000"/>
+              </a:lnSpc>
+              <a:spcAft>
+                <a:spcPts val="300"/>
+              </a:spcAft>
+              <a:defRPr sz="1800"/>
+            </a:pPr>
+            <a:r>
+              <a:rPr sz="1400"/>
               <a:t>    • Tamsayılar</a:t>
             </a:r>
           </a:p>
           <a:p>
             <a:pPr lvl="1">
-              <a:spcAft>
-                <a:spcPts val="1200"/>
-              </a:spcAft>
-              <a:defRPr sz="1800"/>
-            </a:pPr>
-            <a:r>
-              <a:rPr sz="1600"/>
+              <a:lnSpc>
+                <a:spcPct val="90000"/>
+              </a:lnSpc>
+              <a:spcAft>
+                <a:spcPts val="300"/>
+              </a:spcAft>
+              <a:defRPr sz="1800"/>
+            </a:pPr>
+            <a:r>
+              <a:rPr sz="1400"/>
               <a:t>    • Örnek: Öğrenci sayısı (25, 30, 28)</a:t>
             </a:r>
           </a:p>
           <a:p>
             <a:pPr>
-              <a:spcAft>
-                <a:spcPts val="1200"/>
-              </a:spcAft>
-              <a:defRPr sz="2000"/>
-            </a:pPr>
-          </a:p>
-          <a:p>
-            <a:pPr>
-              <a:spcAft>
-                <a:spcPts val="1200"/>
-              </a:spcAft>
-              <a:defRPr sz="2000"/>
-            </a:pPr>
-            <a:r>
-              <a:rPr sz="1600"/>
+              <a:lnSpc>
+                <a:spcPct val="90000"/>
+              </a:lnSpc>
+              <a:spcAft>
+                <a:spcPts val="300"/>
+              </a:spcAft>
+              <a:defRPr sz="2000"/>
+            </a:pPr>
+          </a:p>
+          <a:p>
+            <a:pPr>
+              <a:lnSpc>
+                <a:spcPct val="90000"/>
+              </a:lnSpc>
+              <a:spcAft>
+                <a:spcPts val="300"/>
+              </a:spcAft>
+              <a:defRPr sz="2000"/>
+            </a:pPr>
+            <a:r>
+              <a:rPr sz="1400"/>
               <a:t>📏 Sürekli Veri:</a:t>
             </a:r>
           </a:p>
           <a:p>
             <a:pPr lvl="1">
-              <a:spcAft>
-                <a:spcPts val="1200"/>
-              </a:spcAft>
-              <a:defRPr sz="1800"/>
-            </a:pPr>
-            <a:r>
-              <a:rPr sz="1600"/>
+              <a:lnSpc>
+                <a:spcPct val="90000"/>
+              </a:lnSpc>
+              <a:spcAft>
+                <a:spcPts val="300"/>
+              </a:spcAft>
+              <a:defRPr sz="1800"/>
+            </a:pPr>
+            <a:r>
+              <a:rPr sz="1400"/>
               <a:t>    • Ondalıklı sayılar</a:t>
             </a:r>
           </a:p>
           <a:p>
             <a:pPr lvl="1">
-              <a:spcAft>
-                <a:spcPts val="1200"/>
-              </a:spcAft>
-              <a:defRPr sz="1800"/>
-            </a:pPr>
-            <a:r>
-              <a:rPr sz="1600"/>
+              <a:lnSpc>
+                <a:spcPct val="90000"/>
+              </a:lnSpc>
+              <a:spcAft>
+                <a:spcPts val="300"/>
+              </a:spcAft>
+              <a:defRPr sz="1800"/>
+            </a:pPr>
+            <a:r>
+              <a:rPr sz="1400"/>
               <a:t>    • Örnek: Boy (1.65m), Ağırlık (52.5kg)</a:t>
             </a:r>
           </a:p>
           <a:p>
             <a:pPr>
-              <a:spcAft>
-                <a:spcPts val="1200"/>
-              </a:spcAft>
-              <a:defRPr sz="2000"/>
-            </a:pPr>
-          </a:p>
-          <a:p>
-            <a:pPr>
-              <a:spcAft>
-                <a:spcPts val="1200"/>
+              <a:lnSpc>
+                <a:spcPct val="90000"/>
+              </a:lnSpc>
+              <a:spcAft>
+                <a:spcPts val="300"/>
+              </a:spcAft>
+              <a:defRPr sz="2000"/>
+            </a:pPr>
+          </a:p>
+          <a:p>
+            <a:pPr>
+              <a:lnSpc>
+                <a:spcPct val="90000"/>
+              </a:lnSpc>
+              <a:spcAft>
+                <a:spcPts val="300"/>
               </a:spcAft>
               <a:defRPr sz="2000" b="1"/>
             </a:pPr>
             <a:r>
-              <a:rPr sz="1600"/>
+              <a:rPr sz="1400"/>
               <a:t>✅ 2. Kategorik Veri (Nitel):</a:t>
             </a:r>
           </a:p>
           <a:p>
             <a:pPr>
-              <a:spcAft>
-                <a:spcPts val="1200"/>
-              </a:spcAft>
-              <a:defRPr sz="2000"/>
-            </a:pPr>
-          </a:p>
-          <a:p>
-            <a:pPr>
-              <a:spcAft>
-                <a:spcPts val="1200"/>
-              </a:spcAft>
-              <a:defRPr sz="2000"/>
-            </a:pPr>
-            <a:r>
-              <a:rPr sz="1600"/>
+              <a:lnSpc>
+                <a:spcPct val="90000"/>
+              </a:lnSpc>
+              <a:spcAft>
+                <a:spcPts val="300"/>
+              </a:spcAft>
+              <a:defRPr sz="2000"/>
+            </a:pPr>
+          </a:p>
+          <a:p>
+            <a:pPr>
+              <a:lnSpc>
+                <a:spcPct val="90000"/>
+              </a:lnSpc>
+              <a:spcAft>
+                <a:spcPts val="300"/>
+              </a:spcAft>
+              <a:defRPr sz="2000"/>
+            </a:pPr>
+            <a:r>
+              <a:rPr sz="1400"/>
               <a:t>🏷️ İsimsel:</a:t>
             </a:r>
           </a:p>
           <a:p>
             <a:pPr lvl="1">
-              <a:spcAft>
-                <a:spcPts val="1200"/>
-              </a:spcAft>
-              <a:defRPr sz="1800"/>
-            </a:pPr>
-            <a:r>
-              <a:rPr sz="1600"/>
+              <a:lnSpc>
+                <a:spcPct val="90000"/>
+              </a:lnSpc>
+              <a:spcAft>
+                <a:spcPts val="300"/>
+              </a:spcAft>
+              <a:defRPr sz="1800"/>
+            </a:pPr>
+            <a:r>
+              <a:rPr sz="1400"/>
               <a:t>    • Sıralama yok</a:t>
             </a:r>
           </a:p>
           <a:p>
             <a:pPr lvl="1">
-              <a:spcAft>
-                <a:spcPts val="1200"/>
-              </a:spcAft>
-              <a:defRPr sz="1800"/>
-            </a:pPr>
-            <a:r>
-              <a:rPr sz="1600"/>
+              <a:lnSpc>
+                <a:spcPct val="90000"/>
+              </a:lnSpc>
+              <a:spcAft>
+                <a:spcPts val="300"/>
+              </a:spcAft>
+              <a:defRPr sz="1800"/>
+            </a:pPr>
+            <a:r>
+              <a:rPr sz="1400"/>
               <a:t>    • Örnek: Renk (kırmızı, mavi), Cinsiyet</a:t>
             </a:r>
           </a:p>
           <a:p>
             <a:pPr>
-              <a:spcAft>
-                <a:spcPts val="1200"/>
-              </a:spcAft>
-              <a:defRPr sz="2000"/>
-            </a:pPr>
-          </a:p>
-          <a:p>
-            <a:pPr>
-              <a:spcAft>
-                <a:spcPts val="1200"/>
-              </a:spcAft>
-              <a:defRPr sz="2000"/>
-            </a:pPr>
-            <a:r>
-              <a:rPr sz="1600"/>
+              <a:lnSpc>
+                <a:spcPct val="90000"/>
+              </a:lnSpc>
+              <a:spcAft>
+                <a:spcPts val="300"/>
+              </a:spcAft>
+              <a:defRPr sz="2000"/>
+            </a:pPr>
+          </a:p>
+          <a:p>
+            <a:pPr>
+              <a:lnSpc>
+                <a:spcPct val="90000"/>
+              </a:lnSpc>
+              <a:spcAft>
+                <a:spcPts val="300"/>
+              </a:spcAft>
+              <a:defRPr sz="2000"/>
+            </a:pPr>
+            <a:r>
+              <a:rPr sz="1400"/>
               <a:t>📊 Sıralı:</a:t>
             </a:r>
           </a:p>
           <a:p>
             <a:pPr lvl="1">
-              <a:spcAft>
-                <a:spcPts val="1200"/>
-              </a:spcAft>
-              <a:defRPr sz="1800"/>
-            </a:pPr>
-            <a:r>
-              <a:rPr sz="1600"/>
+              <a:lnSpc>
+                <a:spcPct val="90000"/>
+              </a:lnSpc>
+              <a:spcAft>
+                <a:spcPts val="300"/>
+              </a:spcAft>
+              <a:defRPr sz="1800"/>
+            </a:pPr>
+            <a:r>
+              <a:rPr sz="1400"/>
               <a:t>    • Sıralama var</a:t>
             </a:r>
           </a:p>
           <a:p>
             <a:pPr lvl="1">
-              <a:spcAft>
-                <a:spcPts val="1200"/>
-              </a:spcAft>
-              <a:defRPr sz="1800"/>
-            </a:pPr>
-            <a:r>
-              <a:rPr sz="1600"/>
+              <a:lnSpc>
+                <a:spcPct val="90000"/>
+              </a:lnSpc>
+              <a:spcAft>
+                <a:spcPts val="300"/>
+              </a:spcAft>
+              <a:defRPr sz="1800"/>
+            </a:pPr>
+            <a:r>
+              <a:rPr sz="1400"/>
               <a:t>    • Örnek: Not (Pekiyi, İyi, Orta)</a:t>
             </a:r>
           </a:p>
           <a:p>
             <a:pPr>
-              <a:spcAft>
-                <a:spcPts val="1200"/>
-              </a:spcAft>
-              <a:defRPr sz="2000"/>
-            </a:pPr>
-          </a:p>
-          <a:p>
-            <a:pPr>
-              <a:spcAft>
-                <a:spcPts val="1200"/>
+              <a:lnSpc>
+                <a:spcPct val="90000"/>
+              </a:lnSpc>
+              <a:spcAft>
+                <a:spcPts val="300"/>
+              </a:spcAft>
+              <a:defRPr sz="2000"/>
+            </a:pPr>
+          </a:p>
+          <a:p>
+            <a:pPr>
+              <a:lnSpc>
+                <a:spcPct val="90000"/>
+              </a:lnSpc>
+              <a:spcAft>
+                <a:spcPts val="300"/>
               </a:spcAft>
               <a:defRPr sz="2000" b="1"/>
             </a:pPr>
             <a:r>
-              <a:rPr sz="1600"/>
+              <a:rPr sz="1400"/>
               <a:t>💡 Neden Önemli?</a:t>
             </a:r>
           </a:p>
           <a:p>
             <a:pPr lvl="1">
-              <a:spcAft>
-                <a:spcPts val="1200"/>
-              </a:spcAft>
-              <a:defRPr sz="1800"/>
-            </a:pPr>
-            <a:r>
-              <a:rPr sz="1600"/>
+              <a:lnSpc>
+                <a:spcPct val="90000"/>
+              </a:lnSpc>
+              <a:spcAft>
+                <a:spcPts val="300"/>
+              </a:spcAft>
+              <a:defRPr sz="1800"/>
+            </a:pPr>
+            <a:r>
+              <a:rPr sz="1400"/>
               <a:t>    • Farklı veri türleri → Farklı analizler</a:t>
             </a:r>
           </a:p>
           <a:p>
             <a:pPr lvl="1">
-              <a:spcAft>
-                <a:spcPts val="1200"/>
-              </a:spcAft>
-              <a:defRPr sz="1800"/>
-            </a:pPr>
-            <a:r>
-              <a:rPr sz="1600"/>
+              <a:lnSpc>
+                <a:spcPct val="90000"/>
+              </a:lnSpc>
+              <a:spcAft>
+                <a:spcPts val="300"/>
+              </a:spcAft>
+              <a:defRPr sz="1800"/>
+            </a:pPr>
+            <a:r>
+              <a:rPr sz="1400"/>
               <a:t>    • Sayısal: Ortalama alınabilir</a:t>
             </a:r>
           </a:p>
           <a:p>
             <a:pPr lvl="1">
-              <a:spcAft>
-                <a:spcPts val="1200"/>
-              </a:spcAft>
-              <a:defRPr sz="1800"/>
-            </a:pPr>
-            <a:r>
-              <a:rPr sz="1600"/>
+              <a:lnSpc>
+                <a:spcPct val="90000"/>
+              </a:lnSpc>
+              <a:spcAft>
+                <a:spcPts val="300"/>
+              </a:spcAft>
+              <a:defRPr sz="1800"/>
+            </a:pPr>
+            <a:r>
+              <a:rPr sz="1400"/>
               <a:t>    • Kategorik: Frekans sayılır</a:t>
             </a:r>
           </a:p>
@@ -9696,7 +10634,7 @@
         </p:nvSpPr>
         <p:spPr/>
         <p:txBody>
-          <a:bodyPr/>
+          <a:bodyPr wrap="square"/>
           <a:lstStyle/>
           <a:p>
             <a:pPr>
@@ -9750,324 +10688,420 @@
             <a:spAutoFit/>
           </a:bodyPr>
           <a:lstStyle/>
-          <a:p/>
-          <a:p>
-            <a:pPr>
-              <a:spcAft>
-                <a:spcPts val="1200"/>
-              </a:spcAft>
-              <a:defRPr sz="2000"/>
-            </a:pPr>
-            <a:r>
-              <a:rPr sz="1400"/>
+          <a:p>
+            <a:pPr>
+              <a:lnSpc>
+                <a:spcPct val="90000"/>
+              </a:lnSpc>
+              <a:spcAft>
+                <a:spcPts val="300"/>
+              </a:spcAft>
+            </a:pPr>
+          </a:p>
+          <a:p>
+            <a:pPr>
+              <a:lnSpc>
+                <a:spcPct val="90000"/>
+              </a:lnSpc>
+              <a:spcAft>
+                <a:spcPts val="300"/>
+              </a:spcAft>
+              <a:defRPr sz="2000"/>
+            </a:pPr>
+            <a:r>
+              <a:rPr sz="1300"/>
               <a:t>Toplanan veriyi düzenli hale getirmek</a:t>
             </a:r>
           </a:p>
           <a:p>
             <a:pPr>
-              <a:spcAft>
-                <a:spcPts val="1200"/>
-              </a:spcAft>
-              <a:defRPr sz="2000"/>
-            </a:pPr>
-          </a:p>
-          <a:p>
-            <a:pPr>
-              <a:spcAft>
-                <a:spcPts val="1200"/>
+              <a:lnSpc>
+                <a:spcPct val="90000"/>
+              </a:lnSpc>
+              <a:spcAft>
+                <a:spcPts val="300"/>
+              </a:spcAft>
+              <a:defRPr sz="2000"/>
+            </a:pPr>
+          </a:p>
+          <a:p>
+            <a:pPr>
+              <a:lnSpc>
+                <a:spcPct val="90000"/>
+              </a:lnSpc>
+              <a:spcAft>
+                <a:spcPts val="300"/>
               </a:spcAft>
               <a:defRPr sz="2000" b="1"/>
             </a:pPr>
             <a:r>
-              <a:rPr sz="1400"/>
+              <a:rPr sz="1300"/>
               <a:t>✅ Veri Düzenleme Adımları:</a:t>
             </a:r>
           </a:p>
           <a:p>
             <a:pPr>
-              <a:spcAft>
-                <a:spcPts val="1200"/>
-              </a:spcAft>
-              <a:defRPr sz="2000"/>
-            </a:pPr>
-          </a:p>
-          <a:p>
-            <a:pPr>
-              <a:spcAft>
-                <a:spcPts val="1200"/>
-              </a:spcAft>
-              <a:defRPr sz="2000"/>
-            </a:pPr>
-            <a:r>
-              <a:rPr sz="1400"/>
+              <a:lnSpc>
+                <a:spcPct val="90000"/>
+              </a:lnSpc>
+              <a:spcAft>
+                <a:spcPts val="300"/>
+              </a:spcAft>
+              <a:defRPr sz="2000"/>
+            </a:pPr>
+          </a:p>
+          <a:p>
+            <a:pPr>
+              <a:lnSpc>
+                <a:spcPct val="90000"/>
+              </a:lnSpc>
+              <a:spcAft>
+                <a:spcPts val="300"/>
+              </a:spcAft>
+              <a:defRPr sz="2000"/>
+            </a:pPr>
+            <a:r>
+              <a:rPr sz="1300"/>
               <a:t>1️⃣ Temizleme:</a:t>
             </a:r>
           </a:p>
           <a:p>
             <a:pPr lvl="1">
-              <a:spcAft>
-                <a:spcPts val="1200"/>
-              </a:spcAft>
-              <a:defRPr sz="1800"/>
-            </a:pPr>
-            <a:r>
-              <a:rPr sz="1400"/>
+              <a:lnSpc>
+                <a:spcPct val="90000"/>
+              </a:lnSpc>
+              <a:spcAft>
+                <a:spcPts val="300"/>
+              </a:spcAft>
+              <a:defRPr sz="1800"/>
+            </a:pPr>
+            <a:r>
+              <a:rPr sz="1300"/>
               <a:t>    • Hatalı verileri bul</a:t>
             </a:r>
           </a:p>
           <a:p>
             <a:pPr lvl="1">
-              <a:spcAft>
-                <a:spcPts val="1200"/>
-              </a:spcAft>
-              <a:defRPr sz="1800"/>
-            </a:pPr>
-            <a:r>
-              <a:rPr sz="1400"/>
+              <a:lnSpc>
+                <a:spcPct val="90000"/>
+              </a:lnSpc>
+              <a:spcAft>
+                <a:spcPts val="300"/>
+              </a:spcAft>
+              <a:defRPr sz="1800"/>
+            </a:pPr>
+            <a:r>
+              <a:rPr sz="1300"/>
               <a:t>    • Eksik verileri tamamla veya çıkar</a:t>
             </a:r>
           </a:p>
           <a:p>
             <a:pPr lvl="1">
-              <a:spcAft>
-                <a:spcPts val="1200"/>
-              </a:spcAft>
-              <a:defRPr sz="1800"/>
-            </a:pPr>
-            <a:r>
-              <a:rPr sz="1400"/>
+              <a:lnSpc>
+                <a:spcPct val="90000"/>
+              </a:lnSpc>
+              <a:spcAft>
+                <a:spcPts val="300"/>
+              </a:spcAft>
+              <a:defRPr sz="1800"/>
+            </a:pPr>
+            <a:r>
+              <a:rPr sz="1300"/>
               <a:t>    • Tekrar edenleri sil</a:t>
             </a:r>
           </a:p>
           <a:p>
             <a:pPr>
-              <a:spcAft>
-                <a:spcPts val="1200"/>
-              </a:spcAft>
-              <a:defRPr sz="2000"/>
-            </a:pPr>
-          </a:p>
-          <a:p>
-            <a:pPr>
-              <a:spcAft>
-                <a:spcPts val="1200"/>
-              </a:spcAft>
-              <a:defRPr sz="2000"/>
-            </a:pPr>
-            <a:r>
-              <a:rPr sz="1400"/>
+              <a:lnSpc>
+                <a:spcPct val="90000"/>
+              </a:lnSpc>
+              <a:spcAft>
+                <a:spcPts val="300"/>
+              </a:spcAft>
+              <a:defRPr sz="2000"/>
+            </a:pPr>
+          </a:p>
+          <a:p>
+            <a:pPr>
+              <a:lnSpc>
+                <a:spcPct val="90000"/>
+              </a:lnSpc>
+              <a:spcAft>
+                <a:spcPts val="300"/>
+              </a:spcAft>
+              <a:defRPr sz="2000"/>
+            </a:pPr>
+            <a:r>
+              <a:rPr sz="1300"/>
               <a:t>2️⃣ Sıralama:</a:t>
             </a:r>
           </a:p>
           <a:p>
             <a:pPr lvl="1">
-              <a:spcAft>
-                <a:spcPts val="1200"/>
-              </a:spcAft>
-              <a:defRPr sz="1800"/>
-            </a:pPr>
-            <a:r>
-              <a:rPr sz="1400"/>
+              <a:lnSpc>
+                <a:spcPct val="90000"/>
+              </a:lnSpc>
+              <a:spcAft>
+                <a:spcPts val="300"/>
+              </a:spcAft>
+              <a:defRPr sz="1800"/>
+            </a:pPr>
+            <a:r>
+              <a:rPr sz="1300"/>
               <a:t>    • Küçükten büyüğe</a:t>
             </a:r>
           </a:p>
           <a:p>
             <a:pPr lvl="1">
-              <a:spcAft>
-                <a:spcPts val="1200"/>
-              </a:spcAft>
-              <a:defRPr sz="1800"/>
-            </a:pPr>
-            <a:r>
-              <a:rPr sz="1400"/>
+              <a:lnSpc>
+                <a:spcPct val="90000"/>
+              </a:lnSpc>
+              <a:spcAft>
+                <a:spcPts val="300"/>
+              </a:spcAft>
+              <a:defRPr sz="1800"/>
+            </a:pPr>
+            <a:r>
+              <a:rPr sz="1300"/>
               <a:t>    • A'dan Z'ye</a:t>
             </a:r>
           </a:p>
           <a:p>
             <a:pPr>
-              <a:spcAft>
-                <a:spcPts val="1200"/>
-              </a:spcAft>
-              <a:defRPr sz="2000"/>
-            </a:pPr>
-          </a:p>
-          <a:p>
-            <a:pPr>
-              <a:spcAft>
-                <a:spcPts val="1200"/>
-              </a:spcAft>
-              <a:defRPr sz="2000"/>
-            </a:pPr>
-            <a:r>
-              <a:rPr sz="1400"/>
+              <a:lnSpc>
+                <a:spcPct val="90000"/>
+              </a:lnSpc>
+              <a:spcAft>
+                <a:spcPts val="300"/>
+              </a:spcAft>
+              <a:defRPr sz="2000"/>
+            </a:pPr>
+          </a:p>
+          <a:p>
+            <a:pPr>
+              <a:lnSpc>
+                <a:spcPct val="90000"/>
+              </a:lnSpc>
+              <a:spcAft>
+                <a:spcPts val="300"/>
+              </a:spcAft>
+              <a:defRPr sz="2000"/>
+            </a:pPr>
+            <a:r>
+              <a:rPr sz="1300"/>
               <a:t>3️⃣ Gruplama:</a:t>
             </a:r>
           </a:p>
           <a:p>
             <a:pPr lvl="1">
-              <a:spcAft>
-                <a:spcPts val="1200"/>
-              </a:spcAft>
-              <a:defRPr sz="1800"/>
-            </a:pPr>
-            <a:r>
-              <a:rPr sz="1400"/>
+              <a:lnSpc>
+                <a:spcPct val="90000"/>
+              </a:lnSpc>
+              <a:spcAft>
+                <a:spcPts val="300"/>
+              </a:spcAft>
+              <a:defRPr sz="1800"/>
+            </a:pPr>
+            <a:r>
+              <a:rPr sz="1300"/>
               <a:t>    • Benzer verileri bir araya getir</a:t>
             </a:r>
           </a:p>
           <a:p>
             <a:pPr lvl="1">
-              <a:spcAft>
-                <a:spcPts val="1200"/>
-              </a:spcAft>
-              <a:defRPr sz="1800"/>
-            </a:pPr>
-            <a:r>
-              <a:rPr sz="1400"/>
+              <a:lnSpc>
+                <a:spcPct val="90000"/>
+              </a:lnSpc>
+              <a:spcAft>
+                <a:spcPts val="300"/>
+              </a:spcAft>
+              <a:defRPr sz="1800"/>
+            </a:pPr>
+            <a:r>
+              <a:rPr sz="1300"/>
               <a:t>    • Örnek: Yaş grupları (0-10, 11-20, 21-30)</a:t>
             </a:r>
           </a:p>
           <a:p>
             <a:pPr>
-              <a:spcAft>
-                <a:spcPts val="1200"/>
-              </a:spcAft>
-              <a:defRPr sz="2000"/>
-            </a:pPr>
-          </a:p>
-          <a:p>
-            <a:pPr>
-              <a:spcAft>
-                <a:spcPts val="1200"/>
-              </a:spcAft>
-              <a:defRPr sz="2000"/>
-            </a:pPr>
-            <a:r>
-              <a:rPr sz="1400"/>
+              <a:lnSpc>
+                <a:spcPct val="90000"/>
+              </a:lnSpc>
+              <a:spcAft>
+                <a:spcPts val="300"/>
+              </a:spcAft>
+              <a:defRPr sz="2000"/>
+            </a:pPr>
+          </a:p>
+          <a:p>
+            <a:pPr>
+              <a:lnSpc>
+                <a:spcPct val="90000"/>
+              </a:lnSpc>
+              <a:spcAft>
+                <a:spcPts val="300"/>
+              </a:spcAft>
+              <a:defRPr sz="2000"/>
+            </a:pPr>
+            <a:r>
+              <a:rPr sz="1300"/>
               <a:t>4️⃣ Tabloya Dönüştürme:</a:t>
             </a:r>
           </a:p>
           <a:p>
             <a:pPr lvl="1">
-              <a:spcAft>
-                <a:spcPts val="1200"/>
-              </a:spcAft>
-              <a:defRPr sz="1800"/>
-            </a:pPr>
-            <a:r>
-              <a:rPr sz="1400"/>
+              <a:lnSpc>
+                <a:spcPct val="90000"/>
+              </a:lnSpc>
+              <a:spcAft>
+                <a:spcPts val="300"/>
+              </a:spcAft>
+              <a:defRPr sz="1800"/>
+            </a:pPr>
+            <a:r>
+              <a:rPr sz="1300"/>
               <a:t>    • Satır ve sütunlar</a:t>
             </a:r>
           </a:p>
           <a:p>
             <a:pPr lvl="1">
-              <a:spcAft>
-                <a:spcPts val="1200"/>
-              </a:spcAft>
-              <a:defRPr sz="1800"/>
-            </a:pPr>
-            <a:r>
-              <a:rPr sz="1400"/>
+              <a:lnSpc>
+                <a:spcPct val="90000"/>
+              </a:lnSpc>
+              <a:spcAft>
+                <a:spcPts val="300"/>
+              </a:spcAft>
+              <a:defRPr sz="1800"/>
+            </a:pPr>
+            <a:r>
+              <a:rPr sz="1300"/>
               <a:t>    • Başlıklar ekle</a:t>
             </a:r>
           </a:p>
           <a:p>
             <a:pPr>
-              <a:spcAft>
-                <a:spcPts val="1200"/>
-              </a:spcAft>
-              <a:defRPr sz="2000"/>
-            </a:pPr>
-          </a:p>
-          <a:p>
-            <a:pPr>
-              <a:spcAft>
-                <a:spcPts val="1200"/>
+              <a:lnSpc>
+                <a:spcPct val="90000"/>
+              </a:lnSpc>
+              <a:spcAft>
+                <a:spcPts val="300"/>
+              </a:spcAft>
+              <a:defRPr sz="2000"/>
+            </a:pPr>
+          </a:p>
+          <a:p>
+            <a:pPr>
+              <a:lnSpc>
+                <a:spcPct val="90000"/>
+              </a:lnSpc>
+              <a:spcAft>
+                <a:spcPts val="300"/>
               </a:spcAft>
               <a:defRPr sz="2000" b="1"/>
             </a:pPr>
             <a:r>
-              <a:rPr sz="1400"/>
+              <a:rPr sz="1300"/>
               <a:t>📌 Örnek Ham Veri:</a:t>
             </a:r>
           </a:p>
           <a:p>
             <a:pPr>
-              <a:spcAft>
-                <a:spcPts val="1200"/>
-              </a:spcAft>
-              <a:defRPr sz="2000"/>
-            </a:pPr>
-            <a:r>
-              <a:rPr sz="1400"/>
+              <a:lnSpc>
+                <a:spcPct val="90000"/>
+              </a:lnSpc>
+              <a:spcAft>
+                <a:spcPts val="300"/>
+              </a:spcAft>
+              <a:defRPr sz="2000"/>
+            </a:pPr>
+            <a:r>
+              <a:rPr sz="1300"/>
               <a:t>Ahmet:15, Ayşe:18, 12, Mehmet:20, ??:16</a:t>
             </a:r>
           </a:p>
           <a:p>
             <a:pPr>
-              <a:spcAft>
-                <a:spcPts val="1200"/>
-              </a:spcAft>
-              <a:defRPr sz="2000"/>
-            </a:pPr>
-          </a:p>
-          <a:p>
-            <a:pPr>
-              <a:spcAft>
-                <a:spcPts val="1200"/>
+              <a:lnSpc>
+                <a:spcPct val="90000"/>
+              </a:lnSpc>
+              <a:spcAft>
+                <a:spcPts val="300"/>
+              </a:spcAft>
+              <a:defRPr sz="2000"/>
+            </a:pPr>
+          </a:p>
+          <a:p>
+            <a:pPr>
+              <a:lnSpc>
+                <a:spcPct val="90000"/>
+              </a:lnSpc>
+              <a:spcAft>
+                <a:spcPts val="300"/>
               </a:spcAft>
               <a:defRPr sz="2000" b="1"/>
             </a:pPr>
             <a:r>
-              <a:rPr sz="1400"/>
+              <a:rPr sz="1300"/>
               <a:t>📌 Düzenlenmiş:</a:t>
             </a:r>
           </a:p>
           <a:p>
             <a:pPr>
-              <a:spcAft>
-                <a:spcPts val="1200"/>
-              </a:spcAft>
-              <a:defRPr sz="2000"/>
-            </a:pPr>
-            <a:r>
-              <a:rPr sz="1400"/>
+              <a:lnSpc>
+                <a:spcPct val="90000"/>
+              </a:lnSpc>
+              <a:spcAft>
+                <a:spcPts val="300"/>
+              </a:spcAft>
+              <a:defRPr sz="2000"/>
+            </a:pPr>
+            <a:r>
+              <a:rPr sz="1300"/>
               <a:t>| İsim   | Yaş |</a:t>
             </a:r>
           </a:p>
           <a:p>
             <a:pPr>
-              <a:spcAft>
-                <a:spcPts val="1200"/>
-              </a:spcAft>
-              <a:defRPr sz="2000"/>
-            </a:pPr>
-            <a:r>
-              <a:rPr sz="1400"/>
+              <a:lnSpc>
+                <a:spcPct val="90000"/>
+              </a:lnSpc>
+              <a:spcAft>
+                <a:spcPts val="300"/>
+              </a:spcAft>
+              <a:defRPr sz="2000"/>
+            </a:pPr>
+            <a:r>
+              <a:rPr sz="1300"/>
               <a:t>| Ahmet  | 15  |</a:t>
             </a:r>
           </a:p>
           <a:p>
             <a:pPr>
-              <a:spcAft>
-                <a:spcPts val="1200"/>
-              </a:spcAft>
-              <a:defRPr sz="2000"/>
-            </a:pPr>
-            <a:r>
-              <a:rPr sz="1400"/>
+              <a:lnSpc>
+                <a:spcPct val="90000"/>
+              </a:lnSpc>
+              <a:spcAft>
+                <a:spcPts val="300"/>
+              </a:spcAft>
+              <a:defRPr sz="2000"/>
+            </a:pPr>
+            <a:r>
+              <a:rPr sz="1300"/>
               <a:t>| Ayşe   | 18  |</a:t>
             </a:r>
           </a:p>
           <a:p>
             <a:pPr>
-              <a:spcAft>
-                <a:spcPts val="1200"/>
-              </a:spcAft>
-              <a:defRPr sz="2000"/>
-            </a:pPr>
-            <a:r>
-              <a:rPr sz="1400"/>
+              <a:lnSpc>
+                <a:spcPct val="90000"/>
+              </a:lnSpc>
+              <a:spcAft>
+                <a:spcPts val="300"/>
+              </a:spcAft>
+              <a:defRPr sz="2000"/>
+            </a:pPr>
+            <a:r>
+              <a:rPr sz="1300"/>
               <a:t>| Mehmet | 20  |</a:t>
             </a:r>
           </a:p>
@@ -10103,7 +11137,7 @@
         </p:nvSpPr>
         <p:spPr/>
         <p:txBody>
-          <a:bodyPr/>
+          <a:bodyPr wrap="square"/>
           <a:lstStyle/>
           <a:p>
             <a:pPr>
@@ -10157,312 +11191,405 @@
             <a:spAutoFit/>
           </a:bodyPr>
           <a:lstStyle/>
-          <a:p/>
-          <a:p>
-            <a:pPr>
-              <a:spcAft>
-                <a:spcPts val="1200"/>
-              </a:spcAft>
-              <a:defRPr sz="2000"/>
-            </a:pPr>
-            <a:r>
-              <a:rPr sz="1400"/>
+          <a:p>
+            <a:pPr>
+              <a:lnSpc>
+                <a:spcPct val="90000"/>
+              </a:lnSpc>
+              <a:spcAft>
+                <a:spcPts val="300"/>
+              </a:spcAft>
+            </a:pPr>
+          </a:p>
+          <a:p>
+            <a:pPr>
+              <a:lnSpc>
+                <a:spcPct val="90000"/>
+              </a:lnSpc>
+              <a:spcAft>
+                <a:spcPts val="300"/>
+              </a:spcAft>
+              <a:defRPr sz="2000"/>
+            </a:pPr>
+            <a:r>
+              <a:rPr sz="1300"/>
               <a:t>Veriyi görsel olarak göstermek</a:t>
             </a:r>
           </a:p>
           <a:p>
             <a:pPr>
-              <a:spcAft>
-                <a:spcPts val="1200"/>
-              </a:spcAft>
-              <a:defRPr sz="2000"/>
-            </a:pPr>
-          </a:p>
-          <a:p>
-            <a:pPr>
-              <a:spcAft>
-                <a:spcPts val="1200"/>
+              <a:lnSpc>
+                <a:spcPct val="90000"/>
+              </a:lnSpc>
+              <a:spcAft>
+                <a:spcPts val="300"/>
+              </a:spcAft>
+              <a:defRPr sz="2000"/>
+            </a:pPr>
+          </a:p>
+          <a:p>
+            <a:pPr>
+              <a:lnSpc>
+                <a:spcPct val="90000"/>
+              </a:lnSpc>
+              <a:spcAft>
+                <a:spcPts val="300"/>
               </a:spcAft>
               <a:defRPr sz="2000" b="1"/>
             </a:pPr>
             <a:r>
-              <a:rPr sz="1400"/>
+              <a:rPr sz="1300"/>
               <a:t>✅ Temel Grafik Türleri:</a:t>
             </a:r>
           </a:p>
           <a:p>
             <a:pPr>
-              <a:spcAft>
-                <a:spcPts val="1200"/>
-              </a:spcAft>
-              <a:defRPr sz="2000"/>
-            </a:pPr>
-          </a:p>
-          <a:p>
-            <a:pPr>
-              <a:spcAft>
-                <a:spcPts val="1200"/>
-              </a:spcAft>
-              <a:defRPr sz="2000"/>
-            </a:pPr>
-            <a:r>
-              <a:rPr sz="1400"/>
+              <a:lnSpc>
+                <a:spcPct val="90000"/>
+              </a:lnSpc>
+              <a:spcAft>
+                <a:spcPts val="300"/>
+              </a:spcAft>
+              <a:defRPr sz="2000"/>
+            </a:pPr>
+          </a:p>
+          <a:p>
+            <a:pPr>
+              <a:lnSpc>
+                <a:spcPct val="90000"/>
+              </a:lnSpc>
+              <a:spcAft>
+                <a:spcPts val="300"/>
+              </a:spcAft>
+              <a:defRPr sz="2000"/>
+            </a:pPr>
+            <a:r>
+              <a:rPr sz="1300"/>
               <a:t>📊 Sütun Grafiği (Bar Chart):</a:t>
             </a:r>
           </a:p>
           <a:p>
             <a:pPr lvl="1">
-              <a:spcAft>
-                <a:spcPts val="1200"/>
-              </a:spcAft>
-              <a:defRPr sz="1800"/>
-            </a:pPr>
-            <a:r>
-              <a:rPr sz="1400"/>
+              <a:lnSpc>
+                <a:spcPct val="90000"/>
+              </a:lnSpc>
+              <a:spcAft>
+                <a:spcPts val="300"/>
+              </a:spcAft>
+              <a:defRPr sz="1800"/>
+            </a:pPr>
+            <a:r>
+              <a:rPr sz="1300"/>
               <a:t>    • Kategorileri karşılaştırma</a:t>
             </a:r>
           </a:p>
           <a:p>
             <a:pPr lvl="1">
-              <a:spcAft>
-                <a:spcPts val="1200"/>
-              </a:spcAft>
-              <a:defRPr sz="1800"/>
-            </a:pPr>
-            <a:r>
-              <a:rPr sz="1400"/>
+              <a:lnSpc>
+                <a:spcPct val="90000"/>
+              </a:lnSpc>
+              <a:spcAft>
+                <a:spcPts val="300"/>
+              </a:spcAft>
+              <a:defRPr sz="1800"/>
+            </a:pPr>
+            <a:r>
+              <a:rPr sz="1300"/>
               <a:t>    • Örnek: Şehirlere göre nüfus</a:t>
             </a:r>
           </a:p>
           <a:p>
             <a:pPr>
-              <a:spcAft>
-                <a:spcPts val="1200"/>
-              </a:spcAft>
-              <a:defRPr sz="2000"/>
-            </a:pPr>
-          </a:p>
-          <a:p>
-            <a:pPr>
-              <a:spcAft>
-                <a:spcPts val="1200"/>
-              </a:spcAft>
-              <a:defRPr sz="2000"/>
-            </a:pPr>
-            <a:r>
-              <a:rPr sz="1400"/>
+              <a:lnSpc>
+                <a:spcPct val="90000"/>
+              </a:lnSpc>
+              <a:spcAft>
+                <a:spcPts val="300"/>
+              </a:spcAft>
+              <a:defRPr sz="2000"/>
+            </a:pPr>
+          </a:p>
+          <a:p>
+            <a:pPr>
+              <a:lnSpc>
+                <a:spcPct val="90000"/>
+              </a:lnSpc>
+              <a:spcAft>
+                <a:spcPts val="300"/>
+              </a:spcAft>
+              <a:defRPr sz="2000"/>
+            </a:pPr>
+            <a:r>
+              <a:rPr sz="1300"/>
               <a:t>📈 Çizgi Grafiği (Line Chart):</a:t>
             </a:r>
           </a:p>
           <a:p>
             <a:pPr lvl="1">
-              <a:spcAft>
-                <a:spcPts val="1200"/>
-              </a:spcAft>
-              <a:defRPr sz="1800"/>
-            </a:pPr>
-            <a:r>
-              <a:rPr sz="1400"/>
+              <a:lnSpc>
+                <a:spcPct val="90000"/>
+              </a:lnSpc>
+              <a:spcAft>
+                <a:spcPts val="300"/>
+              </a:spcAft>
+              <a:defRPr sz="1800"/>
+            </a:pPr>
+            <a:r>
+              <a:rPr sz="1300"/>
               <a:t>    • Zamana göre değişim</a:t>
             </a:r>
           </a:p>
           <a:p>
             <a:pPr lvl="1">
-              <a:spcAft>
-                <a:spcPts val="1200"/>
-              </a:spcAft>
-              <a:defRPr sz="1800"/>
-            </a:pPr>
-            <a:r>
-              <a:rPr sz="1400"/>
+              <a:lnSpc>
+                <a:spcPct val="90000"/>
+              </a:lnSpc>
+              <a:spcAft>
+                <a:spcPts val="300"/>
+              </a:spcAft>
+              <a:defRPr sz="1800"/>
+            </a:pPr>
+            <a:r>
+              <a:rPr sz="1300"/>
               <a:t>    • Örnek: Aylara göre sıcaklık</a:t>
             </a:r>
           </a:p>
           <a:p>
             <a:pPr>
-              <a:spcAft>
-                <a:spcPts val="1200"/>
-              </a:spcAft>
-              <a:defRPr sz="2000"/>
-            </a:pPr>
-          </a:p>
-          <a:p>
-            <a:pPr>
-              <a:spcAft>
-                <a:spcPts val="1200"/>
-              </a:spcAft>
-              <a:defRPr sz="2000"/>
-            </a:pPr>
-            <a:r>
-              <a:rPr sz="1400"/>
+              <a:lnSpc>
+                <a:spcPct val="90000"/>
+              </a:lnSpc>
+              <a:spcAft>
+                <a:spcPts val="300"/>
+              </a:spcAft>
+              <a:defRPr sz="2000"/>
+            </a:pPr>
+          </a:p>
+          <a:p>
+            <a:pPr>
+              <a:lnSpc>
+                <a:spcPct val="90000"/>
+              </a:lnSpc>
+              <a:spcAft>
+                <a:spcPts val="300"/>
+              </a:spcAft>
+              <a:defRPr sz="2000"/>
+            </a:pPr>
+            <a:r>
+              <a:rPr sz="1300"/>
               <a:t>🥧 Pasta Grafiği (Pie Chart):</a:t>
             </a:r>
           </a:p>
           <a:p>
             <a:pPr lvl="1">
-              <a:spcAft>
-                <a:spcPts val="1200"/>
-              </a:spcAft>
-              <a:defRPr sz="1800"/>
-            </a:pPr>
-            <a:r>
-              <a:rPr sz="1400"/>
+              <a:lnSpc>
+                <a:spcPct val="90000"/>
+              </a:lnSpc>
+              <a:spcAft>
+                <a:spcPts val="300"/>
+              </a:spcAft>
+              <a:defRPr sz="1800"/>
+            </a:pPr>
+            <a:r>
+              <a:rPr sz="1300"/>
               <a:t>    • Yüzdeler, oranlar</a:t>
             </a:r>
           </a:p>
           <a:p>
             <a:pPr lvl="1">
-              <a:spcAft>
-                <a:spcPts val="1200"/>
-              </a:spcAft>
-              <a:defRPr sz="1800"/>
-            </a:pPr>
-            <a:r>
-              <a:rPr sz="1400"/>
+              <a:lnSpc>
+                <a:spcPct val="90000"/>
+              </a:lnSpc>
+              <a:spcAft>
+                <a:spcPts val="300"/>
+              </a:spcAft>
+              <a:defRPr sz="1800"/>
+            </a:pPr>
+            <a:r>
+              <a:rPr sz="1300"/>
               <a:t>    • Örnek: Bütçe dağılımı</a:t>
             </a:r>
           </a:p>
           <a:p>
             <a:pPr>
-              <a:spcAft>
-                <a:spcPts val="1200"/>
-              </a:spcAft>
-              <a:defRPr sz="2000"/>
-            </a:pPr>
-          </a:p>
-          <a:p>
-            <a:pPr>
-              <a:spcAft>
-                <a:spcPts val="1200"/>
-              </a:spcAft>
-              <a:defRPr sz="2000"/>
-            </a:pPr>
-            <a:r>
-              <a:rPr sz="1400"/>
+              <a:lnSpc>
+                <a:spcPct val="90000"/>
+              </a:lnSpc>
+              <a:spcAft>
+                <a:spcPts val="300"/>
+              </a:spcAft>
+              <a:defRPr sz="2000"/>
+            </a:pPr>
+          </a:p>
+          <a:p>
+            <a:pPr>
+              <a:lnSpc>
+                <a:spcPct val="90000"/>
+              </a:lnSpc>
+              <a:spcAft>
+                <a:spcPts val="300"/>
+              </a:spcAft>
+              <a:defRPr sz="2000"/>
+            </a:pPr>
+            <a:r>
+              <a:rPr sz="1300"/>
               <a:t>📊 Dağılım Grafiği (Scatter Plot):</a:t>
             </a:r>
           </a:p>
           <a:p>
             <a:pPr lvl="1">
-              <a:spcAft>
-                <a:spcPts val="1200"/>
-              </a:spcAft>
-              <a:defRPr sz="1800"/>
-            </a:pPr>
-            <a:r>
-              <a:rPr sz="1400"/>
+              <a:lnSpc>
+                <a:spcPct val="90000"/>
+              </a:lnSpc>
+              <a:spcAft>
+                <a:spcPts val="300"/>
+              </a:spcAft>
+              <a:defRPr sz="1800"/>
+            </a:pPr>
+            <a:r>
+              <a:rPr sz="1300"/>
               <a:t>    • İki değişken arasındaki ilişki</a:t>
             </a:r>
           </a:p>
           <a:p>
             <a:pPr lvl="1">
-              <a:spcAft>
-                <a:spcPts val="1200"/>
-              </a:spcAft>
-              <a:defRPr sz="1800"/>
-            </a:pPr>
-            <a:r>
-              <a:rPr sz="1400"/>
+              <a:lnSpc>
+                <a:spcPct val="90000"/>
+              </a:lnSpc>
+              <a:spcAft>
+                <a:spcPts val="300"/>
+              </a:spcAft>
+              <a:defRPr sz="1800"/>
+            </a:pPr>
+            <a:r>
+              <a:rPr sz="1300"/>
               <a:t>    • Örnek: Boy-Kilo ilişkisi</a:t>
             </a:r>
           </a:p>
           <a:p>
             <a:pPr>
-              <a:spcAft>
-                <a:spcPts val="1200"/>
-              </a:spcAft>
-              <a:defRPr sz="2000"/>
-            </a:pPr>
-          </a:p>
-          <a:p>
-            <a:pPr>
-              <a:spcAft>
-                <a:spcPts val="1200"/>
-              </a:spcAft>
-              <a:defRPr sz="2000"/>
-            </a:pPr>
-            <a:r>
-              <a:rPr sz="1400"/>
+              <a:lnSpc>
+                <a:spcPct val="90000"/>
+              </a:lnSpc>
+              <a:spcAft>
+                <a:spcPts val="300"/>
+              </a:spcAft>
+              <a:defRPr sz="2000"/>
+            </a:pPr>
+          </a:p>
+          <a:p>
+            <a:pPr>
+              <a:lnSpc>
+                <a:spcPct val="90000"/>
+              </a:lnSpc>
+              <a:spcAft>
+                <a:spcPts val="300"/>
+              </a:spcAft>
+              <a:defRPr sz="2000"/>
+            </a:pPr>
+            <a:r>
+              <a:rPr sz="1300"/>
               <a:t>📊 Histogram:</a:t>
             </a:r>
           </a:p>
           <a:p>
             <a:pPr lvl="1">
-              <a:spcAft>
-                <a:spcPts val="1200"/>
-              </a:spcAft>
-              <a:defRPr sz="1800"/>
-            </a:pPr>
-            <a:r>
-              <a:rPr sz="1400"/>
+              <a:lnSpc>
+                <a:spcPct val="90000"/>
+              </a:lnSpc>
+              <a:spcAft>
+                <a:spcPts val="300"/>
+              </a:spcAft>
+              <a:defRPr sz="1800"/>
+            </a:pPr>
+            <a:r>
+              <a:rPr sz="1300"/>
               <a:t>    • Veri dağılımı</a:t>
             </a:r>
           </a:p>
           <a:p>
             <a:pPr lvl="1">
-              <a:spcAft>
-                <a:spcPts val="1200"/>
-              </a:spcAft>
-              <a:defRPr sz="1800"/>
-            </a:pPr>
-            <a:r>
-              <a:rPr sz="1400"/>
+              <a:lnSpc>
+                <a:spcPct val="90000"/>
+              </a:lnSpc>
+              <a:spcAft>
+                <a:spcPts val="300"/>
+              </a:spcAft>
+              <a:defRPr sz="1800"/>
+            </a:pPr>
+            <a:r>
+              <a:rPr sz="1300"/>
               <a:t>    • Örnek: Sınav not dağılımı</a:t>
             </a:r>
           </a:p>
           <a:p>
             <a:pPr>
-              <a:spcAft>
-                <a:spcPts val="1200"/>
-              </a:spcAft>
-              <a:defRPr sz="2000"/>
-            </a:pPr>
-          </a:p>
-          <a:p>
-            <a:pPr>
-              <a:spcAft>
-                <a:spcPts val="1200"/>
+              <a:lnSpc>
+                <a:spcPct val="90000"/>
+              </a:lnSpc>
+              <a:spcAft>
+                <a:spcPts val="300"/>
+              </a:spcAft>
+              <a:defRPr sz="2000"/>
+            </a:pPr>
+          </a:p>
+          <a:p>
+            <a:pPr>
+              <a:lnSpc>
+                <a:spcPct val="90000"/>
+              </a:lnSpc>
+              <a:spcAft>
+                <a:spcPts val="300"/>
               </a:spcAft>
               <a:defRPr sz="2000" b="1"/>
             </a:pPr>
             <a:r>
-              <a:rPr sz="1400"/>
+              <a:rPr sz="1300"/>
               <a:t>💡 Doğru grafik seçimi önemli!</a:t>
             </a:r>
           </a:p>
           <a:p>
             <a:pPr lvl="1">
-              <a:spcAft>
-                <a:spcPts val="1200"/>
-              </a:spcAft>
-              <a:defRPr sz="1800"/>
-            </a:pPr>
-            <a:r>
-              <a:rPr sz="1400"/>
+              <a:lnSpc>
+                <a:spcPct val="90000"/>
+              </a:lnSpc>
+              <a:spcAft>
+                <a:spcPts val="300"/>
+              </a:spcAft>
+              <a:defRPr sz="1800"/>
+            </a:pPr>
+            <a:r>
+              <a:rPr sz="1300"/>
               <a:t>    • Zaman göster → Çizgi</a:t>
             </a:r>
           </a:p>
           <a:p>
             <a:pPr lvl="1">
-              <a:spcAft>
-                <a:spcPts val="1200"/>
-              </a:spcAft>
-              <a:defRPr sz="1800"/>
-            </a:pPr>
-            <a:r>
-              <a:rPr sz="1400"/>
+              <a:lnSpc>
+                <a:spcPct val="90000"/>
+              </a:lnSpc>
+              <a:spcAft>
+                <a:spcPts val="300"/>
+              </a:spcAft>
+              <a:defRPr sz="1800"/>
+            </a:pPr>
+            <a:r>
+              <a:rPr sz="1300"/>
               <a:t>    • Karşılaştır → Sütun</a:t>
             </a:r>
           </a:p>
           <a:p>
             <a:pPr lvl="1">
-              <a:spcAft>
-                <a:spcPts val="1200"/>
-              </a:spcAft>
-              <a:defRPr sz="1800"/>
-            </a:pPr>
-            <a:r>
-              <a:rPr sz="1400"/>
+              <a:lnSpc>
+                <a:spcPct val="90000"/>
+              </a:lnSpc>
+              <a:spcAft>
+                <a:spcPts val="300"/>
+              </a:spcAft>
+              <a:defRPr sz="1800"/>
+            </a:pPr>
+            <a:r>
+              <a:rPr sz="1300"/>
               <a:t>    • Oran göster → Pasta</a:t>
             </a:r>
           </a:p>
@@ -10498,7 +11625,7 @@
         </p:nvSpPr>
         <p:spPr/>
         <p:txBody>
-          <a:bodyPr/>
+          <a:bodyPr wrap="square"/>
           <a:lstStyle/>
           <a:p>
             <a:pPr>
@@ -10552,348 +11679,450 @@
             <a:spAutoFit/>
           </a:bodyPr>
           <a:lstStyle/>
-          <a:p/>
-          <a:p>
-            <a:pPr>
-              <a:spcAft>
-                <a:spcPts val="1200"/>
-              </a:spcAft>
-              <a:defRPr sz="2000"/>
-            </a:pPr>
-            <a:r>
-              <a:rPr sz="1400"/>
+          <a:p>
+            <a:pPr>
+              <a:lnSpc>
+                <a:spcPct val="90000"/>
+              </a:lnSpc>
+              <a:spcAft>
+                <a:spcPts val="300"/>
+              </a:spcAft>
+            </a:pPr>
+          </a:p>
+          <a:p>
+            <a:pPr>
+              <a:lnSpc>
+                <a:spcPct val="90000"/>
+              </a:lnSpc>
+              <a:spcAft>
+                <a:spcPts val="300"/>
+              </a:spcAft>
+              <a:defRPr sz="2000"/>
+            </a:pPr>
+            <a:r>
+              <a:rPr sz="1300"/>
               <a:t>Neden görselleştirme?</a:t>
             </a:r>
           </a:p>
           <a:p>
             <a:pPr>
-              <a:spcAft>
-                <a:spcPts val="1200"/>
-              </a:spcAft>
-              <a:defRPr sz="2000"/>
-            </a:pPr>
-          </a:p>
-          <a:p>
-            <a:pPr>
-              <a:spcAft>
-                <a:spcPts val="1200"/>
+              <a:lnSpc>
+                <a:spcPct val="90000"/>
+              </a:lnSpc>
+              <a:spcAft>
+                <a:spcPts val="300"/>
+              </a:spcAft>
+              <a:defRPr sz="2000"/>
+            </a:pPr>
+          </a:p>
+          <a:p>
+            <a:pPr>
+              <a:lnSpc>
+                <a:spcPct val="90000"/>
+              </a:lnSpc>
+              <a:spcAft>
+                <a:spcPts val="300"/>
               </a:spcAft>
               <a:defRPr sz="2000" b="1"/>
             </a:pPr>
             <a:r>
-              <a:rPr sz="1400"/>
+              <a:rPr sz="1300"/>
               <a:t>✅ Görselleştirme Faydaları:</a:t>
             </a:r>
           </a:p>
           <a:p>
             <a:pPr lvl="1">
-              <a:spcAft>
-                <a:spcPts val="1200"/>
-              </a:spcAft>
-              <a:defRPr sz="1800"/>
-            </a:pPr>
-            <a:r>
-              <a:rPr sz="1400"/>
+              <a:lnSpc>
+                <a:spcPct val="90000"/>
+              </a:lnSpc>
+              <a:spcAft>
+                <a:spcPts val="300"/>
+              </a:spcAft>
+              <a:defRPr sz="1800"/>
+            </a:pPr>
+            <a:r>
+              <a:rPr sz="1300"/>
               <a:t>    • Hızlı anlama</a:t>
             </a:r>
           </a:p>
           <a:p>
             <a:pPr lvl="1">
-              <a:spcAft>
-                <a:spcPts val="1200"/>
-              </a:spcAft>
-              <a:defRPr sz="1800"/>
-            </a:pPr>
-            <a:r>
-              <a:rPr sz="1400"/>
+              <a:lnSpc>
+                <a:spcPct val="90000"/>
+              </a:lnSpc>
+              <a:spcAft>
+                <a:spcPts val="300"/>
+              </a:spcAft>
+              <a:defRPr sz="1800"/>
+            </a:pPr>
+            <a:r>
+              <a:rPr sz="1300"/>
               <a:t>    • Kalıpları görme</a:t>
             </a:r>
           </a:p>
           <a:p>
             <a:pPr lvl="1">
-              <a:spcAft>
-                <a:spcPts val="1200"/>
-              </a:spcAft>
-              <a:defRPr sz="1800"/>
-            </a:pPr>
-            <a:r>
-              <a:rPr sz="1400"/>
+              <a:lnSpc>
+                <a:spcPct val="90000"/>
+              </a:lnSpc>
+              <a:spcAft>
+                <a:spcPts val="300"/>
+              </a:spcAft>
+              <a:defRPr sz="1800"/>
+            </a:pPr>
+            <a:r>
+              <a:rPr sz="1300"/>
               <a:t>    • Karşılaştırma kolaylığı</a:t>
             </a:r>
           </a:p>
           <a:p>
             <a:pPr lvl="1">
-              <a:spcAft>
-                <a:spcPts val="1200"/>
-              </a:spcAft>
-              <a:defRPr sz="1800"/>
-            </a:pPr>
-            <a:r>
-              <a:rPr sz="1400"/>
+              <a:lnSpc>
+                <a:spcPct val="90000"/>
+              </a:lnSpc>
+              <a:spcAft>
+                <a:spcPts val="300"/>
+              </a:spcAft>
+              <a:defRPr sz="1800"/>
+            </a:pPr>
+            <a:r>
+              <a:rPr sz="1300"/>
               <a:t>    • İletişim</a:t>
             </a:r>
           </a:p>
           <a:p>
             <a:pPr>
-              <a:spcAft>
-                <a:spcPts val="1200"/>
-              </a:spcAft>
-              <a:defRPr sz="2000"/>
-            </a:pPr>
-          </a:p>
-          <a:p>
-            <a:pPr>
-              <a:spcAft>
-                <a:spcPts val="1200"/>
+              <a:lnSpc>
+                <a:spcPct val="90000"/>
+              </a:lnSpc>
+              <a:spcAft>
+                <a:spcPts val="300"/>
+              </a:spcAft>
+              <a:defRPr sz="2000"/>
+            </a:pPr>
+          </a:p>
+          <a:p>
+            <a:pPr>
+              <a:lnSpc>
+                <a:spcPct val="90000"/>
+              </a:lnSpc>
+              <a:spcAft>
+                <a:spcPts val="300"/>
               </a:spcAft>
               <a:defRPr sz="2000" b="1"/>
             </a:pPr>
             <a:r>
-              <a:rPr sz="1400"/>
+              <a:rPr sz="1300"/>
               <a:t>📌 İyi Görselleştirme:</a:t>
             </a:r>
           </a:p>
           <a:p>
             <a:pPr>
-              <a:spcAft>
-                <a:spcPts val="1200"/>
-              </a:spcAft>
-              <a:defRPr sz="2000"/>
-            </a:pPr>
-          </a:p>
-          <a:p>
-            <a:pPr>
-              <a:spcAft>
-                <a:spcPts val="1200"/>
+              <a:lnSpc>
+                <a:spcPct val="90000"/>
+              </a:lnSpc>
+              <a:spcAft>
+                <a:spcPts val="300"/>
+              </a:spcAft>
+              <a:defRPr sz="2000"/>
+            </a:pPr>
+          </a:p>
+          <a:p>
+            <a:pPr>
+              <a:lnSpc>
+                <a:spcPct val="90000"/>
+              </a:lnSpc>
+              <a:spcAft>
+                <a:spcPts val="300"/>
               </a:spcAft>
               <a:defRPr sz="2000" b="1"/>
             </a:pPr>
             <a:r>
-              <a:rPr sz="1400"/>
+              <a:rPr sz="1300"/>
               <a:t>✅ Basit:</a:t>
             </a:r>
           </a:p>
           <a:p>
             <a:pPr lvl="1">
-              <a:spcAft>
-                <a:spcPts val="1200"/>
-              </a:spcAft>
-              <a:defRPr sz="1800"/>
-            </a:pPr>
-            <a:r>
-              <a:rPr sz="1400"/>
+              <a:lnSpc>
+                <a:spcPct val="90000"/>
+              </a:lnSpc>
+              <a:spcAft>
+                <a:spcPts val="300"/>
+              </a:spcAft>
+              <a:defRPr sz="1800"/>
+            </a:pPr>
+            <a:r>
+              <a:rPr sz="1300"/>
               <a:t>    • Karmaşık olmasın</a:t>
             </a:r>
           </a:p>
           <a:p>
             <a:pPr lvl="1">
-              <a:spcAft>
-                <a:spcPts val="1200"/>
-              </a:spcAft>
-              <a:defRPr sz="1800"/>
-            </a:pPr>
-            <a:r>
-              <a:rPr sz="1400"/>
+              <a:lnSpc>
+                <a:spcPct val="90000"/>
+              </a:lnSpc>
+              <a:spcAft>
+                <a:spcPts val="300"/>
+              </a:spcAft>
+              <a:defRPr sz="1800"/>
+            </a:pPr>
+            <a:r>
+              <a:rPr sz="1300"/>
               <a:t>    • Ana mesaj net olsun</a:t>
             </a:r>
           </a:p>
           <a:p>
             <a:pPr>
-              <a:spcAft>
-                <a:spcPts val="1200"/>
-              </a:spcAft>
-              <a:defRPr sz="2000"/>
-            </a:pPr>
-          </a:p>
-          <a:p>
-            <a:pPr>
-              <a:spcAft>
-                <a:spcPts val="1200"/>
+              <a:lnSpc>
+                <a:spcPct val="90000"/>
+              </a:lnSpc>
+              <a:spcAft>
+                <a:spcPts val="300"/>
+              </a:spcAft>
+              <a:defRPr sz="2000"/>
+            </a:pPr>
+          </a:p>
+          <a:p>
+            <a:pPr>
+              <a:lnSpc>
+                <a:spcPct val="90000"/>
+              </a:lnSpc>
+              <a:spcAft>
+                <a:spcPts val="300"/>
               </a:spcAft>
               <a:defRPr sz="2000" b="1"/>
             </a:pPr>
             <a:r>
-              <a:rPr sz="1400"/>
+              <a:rPr sz="1300"/>
               <a:t>✅ Açık:</a:t>
             </a:r>
           </a:p>
           <a:p>
             <a:pPr lvl="1">
-              <a:spcAft>
-                <a:spcPts val="1200"/>
-              </a:spcAft>
-              <a:defRPr sz="1800"/>
-            </a:pPr>
-            <a:r>
-              <a:rPr sz="1400"/>
+              <a:lnSpc>
+                <a:spcPct val="90000"/>
+              </a:lnSpc>
+              <a:spcAft>
+                <a:spcPts val="300"/>
+              </a:spcAft>
+              <a:defRPr sz="1800"/>
+            </a:pPr>
+            <a:r>
+              <a:rPr sz="1300"/>
               <a:t>    • Başlık var mı?</a:t>
             </a:r>
           </a:p>
           <a:p>
             <a:pPr lvl="1">
-              <a:spcAft>
-                <a:spcPts val="1200"/>
-              </a:spcAft>
-              <a:defRPr sz="1800"/>
-            </a:pPr>
-            <a:r>
-              <a:rPr sz="1400"/>
+              <a:lnSpc>
+                <a:spcPct val="90000"/>
+              </a:lnSpc>
+              <a:spcAft>
+                <a:spcPts val="300"/>
+              </a:spcAft>
+              <a:defRPr sz="1800"/>
+            </a:pPr>
+            <a:r>
+              <a:rPr sz="1300"/>
               <a:t>    • Eksen etiketleri var mı?</a:t>
             </a:r>
           </a:p>
           <a:p>
             <a:pPr lvl="1">
-              <a:spcAft>
-                <a:spcPts val="1200"/>
-              </a:spcAft>
-              <a:defRPr sz="1800"/>
-            </a:pPr>
-            <a:r>
-              <a:rPr sz="1400"/>
+              <a:lnSpc>
+                <a:spcPct val="90000"/>
+              </a:lnSpc>
+              <a:spcAft>
+                <a:spcPts val="300"/>
+              </a:spcAft>
+              <a:defRPr sz="1800"/>
+            </a:pPr>
+            <a:r>
+              <a:rPr sz="1300"/>
               <a:t>    • Lejant (açıklama) var mı?</a:t>
             </a:r>
           </a:p>
           <a:p>
             <a:pPr>
-              <a:spcAft>
-                <a:spcPts val="1200"/>
-              </a:spcAft>
-              <a:defRPr sz="2000"/>
-            </a:pPr>
-          </a:p>
-          <a:p>
-            <a:pPr>
-              <a:spcAft>
-                <a:spcPts val="1200"/>
+              <a:lnSpc>
+                <a:spcPct val="90000"/>
+              </a:lnSpc>
+              <a:spcAft>
+                <a:spcPts val="300"/>
+              </a:spcAft>
+              <a:defRPr sz="2000"/>
+            </a:pPr>
+          </a:p>
+          <a:p>
+            <a:pPr>
+              <a:lnSpc>
+                <a:spcPct val="90000"/>
+              </a:lnSpc>
+              <a:spcAft>
+                <a:spcPts val="300"/>
               </a:spcAft>
               <a:defRPr sz="2000" b="1"/>
             </a:pPr>
             <a:r>
-              <a:rPr sz="1400"/>
+              <a:rPr sz="1300"/>
               <a:t>✅ Doğru:</a:t>
             </a:r>
           </a:p>
           <a:p>
             <a:pPr lvl="1">
-              <a:spcAft>
-                <a:spcPts val="1200"/>
-              </a:spcAft>
-              <a:defRPr sz="1800"/>
-            </a:pPr>
-            <a:r>
-              <a:rPr sz="1400"/>
+              <a:lnSpc>
+                <a:spcPct val="90000"/>
+              </a:lnSpc>
+              <a:spcAft>
+                <a:spcPts val="300"/>
+              </a:spcAft>
+              <a:defRPr sz="1800"/>
+            </a:pPr>
+            <a:r>
+              <a:rPr sz="1300"/>
               <a:t>    • Yanıltıcı olmasın</a:t>
             </a:r>
           </a:p>
           <a:p>
             <a:pPr lvl="1">
-              <a:spcAft>
-                <a:spcPts val="1200"/>
-              </a:spcAft>
-              <a:defRPr sz="1800"/>
-            </a:pPr>
-            <a:r>
-              <a:rPr sz="1400"/>
+              <a:lnSpc>
+                <a:spcPct val="90000"/>
+              </a:lnSpc>
+              <a:spcAft>
+                <a:spcPts val="300"/>
+              </a:spcAft>
+              <a:defRPr sz="1800"/>
+            </a:pPr>
+            <a:r>
+              <a:rPr sz="1300"/>
               <a:t>    • Ölçek doğru mu?</a:t>
             </a:r>
           </a:p>
           <a:p>
             <a:pPr>
-              <a:spcAft>
-                <a:spcPts val="1200"/>
-              </a:spcAft>
-              <a:defRPr sz="2000"/>
-            </a:pPr>
-          </a:p>
-          <a:p>
-            <a:pPr>
-              <a:spcAft>
-                <a:spcPts val="1200"/>
+              <a:lnSpc>
+                <a:spcPct val="90000"/>
+              </a:lnSpc>
+              <a:spcAft>
+                <a:spcPts val="300"/>
+              </a:spcAft>
+              <a:defRPr sz="2000"/>
+            </a:pPr>
+          </a:p>
+          <a:p>
+            <a:pPr>
+              <a:lnSpc>
+                <a:spcPct val="90000"/>
+              </a:lnSpc>
+              <a:spcAft>
+                <a:spcPts val="300"/>
               </a:spcAft>
               <a:defRPr sz="2000" b="1"/>
             </a:pPr>
             <a:r>
-              <a:rPr sz="1400"/>
+              <a:rPr sz="1300"/>
               <a:t>✅ Renkli:</a:t>
             </a:r>
           </a:p>
           <a:p>
             <a:pPr lvl="1">
-              <a:spcAft>
-                <a:spcPts val="1200"/>
-              </a:spcAft>
-              <a:defRPr sz="1800"/>
-            </a:pPr>
-            <a:r>
-              <a:rPr sz="1400"/>
+              <a:lnSpc>
+                <a:spcPct val="90000"/>
+              </a:lnSpc>
+              <a:spcAft>
+                <a:spcPts val="300"/>
+              </a:spcAft>
+              <a:defRPr sz="1800"/>
+            </a:pPr>
+            <a:r>
+              <a:rPr sz="1300"/>
               <a:t>    • Renk kodlama kullan</a:t>
             </a:r>
           </a:p>
           <a:p>
             <a:pPr lvl="1">
-              <a:spcAft>
-                <a:spcPts val="1200"/>
-              </a:spcAft>
-              <a:defRPr sz="1800"/>
-            </a:pPr>
-            <a:r>
-              <a:rPr sz="1400"/>
+              <a:lnSpc>
+                <a:spcPct val="90000"/>
+              </a:lnSpc>
+              <a:spcAft>
+                <a:spcPts val="300"/>
+              </a:spcAft>
+              <a:defRPr sz="1800"/>
+            </a:pPr>
+            <a:r>
+              <a:rPr sz="1300"/>
               <a:t>    • Ama çok fazla renk kullanma</a:t>
             </a:r>
           </a:p>
           <a:p>
             <a:pPr>
-              <a:spcAft>
-                <a:spcPts val="1200"/>
-              </a:spcAft>
-              <a:defRPr sz="2000"/>
-            </a:pPr>
-          </a:p>
-          <a:p>
-            <a:pPr>
-              <a:spcAft>
-                <a:spcPts val="1200"/>
-              </a:spcAft>
-              <a:defRPr sz="2000"/>
-            </a:pPr>
-            <a:r>
-              <a:rPr sz="1400"/>
+              <a:lnSpc>
+                <a:spcPct val="90000"/>
+              </a:lnSpc>
+              <a:spcAft>
+                <a:spcPts val="300"/>
+              </a:spcAft>
+              <a:defRPr sz="2000"/>
+            </a:pPr>
+          </a:p>
+          <a:p>
+            <a:pPr>
+              <a:lnSpc>
+                <a:spcPct val="90000"/>
+              </a:lnSpc>
+              <a:spcAft>
+                <a:spcPts val="300"/>
+              </a:spcAft>
+              <a:defRPr sz="2000"/>
+            </a:pPr>
+            <a:r>
+              <a:rPr sz="1300"/>
               <a:t>❌ Kötü Görselleştirme:</a:t>
             </a:r>
           </a:p>
           <a:p>
             <a:pPr lvl="1">
-              <a:spcAft>
-                <a:spcPts val="1200"/>
-              </a:spcAft>
-              <a:defRPr sz="1800"/>
-            </a:pPr>
-            <a:r>
-              <a:rPr sz="1400"/>
+              <a:lnSpc>
+                <a:spcPct val="90000"/>
+              </a:lnSpc>
+              <a:spcAft>
+                <a:spcPts val="300"/>
+              </a:spcAft>
+              <a:defRPr sz="1800"/>
+            </a:pPr>
+            <a:r>
+              <a:rPr sz="1300"/>
               <a:t>    • 3D efektler (gereksiz)</a:t>
             </a:r>
           </a:p>
           <a:p>
             <a:pPr lvl="1">
-              <a:spcAft>
-                <a:spcPts val="1200"/>
-              </a:spcAft>
-              <a:defRPr sz="1800"/>
-            </a:pPr>
-            <a:r>
-              <a:rPr sz="1400"/>
+              <a:lnSpc>
+                <a:spcPct val="90000"/>
+              </a:lnSpc>
+              <a:spcAft>
+                <a:spcPts val="300"/>
+              </a:spcAft>
+              <a:defRPr sz="1800"/>
+            </a:pPr>
+            <a:r>
+              <a:rPr sz="1300"/>
               <a:t>    • Yanlış grafik türü</a:t>
             </a:r>
           </a:p>
           <a:p>
             <a:pPr lvl="1">
-              <a:spcAft>
-                <a:spcPts val="1200"/>
-              </a:spcAft>
-              <a:defRPr sz="1800"/>
-            </a:pPr>
-            <a:r>
-              <a:rPr sz="1400"/>
+              <a:lnSpc>
+                <a:spcPct val="90000"/>
+              </a:lnSpc>
+              <a:spcAft>
+                <a:spcPts val="300"/>
+              </a:spcAft>
+              <a:defRPr sz="1800"/>
+            </a:pPr>
+            <a:r>
+              <a:rPr sz="1300"/>
               <a:t>    • Eksik etiketler</a:t>
             </a:r>
           </a:p>
@@ -10929,7 +12158,7 @@
         </p:nvSpPr>
         <p:spPr/>
         <p:txBody>
-          <a:bodyPr/>
+          <a:bodyPr wrap="square"/>
           <a:lstStyle/>
           <a:p>
             <a:pPr>
@@ -10983,344 +12212,446 @@
             <a:spAutoFit/>
           </a:bodyPr>
           <a:lstStyle/>
-          <a:p/>
-          <a:p>
-            <a:pPr>
-              <a:spcAft>
-                <a:spcPts val="1200"/>
-              </a:spcAft>
-              <a:defRPr sz="2000"/>
-            </a:pPr>
-            <a:r>
-              <a:rPr sz="1400"/>
+          <a:p>
+            <a:pPr>
+              <a:lnSpc>
+                <a:spcPct val="90000"/>
+              </a:lnSpc>
+              <a:spcAft>
+                <a:spcPts val="300"/>
+              </a:spcAft>
+            </a:pPr>
+          </a:p>
+          <a:p>
+            <a:pPr>
+              <a:lnSpc>
+                <a:spcPct val="90000"/>
+              </a:lnSpc>
+              <a:spcAft>
+                <a:spcPts val="300"/>
+              </a:spcAft>
+              <a:defRPr sz="2000"/>
+            </a:pPr>
+            <a:r>
+              <a:rPr sz="1300"/>
               <a:t>Tablolama programları veri için çok kullanışlı!</a:t>
             </a:r>
           </a:p>
           <a:p>
             <a:pPr>
-              <a:spcAft>
-                <a:spcPts val="1200"/>
-              </a:spcAft>
-              <a:defRPr sz="2000"/>
-            </a:pPr>
-          </a:p>
-          <a:p>
-            <a:pPr>
-              <a:spcAft>
-                <a:spcPts val="1200"/>
+              <a:lnSpc>
+                <a:spcPct val="90000"/>
+              </a:lnSpc>
+              <a:spcAft>
+                <a:spcPts val="300"/>
+              </a:spcAft>
+              <a:defRPr sz="2000"/>
+            </a:pPr>
+          </a:p>
+          <a:p>
+            <a:pPr>
+              <a:lnSpc>
+                <a:spcPct val="90000"/>
+              </a:lnSpc>
+              <a:spcAft>
+                <a:spcPts val="300"/>
               </a:spcAft>
               <a:defRPr sz="2000" b="1"/>
             </a:pPr>
             <a:r>
-              <a:rPr sz="1400"/>
+              <a:rPr sz="1300"/>
               <a:t>✅ Temel Kavramlar:</a:t>
             </a:r>
           </a:p>
           <a:p>
             <a:pPr lvl="1">
-              <a:spcAft>
-                <a:spcPts val="1200"/>
-              </a:spcAft>
-              <a:defRPr sz="1800"/>
-            </a:pPr>
-            <a:r>
-              <a:rPr sz="1400"/>
+              <a:lnSpc>
+                <a:spcPct val="90000"/>
+              </a:lnSpc>
+              <a:spcAft>
+                <a:spcPts val="300"/>
+              </a:spcAft>
+              <a:defRPr sz="1800"/>
+            </a:pPr>
+            <a:r>
+              <a:rPr sz="1300"/>
               <a:t>    • Hücre: Tek bir veri kutusu (A1, B2)</a:t>
             </a:r>
           </a:p>
           <a:p>
             <a:pPr lvl="1">
-              <a:spcAft>
-                <a:spcPts val="1200"/>
-              </a:spcAft>
-              <a:defRPr sz="1800"/>
-            </a:pPr>
-            <a:r>
-              <a:rPr sz="1400"/>
+              <a:lnSpc>
+                <a:spcPct val="90000"/>
+              </a:lnSpc>
+              <a:spcAft>
+                <a:spcPts val="300"/>
+              </a:spcAft>
+              <a:defRPr sz="1800"/>
+            </a:pPr>
+            <a:r>
+              <a:rPr sz="1300"/>
               <a:t>    • Satır: Yatay</a:t>
             </a:r>
           </a:p>
           <a:p>
             <a:pPr lvl="1">
-              <a:spcAft>
-                <a:spcPts val="1200"/>
-              </a:spcAft>
-              <a:defRPr sz="1800"/>
-            </a:pPr>
-            <a:r>
-              <a:rPr sz="1400"/>
+              <a:lnSpc>
+                <a:spcPct val="90000"/>
+              </a:lnSpc>
+              <a:spcAft>
+                <a:spcPts val="300"/>
+              </a:spcAft>
+              <a:defRPr sz="1800"/>
+            </a:pPr>
+            <a:r>
+              <a:rPr sz="1300"/>
               <a:t>    • Sütun: Dikey</a:t>
             </a:r>
           </a:p>
           <a:p>
             <a:pPr lvl="1">
-              <a:spcAft>
-                <a:spcPts val="1200"/>
-              </a:spcAft>
-              <a:defRPr sz="1800"/>
-            </a:pPr>
-            <a:r>
-              <a:rPr sz="1400"/>
+              <a:lnSpc>
+                <a:spcPct val="90000"/>
+              </a:lnSpc>
+              <a:spcAft>
+                <a:spcPts val="300"/>
+              </a:spcAft>
+              <a:defRPr sz="1800"/>
+            </a:pPr>
+            <a:r>
+              <a:rPr sz="1300"/>
               <a:t>    • Formül: Hesaplamalar</a:t>
             </a:r>
           </a:p>
           <a:p>
             <a:pPr>
-              <a:spcAft>
-                <a:spcPts val="1200"/>
-              </a:spcAft>
-              <a:defRPr sz="2000"/>
-            </a:pPr>
-          </a:p>
-          <a:p>
-            <a:pPr>
-              <a:spcAft>
-                <a:spcPts val="1200"/>
+              <a:lnSpc>
+                <a:spcPct val="90000"/>
+              </a:lnSpc>
+              <a:spcAft>
+                <a:spcPts val="300"/>
+              </a:spcAft>
+              <a:defRPr sz="2000"/>
+            </a:pPr>
+          </a:p>
+          <a:p>
+            <a:pPr>
+              <a:lnSpc>
+                <a:spcPct val="90000"/>
+              </a:lnSpc>
+              <a:spcAft>
+                <a:spcPts val="300"/>
               </a:spcAft>
               <a:defRPr sz="2000" b="1"/>
             </a:pPr>
             <a:r>
-              <a:rPr sz="1400"/>
+              <a:rPr sz="1300"/>
               <a:t>📌 Tablo Oluşturma Adımları:</a:t>
             </a:r>
           </a:p>
           <a:p>
             <a:pPr>
-              <a:spcAft>
-                <a:spcPts val="1200"/>
-              </a:spcAft>
-              <a:defRPr sz="2000"/>
-            </a:pPr>
-          </a:p>
-          <a:p>
-            <a:pPr>
-              <a:spcAft>
-                <a:spcPts val="1200"/>
-              </a:spcAft>
-              <a:defRPr sz="2000"/>
-            </a:pPr>
-            <a:r>
-              <a:rPr sz="1400"/>
+              <a:lnSpc>
+                <a:spcPct val="90000"/>
+              </a:lnSpc>
+              <a:spcAft>
+                <a:spcPts val="300"/>
+              </a:spcAft>
+              <a:defRPr sz="2000"/>
+            </a:pPr>
+          </a:p>
+          <a:p>
+            <a:pPr>
+              <a:lnSpc>
+                <a:spcPct val="90000"/>
+              </a:lnSpc>
+              <a:spcAft>
+                <a:spcPts val="300"/>
+              </a:spcAft>
+              <a:defRPr sz="2000"/>
+            </a:pPr>
+            <a:r>
+              <a:rPr sz="1300"/>
               <a:t>1️⃣ Başlıkları Yaz:</a:t>
             </a:r>
           </a:p>
           <a:p>
             <a:pPr lvl="1">
-              <a:spcAft>
-                <a:spcPts val="1200"/>
-              </a:spcAft>
-              <a:defRPr sz="1800"/>
-            </a:pPr>
-            <a:r>
-              <a:rPr sz="1400"/>
+              <a:lnSpc>
+                <a:spcPct val="90000"/>
+              </a:lnSpc>
+              <a:spcAft>
+                <a:spcPts val="300"/>
+              </a:spcAft>
+              <a:defRPr sz="1800"/>
+            </a:pPr>
+            <a:r>
+              <a:rPr sz="1300"/>
               <a:t>    • İlk satıra sütun adları</a:t>
             </a:r>
           </a:p>
           <a:p>
             <a:pPr>
-              <a:spcAft>
-                <a:spcPts val="1200"/>
-              </a:spcAft>
-              <a:defRPr sz="2000"/>
-            </a:pPr>
-          </a:p>
-          <a:p>
-            <a:pPr>
-              <a:spcAft>
-                <a:spcPts val="1200"/>
-              </a:spcAft>
-              <a:defRPr sz="2000"/>
-            </a:pPr>
-            <a:r>
-              <a:rPr sz="1400"/>
+              <a:lnSpc>
+                <a:spcPct val="90000"/>
+              </a:lnSpc>
+              <a:spcAft>
+                <a:spcPts val="300"/>
+              </a:spcAft>
+              <a:defRPr sz="2000"/>
+            </a:pPr>
+          </a:p>
+          <a:p>
+            <a:pPr>
+              <a:lnSpc>
+                <a:spcPct val="90000"/>
+              </a:lnSpc>
+              <a:spcAft>
+                <a:spcPts val="300"/>
+              </a:spcAft>
+              <a:defRPr sz="2000"/>
+            </a:pPr>
+            <a:r>
+              <a:rPr sz="1300"/>
               <a:t>2️⃣ Verileri Gir:</a:t>
             </a:r>
           </a:p>
           <a:p>
             <a:pPr lvl="1">
-              <a:spcAft>
-                <a:spcPts val="1200"/>
-              </a:spcAft>
-              <a:defRPr sz="1800"/>
-            </a:pPr>
-            <a:r>
-              <a:rPr sz="1400"/>
+              <a:lnSpc>
+                <a:spcPct val="90000"/>
+              </a:lnSpc>
+              <a:spcAft>
+                <a:spcPts val="300"/>
+              </a:spcAft>
+              <a:defRPr sz="1800"/>
+            </a:pPr>
+            <a:r>
+              <a:rPr sz="1300"/>
               <a:t>    • Her satıra bir kayıt</a:t>
             </a:r>
           </a:p>
           <a:p>
             <a:pPr>
-              <a:spcAft>
-                <a:spcPts val="1200"/>
-              </a:spcAft>
-              <a:defRPr sz="2000"/>
-            </a:pPr>
-          </a:p>
-          <a:p>
-            <a:pPr>
-              <a:spcAft>
-                <a:spcPts val="1200"/>
-              </a:spcAft>
-              <a:defRPr sz="2000"/>
-            </a:pPr>
-            <a:r>
-              <a:rPr sz="1400"/>
+              <a:lnSpc>
+                <a:spcPct val="90000"/>
+              </a:lnSpc>
+              <a:spcAft>
+                <a:spcPts val="300"/>
+              </a:spcAft>
+              <a:defRPr sz="2000"/>
+            </a:pPr>
+          </a:p>
+          <a:p>
+            <a:pPr>
+              <a:lnSpc>
+                <a:spcPct val="90000"/>
+              </a:lnSpc>
+              <a:spcAft>
+                <a:spcPts val="300"/>
+              </a:spcAft>
+              <a:defRPr sz="2000"/>
+            </a:pPr>
+            <a:r>
+              <a:rPr sz="1300"/>
               <a:t>3️⃣ Biçimlendir:</a:t>
             </a:r>
           </a:p>
           <a:p>
             <a:pPr lvl="1">
-              <a:spcAft>
-                <a:spcPts val="1200"/>
-              </a:spcAft>
-              <a:defRPr sz="1800"/>
-            </a:pPr>
-            <a:r>
-              <a:rPr sz="1400"/>
+              <a:lnSpc>
+                <a:spcPct val="90000"/>
+              </a:lnSpc>
+              <a:spcAft>
+                <a:spcPts val="300"/>
+              </a:spcAft>
+              <a:defRPr sz="1800"/>
+            </a:pPr>
+            <a:r>
+              <a:rPr sz="1300"/>
               <a:t>    • Kalın başlıklar</a:t>
             </a:r>
           </a:p>
           <a:p>
             <a:pPr lvl="1">
-              <a:spcAft>
-                <a:spcPts val="1200"/>
-              </a:spcAft>
-              <a:defRPr sz="1800"/>
-            </a:pPr>
-            <a:r>
-              <a:rPr sz="1400"/>
+              <a:lnSpc>
+                <a:spcPct val="90000"/>
+              </a:lnSpc>
+              <a:spcAft>
+                <a:spcPts val="300"/>
+              </a:spcAft>
+              <a:defRPr sz="1800"/>
+            </a:pPr>
+            <a:r>
+              <a:rPr sz="1300"/>
               <a:t>    • Kenarlıklar ekle</a:t>
             </a:r>
           </a:p>
           <a:p>
             <a:pPr lvl="1">
-              <a:spcAft>
-                <a:spcPts val="1200"/>
-              </a:spcAft>
-              <a:defRPr sz="1800"/>
-            </a:pPr>
-            <a:r>
-              <a:rPr sz="1400"/>
+              <a:lnSpc>
+                <a:spcPct val="90000"/>
+              </a:lnSpc>
+              <a:spcAft>
+                <a:spcPts val="300"/>
+              </a:spcAft>
+              <a:defRPr sz="1800"/>
+            </a:pPr>
+            <a:r>
+              <a:rPr sz="1300"/>
               <a:t>    • Renkler kullan</a:t>
             </a:r>
           </a:p>
           <a:p>
             <a:pPr>
-              <a:spcAft>
-                <a:spcPts val="1200"/>
-              </a:spcAft>
-              <a:defRPr sz="2000"/>
-            </a:pPr>
-          </a:p>
-          <a:p>
-            <a:pPr>
-              <a:spcAft>
-                <a:spcPts val="1200"/>
-              </a:spcAft>
-              <a:defRPr sz="2000"/>
-            </a:pPr>
-            <a:r>
-              <a:rPr sz="1400"/>
+              <a:lnSpc>
+                <a:spcPct val="90000"/>
+              </a:lnSpc>
+              <a:spcAft>
+                <a:spcPts val="300"/>
+              </a:spcAft>
+              <a:defRPr sz="2000"/>
+            </a:pPr>
+          </a:p>
+          <a:p>
+            <a:pPr>
+              <a:lnSpc>
+                <a:spcPct val="90000"/>
+              </a:lnSpc>
+              <a:spcAft>
+                <a:spcPts val="300"/>
+              </a:spcAft>
+              <a:defRPr sz="2000"/>
+            </a:pPr>
+            <a:r>
+              <a:rPr sz="1300"/>
               <a:t>4️⃣ Sırala:</a:t>
             </a:r>
           </a:p>
           <a:p>
             <a:pPr lvl="1">
-              <a:spcAft>
-                <a:spcPts val="1200"/>
-              </a:spcAft>
-              <a:defRPr sz="1800"/>
-            </a:pPr>
-            <a:r>
-              <a:rPr sz="1400"/>
+              <a:lnSpc>
+                <a:spcPct val="90000"/>
+              </a:lnSpc>
+              <a:spcAft>
+                <a:spcPts val="300"/>
+              </a:spcAft>
+              <a:defRPr sz="1800"/>
+            </a:pPr>
+            <a:r>
+              <a:rPr sz="1300"/>
               <a:t>    • Veri → Sırala</a:t>
             </a:r>
           </a:p>
           <a:p>
             <a:pPr>
-              <a:spcAft>
-                <a:spcPts val="1200"/>
-              </a:spcAft>
-              <a:defRPr sz="2000"/>
-            </a:pPr>
-          </a:p>
-          <a:p>
-            <a:pPr>
-              <a:spcAft>
-                <a:spcPts val="1200"/>
-              </a:spcAft>
-              <a:defRPr sz="2000"/>
-            </a:pPr>
-            <a:r>
-              <a:rPr sz="1400"/>
+              <a:lnSpc>
+                <a:spcPct val="90000"/>
+              </a:lnSpc>
+              <a:spcAft>
+                <a:spcPts val="300"/>
+              </a:spcAft>
+              <a:defRPr sz="2000"/>
+            </a:pPr>
+          </a:p>
+          <a:p>
+            <a:pPr>
+              <a:lnSpc>
+                <a:spcPct val="90000"/>
+              </a:lnSpc>
+              <a:spcAft>
+                <a:spcPts val="300"/>
+              </a:spcAft>
+              <a:defRPr sz="2000"/>
+            </a:pPr>
+            <a:r>
+              <a:rPr sz="1300"/>
               <a:t>5️⃣ Filtrele:</a:t>
             </a:r>
           </a:p>
           <a:p>
             <a:pPr lvl="1">
-              <a:spcAft>
-                <a:spcPts val="1200"/>
-              </a:spcAft>
-              <a:defRPr sz="1800"/>
-            </a:pPr>
-            <a:r>
-              <a:rPr sz="1400"/>
+              <a:lnSpc>
+                <a:spcPct val="90000"/>
+              </a:lnSpc>
+              <a:spcAft>
+                <a:spcPts val="300"/>
+              </a:spcAft>
+              <a:defRPr sz="1800"/>
+            </a:pPr>
+            <a:r>
+              <a:rPr sz="1300"/>
               <a:t>    • Belirli verileri göster</a:t>
             </a:r>
           </a:p>
           <a:p>
             <a:pPr>
-              <a:spcAft>
-                <a:spcPts val="1200"/>
-              </a:spcAft>
-              <a:defRPr sz="2000"/>
-            </a:pPr>
-          </a:p>
-          <a:p>
-            <a:pPr>
-              <a:spcAft>
-                <a:spcPts val="1200"/>
+              <a:lnSpc>
+                <a:spcPct val="90000"/>
+              </a:lnSpc>
+              <a:spcAft>
+                <a:spcPts val="300"/>
+              </a:spcAft>
+              <a:defRPr sz="2000"/>
+            </a:pPr>
+          </a:p>
+          <a:p>
+            <a:pPr>
+              <a:lnSpc>
+                <a:spcPct val="90000"/>
+              </a:lnSpc>
+              <a:spcAft>
+                <a:spcPts val="300"/>
               </a:spcAft>
               <a:defRPr sz="2000" b="1"/>
             </a:pPr>
             <a:r>
-              <a:rPr sz="1400"/>
+              <a:rPr sz="1300"/>
               <a:t>💡 Kısayollar:</a:t>
             </a:r>
           </a:p>
           <a:p>
             <a:pPr lvl="1">
-              <a:spcAft>
-                <a:spcPts val="1200"/>
-              </a:spcAft>
-              <a:defRPr sz="1800"/>
-            </a:pPr>
-            <a:r>
-              <a:rPr sz="1400"/>
+              <a:lnSpc>
+                <a:spcPct val="90000"/>
+              </a:lnSpc>
+              <a:spcAft>
+                <a:spcPts val="300"/>
+              </a:spcAft>
+              <a:defRPr sz="1800"/>
+            </a:pPr>
+            <a:r>
+              <a:rPr sz="1300"/>
               <a:t>    • Ctrl+C: Kopyala</a:t>
             </a:r>
           </a:p>
           <a:p>
             <a:pPr lvl="1">
-              <a:spcAft>
-                <a:spcPts val="1200"/>
-              </a:spcAft>
-              <a:defRPr sz="1800"/>
-            </a:pPr>
-            <a:r>
-              <a:rPr sz="1400"/>
+              <a:lnSpc>
+                <a:spcPct val="90000"/>
+              </a:lnSpc>
+              <a:spcAft>
+                <a:spcPts val="300"/>
+              </a:spcAft>
+              <a:defRPr sz="1800"/>
+            </a:pPr>
+            <a:r>
+              <a:rPr sz="1300"/>
               <a:t>    • Ctrl+V: Yapıştır</a:t>
             </a:r>
           </a:p>
           <a:p>
             <a:pPr lvl="1">
-              <a:spcAft>
-                <a:spcPts val="1200"/>
-              </a:spcAft>
-              <a:defRPr sz="1800"/>
-            </a:pPr>
-            <a:r>
-              <a:rPr sz="1400"/>
+              <a:lnSpc>
+                <a:spcPct val="90000"/>
+              </a:lnSpc>
+              <a:spcAft>
+                <a:spcPts val="300"/>
+              </a:spcAft>
+              <a:defRPr sz="1800"/>
+            </a:pPr>
+            <a:r>
+              <a:rPr sz="1300"/>
               <a:t>    • Ctrl+Z: Geri al</a:t>
             </a:r>
           </a:p>

--- a/sunumlar/6-sinif-unite1-veri-analiz-DETAYLI.pptx
+++ b/sunumlar/6-sinif-unite1-veri-analiz-DETAYLI.pptx
@@ -5586,12 +5586,21 @@
           <a:noFill/>
         </p:spPr>
         <p:txBody>
-          <a:bodyPr wrap="square">
+          <a:bodyPr wrap="square" tIns="25400" bIns="25400" lIns="63500" rIns="63500">
             <a:spAutoFit/>
           </a:bodyPr>
           <a:lstStyle/>
           <a:p>
             <a:pPr algn="ctr">
+              <a:lnSpc>
+                <a:spcPct val="85000"/>
+              </a:lnSpc>
+              <a:spcBef>
+                <a:spcPts val="200"/>
+              </a:spcBef>
+              <a:spcAft>
+                <a:spcPts val="200"/>
+              </a:spcAft>
               <a:defRPr sz="5400" b="1">
                 <a:solidFill>
                   <a:srgbClr val="FFFFFF"/>
@@ -5599,6 +5608,7 @@
               </a:defRPr>
             </a:pPr>
             <a:r>
+              <a:rPr/>
               <a:t>6. SINIF - ÜNİTE 1</a:t>
             </a:r>
           </a:p>
@@ -5621,12 +5631,21 @@
           <a:noFill/>
         </p:spPr>
         <p:txBody>
-          <a:bodyPr wrap="square">
+          <a:bodyPr wrap="square" tIns="25400" bIns="25400" lIns="63500" rIns="63500">
             <a:spAutoFit/>
           </a:bodyPr>
           <a:lstStyle/>
           <a:p>
             <a:pPr algn="ctr">
+              <a:lnSpc>
+                <a:spcPct val="85000"/>
+              </a:lnSpc>
+              <a:spcBef>
+                <a:spcPts val="200"/>
+              </a:spcBef>
+              <a:spcAft>
+                <a:spcPts val="200"/>
+              </a:spcAft>
               <a:defRPr sz="2800">
                 <a:solidFill>
                   <a:srgbClr val="FFFFFF"/>
@@ -5634,6 +5653,7 @@
               </a:defRPr>
             </a:pPr>
             <a:r>
+              <a:rPr/>
               <a:t>Veri ve Analiz</a:t>
             </a:r>
           </a:p>
@@ -5669,10 +5689,19 @@
         </p:nvSpPr>
         <p:spPr/>
         <p:txBody>
-          <a:bodyPr wrap="square"/>
+          <a:bodyPr wrap="square" tIns="25400" bIns="25400" lIns="63500" rIns="63500"/>
           <a:lstStyle/>
           <a:p>
             <a:pPr>
+              <a:lnSpc>
+                <a:spcPct val="85000"/>
+              </a:lnSpc>
+              <a:spcBef>
+                <a:spcPts val="200"/>
+              </a:spcBef>
+              <a:spcAft>
+                <a:spcPts val="200"/>
+              </a:spcAft>
               <a:defRPr sz="4000" b="1">
                 <a:solidFill>
                   <a:srgbClr val="764BA2"/>
@@ -5680,6 +5709,7 @@
               </a:defRPr>
             </a:pPr>
             <a:r>
+              <a:rPr/>
               <a:t>🧮 Formüller ve Fonksiyonlar</a:t>
             </a:r>
           </a:p>
@@ -5719,7 +5749,7 @@
           <a:noFill/>
         </p:spPr>
         <p:txBody>
-          <a:bodyPr wrap="square">
+          <a:bodyPr wrap="square" tIns="25400" bIns="25400" lIns="63500" rIns="63500">
             <a:spAutoFit/>
           </a:bodyPr>
           <a:lstStyle/>
@@ -5736,10 +5766,13 @@
           <a:p>
             <a:pPr>
               <a:lnSpc>
-                <a:spcPct val="90000"/>
-              </a:lnSpc>
-              <a:spcAft>
-                <a:spcPts val="300"/>
+                <a:spcPct val="85000"/>
+              </a:lnSpc>
+              <a:spcBef>
+                <a:spcPts val="200"/>
+              </a:spcBef>
+              <a:spcAft>
+                <a:spcPts val="200"/>
               </a:spcAft>
               <a:defRPr sz="2000"/>
             </a:pPr>
@@ -5762,10 +5795,13 @@
           <a:p>
             <a:pPr>
               <a:lnSpc>
-                <a:spcPct val="90000"/>
-              </a:lnSpc>
-              <a:spcAft>
-                <a:spcPts val="300"/>
+                <a:spcPct val="85000"/>
+              </a:lnSpc>
+              <a:spcBef>
+                <a:spcPts val="200"/>
+              </a:spcBef>
+              <a:spcAft>
+                <a:spcPts val="200"/>
               </a:spcAft>
               <a:defRPr sz="2000" b="1"/>
             </a:pPr>
@@ -5788,10 +5824,13 @@
           <a:p>
             <a:pPr>
               <a:lnSpc>
-                <a:spcPct val="90000"/>
-              </a:lnSpc>
-              <a:spcAft>
-                <a:spcPts val="300"/>
+                <a:spcPct val="85000"/>
+              </a:lnSpc>
+              <a:spcBef>
+                <a:spcPts val="200"/>
+              </a:spcBef>
+              <a:spcAft>
+                <a:spcPts val="200"/>
               </a:spcAft>
               <a:defRPr sz="2000"/>
             </a:pPr>
@@ -5803,10 +5842,13 @@
           <a:p>
             <a:pPr lvl="1">
               <a:lnSpc>
-                <a:spcPct val="90000"/>
-              </a:lnSpc>
-              <a:spcAft>
-                <a:spcPts val="300"/>
+                <a:spcPct val="85000"/>
+              </a:lnSpc>
+              <a:spcBef>
+                <a:spcPts val="200"/>
+              </a:spcBef>
+              <a:spcAft>
+                <a:spcPts val="200"/>
               </a:spcAft>
               <a:defRPr sz="1800"/>
             </a:pPr>
@@ -5818,10 +5860,13 @@
           <a:p>
             <a:pPr lvl="1">
               <a:lnSpc>
-                <a:spcPct val="90000"/>
-              </a:lnSpc>
-              <a:spcAft>
-                <a:spcPts val="300"/>
+                <a:spcPct val="85000"/>
+              </a:lnSpc>
+              <a:spcBef>
+                <a:spcPts val="200"/>
+              </a:spcBef>
+              <a:spcAft>
+                <a:spcPts val="200"/>
               </a:spcAft>
               <a:defRPr sz="1800"/>
             </a:pPr>
@@ -5844,10 +5889,13 @@
           <a:p>
             <a:pPr>
               <a:lnSpc>
-                <a:spcPct val="90000"/>
-              </a:lnSpc>
-              <a:spcAft>
-                <a:spcPts val="300"/>
+                <a:spcPct val="85000"/>
+              </a:lnSpc>
+              <a:spcBef>
+                <a:spcPts val="200"/>
+              </a:spcBef>
+              <a:spcAft>
+                <a:spcPts val="200"/>
               </a:spcAft>
               <a:defRPr sz="2000"/>
             </a:pPr>
@@ -5859,10 +5907,13 @@
           <a:p>
             <a:pPr lvl="1">
               <a:lnSpc>
-                <a:spcPct val="90000"/>
-              </a:lnSpc>
-              <a:spcAft>
-                <a:spcPts val="300"/>
+                <a:spcPct val="85000"/>
+              </a:lnSpc>
+              <a:spcBef>
+                <a:spcPts val="200"/>
+              </a:spcBef>
+              <a:spcAft>
+                <a:spcPts val="200"/>
               </a:spcAft>
               <a:defRPr sz="1800"/>
             </a:pPr>
@@ -5885,10 +5936,13 @@
           <a:p>
             <a:pPr>
               <a:lnSpc>
-                <a:spcPct val="90000"/>
-              </a:lnSpc>
-              <a:spcAft>
-                <a:spcPts val="300"/>
+                <a:spcPct val="85000"/>
+              </a:lnSpc>
+              <a:spcBef>
+                <a:spcPts val="200"/>
+              </a:spcBef>
+              <a:spcAft>
+                <a:spcPts val="200"/>
               </a:spcAft>
               <a:defRPr sz="2000"/>
             </a:pPr>
@@ -5900,10 +5954,13 @@
           <a:p>
             <a:pPr lvl="1">
               <a:lnSpc>
-                <a:spcPct val="90000"/>
-              </a:lnSpc>
-              <a:spcAft>
-                <a:spcPts val="300"/>
+                <a:spcPct val="85000"/>
+              </a:lnSpc>
+              <a:spcBef>
+                <a:spcPts val="200"/>
+              </a:spcBef>
+              <a:spcAft>
+                <a:spcPts val="200"/>
               </a:spcAft>
               <a:defRPr sz="1800"/>
             </a:pPr>
@@ -5926,10 +5983,13 @@
           <a:p>
             <a:pPr>
               <a:lnSpc>
-                <a:spcPct val="90000"/>
-              </a:lnSpc>
-              <a:spcAft>
-                <a:spcPts val="300"/>
+                <a:spcPct val="85000"/>
+              </a:lnSpc>
+              <a:spcBef>
+                <a:spcPts val="200"/>
+              </a:spcBef>
+              <a:spcAft>
+                <a:spcPts val="200"/>
               </a:spcAft>
               <a:defRPr sz="2000"/>
             </a:pPr>
@@ -5941,10 +6001,13 @@
           <a:p>
             <a:pPr lvl="1">
               <a:lnSpc>
-                <a:spcPct val="90000"/>
-              </a:lnSpc>
-              <a:spcAft>
-                <a:spcPts val="300"/>
+                <a:spcPct val="85000"/>
+              </a:lnSpc>
+              <a:spcBef>
+                <a:spcPts val="200"/>
+              </a:spcBef>
+              <a:spcAft>
+                <a:spcPts val="200"/>
               </a:spcAft>
               <a:defRPr sz="1800"/>
             </a:pPr>
@@ -5956,10 +6019,13 @@
           <a:p>
             <a:pPr lvl="1">
               <a:lnSpc>
-                <a:spcPct val="90000"/>
-              </a:lnSpc>
-              <a:spcAft>
-                <a:spcPts val="300"/>
+                <a:spcPct val="85000"/>
+              </a:lnSpc>
+              <a:spcBef>
+                <a:spcPts val="200"/>
+              </a:spcBef>
+              <a:spcAft>
+                <a:spcPts val="200"/>
               </a:spcAft>
               <a:defRPr sz="1800"/>
             </a:pPr>
@@ -5982,10 +6048,13 @@
           <a:p>
             <a:pPr>
               <a:lnSpc>
-                <a:spcPct val="90000"/>
-              </a:lnSpc>
-              <a:spcAft>
-                <a:spcPts val="300"/>
+                <a:spcPct val="85000"/>
+              </a:lnSpc>
+              <a:spcBef>
+                <a:spcPts val="200"/>
+              </a:spcBef>
+              <a:spcAft>
+                <a:spcPts val="200"/>
               </a:spcAft>
               <a:defRPr sz="2000" b="1"/>
             </a:pPr>
@@ -5997,10 +6066,13 @@
           <a:p>
             <a:pPr lvl="1">
               <a:lnSpc>
-                <a:spcPct val="90000"/>
-              </a:lnSpc>
-              <a:spcAft>
-                <a:spcPts val="300"/>
+                <a:spcPct val="85000"/>
+              </a:lnSpc>
+              <a:spcBef>
+                <a:spcPts val="200"/>
+              </a:spcBef>
+              <a:spcAft>
+                <a:spcPts val="200"/>
               </a:spcAft>
               <a:defRPr sz="1800"/>
             </a:pPr>
@@ -6012,10 +6084,13 @@
           <a:p>
             <a:pPr lvl="1">
               <a:lnSpc>
-                <a:spcPct val="90000"/>
-              </a:lnSpc>
-              <a:spcAft>
-                <a:spcPts val="300"/>
+                <a:spcPct val="85000"/>
+              </a:lnSpc>
+              <a:spcBef>
+                <a:spcPts val="200"/>
+              </a:spcBef>
+              <a:spcAft>
+                <a:spcPts val="200"/>
               </a:spcAft>
               <a:defRPr sz="1800"/>
             </a:pPr>
@@ -6027,10 +6102,13 @@
           <a:p>
             <a:pPr lvl="1">
               <a:lnSpc>
-                <a:spcPct val="90000"/>
-              </a:lnSpc>
-              <a:spcAft>
-                <a:spcPts val="300"/>
+                <a:spcPct val="85000"/>
+              </a:lnSpc>
+              <a:spcBef>
+                <a:spcPts val="200"/>
+              </a:spcBef>
+              <a:spcAft>
+                <a:spcPts val="200"/>
               </a:spcAft>
               <a:defRPr sz="1800"/>
             </a:pPr>
@@ -6053,10 +6131,13 @@
           <a:p>
             <a:pPr>
               <a:lnSpc>
-                <a:spcPct val="90000"/>
-              </a:lnSpc>
-              <a:spcAft>
-                <a:spcPts val="300"/>
+                <a:spcPct val="85000"/>
+              </a:lnSpc>
+              <a:spcBef>
+                <a:spcPts val="200"/>
+              </a:spcBef>
+              <a:spcAft>
+                <a:spcPts val="200"/>
               </a:spcAft>
               <a:defRPr sz="2000" b="1"/>
             </a:pPr>
@@ -6068,10 +6149,13 @@
           <a:p>
             <a:pPr>
               <a:lnSpc>
-                <a:spcPct val="90000"/>
-              </a:lnSpc>
-              <a:spcAft>
-                <a:spcPts val="300"/>
+                <a:spcPct val="85000"/>
+              </a:lnSpc>
+              <a:spcBef>
+                <a:spcPts val="200"/>
+              </a:spcBef>
+              <a:spcAft>
+                <a:spcPts val="200"/>
               </a:spcAft>
               <a:defRPr sz="2000"/>
             </a:pPr>
@@ -6083,10 +6167,13 @@
           <a:p>
             <a:pPr>
               <a:lnSpc>
-                <a:spcPct val="90000"/>
-              </a:lnSpc>
-              <a:spcAft>
-                <a:spcPts val="300"/>
+                <a:spcPct val="85000"/>
+              </a:lnSpc>
+              <a:spcBef>
+                <a:spcPts val="200"/>
+              </a:spcBef>
+              <a:spcAft>
+                <a:spcPts val="200"/>
               </a:spcAft>
               <a:defRPr sz="2000"/>
             </a:pPr>
@@ -6098,10 +6185,13 @@
           <a:p>
             <a:pPr>
               <a:lnSpc>
-                <a:spcPct val="90000"/>
-              </a:lnSpc>
-              <a:spcAft>
-                <a:spcPts val="300"/>
+                <a:spcPct val="85000"/>
+              </a:lnSpc>
+              <a:spcBef>
+                <a:spcPts val="200"/>
+              </a:spcBef>
+              <a:spcAft>
+                <a:spcPts val="200"/>
               </a:spcAft>
               <a:defRPr sz="2000"/>
             </a:pPr>
@@ -6113,10 +6203,13 @@
           <a:p>
             <a:pPr>
               <a:lnSpc>
-                <a:spcPct val="90000"/>
-              </a:lnSpc>
-              <a:spcAft>
-                <a:spcPts val="300"/>
+                <a:spcPct val="85000"/>
+              </a:lnSpc>
+              <a:spcBef>
+                <a:spcPts val="200"/>
+              </a:spcBef>
+              <a:spcAft>
+                <a:spcPts val="200"/>
               </a:spcAft>
               <a:defRPr sz="2000"/>
             </a:pPr>
@@ -6128,10 +6221,13 @@
           <a:p>
             <a:pPr>
               <a:lnSpc>
-                <a:spcPct val="90000"/>
-              </a:lnSpc>
-              <a:spcAft>
-                <a:spcPts val="300"/>
+                <a:spcPct val="85000"/>
+              </a:lnSpc>
+              <a:spcBef>
+                <a:spcPts val="200"/>
+              </a:spcBef>
+              <a:spcAft>
+                <a:spcPts val="200"/>
               </a:spcAft>
               <a:defRPr sz="2000"/>
             </a:pPr>
@@ -6172,10 +6268,19 @@
         </p:nvSpPr>
         <p:spPr/>
         <p:txBody>
-          <a:bodyPr wrap="square"/>
+          <a:bodyPr wrap="square" tIns="25400" bIns="25400" lIns="63500" rIns="63500"/>
           <a:lstStyle/>
           <a:p>
             <a:pPr>
+              <a:lnSpc>
+                <a:spcPct val="85000"/>
+              </a:lnSpc>
+              <a:spcBef>
+                <a:spcPts val="200"/>
+              </a:spcBef>
+              <a:spcAft>
+                <a:spcPts val="200"/>
+              </a:spcAft>
               <a:defRPr sz="4000" b="1">
                 <a:solidFill>
                   <a:srgbClr val="764BA2"/>
@@ -6183,6 +6288,7 @@
               </a:defRPr>
             </a:pPr>
             <a:r>
+              <a:rPr/>
               <a:t>📊 Grafik Oluşturma (Excel/Sheets)</a:t>
             </a:r>
           </a:p>
@@ -6222,7 +6328,7 @@
           <a:noFill/>
         </p:spPr>
         <p:txBody>
-          <a:bodyPr wrap="square">
+          <a:bodyPr wrap="square" tIns="25400" bIns="25400" lIns="63500" rIns="63500">
             <a:spAutoFit/>
           </a:bodyPr>
           <a:lstStyle/>
@@ -6239,6 +6345,24 @@
           <a:p>
             <a:pPr>
               <a:lnSpc>
+                <a:spcPct val="85000"/>
+              </a:lnSpc>
+              <a:spcBef>
+                <a:spcPts val="200"/>
+              </a:spcBef>
+              <a:spcAft>
+                <a:spcPts val="200"/>
+              </a:spcAft>
+              <a:defRPr sz="2000"/>
+            </a:pPr>
+            <a:r>
+              <a:rPr sz="1300"/>
+              <a:t>Tablodan grafik yapmak çok kolay!</a:t>
+            </a:r>
+          </a:p>
+          <a:p>
+            <a:pPr>
+              <a:lnSpc>
                 <a:spcPct val="90000"/>
               </a:lnSpc>
               <a:spcAft>
@@ -6246,9 +6370,23 @@
               </a:spcAft>
               <a:defRPr sz="2000"/>
             </a:pPr>
-            <a:r>
-              <a:rPr sz="1300"/>
-              <a:t>Tablodan grafik yapmak çok kolay!</a:t>
+          </a:p>
+          <a:p>
+            <a:pPr>
+              <a:lnSpc>
+                <a:spcPct val="85000"/>
+              </a:lnSpc>
+              <a:spcBef>
+                <a:spcPts val="200"/>
+              </a:spcBef>
+              <a:spcAft>
+                <a:spcPts val="200"/>
+              </a:spcAft>
+              <a:defRPr sz="2000" b="1"/>
+            </a:pPr>
+            <a:r>
+              <a:rPr sz="1300"/>
+              <a:t>✅ Grafik Oluşturma Adımları:</a:t>
             </a:r>
           </a:p>
           <a:p>
@@ -6265,316 +6403,338 @@
           <a:p>
             <a:pPr>
               <a:lnSpc>
+                <a:spcPct val="85000"/>
+              </a:lnSpc>
+              <a:spcBef>
+                <a:spcPts val="200"/>
+              </a:spcBef>
+              <a:spcAft>
+                <a:spcPts val="200"/>
+              </a:spcAft>
+              <a:defRPr sz="2000"/>
+            </a:pPr>
+            <a:r>
+              <a:rPr sz="1300"/>
+              <a:t>1️⃣ Veriyi Seç:</a:t>
+            </a:r>
+          </a:p>
+          <a:p>
+            <a:pPr lvl="1">
+              <a:lnSpc>
+                <a:spcPct val="85000"/>
+              </a:lnSpc>
+              <a:spcBef>
+                <a:spcPts val="200"/>
+              </a:spcBef>
+              <a:spcAft>
+                <a:spcPts val="200"/>
+              </a:spcAft>
+              <a:defRPr sz="1800"/>
+            </a:pPr>
+            <a:r>
+              <a:rPr sz="1300"/>
+              <a:t>    • Grafik yapılacak hücreleri seç</a:t>
+            </a:r>
+          </a:p>
+          <a:p>
+            <a:pPr>
+              <a:lnSpc>
                 <a:spcPct val="90000"/>
               </a:lnSpc>
               <a:spcAft>
                 <a:spcPts val="300"/>
               </a:spcAft>
+              <a:defRPr sz="2000"/>
+            </a:pPr>
+          </a:p>
+          <a:p>
+            <a:pPr>
+              <a:lnSpc>
+                <a:spcPct val="85000"/>
+              </a:lnSpc>
+              <a:spcBef>
+                <a:spcPts val="200"/>
+              </a:spcBef>
+              <a:spcAft>
+                <a:spcPts val="200"/>
+              </a:spcAft>
+              <a:defRPr sz="2000"/>
+            </a:pPr>
+            <a:r>
+              <a:rPr sz="1300"/>
+              <a:t>2️⃣ Ekle → Grafik:</a:t>
+            </a:r>
+          </a:p>
+          <a:p>
+            <a:pPr lvl="1">
+              <a:lnSpc>
+                <a:spcPct val="85000"/>
+              </a:lnSpc>
+              <a:spcBef>
+                <a:spcPts val="200"/>
+              </a:spcBef>
+              <a:spcAft>
+                <a:spcPts val="200"/>
+              </a:spcAft>
+              <a:defRPr sz="1800"/>
+            </a:pPr>
+            <a:r>
+              <a:rPr sz="1300"/>
+              <a:t>    • Excel: Insert → Chart</a:t>
+            </a:r>
+          </a:p>
+          <a:p>
+            <a:pPr lvl="1">
+              <a:lnSpc>
+                <a:spcPct val="85000"/>
+              </a:lnSpc>
+              <a:spcBef>
+                <a:spcPts val="200"/>
+              </a:spcBef>
+              <a:spcAft>
+                <a:spcPts val="200"/>
+              </a:spcAft>
+              <a:defRPr sz="1800"/>
+            </a:pPr>
+            <a:r>
+              <a:rPr sz="1300"/>
+              <a:t>    • Sheets: Insert → Chart</a:t>
+            </a:r>
+          </a:p>
+          <a:p>
+            <a:pPr>
+              <a:lnSpc>
+                <a:spcPct val="90000"/>
+              </a:lnSpc>
+              <a:spcAft>
+                <a:spcPts val="300"/>
+              </a:spcAft>
+              <a:defRPr sz="2000"/>
+            </a:pPr>
+          </a:p>
+          <a:p>
+            <a:pPr>
+              <a:lnSpc>
+                <a:spcPct val="85000"/>
+              </a:lnSpc>
+              <a:spcBef>
+                <a:spcPts val="200"/>
+              </a:spcBef>
+              <a:spcAft>
+                <a:spcPts val="200"/>
+              </a:spcAft>
+              <a:defRPr sz="2000"/>
+            </a:pPr>
+            <a:r>
+              <a:rPr sz="1300"/>
+              <a:t>3️⃣ Grafik Türünü Seç:</a:t>
+            </a:r>
+          </a:p>
+          <a:p>
+            <a:pPr lvl="1">
+              <a:lnSpc>
+                <a:spcPct val="85000"/>
+              </a:lnSpc>
+              <a:spcBef>
+                <a:spcPts val="200"/>
+              </a:spcBef>
+              <a:spcAft>
+                <a:spcPts val="200"/>
+              </a:spcAft>
+              <a:defRPr sz="1800"/>
+            </a:pPr>
+            <a:r>
+              <a:rPr sz="1300"/>
+              <a:t>    • Sütun, Çizgi, Pasta...</a:t>
+            </a:r>
+          </a:p>
+          <a:p>
+            <a:pPr>
+              <a:lnSpc>
+                <a:spcPct val="90000"/>
+              </a:lnSpc>
+              <a:spcAft>
+                <a:spcPts val="300"/>
+              </a:spcAft>
+              <a:defRPr sz="2000"/>
+            </a:pPr>
+          </a:p>
+          <a:p>
+            <a:pPr>
+              <a:lnSpc>
+                <a:spcPct val="85000"/>
+              </a:lnSpc>
+              <a:spcBef>
+                <a:spcPts val="200"/>
+              </a:spcBef>
+              <a:spcAft>
+                <a:spcPts val="200"/>
+              </a:spcAft>
+              <a:defRPr sz="2000"/>
+            </a:pPr>
+            <a:r>
+              <a:rPr sz="1300"/>
+              <a:t>4️⃣ Özelleştir:</a:t>
+            </a:r>
+          </a:p>
+          <a:p>
+            <a:pPr lvl="1">
+              <a:lnSpc>
+                <a:spcPct val="85000"/>
+              </a:lnSpc>
+              <a:spcBef>
+                <a:spcPts val="200"/>
+              </a:spcBef>
+              <a:spcAft>
+                <a:spcPts val="200"/>
+              </a:spcAft>
+              <a:defRPr sz="1800"/>
+            </a:pPr>
+            <a:r>
+              <a:rPr sz="1300"/>
+              <a:t>    • Başlık ekle</a:t>
+            </a:r>
+          </a:p>
+          <a:p>
+            <a:pPr lvl="1">
+              <a:lnSpc>
+                <a:spcPct val="85000"/>
+              </a:lnSpc>
+              <a:spcBef>
+                <a:spcPts val="200"/>
+              </a:spcBef>
+              <a:spcAft>
+                <a:spcPts val="200"/>
+              </a:spcAft>
+              <a:defRPr sz="1800"/>
+            </a:pPr>
+            <a:r>
+              <a:rPr sz="1300"/>
+              <a:t>    • Renkleri değiştir</a:t>
+            </a:r>
+          </a:p>
+          <a:p>
+            <a:pPr lvl="1">
+              <a:lnSpc>
+                <a:spcPct val="85000"/>
+              </a:lnSpc>
+              <a:spcBef>
+                <a:spcPts val="200"/>
+              </a:spcBef>
+              <a:spcAft>
+                <a:spcPts val="200"/>
+              </a:spcAft>
+              <a:defRPr sz="1800"/>
+            </a:pPr>
+            <a:r>
+              <a:rPr sz="1300"/>
+              <a:t>    • Eksen etiketleri</a:t>
+            </a:r>
+          </a:p>
+          <a:p>
+            <a:pPr>
+              <a:lnSpc>
+                <a:spcPct val="90000"/>
+              </a:lnSpc>
+              <a:spcAft>
+                <a:spcPts val="300"/>
+              </a:spcAft>
+              <a:defRPr sz="2000"/>
+            </a:pPr>
+          </a:p>
+          <a:p>
+            <a:pPr>
+              <a:lnSpc>
+                <a:spcPct val="85000"/>
+              </a:lnSpc>
+              <a:spcBef>
+                <a:spcPts val="200"/>
+              </a:spcBef>
+              <a:spcAft>
+                <a:spcPts val="200"/>
+              </a:spcAft>
+              <a:defRPr sz="2000"/>
+            </a:pPr>
+            <a:r>
+              <a:rPr sz="1300"/>
+              <a:t>5️⃣ Kaydet/Paylaş:</a:t>
+            </a:r>
+          </a:p>
+          <a:p>
+            <a:pPr lvl="1">
+              <a:lnSpc>
+                <a:spcPct val="85000"/>
+              </a:lnSpc>
+              <a:spcBef>
+                <a:spcPts val="200"/>
+              </a:spcBef>
+              <a:spcAft>
+                <a:spcPts val="200"/>
+              </a:spcAft>
+              <a:defRPr sz="1800"/>
+            </a:pPr>
+            <a:r>
+              <a:rPr sz="1300"/>
+              <a:t>    • Resim olarak kaydet</a:t>
+            </a:r>
+          </a:p>
+          <a:p>
+            <a:pPr lvl="1">
+              <a:lnSpc>
+                <a:spcPct val="85000"/>
+              </a:lnSpc>
+              <a:spcBef>
+                <a:spcPts val="200"/>
+              </a:spcBef>
+              <a:spcAft>
+                <a:spcPts val="200"/>
+              </a:spcAft>
+              <a:defRPr sz="1800"/>
+            </a:pPr>
+            <a:r>
+              <a:rPr sz="1300"/>
+              <a:t>    • Sunuma ekle</a:t>
+            </a:r>
+          </a:p>
+          <a:p>
+            <a:pPr>
+              <a:lnSpc>
+                <a:spcPct val="90000"/>
+              </a:lnSpc>
+              <a:spcAft>
+                <a:spcPts val="300"/>
+              </a:spcAft>
+              <a:defRPr sz="2000"/>
+            </a:pPr>
+          </a:p>
+          <a:p>
+            <a:pPr>
+              <a:lnSpc>
+                <a:spcPct val="85000"/>
+              </a:lnSpc>
+              <a:spcBef>
+                <a:spcPts val="200"/>
+              </a:spcBef>
+              <a:spcAft>
+                <a:spcPts val="200"/>
+              </a:spcAft>
               <a:defRPr sz="2000" b="1"/>
             </a:pPr>
             <a:r>
               <a:rPr sz="1300"/>
-              <a:t>✅ Grafik Oluşturma Adımları:</a:t>
-            </a:r>
-          </a:p>
-          <a:p>
-            <a:pPr>
-              <a:lnSpc>
-                <a:spcPct val="90000"/>
-              </a:lnSpc>
-              <a:spcAft>
-                <a:spcPts val="300"/>
-              </a:spcAft>
-              <a:defRPr sz="2000"/>
-            </a:pPr>
-          </a:p>
-          <a:p>
-            <a:pPr>
-              <a:lnSpc>
-                <a:spcPct val="90000"/>
-              </a:lnSpc>
-              <a:spcAft>
-                <a:spcPts val="300"/>
-              </a:spcAft>
-              <a:defRPr sz="2000"/>
-            </a:pPr>
-            <a:r>
-              <a:rPr sz="1300"/>
-              <a:t>1️⃣ Veriyi Seç:</a:t>
-            </a:r>
-          </a:p>
-          <a:p>
-            <a:pPr lvl="1">
-              <a:lnSpc>
-                <a:spcPct val="90000"/>
-              </a:lnSpc>
-              <a:spcAft>
-                <a:spcPts val="300"/>
-              </a:spcAft>
-              <a:defRPr sz="1800"/>
-            </a:pPr>
-            <a:r>
-              <a:rPr sz="1300"/>
-              <a:t>    • Grafik yapılacak hücreleri seç</a:t>
-            </a:r>
-          </a:p>
-          <a:p>
-            <a:pPr>
-              <a:lnSpc>
-                <a:spcPct val="90000"/>
-              </a:lnSpc>
-              <a:spcAft>
-                <a:spcPts val="300"/>
-              </a:spcAft>
-              <a:defRPr sz="2000"/>
-            </a:pPr>
-          </a:p>
-          <a:p>
-            <a:pPr>
-              <a:lnSpc>
-                <a:spcPct val="90000"/>
-              </a:lnSpc>
-              <a:spcAft>
-                <a:spcPts val="300"/>
-              </a:spcAft>
-              <a:defRPr sz="2000"/>
-            </a:pPr>
-            <a:r>
-              <a:rPr sz="1300"/>
-              <a:t>2️⃣ Ekle → Grafik:</a:t>
-            </a:r>
-          </a:p>
-          <a:p>
-            <a:pPr lvl="1">
-              <a:lnSpc>
-                <a:spcPct val="90000"/>
-              </a:lnSpc>
-              <a:spcAft>
-                <a:spcPts val="300"/>
-              </a:spcAft>
-              <a:defRPr sz="1800"/>
-            </a:pPr>
-            <a:r>
-              <a:rPr sz="1300"/>
-              <a:t>    • Excel: Insert → Chart</a:t>
-            </a:r>
-          </a:p>
-          <a:p>
-            <a:pPr lvl="1">
-              <a:lnSpc>
-                <a:spcPct val="90000"/>
-              </a:lnSpc>
-              <a:spcAft>
-                <a:spcPts val="300"/>
-              </a:spcAft>
-              <a:defRPr sz="1800"/>
-            </a:pPr>
-            <a:r>
-              <a:rPr sz="1300"/>
-              <a:t>    • Sheets: Insert → Chart</a:t>
-            </a:r>
-          </a:p>
-          <a:p>
-            <a:pPr>
-              <a:lnSpc>
-                <a:spcPct val="90000"/>
-              </a:lnSpc>
-              <a:spcAft>
-                <a:spcPts val="300"/>
-              </a:spcAft>
-              <a:defRPr sz="2000"/>
-            </a:pPr>
-          </a:p>
-          <a:p>
-            <a:pPr>
-              <a:lnSpc>
-                <a:spcPct val="90000"/>
-              </a:lnSpc>
-              <a:spcAft>
-                <a:spcPts val="300"/>
-              </a:spcAft>
-              <a:defRPr sz="2000"/>
-            </a:pPr>
-            <a:r>
-              <a:rPr sz="1300"/>
-              <a:t>3️⃣ Grafik Türünü Seç:</a:t>
-            </a:r>
-          </a:p>
-          <a:p>
-            <a:pPr lvl="1">
-              <a:lnSpc>
-                <a:spcPct val="90000"/>
-              </a:lnSpc>
-              <a:spcAft>
-                <a:spcPts val="300"/>
-              </a:spcAft>
-              <a:defRPr sz="1800"/>
-            </a:pPr>
-            <a:r>
-              <a:rPr sz="1300"/>
-              <a:t>    • Sütun, Çizgi, Pasta...</a:t>
-            </a:r>
-          </a:p>
-          <a:p>
-            <a:pPr>
-              <a:lnSpc>
-                <a:spcPct val="90000"/>
-              </a:lnSpc>
-              <a:spcAft>
-                <a:spcPts val="300"/>
-              </a:spcAft>
-              <a:defRPr sz="2000"/>
-            </a:pPr>
-          </a:p>
-          <a:p>
-            <a:pPr>
-              <a:lnSpc>
-                <a:spcPct val="90000"/>
-              </a:lnSpc>
-              <a:spcAft>
-                <a:spcPts val="300"/>
-              </a:spcAft>
-              <a:defRPr sz="2000"/>
-            </a:pPr>
-            <a:r>
-              <a:rPr sz="1300"/>
-              <a:t>4️⃣ Özelleştir:</a:t>
-            </a:r>
-          </a:p>
-          <a:p>
-            <a:pPr lvl="1">
-              <a:lnSpc>
-                <a:spcPct val="90000"/>
-              </a:lnSpc>
-              <a:spcAft>
-                <a:spcPts val="300"/>
-              </a:spcAft>
-              <a:defRPr sz="1800"/>
-            </a:pPr>
-            <a:r>
-              <a:rPr sz="1300"/>
-              <a:t>    • Başlık ekle</a:t>
-            </a:r>
-          </a:p>
-          <a:p>
-            <a:pPr lvl="1">
-              <a:lnSpc>
-                <a:spcPct val="90000"/>
-              </a:lnSpc>
-              <a:spcAft>
-                <a:spcPts val="300"/>
-              </a:spcAft>
-              <a:defRPr sz="1800"/>
-            </a:pPr>
-            <a:r>
-              <a:rPr sz="1300"/>
-              <a:t>    • Renkleri değiştir</a:t>
-            </a:r>
-          </a:p>
-          <a:p>
-            <a:pPr lvl="1">
-              <a:lnSpc>
-                <a:spcPct val="90000"/>
-              </a:lnSpc>
-              <a:spcAft>
-                <a:spcPts val="300"/>
-              </a:spcAft>
-              <a:defRPr sz="1800"/>
-            </a:pPr>
-            <a:r>
-              <a:rPr sz="1300"/>
-              <a:t>    • Eksen etiketleri</a:t>
-            </a:r>
-          </a:p>
-          <a:p>
-            <a:pPr>
-              <a:lnSpc>
-                <a:spcPct val="90000"/>
-              </a:lnSpc>
-              <a:spcAft>
-                <a:spcPts val="300"/>
-              </a:spcAft>
-              <a:defRPr sz="2000"/>
-            </a:pPr>
-          </a:p>
-          <a:p>
-            <a:pPr>
-              <a:lnSpc>
-                <a:spcPct val="90000"/>
-              </a:lnSpc>
-              <a:spcAft>
-                <a:spcPts val="300"/>
-              </a:spcAft>
-              <a:defRPr sz="2000"/>
-            </a:pPr>
-            <a:r>
-              <a:rPr sz="1300"/>
-              <a:t>5️⃣ Kaydet/Paylaş:</a:t>
-            </a:r>
-          </a:p>
-          <a:p>
-            <a:pPr lvl="1">
-              <a:lnSpc>
-                <a:spcPct val="90000"/>
-              </a:lnSpc>
-              <a:spcAft>
-                <a:spcPts val="300"/>
-              </a:spcAft>
-              <a:defRPr sz="1800"/>
-            </a:pPr>
-            <a:r>
-              <a:rPr sz="1300"/>
-              <a:t>    • Resim olarak kaydet</a:t>
-            </a:r>
-          </a:p>
-          <a:p>
-            <a:pPr lvl="1">
-              <a:lnSpc>
-                <a:spcPct val="90000"/>
-              </a:lnSpc>
-              <a:spcAft>
-                <a:spcPts val="300"/>
-              </a:spcAft>
-              <a:defRPr sz="1800"/>
-            </a:pPr>
-            <a:r>
-              <a:rPr sz="1300"/>
-              <a:t>    • Sunuma ekle</a:t>
-            </a:r>
-          </a:p>
-          <a:p>
-            <a:pPr>
-              <a:lnSpc>
-                <a:spcPct val="90000"/>
-              </a:lnSpc>
-              <a:spcAft>
-                <a:spcPts val="300"/>
-              </a:spcAft>
-              <a:defRPr sz="2000"/>
-            </a:pPr>
-          </a:p>
-          <a:p>
-            <a:pPr>
-              <a:lnSpc>
-                <a:spcPct val="90000"/>
-              </a:lnSpc>
-              <a:spcAft>
-                <a:spcPts val="300"/>
-              </a:spcAft>
-              <a:defRPr sz="2000" b="1"/>
-            </a:pPr>
-            <a:r>
-              <a:rPr sz="1300"/>
               <a:t>📌 Örnek: Aylık Sıcaklık Grafiği</a:t>
             </a:r>
           </a:p>
           <a:p>
             <a:pPr>
               <a:lnSpc>
-                <a:spcPct val="90000"/>
-              </a:lnSpc>
-              <a:spcAft>
-                <a:spcPts val="300"/>
+                <a:spcPct val="85000"/>
+              </a:lnSpc>
+              <a:spcBef>
+                <a:spcPts val="200"/>
+              </a:spcBef>
+              <a:spcAft>
+                <a:spcPts val="200"/>
               </a:spcAft>
               <a:defRPr sz="2000"/>
             </a:pPr>
@@ -6586,10 +6746,13 @@
           <a:p>
             <a:pPr>
               <a:lnSpc>
-                <a:spcPct val="90000"/>
-              </a:lnSpc>
-              <a:spcAft>
-                <a:spcPts val="300"/>
+                <a:spcPct val="85000"/>
+              </a:lnSpc>
+              <a:spcBef>
+                <a:spcPts val="200"/>
+              </a:spcBef>
+              <a:spcAft>
+                <a:spcPts val="200"/>
               </a:spcAft>
               <a:defRPr sz="2000"/>
             </a:pPr>
@@ -6601,10 +6764,13 @@
           <a:p>
             <a:pPr>
               <a:lnSpc>
-                <a:spcPct val="90000"/>
-              </a:lnSpc>
-              <a:spcAft>
-                <a:spcPts val="300"/>
+                <a:spcPct val="85000"/>
+              </a:lnSpc>
+              <a:spcBef>
+                <a:spcPts val="200"/>
+              </a:spcBef>
+              <a:spcAft>
+                <a:spcPts val="200"/>
               </a:spcAft>
               <a:defRPr sz="2000"/>
             </a:pPr>
@@ -6616,10 +6782,13 @@
           <a:p>
             <a:pPr>
               <a:lnSpc>
-                <a:spcPct val="90000"/>
-              </a:lnSpc>
-              <a:spcAft>
-                <a:spcPts val="300"/>
+                <a:spcPct val="85000"/>
+              </a:lnSpc>
+              <a:spcBef>
+                <a:spcPts val="200"/>
+              </a:spcBef>
+              <a:spcAft>
+                <a:spcPts val="200"/>
               </a:spcAft>
               <a:defRPr sz="2000"/>
             </a:pPr>
@@ -6631,10 +6800,13 @@
           <a:p>
             <a:pPr>
               <a:lnSpc>
-                <a:spcPct val="90000"/>
-              </a:lnSpc>
-              <a:spcAft>
-                <a:spcPts val="300"/>
+                <a:spcPct val="85000"/>
+              </a:lnSpc>
+              <a:spcBef>
+                <a:spcPts val="200"/>
+              </a:spcBef>
+              <a:spcAft>
+                <a:spcPts val="200"/>
               </a:spcAft>
               <a:defRPr sz="2000"/>
             </a:pPr>
@@ -6675,10 +6847,19 @@
         </p:nvSpPr>
         <p:spPr/>
         <p:txBody>
-          <a:bodyPr wrap="square"/>
+          <a:bodyPr wrap="square" tIns="25400" bIns="25400" lIns="63500" rIns="63500"/>
           <a:lstStyle/>
           <a:p>
             <a:pPr>
+              <a:lnSpc>
+                <a:spcPct val="85000"/>
+              </a:lnSpc>
+              <a:spcBef>
+                <a:spcPts val="200"/>
+              </a:spcBef>
+              <a:spcAft>
+                <a:spcPts val="200"/>
+              </a:spcAft>
               <a:defRPr sz="4000" b="1">
                 <a:solidFill>
                   <a:srgbClr val="764BA2"/>
@@ -6686,6 +6867,7 @@
               </a:defRPr>
             </a:pPr>
             <a:r>
+              <a:rPr/>
               <a:t>📊 Veri Analizi</a:t>
             </a:r>
           </a:p>
@@ -6725,7 +6907,7 @@
           <a:noFill/>
         </p:spPr>
         <p:txBody>
-          <a:bodyPr wrap="square">
+          <a:bodyPr wrap="square" tIns="25400" bIns="25400" lIns="63500" rIns="63500">
             <a:spAutoFit/>
           </a:bodyPr>
           <a:lstStyle/>
@@ -6742,6 +6924,24 @@
           <a:p>
             <a:pPr>
               <a:lnSpc>
+                <a:spcPct val="85000"/>
+              </a:lnSpc>
+              <a:spcBef>
+                <a:spcPts val="200"/>
+              </a:spcBef>
+              <a:spcAft>
+                <a:spcPts val="200"/>
+              </a:spcAft>
+              <a:defRPr sz="2000"/>
+            </a:pPr>
+            <a:r>
+              <a:rPr sz="1300"/>
+              <a:t>Veriyi inceleyip sonuç çıkarmak</a:t>
+            </a:r>
+          </a:p>
+          <a:p>
+            <a:pPr>
+              <a:lnSpc>
                 <a:spcPct val="90000"/>
               </a:lnSpc>
               <a:spcAft>
@@ -6749,9 +6949,113 @@
               </a:spcAft>
               <a:defRPr sz="2000"/>
             </a:pPr>
-            <a:r>
-              <a:rPr sz="1300"/>
-              <a:t>Veriyi inceleyip sonuç çıkarmak</a:t>
+          </a:p>
+          <a:p>
+            <a:pPr>
+              <a:lnSpc>
+                <a:spcPct val="85000"/>
+              </a:lnSpc>
+              <a:spcBef>
+                <a:spcPts val="200"/>
+              </a:spcBef>
+              <a:spcAft>
+                <a:spcPts val="200"/>
+              </a:spcAft>
+              <a:defRPr sz="2000" b="1"/>
+            </a:pPr>
+            <a:r>
+              <a:rPr sz="1300"/>
+              <a:t>✅ Analiz Soruları:</a:t>
+            </a:r>
+          </a:p>
+          <a:p>
+            <a:pPr lvl="1">
+              <a:lnSpc>
+                <a:spcPct val="85000"/>
+              </a:lnSpc>
+              <a:spcBef>
+                <a:spcPts val="200"/>
+              </a:spcBef>
+              <a:spcAft>
+                <a:spcPts val="200"/>
+              </a:spcAft>
+              <a:defRPr sz="1800"/>
+            </a:pPr>
+            <a:r>
+              <a:rPr sz="1300"/>
+              <a:t>    • En yüksek değer nedir?</a:t>
+            </a:r>
+          </a:p>
+          <a:p>
+            <a:pPr lvl="1">
+              <a:lnSpc>
+                <a:spcPct val="85000"/>
+              </a:lnSpc>
+              <a:spcBef>
+                <a:spcPts val="200"/>
+              </a:spcBef>
+              <a:spcAft>
+                <a:spcPts val="200"/>
+              </a:spcAft>
+              <a:defRPr sz="1800"/>
+            </a:pPr>
+            <a:r>
+              <a:rPr sz="1300"/>
+              <a:t>    • En düşük değer nedir?</a:t>
+            </a:r>
+          </a:p>
+          <a:p>
+            <a:pPr lvl="1">
+              <a:lnSpc>
+                <a:spcPct val="85000"/>
+              </a:lnSpc>
+              <a:spcBef>
+                <a:spcPts val="200"/>
+              </a:spcBef>
+              <a:spcAft>
+                <a:spcPts val="200"/>
+              </a:spcAft>
+              <a:defRPr sz="1800"/>
+            </a:pPr>
+            <a:r>
+              <a:rPr sz="1300"/>
+              <a:t>    • Ortalama nedir?</a:t>
+            </a:r>
+          </a:p>
+          <a:p>
+            <a:pPr lvl="1">
+              <a:lnSpc>
+                <a:spcPct val="85000"/>
+              </a:lnSpc>
+              <a:spcBef>
+                <a:spcPts val="200"/>
+              </a:spcBef>
+              <a:spcAft>
+                <a:spcPts val="200"/>
+              </a:spcAft>
+              <a:defRPr sz="1800"/>
+            </a:pPr>
+            <a:r>
+              <a:rPr sz="1300"/>
+              <a:t>    • Bir kalıp var mı?</a:t>
+            </a:r>
+          </a:p>
+          <a:p>
+            <a:pPr lvl="1">
+              <a:lnSpc>
+                <a:spcPct val="85000"/>
+              </a:lnSpc>
+              <a:spcBef>
+                <a:spcPts val="200"/>
+              </a:spcBef>
+              <a:spcAft>
+                <a:spcPts val="200"/>
+              </a:spcAft>
+              <a:defRPr sz="1800"/>
+            </a:pPr>
+            <a:r>
+              <a:rPr sz="1300"/>
+              <a:t>    • İlişki var mı?</a:t>
             </a:r>
           </a:p>
           <a:p>
@@ -6768,320 +7072,255 @@
           <a:p>
             <a:pPr>
               <a:lnSpc>
+                <a:spcPct val="85000"/>
+              </a:lnSpc>
+              <a:spcBef>
+                <a:spcPts val="200"/>
+              </a:spcBef>
+              <a:spcAft>
+                <a:spcPts val="200"/>
+              </a:spcAft>
+              <a:defRPr sz="2000" b="1"/>
+            </a:pPr>
+            <a:r>
+              <a:rPr sz="1300"/>
+              <a:t>📌 Merkezi Eğilim Ölçüleri:</a:t>
+            </a:r>
+          </a:p>
+          <a:p>
+            <a:pPr>
+              <a:lnSpc>
                 <a:spcPct val="90000"/>
               </a:lnSpc>
               <a:spcAft>
                 <a:spcPts val="300"/>
               </a:spcAft>
+              <a:defRPr sz="2000"/>
+            </a:pPr>
+          </a:p>
+          <a:p>
+            <a:pPr>
+              <a:lnSpc>
+                <a:spcPct val="85000"/>
+              </a:lnSpc>
+              <a:spcBef>
+                <a:spcPts val="200"/>
+              </a:spcBef>
+              <a:spcAft>
+                <a:spcPts val="200"/>
+              </a:spcAft>
+              <a:defRPr sz="2000"/>
+            </a:pPr>
+            <a:r>
+              <a:rPr sz="1300"/>
+              <a:t>📊 Ortalama (Mean):</a:t>
+            </a:r>
+          </a:p>
+          <a:p>
+            <a:pPr lvl="1">
+              <a:lnSpc>
+                <a:spcPct val="85000"/>
+              </a:lnSpc>
+              <a:spcBef>
+                <a:spcPts val="200"/>
+              </a:spcBef>
+              <a:spcAft>
+                <a:spcPts val="200"/>
+              </a:spcAft>
+              <a:defRPr sz="1800"/>
+            </a:pPr>
+            <a:r>
+              <a:rPr sz="1300"/>
+              <a:t>    • Tüm değerleri topla, sayıya böl</a:t>
+            </a:r>
+          </a:p>
+          <a:p>
+            <a:pPr lvl="1">
+              <a:lnSpc>
+                <a:spcPct val="85000"/>
+              </a:lnSpc>
+              <a:spcBef>
+                <a:spcPts val="200"/>
+              </a:spcBef>
+              <a:spcAft>
+                <a:spcPts val="200"/>
+              </a:spcAft>
+              <a:defRPr sz="1800"/>
+            </a:pPr>
+            <a:r>
+              <a:rPr sz="1300"/>
+              <a:t>    • Örnek: (10+20+30)/3 = 20</a:t>
+            </a:r>
+          </a:p>
+          <a:p>
+            <a:pPr>
+              <a:lnSpc>
+                <a:spcPct val="90000"/>
+              </a:lnSpc>
+              <a:spcAft>
+                <a:spcPts val="300"/>
+              </a:spcAft>
+              <a:defRPr sz="2000"/>
+            </a:pPr>
+          </a:p>
+          <a:p>
+            <a:pPr>
+              <a:lnSpc>
+                <a:spcPct val="85000"/>
+              </a:lnSpc>
+              <a:spcBef>
+                <a:spcPts val="200"/>
+              </a:spcBef>
+              <a:spcAft>
+                <a:spcPts val="200"/>
+              </a:spcAft>
+              <a:defRPr sz="2000"/>
+            </a:pPr>
+            <a:r>
+              <a:rPr sz="1300"/>
+              <a:t>📊 Medyan (Median):</a:t>
+            </a:r>
+          </a:p>
+          <a:p>
+            <a:pPr lvl="1">
+              <a:lnSpc>
+                <a:spcPct val="85000"/>
+              </a:lnSpc>
+              <a:spcBef>
+                <a:spcPts val="200"/>
+              </a:spcBef>
+              <a:spcAft>
+                <a:spcPts val="200"/>
+              </a:spcAft>
+              <a:defRPr sz="1800"/>
+            </a:pPr>
+            <a:r>
+              <a:rPr sz="1300"/>
+              <a:t>    • Ortadaki değer</a:t>
+            </a:r>
+          </a:p>
+          <a:p>
+            <a:pPr lvl="1">
+              <a:lnSpc>
+                <a:spcPct val="85000"/>
+              </a:lnSpc>
+              <a:spcBef>
+                <a:spcPts val="200"/>
+              </a:spcBef>
+              <a:spcAft>
+                <a:spcPts val="200"/>
+              </a:spcAft>
+              <a:defRPr sz="1800"/>
+            </a:pPr>
+            <a:r>
+              <a:rPr sz="1300"/>
+              <a:t>    • Örnek: 10, 15, 20 → Medyan: 15</a:t>
+            </a:r>
+          </a:p>
+          <a:p>
+            <a:pPr>
+              <a:lnSpc>
+                <a:spcPct val="90000"/>
+              </a:lnSpc>
+              <a:spcAft>
+                <a:spcPts val="300"/>
+              </a:spcAft>
+              <a:defRPr sz="2000"/>
+            </a:pPr>
+          </a:p>
+          <a:p>
+            <a:pPr>
+              <a:lnSpc>
+                <a:spcPct val="85000"/>
+              </a:lnSpc>
+              <a:spcBef>
+                <a:spcPts val="200"/>
+              </a:spcBef>
+              <a:spcAft>
+                <a:spcPts val="200"/>
+              </a:spcAft>
+              <a:defRPr sz="2000"/>
+            </a:pPr>
+            <a:r>
+              <a:rPr sz="1300"/>
+              <a:t>📊 Mod (Mode):</a:t>
+            </a:r>
+          </a:p>
+          <a:p>
+            <a:pPr lvl="1">
+              <a:lnSpc>
+                <a:spcPct val="85000"/>
+              </a:lnSpc>
+              <a:spcBef>
+                <a:spcPts val="200"/>
+              </a:spcBef>
+              <a:spcAft>
+                <a:spcPts val="200"/>
+              </a:spcAft>
+              <a:defRPr sz="1800"/>
+            </a:pPr>
+            <a:r>
+              <a:rPr sz="1300"/>
+              <a:t>    • En çok tekrar eden</a:t>
+            </a:r>
+          </a:p>
+          <a:p>
+            <a:pPr lvl="1">
+              <a:lnSpc>
+                <a:spcPct val="85000"/>
+              </a:lnSpc>
+              <a:spcBef>
+                <a:spcPts val="200"/>
+              </a:spcBef>
+              <a:spcAft>
+                <a:spcPts val="200"/>
+              </a:spcAft>
+              <a:defRPr sz="1800"/>
+            </a:pPr>
+            <a:r>
+              <a:rPr sz="1300"/>
+              <a:t>    • Örnek: 5, 5, 7, 9 → Mod: 5</a:t>
+            </a:r>
+          </a:p>
+          <a:p>
+            <a:pPr>
+              <a:lnSpc>
+                <a:spcPct val="90000"/>
+              </a:lnSpc>
+              <a:spcAft>
+                <a:spcPts val="300"/>
+              </a:spcAft>
+              <a:defRPr sz="2000"/>
+            </a:pPr>
+          </a:p>
+          <a:p>
+            <a:pPr>
+              <a:lnSpc>
+                <a:spcPct val="85000"/>
+              </a:lnSpc>
+              <a:spcBef>
+                <a:spcPts val="200"/>
+              </a:spcBef>
+              <a:spcAft>
+                <a:spcPts val="200"/>
+              </a:spcAft>
               <a:defRPr sz="2000" b="1"/>
             </a:pPr>
             <a:r>
               <a:rPr sz="1300"/>
-              <a:t>✅ Analiz Soruları:</a:t>
-            </a:r>
-          </a:p>
-          <a:p>
-            <a:pPr lvl="1">
-              <a:lnSpc>
-                <a:spcPct val="90000"/>
-              </a:lnSpc>
-              <a:spcAft>
-                <a:spcPts val="300"/>
-              </a:spcAft>
-              <a:defRPr sz="1800"/>
-            </a:pPr>
-            <a:r>
-              <a:rPr sz="1300"/>
-              <a:t>    • En yüksek değer nedir?</a:t>
-            </a:r>
-          </a:p>
-          <a:p>
-            <a:pPr lvl="1">
-              <a:lnSpc>
-                <a:spcPct val="90000"/>
-              </a:lnSpc>
-              <a:spcAft>
-                <a:spcPts val="300"/>
-              </a:spcAft>
-              <a:defRPr sz="1800"/>
-            </a:pPr>
-            <a:r>
-              <a:rPr sz="1300"/>
-              <a:t>    • En düşük değer nedir?</a:t>
-            </a:r>
-          </a:p>
-          <a:p>
-            <a:pPr lvl="1">
-              <a:lnSpc>
-                <a:spcPct val="90000"/>
-              </a:lnSpc>
-              <a:spcAft>
-                <a:spcPts val="300"/>
-              </a:spcAft>
-              <a:defRPr sz="1800"/>
-            </a:pPr>
-            <a:r>
-              <a:rPr sz="1300"/>
-              <a:t>    • Ortalama nedir?</a:t>
-            </a:r>
-          </a:p>
-          <a:p>
-            <a:pPr lvl="1">
-              <a:lnSpc>
-                <a:spcPct val="90000"/>
-              </a:lnSpc>
-              <a:spcAft>
-                <a:spcPts val="300"/>
-              </a:spcAft>
-              <a:defRPr sz="1800"/>
-            </a:pPr>
-            <a:r>
-              <a:rPr sz="1300"/>
-              <a:t>    • Bir kalıp var mı?</a:t>
-            </a:r>
-          </a:p>
-          <a:p>
-            <a:pPr lvl="1">
-              <a:lnSpc>
-                <a:spcPct val="90000"/>
-              </a:lnSpc>
-              <a:spcAft>
-                <a:spcPts val="300"/>
-              </a:spcAft>
-              <a:defRPr sz="1800"/>
-            </a:pPr>
-            <a:r>
-              <a:rPr sz="1300"/>
-              <a:t>    • İlişki var mı?</a:t>
-            </a:r>
-          </a:p>
-          <a:p>
-            <a:pPr>
-              <a:lnSpc>
-                <a:spcPct val="90000"/>
-              </a:lnSpc>
-              <a:spcAft>
-                <a:spcPts val="300"/>
-              </a:spcAft>
-              <a:defRPr sz="2000"/>
-            </a:pPr>
-          </a:p>
-          <a:p>
-            <a:pPr>
-              <a:lnSpc>
-                <a:spcPct val="90000"/>
-              </a:lnSpc>
-              <a:spcAft>
-                <a:spcPts val="300"/>
-              </a:spcAft>
-              <a:defRPr sz="2000" b="1"/>
-            </a:pPr>
-            <a:r>
-              <a:rPr sz="1300"/>
-              <a:t>📌 Merkezi Eğilim Ölçüleri:</a:t>
-            </a:r>
-          </a:p>
-          <a:p>
-            <a:pPr>
-              <a:lnSpc>
-                <a:spcPct val="90000"/>
-              </a:lnSpc>
-              <a:spcAft>
-                <a:spcPts val="300"/>
-              </a:spcAft>
-              <a:defRPr sz="2000"/>
-            </a:pPr>
-          </a:p>
-          <a:p>
-            <a:pPr>
-              <a:lnSpc>
-                <a:spcPct val="90000"/>
-              </a:lnSpc>
-              <a:spcAft>
-                <a:spcPts val="300"/>
-              </a:spcAft>
-              <a:defRPr sz="2000"/>
-            </a:pPr>
-            <a:r>
-              <a:rPr sz="1300"/>
-              <a:t>📊 Ortalama (Mean):</a:t>
-            </a:r>
-          </a:p>
-          <a:p>
-            <a:pPr lvl="1">
-              <a:lnSpc>
-                <a:spcPct val="90000"/>
-              </a:lnSpc>
-              <a:spcAft>
-                <a:spcPts val="300"/>
-              </a:spcAft>
-              <a:defRPr sz="1800"/>
-            </a:pPr>
-            <a:r>
-              <a:rPr sz="1300"/>
-              <a:t>    • Tüm değerleri topla, sayıya böl</a:t>
-            </a:r>
-          </a:p>
-          <a:p>
-            <a:pPr lvl="1">
-              <a:lnSpc>
-                <a:spcPct val="90000"/>
-              </a:lnSpc>
-              <a:spcAft>
-                <a:spcPts val="300"/>
-              </a:spcAft>
-              <a:defRPr sz="1800"/>
-            </a:pPr>
-            <a:r>
-              <a:rPr sz="1300"/>
-              <a:t>    • Örnek: (10+20+30)/3 = 20</a:t>
-            </a:r>
-          </a:p>
-          <a:p>
-            <a:pPr>
-              <a:lnSpc>
-                <a:spcPct val="90000"/>
-              </a:lnSpc>
-              <a:spcAft>
-                <a:spcPts val="300"/>
-              </a:spcAft>
-              <a:defRPr sz="2000"/>
-            </a:pPr>
-          </a:p>
-          <a:p>
-            <a:pPr>
-              <a:lnSpc>
-                <a:spcPct val="90000"/>
-              </a:lnSpc>
-              <a:spcAft>
-                <a:spcPts val="300"/>
-              </a:spcAft>
-              <a:defRPr sz="2000"/>
-            </a:pPr>
-            <a:r>
-              <a:rPr sz="1300"/>
-              <a:t>📊 Medyan (Median):</a:t>
-            </a:r>
-          </a:p>
-          <a:p>
-            <a:pPr lvl="1">
-              <a:lnSpc>
-                <a:spcPct val="90000"/>
-              </a:lnSpc>
-              <a:spcAft>
-                <a:spcPts val="300"/>
-              </a:spcAft>
-              <a:defRPr sz="1800"/>
-            </a:pPr>
-            <a:r>
-              <a:rPr sz="1300"/>
-              <a:t>    • Ortadaki değer</a:t>
-            </a:r>
-          </a:p>
-          <a:p>
-            <a:pPr lvl="1">
-              <a:lnSpc>
-                <a:spcPct val="90000"/>
-              </a:lnSpc>
-              <a:spcAft>
-                <a:spcPts val="300"/>
-              </a:spcAft>
-              <a:defRPr sz="1800"/>
-            </a:pPr>
-            <a:r>
-              <a:rPr sz="1300"/>
-              <a:t>    • Örnek: 10, 15, 20 → Medyan: 15</a:t>
-            </a:r>
-          </a:p>
-          <a:p>
-            <a:pPr>
-              <a:lnSpc>
-                <a:spcPct val="90000"/>
-              </a:lnSpc>
-              <a:spcAft>
-                <a:spcPts val="300"/>
-              </a:spcAft>
-              <a:defRPr sz="2000"/>
-            </a:pPr>
-          </a:p>
-          <a:p>
-            <a:pPr>
-              <a:lnSpc>
-                <a:spcPct val="90000"/>
-              </a:lnSpc>
-              <a:spcAft>
-                <a:spcPts val="300"/>
-              </a:spcAft>
-              <a:defRPr sz="2000"/>
-            </a:pPr>
-            <a:r>
-              <a:rPr sz="1300"/>
-              <a:t>📊 Mod (Mode):</a:t>
-            </a:r>
-          </a:p>
-          <a:p>
-            <a:pPr lvl="1">
-              <a:lnSpc>
-                <a:spcPct val="90000"/>
-              </a:lnSpc>
-              <a:spcAft>
-                <a:spcPts val="300"/>
-              </a:spcAft>
-              <a:defRPr sz="1800"/>
-            </a:pPr>
-            <a:r>
-              <a:rPr sz="1300"/>
-              <a:t>    • En çok tekrar eden</a:t>
-            </a:r>
-          </a:p>
-          <a:p>
-            <a:pPr lvl="1">
-              <a:lnSpc>
-                <a:spcPct val="90000"/>
-              </a:lnSpc>
-              <a:spcAft>
-                <a:spcPts val="300"/>
-              </a:spcAft>
-              <a:defRPr sz="1800"/>
-            </a:pPr>
-            <a:r>
-              <a:rPr sz="1300"/>
-              <a:t>    • Örnek: 5, 5, 7, 9 → Mod: 5</a:t>
-            </a:r>
-          </a:p>
-          <a:p>
-            <a:pPr>
-              <a:lnSpc>
-                <a:spcPct val="90000"/>
-              </a:lnSpc>
-              <a:spcAft>
-                <a:spcPts val="300"/>
-              </a:spcAft>
-              <a:defRPr sz="2000"/>
-            </a:pPr>
-          </a:p>
-          <a:p>
-            <a:pPr>
-              <a:lnSpc>
-                <a:spcPct val="90000"/>
-              </a:lnSpc>
-              <a:spcAft>
-                <a:spcPts val="300"/>
-              </a:spcAft>
-              <a:defRPr sz="2000" b="1"/>
-            </a:pPr>
-            <a:r>
-              <a:rPr sz="1300"/>
               <a:t>💡 Hangisini Kullan?</a:t>
             </a:r>
           </a:p>
           <a:p>
             <a:pPr lvl="1">
               <a:lnSpc>
-                <a:spcPct val="90000"/>
-              </a:lnSpc>
-              <a:spcAft>
-                <a:spcPts val="300"/>
+                <a:spcPct val="85000"/>
+              </a:lnSpc>
+              <a:spcBef>
+                <a:spcPts val="200"/>
+              </a:spcBef>
+              <a:spcAft>
+                <a:spcPts val="200"/>
               </a:spcAft>
               <a:defRPr sz="1800"/>
             </a:pPr>
@@ -7093,10 +7332,13 @@
           <a:p>
             <a:pPr lvl="1">
               <a:lnSpc>
-                <a:spcPct val="90000"/>
-              </a:lnSpc>
-              <a:spcAft>
-                <a:spcPts val="300"/>
+                <a:spcPct val="85000"/>
+              </a:lnSpc>
+              <a:spcBef>
+                <a:spcPts val="200"/>
+              </a:spcBef>
+              <a:spcAft>
+                <a:spcPts val="200"/>
               </a:spcAft>
               <a:defRPr sz="1800"/>
             </a:pPr>
@@ -7108,10 +7350,13 @@
           <a:p>
             <a:pPr lvl="1">
               <a:lnSpc>
-                <a:spcPct val="90000"/>
-              </a:lnSpc>
-              <a:spcAft>
-                <a:spcPts val="300"/>
+                <a:spcPct val="85000"/>
+              </a:lnSpc>
+              <a:spcBef>
+                <a:spcPts val="200"/>
+              </a:spcBef>
+              <a:spcAft>
+                <a:spcPts val="200"/>
               </a:spcAft>
               <a:defRPr sz="1800"/>
             </a:pPr>
@@ -7152,10 +7397,19 @@
         </p:nvSpPr>
         <p:spPr/>
         <p:txBody>
-          <a:bodyPr wrap="square"/>
+          <a:bodyPr wrap="square" tIns="25400" bIns="25400" lIns="63500" rIns="63500"/>
           <a:lstStyle/>
           <a:p>
             <a:pPr>
+              <a:lnSpc>
+                <a:spcPct val="85000"/>
+              </a:lnSpc>
+              <a:spcBef>
+                <a:spcPts val="200"/>
+              </a:spcBef>
+              <a:spcAft>
+                <a:spcPts val="200"/>
+              </a:spcAft>
               <a:defRPr sz="4000" b="1">
                 <a:solidFill>
                   <a:srgbClr val="764BA2"/>
@@ -7163,6 +7417,7 @@
               </a:defRPr>
             </a:pPr>
             <a:r>
+              <a:rPr/>
               <a:t>🎯 Veri ile Karar Verme</a:t>
             </a:r>
           </a:p>
@@ -7202,7 +7457,7 @@
           <a:noFill/>
         </p:spPr>
         <p:txBody>
-          <a:bodyPr wrap="square">
+          <a:bodyPr wrap="square" tIns="25400" bIns="25400" lIns="63500" rIns="63500">
             <a:spAutoFit/>
           </a:bodyPr>
           <a:lstStyle/>
@@ -7219,6 +7474,24 @@
           <a:p>
             <a:pPr>
               <a:lnSpc>
+                <a:spcPct val="85000"/>
+              </a:lnSpc>
+              <a:spcBef>
+                <a:spcPts val="200"/>
+              </a:spcBef>
+              <a:spcAft>
+                <a:spcPts val="200"/>
+              </a:spcAft>
+              <a:defRPr sz="2000"/>
+            </a:pPr>
+            <a:r>
+              <a:rPr sz="1300"/>
+              <a:t>Veriye dayalı kararlar daha sağlıklı!</a:t>
+            </a:r>
+          </a:p>
+          <a:p>
+            <a:pPr>
+              <a:lnSpc>
                 <a:spcPct val="90000"/>
               </a:lnSpc>
               <a:spcAft>
@@ -7226,9 +7499,23 @@
               </a:spcAft>
               <a:defRPr sz="2000"/>
             </a:pPr>
-            <a:r>
-              <a:rPr sz="1300"/>
-              <a:t>Veriye dayalı kararlar daha sağlıklı!</a:t>
+          </a:p>
+          <a:p>
+            <a:pPr>
+              <a:lnSpc>
+                <a:spcPct val="85000"/>
+              </a:lnSpc>
+              <a:spcBef>
+                <a:spcPts val="200"/>
+              </a:spcBef>
+              <a:spcAft>
+                <a:spcPts val="200"/>
+              </a:spcAft>
+              <a:defRPr sz="2000" b="1"/>
+            </a:pPr>
+            <a:r>
+              <a:rPr sz="1300"/>
+              <a:t>✅ Veri Odaklı Karar Örneği:</a:t>
             </a:r>
           </a:p>
           <a:p>
@@ -7245,16 +7532,268 @@
           <a:p>
             <a:pPr>
               <a:lnSpc>
+                <a:spcPct val="85000"/>
+              </a:lnSpc>
+              <a:spcBef>
+                <a:spcPts val="200"/>
+              </a:spcBef>
+              <a:spcAft>
+                <a:spcPts val="200"/>
+              </a:spcAft>
+              <a:defRPr sz="2000" b="1"/>
+            </a:pPr>
+            <a:r>
+              <a:rPr sz="1300"/>
+              <a:t>📌 Problem:</a:t>
+            </a:r>
+          </a:p>
+          <a:p>
+            <a:pPr>
+              <a:lnSpc>
+                <a:spcPct val="85000"/>
+              </a:lnSpc>
+              <a:spcBef>
+                <a:spcPts val="200"/>
+              </a:spcBef>
+              <a:spcAft>
+                <a:spcPts val="200"/>
+              </a:spcAft>
+              <a:defRPr sz="2000"/>
+            </a:pPr>
+            <a:r>
+              <a:rPr sz="1300"/>
+              <a:t>Okul kütüphanesine hangi kitapları alalım?</a:t>
+            </a:r>
+          </a:p>
+          <a:p>
+            <a:pPr>
+              <a:lnSpc>
                 <a:spcPct val="90000"/>
               </a:lnSpc>
               <a:spcAft>
                 <a:spcPts val="300"/>
               </a:spcAft>
+              <a:defRPr sz="2000"/>
+            </a:pPr>
+          </a:p>
+          <a:p>
+            <a:pPr>
+              <a:lnSpc>
+                <a:spcPct val="85000"/>
+              </a:lnSpc>
+              <a:spcBef>
+                <a:spcPts val="200"/>
+              </a:spcBef>
+              <a:spcAft>
+                <a:spcPts val="200"/>
+              </a:spcAft>
+              <a:defRPr sz="2000"/>
+            </a:pPr>
+            <a:r>
+              <a:rPr sz="1300"/>
+              <a:t>📊 Veri Toplama:</a:t>
+            </a:r>
+          </a:p>
+          <a:p>
+            <a:pPr lvl="1">
+              <a:lnSpc>
+                <a:spcPct val="85000"/>
+              </a:lnSpc>
+              <a:spcBef>
+                <a:spcPts val="200"/>
+              </a:spcBef>
+              <a:spcAft>
+                <a:spcPts val="200"/>
+              </a:spcAft>
+              <a:defRPr sz="1800"/>
+            </a:pPr>
+            <a:r>
+              <a:rPr sz="1300"/>
+              <a:t>    • Anket: En sevilen kitap türü?</a:t>
+            </a:r>
+          </a:p>
+          <a:p>
+            <a:pPr lvl="1">
+              <a:lnSpc>
+                <a:spcPct val="85000"/>
+              </a:lnSpc>
+              <a:spcBef>
+                <a:spcPts val="200"/>
+              </a:spcBef>
+              <a:spcAft>
+                <a:spcPts val="200"/>
+              </a:spcAft>
+              <a:defRPr sz="1800"/>
+            </a:pPr>
+            <a:r>
+              <a:rPr sz="1300"/>
+              <a:t>    • Gözlem: Hangi kitaplar çok ödünç alınıyor?</a:t>
+            </a:r>
+          </a:p>
+          <a:p>
+            <a:pPr lvl="1">
+              <a:lnSpc>
+                <a:spcPct val="85000"/>
+              </a:lnSpc>
+              <a:spcBef>
+                <a:spcPts val="200"/>
+              </a:spcBef>
+              <a:spcAft>
+                <a:spcPts val="200"/>
+              </a:spcAft>
+              <a:defRPr sz="1800"/>
+            </a:pPr>
+            <a:r>
+              <a:rPr sz="1300"/>
+              <a:t>    • Kayıt: Rafta eksik ne var?</a:t>
+            </a:r>
+          </a:p>
+          <a:p>
+            <a:pPr>
+              <a:lnSpc>
+                <a:spcPct val="90000"/>
+              </a:lnSpc>
+              <a:spcAft>
+                <a:spcPts val="300"/>
+              </a:spcAft>
+              <a:defRPr sz="2000"/>
+            </a:pPr>
+          </a:p>
+          <a:p>
+            <a:pPr>
+              <a:lnSpc>
+                <a:spcPct val="85000"/>
+              </a:lnSpc>
+              <a:spcBef>
+                <a:spcPts val="200"/>
+              </a:spcBef>
+              <a:spcAft>
+                <a:spcPts val="200"/>
+              </a:spcAft>
+              <a:defRPr sz="2000"/>
+            </a:pPr>
+            <a:r>
+              <a:rPr sz="1300"/>
+              <a:t>📈 Analiz:</a:t>
+            </a:r>
+          </a:p>
+          <a:p>
+            <a:pPr lvl="1">
+              <a:lnSpc>
+                <a:spcPct val="85000"/>
+              </a:lnSpc>
+              <a:spcBef>
+                <a:spcPts val="200"/>
+              </a:spcBef>
+              <a:spcAft>
+                <a:spcPts val="200"/>
+              </a:spcAft>
+              <a:defRPr sz="1800"/>
+            </a:pPr>
+            <a:r>
+              <a:rPr sz="1300"/>
+              <a:t>    • %40 macera</a:t>
+            </a:r>
+          </a:p>
+          <a:p>
+            <a:pPr lvl="1">
+              <a:lnSpc>
+                <a:spcPct val="85000"/>
+              </a:lnSpc>
+              <a:spcBef>
+                <a:spcPts val="200"/>
+              </a:spcBef>
+              <a:spcAft>
+                <a:spcPts val="200"/>
+              </a:spcAft>
+              <a:defRPr sz="1800"/>
+            </a:pPr>
+            <a:r>
+              <a:rPr sz="1300"/>
+              <a:t>    • %30 bilim kurgu</a:t>
+            </a:r>
+          </a:p>
+          <a:p>
+            <a:pPr lvl="1">
+              <a:lnSpc>
+                <a:spcPct val="85000"/>
+              </a:lnSpc>
+              <a:spcBef>
+                <a:spcPts val="200"/>
+              </a:spcBef>
+              <a:spcAft>
+                <a:spcPts val="200"/>
+              </a:spcAft>
+              <a:defRPr sz="1800"/>
+            </a:pPr>
+            <a:r>
+              <a:rPr sz="1300"/>
+              <a:t>    • %20 roman</a:t>
+            </a:r>
+          </a:p>
+          <a:p>
+            <a:pPr lvl="1">
+              <a:lnSpc>
+                <a:spcPct val="85000"/>
+              </a:lnSpc>
+              <a:spcBef>
+                <a:spcPts val="200"/>
+              </a:spcBef>
+              <a:spcAft>
+                <a:spcPts val="200"/>
+              </a:spcAft>
+              <a:defRPr sz="1800"/>
+            </a:pPr>
+            <a:r>
+              <a:rPr sz="1300"/>
+              <a:t>    • %10 diğer</a:t>
+            </a:r>
+          </a:p>
+          <a:p>
+            <a:pPr>
+              <a:lnSpc>
+                <a:spcPct val="90000"/>
+              </a:lnSpc>
+              <a:spcAft>
+                <a:spcPts val="300"/>
+              </a:spcAft>
+              <a:defRPr sz="2000"/>
+            </a:pPr>
+          </a:p>
+          <a:p>
+            <a:pPr>
+              <a:lnSpc>
+                <a:spcPct val="85000"/>
+              </a:lnSpc>
+              <a:spcBef>
+                <a:spcPts val="200"/>
+              </a:spcBef>
+              <a:spcAft>
+                <a:spcPts val="200"/>
+              </a:spcAft>
               <a:defRPr sz="2000" b="1"/>
             </a:pPr>
             <a:r>
               <a:rPr sz="1300"/>
-              <a:t>✅ Veri Odaklı Karar Örneği:</a:t>
+              <a:t>✅ Karar:</a:t>
+            </a:r>
+          </a:p>
+          <a:p>
+            <a:pPr>
+              <a:lnSpc>
+                <a:spcPct val="85000"/>
+              </a:lnSpc>
+              <a:spcBef>
+                <a:spcPts val="200"/>
+              </a:spcBef>
+              <a:spcAft>
+                <a:spcPts val="200"/>
+              </a:spcAft>
+              <a:defRPr sz="2000"/>
+            </a:pPr>
+            <a:r>
+              <a:rPr sz="1300"/>
+              <a:t>Yeni kitapların %40'ı macera olsun!</a:t>
             </a:r>
           </a:p>
           <a:p>
@@ -7271,320 +7810,96 @@
           <a:p>
             <a:pPr>
               <a:lnSpc>
+                <a:spcPct val="85000"/>
+              </a:lnSpc>
+              <a:spcBef>
+                <a:spcPts val="200"/>
+              </a:spcBef>
+              <a:spcAft>
+                <a:spcPts val="200"/>
+              </a:spcAft>
+              <a:defRPr sz="2000" b="1"/>
+            </a:pPr>
+            <a:r>
+              <a:rPr sz="1300"/>
+              <a:t>💡 Veriye dayalı karar:</a:t>
+            </a:r>
+          </a:p>
+          <a:p>
+            <a:pPr lvl="1">
+              <a:lnSpc>
+                <a:spcPct val="85000"/>
+              </a:lnSpc>
+              <a:spcBef>
+                <a:spcPts val="200"/>
+              </a:spcBef>
+              <a:spcAft>
+                <a:spcPts val="200"/>
+              </a:spcAft>
+              <a:defRPr sz="1800"/>
+            </a:pPr>
+            <a:r>
+              <a:rPr sz="1300"/>
+              <a:t>    • Objektif (tarafsız)</a:t>
+            </a:r>
+          </a:p>
+          <a:p>
+            <a:pPr lvl="1">
+              <a:lnSpc>
+                <a:spcPct val="85000"/>
+              </a:lnSpc>
+              <a:spcBef>
+                <a:spcPts val="200"/>
+              </a:spcBef>
+              <a:spcAft>
+                <a:spcPts val="200"/>
+              </a:spcAft>
+              <a:defRPr sz="1800"/>
+            </a:pPr>
+            <a:r>
+              <a:rPr sz="1300"/>
+              <a:t>    • Kanıta dayalı</a:t>
+            </a:r>
+          </a:p>
+          <a:p>
+            <a:pPr lvl="1">
+              <a:lnSpc>
+                <a:spcPct val="85000"/>
+              </a:lnSpc>
+              <a:spcBef>
+                <a:spcPts val="200"/>
+              </a:spcBef>
+              <a:spcAft>
+                <a:spcPts val="200"/>
+              </a:spcAft>
+              <a:defRPr sz="1800"/>
+            </a:pPr>
+            <a:r>
+              <a:rPr sz="1300"/>
+              <a:t>    • Savunulabilir</a:t>
+            </a:r>
+          </a:p>
+          <a:p>
+            <a:pPr>
+              <a:lnSpc>
                 <a:spcPct val="90000"/>
               </a:lnSpc>
               <a:spcAft>
                 <a:spcPts val="300"/>
               </a:spcAft>
-              <a:defRPr sz="2000" b="1"/>
-            </a:pPr>
-            <a:r>
-              <a:rPr sz="1300"/>
-              <a:t>📌 Problem:</a:t>
-            </a:r>
-          </a:p>
-          <a:p>
-            <a:pPr>
-              <a:lnSpc>
-                <a:spcPct val="90000"/>
-              </a:lnSpc>
-              <a:spcAft>
-                <a:spcPts val="300"/>
-              </a:spcAft>
-              <a:defRPr sz="2000"/>
-            </a:pPr>
-            <a:r>
-              <a:rPr sz="1300"/>
-              <a:t>Okul kütüphanesine hangi kitapları alalım?</a:t>
-            </a:r>
-          </a:p>
-          <a:p>
-            <a:pPr>
-              <a:lnSpc>
-                <a:spcPct val="90000"/>
-              </a:lnSpc>
-              <a:spcAft>
-                <a:spcPts val="300"/>
-              </a:spcAft>
-              <a:defRPr sz="2000"/>
-            </a:pPr>
-          </a:p>
-          <a:p>
-            <a:pPr>
-              <a:lnSpc>
-                <a:spcPct val="90000"/>
-              </a:lnSpc>
-              <a:spcAft>
-                <a:spcPts val="300"/>
-              </a:spcAft>
-              <a:defRPr sz="2000"/>
-            </a:pPr>
-            <a:r>
-              <a:rPr sz="1300"/>
-              <a:t>📊 Veri Toplama:</a:t>
-            </a:r>
-          </a:p>
-          <a:p>
-            <a:pPr lvl="1">
-              <a:lnSpc>
-                <a:spcPct val="90000"/>
-              </a:lnSpc>
-              <a:spcAft>
-                <a:spcPts val="300"/>
-              </a:spcAft>
-              <a:defRPr sz="1800"/>
-            </a:pPr>
-            <a:r>
-              <a:rPr sz="1300"/>
-              <a:t>    • Anket: En sevilen kitap türü?</a:t>
-            </a:r>
-          </a:p>
-          <a:p>
-            <a:pPr lvl="1">
-              <a:lnSpc>
-                <a:spcPct val="90000"/>
-              </a:lnSpc>
-              <a:spcAft>
-                <a:spcPts val="300"/>
-              </a:spcAft>
-              <a:defRPr sz="1800"/>
-            </a:pPr>
-            <a:r>
-              <a:rPr sz="1300"/>
-              <a:t>    • Gözlem: Hangi kitaplar çok ödünç alınıyor?</a:t>
-            </a:r>
-          </a:p>
-          <a:p>
-            <a:pPr lvl="1">
-              <a:lnSpc>
-                <a:spcPct val="90000"/>
-              </a:lnSpc>
-              <a:spcAft>
-                <a:spcPts val="300"/>
-              </a:spcAft>
-              <a:defRPr sz="1800"/>
-            </a:pPr>
-            <a:r>
-              <a:rPr sz="1300"/>
-              <a:t>    • Kayıt: Rafta eksik ne var?</a:t>
-            </a:r>
-          </a:p>
-          <a:p>
-            <a:pPr>
-              <a:lnSpc>
-                <a:spcPct val="90000"/>
-              </a:lnSpc>
-              <a:spcAft>
-                <a:spcPts val="300"/>
-              </a:spcAft>
-              <a:defRPr sz="2000"/>
-            </a:pPr>
-          </a:p>
-          <a:p>
-            <a:pPr>
-              <a:lnSpc>
-                <a:spcPct val="90000"/>
-              </a:lnSpc>
-              <a:spcAft>
-                <a:spcPts val="300"/>
-              </a:spcAft>
-              <a:defRPr sz="2000"/>
-            </a:pPr>
-            <a:r>
-              <a:rPr sz="1300"/>
-              <a:t>📈 Analiz:</a:t>
-            </a:r>
-          </a:p>
-          <a:p>
-            <a:pPr lvl="1">
-              <a:lnSpc>
-                <a:spcPct val="90000"/>
-              </a:lnSpc>
-              <a:spcAft>
-                <a:spcPts val="300"/>
-              </a:spcAft>
-              <a:defRPr sz="1800"/>
-            </a:pPr>
-            <a:r>
-              <a:rPr sz="1300"/>
-              <a:t>    • %40 macera</a:t>
-            </a:r>
-          </a:p>
-          <a:p>
-            <a:pPr lvl="1">
-              <a:lnSpc>
-                <a:spcPct val="90000"/>
-              </a:lnSpc>
-              <a:spcAft>
-                <a:spcPts val="300"/>
-              </a:spcAft>
-              <a:defRPr sz="1800"/>
-            </a:pPr>
-            <a:r>
-              <a:rPr sz="1300"/>
-              <a:t>    • %30 bilim kurgu</a:t>
-            </a:r>
-          </a:p>
-          <a:p>
-            <a:pPr lvl="1">
-              <a:lnSpc>
-                <a:spcPct val="90000"/>
-              </a:lnSpc>
-              <a:spcAft>
-                <a:spcPts val="300"/>
-              </a:spcAft>
-              <a:defRPr sz="1800"/>
-            </a:pPr>
-            <a:r>
-              <a:rPr sz="1300"/>
-              <a:t>    • %20 roman</a:t>
-            </a:r>
-          </a:p>
-          <a:p>
-            <a:pPr lvl="1">
-              <a:lnSpc>
-                <a:spcPct val="90000"/>
-              </a:lnSpc>
-              <a:spcAft>
-                <a:spcPts val="300"/>
-              </a:spcAft>
-              <a:defRPr sz="1800"/>
-            </a:pPr>
-            <a:r>
-              <a:rPr sz="1300"/>
-              <a:t>    • %10 diğer</a:t>
-            </a:r>
-          </a:p>
-          <a:p>
-            <a:pPr>
-              <a:lnSpc>
-                <a:spcPct val="90000"/>
-              </a:lnSpc>
-              <a:spcAft>
-                <a:spcPts val="300"/>
-              </a:spcAft>
-              <a:defRPr sz="2000"/>
-            </a:pPr>
-          </a:p>
-          <a:p>
-            <a:pPr>
-              <a:lnSpc>
-                <a:spcPct val="90000"/>
-              </a:lnSpc>
-              <a:spcAft>
-                <a:spcPts val="300"/>
-              </a:spcAft>
-              <a:defRPr sz="2000" b="1"/>
-            </a:pPr>
-            <a:r>
-              <a:rPr sz="1300"/>
-              <a:t>✅ Karar:</a:t>
-            </a:r>
-          </a:p>
-          <a:p>
-            <a:pPr>
-              <a:lnSpc>
-                <a:spcPct val="90000"/>
-              </a:lnSpc>
-              <a:spcAft>
-                <a:spcPts val="300"/>
-              </a:spcAft>
-              <a:defRPr sz="2000"/>
-            </a:pPr>
-            <a:r>
-              <a:rPr sz="1300"/>
-              <a:t>Yeni kitapların %40'ı macera olsun!</a:t>
-            </a:r>
-          </a:p>
-          <a:p>
-            <a:pPr>
-              <a:lnSpc>
-                <a:spcPct val="90000"/>
-              </a:lnSpc>
-              <a:spcAft>
-                <a:spcPts val="300"/>
-              </a:spcAft>
-              <a:defRPr sz="2000"/>
-            </a:pPr>
-          </a:p>
-          <a:p>
-            <a:pPr>
-              <a:lnSpc>
-                <a:spcPct val="90000"/>
-              </a:lnSpc>
-              <a:spcAft>
-                <a:spcPts val="300"/>
-              </a:spcAft>
-              <a:defRPr sz="2000" b="1"/>
-            </a:pPr>
-            <a:r>
-              <a:rPr sz="1300"/>
-              <a:t>💡 Veriye dayalı karar:</a:t>
-            </a:r>
-          </a:p>
-          <a:p>
-            <a:pPr lvl="1">
-              <a:lnSpc>
-                <a:spcPct val="90000"/>
-              </a:lnSpc>
-              <a:spcAft>
-                <a:spcPts val="300"/>
-              </a:spcAft>
-              <a:defRPr sz="1800"/>
-            </a:pPr>
-            <a:r>
-              <a:rPr sz="1300"/>
-              <a:t>    • Objektif (tarafsız)</a:t>
-            </a:r>
-          </a:p>
-          <a:p>
-            <a:pPr lvl="1">
-              <a:lnSpc>
-                <a:spcPct val="90000"/>
-              </a:lnSpc>
-              <a:spcAft>
-                <a:spcPts val="300"/>
-              </a:spcAft>
-              <a:defRPr sz="1800"/>
-            </a:pPr>
-            <a:r>
-              <a:rPr sz="1300"/>
-              <a:t>    • Kanıta dayalı</a:t>
-            </a:r>
-          </a:p>
-          <a:p>
-            <a:pPr lvl="1">
-              <a:lnSpc>
-                <a:spcPct val="90000"/>
-              </a:lnSpc>
-              <a:spcAft>
-                <a:spcPts val="300"/>
-              </a:spcAft>
-              <a:defRPr sz="1800"/>
-            </a:pPr>
-            <a:r>
-              <a:rPr sz="1300"/>
-              <a:t>    • Savunulabilir</a:t>
-            </a:r>
-          </a:p>
-          <a:p>
-            <a:pPr>
-              <a:lnSpc>
-                <a:spcPct val="90000"/>
-              </a:lnSpc>
-              <a:spcAft>
-                <a:spcPts val="300"/>
-              </a:spcAft>
-              <a:defRPr sz="2000"/>
-            </a:pPr>
-          </a:p>
-          <a:p>
-            <a:pPr>
-              <a:lnSpc>
-                <a:spcPct val="90000"/>
-              </a:lnSpc>
-              <a:spcAft>
-                <a:spcPts val="300"/>
+              <a:defRPr sz="2000"/>
+            </a:pPr>
+          </a:p>
+          <a:p>
+            <a:pPr>
+              <a:lnSpc>
+                <a:spcPct val="85000"/>
+              </a:lnSpc>
+              <a:spcBef>
+                <a:spcPts val="200"/>
+              </a:spcBef>
+              <a:spcAft>
+                <a:spcPts val="200"/>
               </a:spcAft>
               <a:defRPr sz="2000"/>
             </a:pPr>
@@ -7596,10 +7911,13 @@
           <a:p>
             <a:pPr>
               <a:lnSpc>
-                <a:spcPct val="90000"/>
-              </a:lnSpc>
-              <a:spcAft>
-                <a:spcPts val="300"/>
+                <a:spcPct val="85000"/>
+              </a:lnSpc>
+              <a:spcBef>
+                <a:spcPts val="200"/>
+              </a:spcBef>
+              <a:spcAft>
+                <a:spcPts val="200"/>
               </a:spcAft>
               <a:defRPr sz="2000"/>
             </a:pPr>
@@ -7640,10 +7958,19 @@
         </p:nvSpPr>
         <p:spPr/>
         <p:txBody>
-          <a:bodyPr wrap="square"/>
+          <a:bodyPr wrap="square" tIns="25400" bIns="25400" lIns="63500" rIns="63500"/>
           <a:lstStyle/>
           <a:p>
             <a:pPr>
+              <a:lnSpc>
+                <a:spcPct val="85000"/>
+              </a:lnSpc>
+              <a:spcBef>
+                <a:spcPts val="200"/>
+              </a:spcBef>
+              <a:spcAft>
+                <a:spcPts val="200"/>
+              </a:spcAft>
               <a:defRPr sz="4000" b="1">
                 <a:solidFill>
                   <a:srgbClr val="764BA2"/>
@@ -7651,6 +7978,7 @@
               </a:defRPr>
             </a:pPr>
             <a:r>
+              <a:rPr/>
               <a:t>🔒 Veri Güvenliği ve Gizlilik</a:t>
             </a:r>
           </a:p>
@@ -7690,7 +8018,7 @@
           <a:noFill/>
         </p:spPr>
         <p:txBody>
-          <a:bodyPr wrap="square">
+          <a:bodyPr wrap="square" tIns="25400" bIns="25400" lIns="63500" rIns="63500">
             <a:spAutoFit/>
           </a:bodyPr>
           <a:lstStyle/>
@@ -7707,6 +8035,24 @@
           <a:p>
             <a:pPr>
               <a:lnSpc>
+                <a:spcPct val="85000"/>
+              </a:lnSpc>
+              <a:spcBef>
+                <a:spcPts val="200"/>
+              </a:spcBef>
+              <a:spcAft>
+                <a:spcPts val="200"/>
+              </a:spcAft>
+              <a:defRPr sz="2000"/>
+            </a:pPr>
+            <a:r>
+              <a:rPr sz="1300"/>
+              <a:t>Veri toplarken/paylaşırken dikkatli ol!</a:t>
+            </a:r>
+          </a:p>
+          <a:p>
+            <a:pPr>
+              <a:lnSpc>
                 <a:spcPct val="90000"/>
               </a:lnSpc>
               <a:spcAft>
@@ -7714,9 +8060,113 @@
               </a:spcAft>
               <a:defRPr sz="2000"/>
             </a:pPr>
-            <a:r>
-              <a:rPr sz="1300"/>
-              <a:t>Veri toplarken/paylaşırken dikkatli ol!</a:t>
+          </a:p>
+          <a:p>
+            <a:pPr>
+              <a:lnSpc>
+                <a:spcPct val="85000"/>
+              </a:lnSpc>
+              <a:spcBef>
+                <a:spcPts val="200"/>
+              </a:spcBef>
+              <a:spcAft>
+                <a:spcPts val="200"/>
+              </a:spcAft>
+              <a:defRPr sz="2000" b="1"/>
+            </a:pPr>
+            <a:r>
+              <a:rPr sz="1300"/>
+              <a:t>✅ Kişisel Veri Nedir?</a:t>
+            </a:r>
+          </a:p>
+          <a:p>
+            <a:pPr lvl="1">
+              <a:lnSpc>
+                <a:spcPct val="85000"/>
+              </a:lnSpc>
+              <a:spcBef>
+                <a:spcPts val="200"/>
+              </a:spcBef>
+              <a:spcAft>
+                <a:spcPts val="200"/>
+              </a:spcAft>
+              <a:defRPr sz="1800"/>
+            </a:pPr>
+            <a:r>
+              <a:rPr sz="1300"/>
+              <a:t>    • İsim, soyisim</a:t>
+            </a:r>
+          </a:p>
+          <a:p>
+            <a:pPr lvl="1">
+              <a:lnSpc>
+                <a:spcPct val="85000"/>
+              </a:lnSpc>
+              <a:spcBef>
+                <a:spcPts val="200"/>
+              </a:spcBef>
+              <a:spcAft>
+                <a:spcPts val="200"/>
+              </a:spcAft>
+              <a:defRPr sz="1800"/>
+            </a:pPr>
+            <a:r>
+              <a:rPr sz="1300"/>
+              <a:t>    • Doğum tarihi</a:t>
+            </a:r>
+          </a:p>
+          <a:p>
+            <a:pPr lvl="1">
+              <a:lnSpc>
+                <a:spcPct val="85000"/>
+              </a:lnSpc>
+              <a:spcBef>
+                <a:spcPts val="200"/>
+              </a:spcBef>
+              <a:spcAft>
+                <a:spcPts val="200"/>
+              </a:spcAft>
+              <a:defRPr sz="1800"/>
+            </a:pPr>
+            <a:r>
+              <a:rPr sz="1300"/>
+              <a:t>    • Adres, telefon</a:t>
+            </a:r>
+          </a:p>
+          <a:p>
+            <a:pPr lvl="1">
+              <a:lnSpc>
+                <a:spcPct val="85000"/>
+              </a:lnSpc>
+              <a:spcBef>
+                <a:spcPts val="200"/>
+              </a:spcBef>
+              <a:spcAft>
+                <a:spcPts val="200"/>
+              </a:spcAft>
+              <a:defRPr sz="1800"/>
+            </a:pPr>
+            <a:r>
+              <a:rPr sz="1300"/>
+              <a:t>    • Fotoğraflar</a:t>
+            </a:r>
+          </a:p>
+          <a:p>
+            <a:pPr lvl="1">
+              <a:lnSpc>
+                <a:spcPct val="85000"/>
+              </a:lnSpc>
+              <a:spcBef>
+                <a:spcPts val="200"/>
+              </a:spcBef>
+              <a:spcAft>
+                <a:spcPts val="200"/>
+              </a:spcAft>
+              <a:defRPr sz="1800"/>
+            </a:pPr>
+            <a:r>
+              <a:rPr sz="1300"/>
+              <a:t>    • Sağlık bilgileri</a:t>
             </a:r>
           </a:p>
           <a:p>
@@ -7733,372 +8183,313 @@
           <a:p>
             <a:pPr>
               <a:lnSpc>
+                <a:spcPct val="85000"/>
+              </a:lnSpc>
+              <a:spcBef>
+                <a:spcPts val="200"/>
+              </a:spcBef>
+              <a:spcAft>
+                <a:spcPts val="200"/>
+              </a:spcAft>
+              <a:defRPr sz="2000" b="1"/>
+            </a:pPr>
+            <a:r>
+              <a:rPr sz="1300"/>
+              <a:t>📌 Veri Toplama Etik Kuralları:</a:t>
+            </a:r>
+          </a:p>
+          <a:p>
+            <a:pPr>
+              <a:lnSpc>
                 <a:spcPct val="90000"/>
               </a:lnSpc>
               <a:spcAft>
                 <a:spcPts val="300"/>
               </a:spcAft>
+              <a:defRPr sz="2000"/>
+            </a:pPr>
+          </a:p>
+          <a:p>
+            <a:pPr>
+              <a:lnSpc>
+                <a:spcPct val="85000"/>
+              </a:lnSpc>
+              <a:spcBef>
+                <a:spcPts val="200"/>
+              </a:spcBef>
+              <a:spcAft>
+                <a:spcPts val="200"/>
+              </a:spcAft>
+              <a:defRPr sz="2000"/>
+            </a:pPr>
+            <a:r>
+              <a:rPr sz="1300"/>
+              <a:t>🔐 İzin Al:</a:t>
+            </a:r>
+          </a:p>
+          <a:p>
+            <a:pPr lvl="1">
+              <a:lnSpc>
+                <a:spcPct val="85000"/>
+              </a:lnSpc>
+              <a:spcBef>
+                <a:spcPts val="200"/>
+              </a:spcBef>
+              <a:spcAft>
+                <a:spcPts val="200"/>
+              </a:spcAft>
+              <a:defRPr sz="1800"/>
+            </a:pPr>
+            <a:r>
+              <a:rPr sz="1300"/>
+              <a:t>    • Kişilere sor, onay al</a:t>
+            </a:r>
+          </a:p>
+          <a:p>
+            <a:pPr>
+              <a:lnSpc>
+                <a:spcPct val="90000"/>
+              </a:lnSpc>
+              <a:spcAft>
+                <a:spcPts val="300"/>
+              </a:spcAft>
+              <a:defRPr sz="2000"/>
+            </a:pPr>
+          </a:p>
+          <a:p>
+            <a:pPr>
+              <a:lnSpc>
+                <a:spcPct val="85000"/>
+              </a:lnSpc>
+              <a:spcBef>
+                <a:spcPts val="200"/>
+              </a:spcBef>
+              <a:spcAft>
+                <a:spcPts val="200"/>
+              </a:spcAft>
+              <a:defRPr sz="2000"/>
+            </a:pPr>
+            <a:r>
+              <a:rPr sz="1300"/>
+              <a:t>🔒 Gizli Tut:</a:t>
+            </a:r>
+          </a:p>
+          <a:p>
+            <a:pPr lvl="1">
+              <a:lnSpc>
+                <a:spcPct val="85000"/>
+              </a:lnSpc>
+              <a:spcBef>
+                <a:spcPts val="200"/>
+              </a:spcBef>
+              <a:spcAft>
+                <a:spcPts val="200"/>
+              </a:spcAft>
+              <a:defRPr sz="1800"/>
+            </a:pPr>
+            <a:r>
+              <a:rPr sz="1300"/>
+              <a:t>    • Kişisel verileri paylaşma</a:t>
+            </a:r>
+          </a:p>
+          <a:p>
+            <a:pPr>
+              <a:lnSpc>
+                <a:spcPct val="90000"/>
+              </a:lnSpc>
+              <a:spcAft>
+                <a:spcPts val="300"/>
+              </a:spcAft>
+              <a:defRPr sz="2000"/>
+            </a:pPr>
+          </a:p>
+          <a:p>
+            <a:pPr>
+              <a:lnSpc>
+                <a:spcPct val="85000"/>
+              </a:lnSpc>
+              <a:spcBef>
+                <a:spcPts val="200"/>
+              </a:spcBef>
+              <a:spcAft>
+                <a:spcPts val="200"/>
+              </a:spcAft>
+              <a:defRPr sz="2000"/>
+            </a:pPr>
+            <a:r>
+              <a:rPr sz="1300"/>
+              <a:t>📊 Anonim Yap:</a:t>
+            </a:r>
+          </a:p>
+          <a:p>
+            <a:pPr lvl="1">
+              <a:lnSpc>
+                <a:spcPct val="85000"/>
+              </a:lnSpc>
+              <a:spcBef>
+                <a:spcPts val="200"/>
+              </a:spcBef>
+              <a:spcAft>
+                <a:spcPts val="200"/>
+              </a:spcAft>
+              <a:defRPr sz="1800"/>
+            </a:pPr>
+            <a:r>
+              <a:rPr sz="1300"/>
+              <a:t>    • İsim kullanma, genel göster</a:t>
+            </a:r>
+          </a:p>
+          <a:p>
+            <a:pPr lvl="1">
+              <a:lnSpc>
+                <a:spcPct val="85000"/>
+              </a:lnSpc>
+              <a:spcBef>
+                <a:spcPts val="200"/>
+              </a:spcBef>
+              <a:spcAft>
+                <a:spcPts val="200"/>
+              </a:spcAft>
+              <a:defRPr sz="1800"/>
+            </a:pPr>
+            <a:r>
+              <a:rPr sz="1300"/>
+              <a:t>    • Örnek: 'Öğrenci 1, Öğrenci 2'</a:t>
+            </a:r>
+          </a:p>
+          <a:p>
+            <a:pPr>
+              <a:lnSpc>
+                <a:spcPct val="90000"/>
+              </a:lnSpc>
+              <a:spcAft>
+                <a:spcPts val="300"/>
+              </a:spcAft>
+              <a:defRPr sz="2000"/>
+            </a:pPr>
+          </a:p>
+          <a:p>
+            <a:pPr>
+              <a:lnSpc>
+                <a:spcPct val="85000"/>
+              </a:lnSpc>
+              <a:spcBef>
+                <a:spcPts val="200"/>
+              </a:spcBef>
+              <a:spcAft>
+                <a:spcPts val="200"/>
+              </a:spcAft>
               <a:defRPr sz="2000" b="1"/>
             </a:pPr>
             <a:r>
               <a:rPr sz="1300"/>
-              <a:t>✅ Kişisel Veri Nedir?</a:t>
-            </a:r>
-          </a:p>
-          <a:p>
-            <a:pPr lvl="1">
+              <a:t>🎯 Amacını Belirt:</a:t>
+            </a:r>
+          </a:p>
+          <a:p>
+            <a:pPr lvl="1">
+              <a:lnSpc>
+                <a:spcPct val="85000"/>
+              </a:lnSpc>
+              <a:spcBef>
+                <a:spcPts val="200"/>
+              </a:spcBef>
+              <a:spcAft>
+                <a:spcPts val="200"/>
+              </a:spcAft>
+              <a:defRPr sz="1800"/>
+            </a:pPr>
+            <a:r>
+              <a:rPr sz="1300"/>
+              <a:t>    • Veri ne için kullanılacak?</a:t>
+            </a:r>
+          </a:p>
+          <a:p>
+            <a:pPr>
               <a:lnSpc>
                 <a:spcPct val="90000"/>
               </a:lnSpc>
               <a:spcAft>
                 <a:spcPts val="300"/>
               </a:spcAft>
-              <a:defRPr sz="1800"/>
-            </a:pPr>
-            <a:r>
-              <a:rPr sz="1300"/>
-              <a:t>    • İsim, soyisim</a:t>
-            </a:r>
-          </a:p>
-          <a:p>
-            <a:pPr lvl="1">
+              <a:defRPr sz="2000"/>
+            </a:pPr>
+          </a:p>
+          <a:p>
+            <a:pPr>
+              <a:lnSpc>
+                <a:spcPct val="85000"/>
+              </a:lnSpc>
+              <a:spcBef>
+                <a:spcPts val="200"/>
+              </a:spcBef>
+              <a:spcAft>
+                <a:spcPts val="200"/>
+              </a:spcAft>
+              <a:defRPr sz="2000"/>
+            </a:pPr>
+            <a:r>
+              <a:rPr sz="1300"/>
+              <a:t>🗑️ Gereksiz Veri Toplama:</a:t>
+            </a:r>
+          </a:p>
+          <a:p>
+            <a:pPr lvl="1">
+              <a:lnSpc>
+                <a:spcPct val="85000"/>
+              </a:lnSpc>
+              <a:spcBef>
+                <a:spcPts val="200"/>
+              </a:spcBef>
+              <a:spcAft>
+                <a:spcPts val="200"/>
+              </a:spcAft>
+              <a:defRPr sz="1800"/>
+            </a:pPr>
+            <a:r>
+              <a:rPr sz="1300"/>
+              <a:t>    • Sadece gerekli veriyi topla</a:t>
+            </a:r>
+          </a:p>
+          <a:p>
+            <a:pPr>
               <a:lnSpc>
                 <a:spcPct val="90000"/>
               </a:lnSpc>
               <a:spcAft>
                 <a:spcPts val="300"/>
               </a:spcAft>
-              <a:defRPr sz="1800"/>
-            </a:pPr>
-            <a:r>
-              <a:rPr sz="1300"/>
-              <a:t>    • Doğum tarihi</a:t>
-            </a:r>
-          </a:p>
-          <a:p>
-            <a:pPr lvl="1">
-              <a:lnSpc>
-                <a:spcPct val="90000"/>
-              </a:lnSpc>
-              <a:spcAft>
-                <a:spcPts val="300"/>
-              </a:spcAft>
-              <a:defRPr sz="1800"/>
-            </a:pPr>
-            <a:r>
-              <a:rPr sz="1300"/>
-              <a:t>    • Adres, telefon</a:t>
-            </a:r>
-          </a:p>
-          <a:p>
-            <a:pPr lvl="1">
-              <a:lnSpc>
-                <a:spcPct val="90000"/>
-              </a:lnSpc>
-              <a:spcAft>
-                <a:spcPts val="300"/>
-              </a:spcAft>
-              <a:defRPr sz="1800"/>
-            </a:pPr>
-            <a:r>
-              <a:rPr sz="1300"/>
-              <a:t>    • Fotoğraflar</a:t>
-            </a:r>
-          </a:p>
-          <a:p>
-            <a:pPr lvl="1">
-              <a:lnSpc>
-                <a:spcPct val="90000"/>
-              </a:lnSpc>
-              <a:spcAft>
-                <a:spcPts val="300"/>
-              </a:spcAft>
-              <a:defRPr sz="1800"/>
-            </a:pPr>
-            <a:r>
-              <a:rPr sz="1300"/>
-              <a:t>    • Sağlık bilgileri</a:t>
-            </a:r>
-          </a:p>
-          <a:p>
-            <a:pPr>
-              <a:lnSpc>
-                <a:spcPct val="90000"/>
-              </a:lnSpc>
-              <a:spcAft>
-                <a:spcPts val="300"/>
-              </a:spcAft>
-              <a:defRPr sz="2000"/>
-            </a:pPr>
-          </a:p>
-          <a:p>
-            <a:pPr>
-              <a:lnSpc>
-                <a:spcPct val="90000"/>
-              </a:lnSpc>
-              <a:spcAft>
-                <a:spcPts val="300"/>
+              <a:defRPr sz="2000"/>
+            </a:pPr>
+          </a:p>
+          <a:p>
+            <a:pPr>
+              <a:lnSpc>
+                <a:spcPct val="85000"/>
+              </a:lnSpc>
+              <a:spcBef>
+                <a:spcPts val="200"/>
+              </a:spcBef>
+              <a:spcAft>
+                <a:spcPts val="200"/>
               </a:spcAft>
               <a:defRPr sz="2000" b="1"/>
             </a:pPr>
             <a:r>
               <a:rPr sz="1300"/>
-              <a:t>📌 Veri Toplama Etik Kuralları:</a:t>
-            </a:r>
-          </a:p>
-          <a:p>
-            <a:pPr>
-              <a:lnSpc>
-                <a:spcPct val="90000"/>
-              </a:lnSpc>
-              <a:spcAft>
-                <a:spcPts val="300"/>
-              </a:spcAft>
-              <a:defRPr sz="2000"/>
-            </a:pPr>
-          </a:p>
-          <a:p>
-            <a:pPr>
-              <a:lnSpc>
-                <a:spcPct val="90000"/>
-              </a:lnSpc>
-              <a:spcAft>
-                <a:spcPts val="300"/>
-              </a:spcAft>
-              <a:defRPr sz="2000"/>
-            </a:pPr>
-            <a:r>
-              <a:rPr sz="1300"/>
-              <a:t>🔐 İzin Al:</a:t>
-            </a:r>
-          </a:p>
-          <a:p>
-            <a:pPr lvl="1">
-              <a:lnSpc>
-                <a:spcPct val="90000"/>
-              </a:lnSpc>
-              <a:spcAft>
-                <a:spcPts val="300"/>
-              </a:spcAft>
-              <a:defRPr sz="1800"/>
-            </a:pPr>
-            <a:r>
-              <a:rPr sz="1300"/>
-              <a:t>    • Kişilere sor, onay al</a:t>
-            </a:r>
-          </a:p>
-          <a:p>
-            <a:pPr>
-              <a:lnSpc>
-                <a:spcPct val="90000"/>
-              </a:lnSpc>
-              <a:spcAft>
-                <a:spcPts val="300"/>
-              </a:spcAft>
-              <a:defRPr sz="2000"/>
-            </a:pPr>
-          </a:p>
-          <a:p>
-            <a:pPr>
-              <a:lnSpc>
-                <a:spcPct val="90000"/>
-              </a:lnSpc>
-              <a:spcAft>
-                <a:spcPts val="300"/>
-              </a:spcAft>
-              <a:defRPr sz="2000"/>
-            </a:pPr>
-            <a:r>
-              <a:rPr sz="1300"/>
-              <a:t>🔒 Gizli Tut:</a:t>
-            </a:r>
-          </a:p>
-          <a:p>
-            <a:pPr lvl="1">
-              <a:lnSpc>
-                <a:spcPct val="90000"/>
-              </a:lnSpc>
-              <a:spcAft>
-                <a:spcPts val="300"/>
-              </a:spcAft>
-              <a:defRPr sz="1800"/>
-            </a:pPr>
-            <a:r>
-              <a:rPr sz="1300"/>
-              <a:t>    • Kişisel verileri paylaşma</a:t>
-            </a:r>
-          </a:p>
-          <a:p>
-            <a:pPr>
-              <a:lnSpc>
-                <a:spcPct val="90000"/>
-              </a:lnSpc>
-              <a:spcAft>
-                <a:spcPts val="300"/>
-              </a:spcAft>
-              <a:defRPr sz="2000"/>
-            </a:pPr>
-          </a:p>
-          <a:p>
-            <a:pPr>
-              <a:lnSpc>
-                <a:spcPct val="90000"/>
-              </a:lnSpc>
-              <a:spcAft>
-                <a:spcPts val="300"/>
-              </a:spcAft>
-              <a:defRPr sz="2000"/>
-            </a:pPr>
-            <a:r>
-              <a:rPr sz="1300"/>
-              <a:t>📊 Anonim Yap:</a:t>
-            </a:r>
-          </a:p>
-          <a:p>
-            <a:pPr lvl="1">
-              <a:lnSpc>
-                <a:spcPct val="90000"/>
-              </a:lnSpc>
-              <a:spcAft>
-                <a:spcPts val="300"/>
-              </a:spcAft>
-              <a:defRPr sz="1800"/>
-            </a:pPr>
-            <a:r>
-              <a:rPr sz="1300"/>
-              <a:t>    • İsim kullanma, genel göster</a:t>
-            </a:r>
-          </a:p>
-          <a:p>
-            <a:pPr lvl="1">
-              <a:lnSpc>
-                <a:spcPct val="90000"/>
-              </a:lnSpc>
-              <a:spcAft>
-                <a:spcPts val="300"/>
-              </a:spcAft>
-              <a:defRPr sz="1800"/>
-            </a:pPr>
-            <a:r>
-              <a:rPr sz="1300"/>
-              <a:t>    • Örnek: 'Öğrenci 1, Öğrenci 2'</a:t>
-            </a:r>
-          </a:p>
-          <a:p>
-            <a:pPr>
-              <a:lnSpc>
-                <a:spcPct val="90000"/>
-              </a:lnSpc>
-              <a:spcAft>
-                <a:spcPts val="300"/>
-              </a:spcAft>
-              <a:defRPr sz="2000"/>
-            </a:pPr>
-          </a:p>
-          <a:p>
-            <a:pPr>
-              <a:lnSpc>
-                <a:spcPct val="90000"/>
-              </a:lnSpc>
-              <a:spcAft>
-                <a:spcPts val="300"/>
-              </a:spcAft>
-              <a:defRPr sz="2000" b="1"/>
-            </a:pPr>
-            <a:r>
-              <a:rPr sz="1300"/>
-              <a:t>🎯 Amacını Belirt:</a:t>
-            </a:r>
-          </a:p>
-          <a:p>
-            <a:pPr lvl="1">
-              <a:lnSpc>
-                <a:spcPct val="90000"/>
-              </a:lnSpc>
-              <a:spcAft>
-                <a:spcPts val="300"/>
-              </a:spcAft>
-              <a:defRPr sz="1800"/>
-            </a:pPr>
-            <a:r>
-              <a:rPr sz="1300"/>
-              <a:t>    • Veri ne için kullanılacak?</a:t>
-            </a:r>
-          </a:p>
-          <a:p>
-            <a:pPr>
-              <a:lnSpc>
-                <a:spcPct val="90000"/>
-              </a:lnSpc>
-              <a:spcAft>
-                <a:spcPts val="300"/>
-              </a:spcAft>
-              <a:defRPr sz="2000"/>
-            </a:pPr>
-          </a:p>
-          <a:p>
-            <a:pPr>
-              <a:lnSpc>
-                <a:spcPct val="90000"/>
-              </a:lnSpc>
-              <a:spcAft>
-                <a:spcPts val="300"/>
-              </a:spcAft>
-              <a:defRPr sz="2000"/>
-            </a:pPr>
-            <a:r>
-              <a:rPr sz="1300"/>
-              <a:t>🗑️ Gereksiz Veri Toplama:</a:t>
-            </a:r>
-          </a:p>
-          <a:p>
-            <a:pPr lvl="1">
-              <a:lnSpc>
-                <a:spcPct val="90000"/>
-              </a:lnSpc>
-              <a:spcAft>
-                <a:spcPts val="300"/>
-              </a:spcAft>
-              <a:defRPr sz="1800"/>
-            </a:pPr>
-            <a:r>
-              <a:rPr sz="1300"/>
-              <a:t>    • Sadece gerekli veriyi topla</a:t>
-            </a:r>
-          </a:p>
-          <a:p>
-            <a:pPr>
-              <a:lnSpc>
-                <a:spcPct val="90000"/>
-              </a:lnSpc>
-              <a:spcAft>
-                <a:spcPts val="300"/>
-              </a:spcAft>
-              <a:defRPr sz="2000"/>
-            </a:pPr>
-          </a:p>
-          <a:p>
-            <a:pPr>
-              <a:lnSpc>
-                <a:spcPct val="90000"/>
-              </a:lnSpc>
-              <a:spcAft>
-                <a:spcPts val="300"/>
-              </a:spcAft>
-              <a:defRPr sz="2000" b="1"/>
-            </a:pPr>
-            <a:r>
-              <a:rPr sz="1300"/>
               <a:t>💡 KVKK (Kişisel Verilerin Korunması Kanunu):</a:t>
             </a:r>
           </a:p>
           <a:p>
             <a:pPr>
               <a:lnSpc>
-                <a:spcPct val="90000"/>
-              </a:lnSpc>
-              <a:spcAft>
-                <a:spcPts val="300"/>
+                <a:spcPct val="85000"/>
+              </a:lnSpc>
+              <a:spcBef>
+                <a:spcPts val="200"/>
+              </a:spcBef>
+              <a:spcAft>
+                <a:spcPts val="200"/>
               </a:spcAft>
               <a:defRPr sz="2000"/>
             </a:pPr>
@@ -8139,10 +8530,19 @@
         </p:nvSpPr>
         <p:spPr/>
         <p:txBody>
-          <a:bodyPr wrap="square"/>
+          <a:bodyPr wrap="square" tIns="25400" bIns="25400" lIns="63500" rIns="63500"/>
           <a:lstStyle/>
           <a:p>
             <a:pPr>
+              <a:lnSpc>
+                <a:spcPct val="85000"/>
+              </a:lnSpc>
+              <a:spcBef>
+                <a:spcPts val="200"/>
+              </a:spcBef>
+              <a:spcAft>
+                <a:spcPts val="200"/>
+              </a:spcAft>
               <a:defRPr sz="4000" b="1">
                 <a:solidFill>
                   <a:srgbClr val="764BA2"/>
@@ -8150,6 +8550,7 @@
               </a:defRPr>
             </a:pPr>
             <a:r>
+              <a:rPr/>
               <a:t>📝 Ünite Özeti</a:t>
             </a:r>
           </a:p>
@@ -8189,7 +8590,7 @@
           <a:noFill/>
         </p:spPr>
         <p:txBody>
-          <a:bodyPr wrap="square">
+          <a:bodyPr wrap="square" tIns="25400" bIns="25400" lIns="63500" rIns="63500">
             <a:spAutoFit/>
           </a:bodyPr>
           <a:lstStyle/>
@@ -8206,6 +8607,24 @@
           <a:p>
             <a:pPr>
               <a:lnSpc>
+                <a:spcPct val="85000"/>
+              </a:lnSpc>
+              <a:spcBef>
+                <a:spcPts val="200"/>
+              </a:spcBef>
+              <a:spcAft>
+                <a:spcPts val="200"/>
+              </a:spcAft>
+              <a:defRPr sz="2000"/>
+            </a:pPr>
+            <a:r>
+              <a:rPr sz="1300"/>
+              <a:t>Bu ünitede neler öğrendik?</a:t>
+            </a:r>
+          </a:p>
+          <a:p>
+            <a:pPr>
+              <a:lnSpc>
                 <a:spcPct val="90000"/>
               </a:lnSpc>
               <a:spcAft>
@@ -8213,9 +8632,221 @@
               </a:spcAft>
               <a:defRPr sz="2000"/>
             </a:pPr>
-            <a:r>
-              <a:rPr sz="1300"/>
-              <a:t>Bu ünitede neler öğrendik?</a:t>
+          </a:p>
+          <a:p>
+            <a:pPr>
+              <a:lnSpc>
+                <a:spcPct val="85000"/>
+              </a:lnSpc>
+              <a:spcBef>
+                <a:spcPts val="200"/>
+              </a:spcBef>
+              <a:spcAft>
+                <a:spcPts val="200"/>
+              </a:spcAft>
+              <a:defRPr sz="2000" b="1"/>
+            </a:pPr>
+            <a:r>
+              <a:rPr sz="1300"/>
+              <a:t>✅ Veri ve bilgi kavramları</a:t>
+            </a:r>
+          </a:p>
+          <a:p>
+            <a:pPr>
+              <a:lnSpc>
+                <a:spcPct val="85000"/>
+              </a:lnSpc>
+              <a:spcBef>
+                <a:spcPts val="200"/>
+              </a:spcBef>
+              <a:spcAft>
+                <a:spcPts val="200"/>
+              </a:spcAft>
+              <a:defRPr sz="2000" b="1"/>
+            </a:pPr>
+            <a:r>
+              <a:rPr sz="1300"/>
+              <a:t>✅ Veri toplama yöntemleri (anket, gözlem, deney)</a:t>
+            </a:r>
+          </a:p>
+          <a:p>
+            <a:pPr>
+              <a:lnSpc>
+                <a:spcPct val="85000"/>
+              </a:lnSpc>
+              <a:spcBef>
+                <a:spcPts val="200"/>
+              </a:spcBef>
+              <a:spcAft>
+                <a:spcPts val="200"/>
+              </a:spcAft>
+              <a:defRPr sz="2000" b="1"/>
+            </a:pPr>
+            <a:r>
+              <a:rPr sz="1300"/>
+              <a:t>✅ Veri türleri (sayısal, kategorik)</a:t>
+            </a:r>
+          </a:p>
+          <a:p>
+            <a:pPr>
+              <a:lnSpc>
+                <a:spcPct val="85000"/>
+              </a:lnSpc>
+              <a:spcBef>
+                <a:spcPts val="200"/>
+              </a:spcBef>
+              <a:spcAft>
+                <a:spcPts val="200"/>
+              </a:spcAft>
+              <a:defRPr sz="2000" b="1"/>
+            </a:pPr>
+            <a:r>
+              <a:rPr sz="1300"/>
+              <a:t>✅ Veri düzenleme ve sıralama</a:t>
+            </a:r>
+          </a:p>
+          <a:p>
+            <a:pPr>
+              <a:lnSpc>
+                <a:spcPct val="85000"/>
+              </a:lnSpc>
+              <a:spcBef>
+                <a:spcPts val="200"/>
+              </a:spcBef>
+              <a:spcAft>
+                <a:spcPts val="200"/>
+              </a:spcAft>
+              <a:defRPr sz="2000" b="1"/>
+            </a:pPr>
+            <a:r>
+              <a:rPr sz="1300"/>
+              <a:t>✅ Grafik türleri (sütun, çizgi, pasta)</a:t>
+            </a:r>
+          </a:p>
+          <a:p>
+            <a:pPr>
+              <a:lnSpc>
+                <a:spcPct val="85000"/>
+              </a:lnSpc>
+              <a:spcBef>
+                <a:spcPts val="200"/>
+              </a:spcBef>
+              <a:spcAft>
+                <a:spcPts val="200"/>
+              </a:spcAft>
+              <a:defRPr sz="2000" b="1"/>
+            </a:pPr>
+            <a:r>
+              <a:rPr sz="1300"/>
+              <a:t>✅ Veri görselleştirme</a:t>
+            </a:r>
+          </a:p>
+          <a:p>
+            <a:pPr>
+              <a:lnSpc>
+                <a:spcPct val="85000"/>
+              </a:lnSpc>
+              <a:spcBef>
+                <a:spcPts val="200"/>
+              </a:spcBef>
+              <a:spcAft>
+                <a:spcPts val="200"/>
+              </a:spcAft>
+              <a:defRPr sz="2000" b="1"/>
+            </a:pPr>
+            <a:r>
+              <a:rPr sz="1300"/>
+              <a:t>✅ Excel/Sheets ile tablo oluşturma</a:t>
+            </a:r>
+          </a:p>
+          <a:p>
+            <a:pPr>
+              <a:lnSpc>
+                <a:spcPct val="85000"/>
+              </a:lnSpc>
+              <a:spcBef>
+                <a:spcPts val="200"/>
+              </a:spcBef>
+              <a:spcAft>
+                <a:spcPts val="200"/>
+              </a:spcAft>
+              <a:defRPr sz="2000" b="1"/>
+            </a:pPr>
+            <a:r>
+              <a:rPr sz="1300"/>
+              <a:t>✅ Formüller ve fonksiyonlar</a:t>
+            </a:r>
+          </a:p>
+          <a:p>
+            <a:pPr>
+              <a:lnSpc>
+                <a:spcPct val="85000"/>
+              </a:lnSpc>
+              <a:spcBef>
+                <a:spcPts val="200"/>
+              </a:spcBef>
+              <a:spcAft>
+                <a:spcPts val="200"/>
+              </a:spcAft>
+              <a:defRPr sz="2000" b="1"/>
+            </a:pPr>
+            <a:r>
+              <a:rPr sz="1300"/>
+              <a:t>✅ Grafik oluşturma</a:t>
+            </a:r>
+          </a:p>
+          <a:p>
+            <a:pPr>
+              <a:lnSpc>
+                <a:spcPct val="85000"/>
+              </a:lnSpc>
+              <a:spcBef>
+                <a:spcPts val="200"/>
+              </a:spcBef>
+              <a:spcAft>
+                <a:spcPts val="200"/>
+              </a:spcAft>
+              <a:defRPr sz="2000" b="1"/>
+            </a:pPr>
+            <a:r>
+              <a:rPr sz="1300"/>
+              <a:t>✅ Veri analizi (ortalama, medyan, mod)</a:t>
+            </a:r>
+          </a:p>
+          <a:p>
+            <a:pPr>
+              <a:lnSpc>
+                <a:spcPct val="85000"/>
+              </a:lnSpc>
+              <a:spcBef>
+                <a:spcPts val="200"/>
+              </a:spcBef>
+              <a:spcAft>
+                <a:spcPts val="200"/>
+              </a:spcAft>
+              <a:defRPr sz="2000" b="1"/>
+            </a:pPr>
+            <a:r>
+              <a:rPr sz="1300"/>
+              <a:t>✅ Veriye dayalı karar verme</a:t>
+            </a:r>
+          </a:p>
+          <a:p>
+            <a:pPr>
+              <a:lnSpc>
+                <a:spcPct val="85000"/>
+              </a:lnSpc>
+              <a:spcBef>
+                <a:spcPts val="200"/>
+              </a:spcBef>
+              <a:spcAft>
+                <a:spcPts val="200"/>
+              </a:spcAft>
+              <a:defRPr sz="2000" b="1"/>
+            </a:pPr>
+            <a:r>
+              <a:rPr sz="1300"/>
+              <a:t>✅ Veri güvenliği ve gizlilik</a:t>
             </a:r>
           </a:p>
           <a:p>
@@ -8232,257 +8863,78 @@
           <a:p>
             <a:pPr>
               <a:lnSpc>
+                <a:spcPct val="85000"/>
+              </a:lnSpc>
+              <a:spcBef>
+                <a:spcPts val="200"/>
+              </a:spcBef>
+              <a:spcAft>
+                <a:spcPts val="200"/>
+              </a:spcAft>
+              <a:defRPr sz="2000" b="1"/>
+            </a:pPr>
+            <a:r>
+              <a:rPr sz="1300"/>
+              <a:t>💡 Anahtar Mesaj:</a:t>
+            </a:r>
+          </a:p>
+          <a:p>
+            <a:pPr>
+              <a:lnSpc>
+                <a:spcPct val="85000"/>
+              </a:lnSpc>
+              <a:spcBef>
+                <a:spcPts val="200"/>
+              </a:spcBef>
+              <a:spcAft>
+                <a:spcPts val="200"/>
+              </a:spcAft>
+              <a:defRPr sz="2000"/>
+            </a:pPr>
+            <a:r>
+              <a:rPr sz="1300"/>
+              <a:t>Veri doğru analiz edilirse değerli bilgi haline gelir!</a:t>
+            </a:r>
+          </a:p>
+          <a:p>
+            <a:pPr>
+              <a:lnSpc>
                 <a:spcPct val="90000"/>
               </a:lnSpc>
               <a:spcAft>
                 <a:spcPts val="300"/>
               </a:spcAft>
+              <a:defRPr sz="2000"/>
+            </a:pPr>
+          </a:p>
+          <a:p>
+            <a:pPr>
+              <a:lnSpc>
+                <a:spcPct val="85000"/>
+              </a:lnSpc>
+              <a:spcBef>
+                <a:spcPts val="200"/>
+              </a:spcBef>
+              <a:spcAft>
+                <a:spcPts val="200"/>
+              </a:spcAft>
               <a:defRPr sz="2000" b="1"/>
             </a:pPr>
             <a:r>
               <a:rPr sz="1300"/>
-              <a:t>✅ Veri ve bilgi kavramları</a:t>
-            </a:r>
-          </a:p>
-          <a:p>
-            <a:pPr>
-              <a:lnSpc>
-                <a:spcPct val="90000"/>
-              </a:lnSpc>
-              <a:spcAft>
-                <a:spcPts val="300"/>
-              </a:spcAft>
-              <a:defRPr sz="2000" b="1"/>
-            </a:pPr>
-            <a:r>
-              <a:rPr sz="1300"/>
-              <a:t>✅ Veri toplama yöntemleri (anket, gözlem, deney)</a:t>
-            </a:r>
-          </a:p>
-          <a:p>
-            <a:pPr>
-              <a:lnSpc>
-                <a:spcPct val="90000"/>
-              </a:lnSpc>
-              <a:spcAft>
-                <a:spcPts val="300"/>
-              </a:spcAft>
-              <a:defRPr sz="2000" b="1"/>
-            </a:pPr>
-            <a:r>
-              <a:rPr sz="1300"/>
-              <a:t>✅ Veri türleri (sayısal, kategorik)</a:t>
-            </a:r>
-          </a:p>
-          <a:p>
-            <a:pPr>
-              <a:lnSpc>
-                <a:spcPct val="90000"/>
-              </a:lnSpc>
-              <a:spcAft>
-                <a:spcPts val="300"/>
-              </a:spcAft>
-              <a:defRPr sz="2000" b="1"/>
-            </a:pPr>
-            <a:r>
-              <a:rPr sz="1300"/>
-              <a:t>✅ Veri düzenleme ve sıralama</a:t>
-            </a:r>
-          </a:p>
-          <a:p>
-            <a:pPr>
-              <a:lnSpc>
-                <a:spcPct val="90000"/>
-              </a:lnSpc>
-              <a:spcAft>
-                <a:spcPts val="300"/>
-              </a:spcAft>
-              <a:defRPr sz="2000" b="1"/>
-            </a:pPr>
-            <a:r>
-              <a:rPr sz="1300"/>
-              <a:t>✅ Grafik türleri (sütun, çizgi, pasta)</a:t>
-            </a:r>
-          </a:p>
-          <a:p>
-            <a:pPr>
-              <a:lnSpc>
-                <a:spcPct val="90000"/>
-              </a:lnSpc>
-              <a:spcAft>
-                <a:spcPts val="300"/>
-              </a:spcAft>
-              <a:defRPr sz="2000" b="1"/>
-            </a:pPr>
-            <a:r>
-              <a:rPr sz="1300"/>
-              <a:t>✅ Veri görselleştirme</a:t>
-            </a:r>
-          </a:p>
-          <a:p>
-            <a:pPr>
-              <a:lnSpc>
-                <a:spcPct val="90000"/>
-              </a:lnSpc>
-              <a:spcAft>
-                <a:spcPts val="300"/>
-              </a:spcAft>
-              <a:defRPr sz="2000" b="1"/>
-            </a:pPr>
-            <a:r>
-              <a:rPr sz="1300"/>
-              <a:t>✅ Excel/Sheets ile tablo oluşturma</a:t>
-            </a:r>
-          </a:p>
-          <a:p>
-            <a:pPr>
-              <a:lnSpc>
-                <a:spcPct val="90000"/>
-              </a:lnSpc>
-              <a:spcAft>
-                <a:spcPts val="300"/>
-              </a:spcAft>
-              <a:defRPr sz="2000" b="1"/>
-            </a:pPr>
-            <a:r>
-              <a:rPr sz="1300"/>
-              <a:t>✅ Formüller ve fonksiyonlar</a:t>
-            </a:r>
-          </a:p>
-          <a:p>
-            <a:pPr>
-              <a:lnSpc>
-                <a:spcPct val="90000"/>
-              </a:lnSpc>
-              <a:spcAft>
-                <a:spcPts val="300"/>
-              </a:spcAft>
-              <a:defRPr sz="2000" b="1"/>
-            </a:pPr>
-            <a:r>
-              <a:rPr sz="1300"/>
-              <a:t>✅ Grafik oluşturma</a:t>
-            </a:r>
-          </a:p>
-          <a:p>
-            <a:pPr>
-              <a:lnSpc>
-                <a:spcPct val="90000"/>
-              </a:lnSpc>
-              <a:spcAft>
-                <a:spcPts val="300"/>
-              </a:spcAft>
-              <a:defRPr sz="2000" b="1"/>
-            </a:pPr>
-            <a:r>
-              <a:rPr sz="1300"/>
-              <a:t>✅ Veri analizi (ortalama, medyan, mod)</a:t>
-            </a:r>
-          </a:p>
-          <a:p>
-            <a:pPr>
-              <a:lnSpc>
-                <a:spcPct val="90000"/>
-              </a:lnSpc>
-              <a:spcAft>
-                <a:spcPts val="300"/>
-              </a:spcAft>
-              <a:defRPr sz="2000" b="1"/>
-            </a:pPr>
-            <a:r>
-              <a:rPr sz="1300"/>
-              <a:t>✅ Veriye dayalı karar verme</a:t>
-            </a:r>
-          </a:p>
-          <a:p>
-            <a:pPr>
-              <a:lnSpc>
-                <a:spcPct val="90000"/>
-              </a:lnSpc>
-              <a:spcAft>
-                <a:spcPts val="300"/>
-              </a:spcAft>
-              <a:defRPr sz="2000" b="1"/>
-            </a:pPr>
-            <a:r>
-              <a:rPr sz="1300"/>
-              <a:t>✅ Veri güvenliği ve gizlilik</a:t>
-            </a:r>
-          </a:p>
-          <a:p>
-            <a:pPr>
-              <a:lnSpc>
-                <a:spcPct val="90000"/>
-              </a:lnSpc>
-              <a:spcAft>
-                <a:spcPts val="300"/>
-              </a:spcAft>
-              <a:defRPr sz="2000"/>
-            </a:pPr>
-          </a:p>
-          <a:p>
-            <a:pPr>
-              <a:lnSpc>
-                <a:spcPct val="90000"/>
-              </a:lnSpc>
-              <a:spcAft>
-                <a:spcPts val="300"/>
-              </a:spcAft>
-              <a:defRPr sz="2000" b="1"/>
-            </a:pPr>
-            <a:r>
-              <a:rPr sz="1300"/>
-              <a:t>💡 Anahtar Mesaj:</a:t>
-            </a:r>
-          </a:p>
-          <a:p>
-            <a:pPr>
-              <a:lnSpc>
-                <a:spcPct val="90000"/>
-              </a:lnSpc>
-              <a:spcAft>
-                <a:spcPts val="300"/>
-              </a:spcAft>
-              <a:defRPr sz="2000"/>
-            </a:pPr>
-            <a:r>
-              <a:rPr sz="1300"/>
-              <a:t>Veri doğru analiz edilirse değerli bilgi haline gelir!</a:t>
-            </a:r>
-          </a:p>
-          <a:p>
-            <a:pPr>
-              <a:lnSpc>
-                <a:spcPct val="90000"/>
-              </a:lnSpc>
-              <a:spcAft>
-                <a:spcPts val="300"/>
-              </a:spcAft>
-              <a:defRPr sz="2000"/>
-            </a:pPr>
-          </a:p>
-          <a:p>
-            <a:pPr>
-              <a:lnSpc>
-                <a:spcPct val="90000"/>
-              </a:lnSpc>
-              <a:spcAft>
-                <a:spcPts val="300"/>
-              </a:spcAft>
-              <a:defRPr sz="2000" b="1"/>
-            </a:pPr>
-            <a:r>
-              <a:rPr sz="1300"/>
               <a:t>🎯 Artık veri analisti gibi düşünebilirsin!</a:t>
             </a:r>
           </a:p>
           <a:p>
             <a:pPr>
               <a:lnSpc>
-                <a:spcPct val="90000"/>
-              </a:lnSpc>
-              <a:spcAft>
-                <a:spcPts val="300"/>
+                <a:spcPct val="85000"/>
+              </a:lnSpc>
+              <a:spcBef>
+                <a:spcPts val="200"/>
+              </a:spcBef>
+              <a:spcAft>
+                <a:spcPts val="200"/>
               </a:spcAft>
               <a:defRPr sz="2000"/>
             </a:pPr>
@@ -8523,10 +8975,19 @@
         </p:nvSpPr>
         <p:spPr/>
         <p:txBody>
-          <a:bodyPr wrap="square"/>
+          <a:bodyPr wrap="square" tIns="25400" bIns="25400" lIns="63500" rIns="63500"/>
           <a:lstStyle/>
           <a:p>
             <a:pPr>
+              <a:lnSpc>
+                <a:spcPct val="85000"/>
+              </a:lnSpc>
+              <a:spcBef>
+                <a:spcPts val="200"/>
+              </a:spcBef>
+              <a:spcAft>
+                <a:spcPts val="200"/>
+              </a:spcAft>
               <a:defRPr sz="4000" b="1">
                 <a:solidFill>
                   <a:srgbClr val="764BA2"/>
@@ -8534,6 +8995,7 @@
               </a:defRPr>
             </a:pPr>
             <a:r>
+              <a:rPr/>
               <a:t>📚 Kaynaklar</a:t>
             </a:r>
           </a:p>
@@ -8573,7 +9035,7 @@
           <a:noFill/>
         </p:spPr>
         <p:txBody>
-          <a:bodyPr wrap="square">
+          <a:bodyPr wrap="square" tIns="25400" bIns="25400" lIns="63500" rIns="63500">
             <a:spAutoFit/>
           </a:bodyPr>
           <a:lstStyle/>
@@ -8590,10 +9052,13 @@
           <a:p>
             <a:pPr>
               <a:lnSpc>
-                <a:spcPct val="90000"/>
-              </a:lnSpc>
-              <a:spcAft>
-                <a:spcPts val="300"/>
+                <a:spcPct val="85000"/>
+              </a:lnSpc>
+              <a:spcBef>
+                <a:spcPts val="200"/>
+              </a:spcBef>
+              <a:spcAft>
+                <a:spcPts val="200"/>
               </a:spcAft>
               <a:defRPr sz="2000"/>
             </a:pPr>
@@ -8605,10 +9070,13 @@
           <a:p>
             <a:pPr lvl="1">
               <a:lnSpc>
-                <a:spcPct val="90000"/>
-              </a:lnSpc>
-              <a:spcAft>
-                <a:spcPts val="300"/>
+                <a:spcPct val="85000"/>
+              </a:lnSpc>
+              <a:spcBef>
+                <a:spcPts val="200"/>
+              </a:spcBef>
+              <a:spcAft>
+                <a:spcPts val="200"/>
               </a:spcAft>
               <a:defRPr sz="1800"/>
             </a:pPr>
@@ -8620,10 +9088,13 @@
           <a:p>
             <a:pPr lvl="1">
               <a:lnSpc>
-                <a:spcPct val="90000"/>
-              </a:lnSpc>
-              <a:spcAft>
-                <a:spcPts val="300"/>
+                <a:spcPct val="85000"/>
+              </a:lnSpc>
+              <a:spcBef>
+                <a:spcPts val="200"/>
+              </a:spcBef>
+              <a:spcAft>
+                <a:spcPts val="200"/>
               </a:spcAft>
               <a:defRPr sz="1800"/>
             </a:pPr>
@@ -8635,10 +9106,13 @@
           <a:p>
             <a:pPr lvl="1">
               <a:lnSpc>
-                <a:spcPct val="90000"/>
-              </a:lnSpc>
-              <a:spcAft>
-                <a:spcPts val="300"/>
+                <a:spcPct val="85000"/>
+              </a:lnSpc>
+              <a:spcBef>
+                <a:spcPts val="200"/>
+              </a:spcBef>
+              <a:spcAft>
+                <a:spcPts val="200"/>
               </a:spcAft>
               <a:defRPr sz="1800"/>
             </a:pPr>
@@ -8661,10 +9135,13 @@
           <a:p>
             <a:pPr>
               <a:lnSpc>
-                <a:spcPct val="90000"/>
-              </a:lnSpc>
-              <a:spcAft>
-                <a:spcPts val="300"/>
+                <a:spcPct val="85000"/>
+              </a:lnSpc>
+              <a:spcBef>
+                <a:spcPts val="200"/>
+              </a:spcBef>
+              <a:spcAft>
+                <a:spcPts val="200"/>
               </a:spcAft>
               <a:defRPr sz="2000"/>
             </a:pPr>
@@ -8676,10 +9153,13 @@
           <a:p>
             <a:pPr lvl="1">
               <a:lnSpc>
-                <a:spcPct val="90000"/>
-              </a:lnSpc>
-              <a:spcAft>
-                <a:spcPts val="300"/>
+                <a:spcPct val="85000"/>
+              </a:lnSpc>
+              <a:spcBef>
+                <a:spcPts val="200"/>
+              </a:spcBef>
+              <a:spcAft>
+                <a:spcPts val="200"/>
               </a:spcAft>
               <a:defRPr sz="1800"/>
             </a:pPr>
@@ -8691,10 +9171,13 @@
           <a:p>
             <a:pPr lvl="1">
               <a:lnSpc>
-                <a:spcPct val="90000"/>
-              </a:lnSpc>
-              <a:spcAft>
-                <a:spcPts val="300"/>
+                <a:spcPct val="85000"/>
+              </a:lnSpc>
+              <a:spcBef>
+                <a:spcPts val="200"/>
+              </a:spcBef>
+              <a:spcAft>
+                <a:spcPts val="200"/>
               </a:spcAft>
               <a:defRPr sz="1800"/>
             </a:pPr>
@@ -8717,10 +9200,13 @@
           <a:p>
             <a:pPr>
               <a:lnSpc>
-                <a:spcPct val="90000"/>
-              </a:lnSpc>
-              <a:spcAft>
-                <a:spcPts val="300"/>
+                <a:spcPct val="85000"/>
+              </a:lnSpc>
+              <a:spcBef>
+                <a:spcPts val="200"/>
+              </a:spcBef>
+              <a:spcAft>
+                <a:spcPts val="200"/>
               </a:spcAft>
               <a:defRPr sz="2000"/>
             </a:pPr>
@@ -8732,10 +9218,13 @@
           <a:p>
             <a:pPr lvl="1">
               <a:lnSpc>
-                <a:spcPct val="90000"/>
-              </a:lnSpc>
-              <a:spcAft>
-                <a:spcPts val="300"/>
+                <a:spcPct val="85000"/>
+              </a:lnSpc>
+              <a:spcBef>
+                <a:spcPts val="200"/>
+              </a:spcBef>
+              <a:spcAft>
+                <a:spcPts val="200"/>
               </a:spcAft>
               <a:defRPr sz="1800"/>
             </a:pPr>
@@ -8747,10 +9236,13 @@
           <a:p>
             <a:pPr lvl="1">
               <a:lnSpc>
-                <a:spcPct val="90000"/>
-              </a:lnSpc>
-              <a:spcAft>
-                <a:spcPts val="300"/>
+                <a:spcPct val="85000"/>
+              </a:lnSpc>
+              <a:spcBef>
+                <a:spcPts val="200"/>
+              </a:spcBef>
+              <a:spcAft>
+                <a:spcPts val="200"/>
               </a:spcAft>
               <a:defRPr sz="1800"/>
             </a:pPr>
@@ -8762,10 +9254,13 @@
           <a:p>
             <a:pPr lvl="1">
               <a:lnSpc>
-                <a:spcPct val="90000"/>
-              </a:lnSpc>
-              <a:spcAft>
-                <a:spcPts val="300"/>
+                <a:spcPct val="85000"/>
+              </a:lnSpc>
+              <a:spcBef>
+                <a:spcPts val="200"/>
+              </a:spcBef>
+              <a:spcAft>
+                <a:spcPts val="200"/>
               </a:spcAft>
               <a:defRPr sz="1800"/>
             </a:pPr>
@@ -8788,10 +9283,13 @@
           <a:p>
             <a:pPr>
               <a:lnSpc>
-                <a:spcPct val="90000"/>
-              </a:lnSpc>
-              <a:spcAft>
-                <a:spcPts val="300"/>
+                <a:spcPct val="85000"/>
+              </a:lnSpc>
+              <a:spcBef>
+                <a:spcPts val="200"/>
+              </a:spcBef>
+              <a:spcAft>
+                <a:spcPts val="200"/>
               </a:spcAft>
               <a:defRPr sz="2000" b="1"/>
             </a:pPr>
@@ -8845,12 +9343,21 @@
           <a:noFill/>
         </p:spPr>
         <p:txBody>
-          <a:bodyPr wrap="square">
+          <a:bodyPr wrap="square" tIns="25400" bIns="25400" lIns="63500" rIns="63500">
             <a:spAutoFit/>
           </a:bodyPr>
           <a:lstStyle/>
           <a:p>
             <a:pPr algn="ctr">
+              <a:lnSpc>
+                <a:spcPct val="85000"/>
+              </a:lnSpc>
+              <a:spcBef>
+                <a:spcPts val="200"/>
+              </a:spcBef>
+              <a:spcAft>
+                <a:spcPts val="200"/>
+              </a:spcAft>
               <a:defRPr sz="5400" b="1">
                 <a:solidFill>
                   <a:srgbClr val="FFFFFF"/>
@@ -8858,6 +9365,7 @@
               </a:defRPr>
             </a:pPr>
             <a:r>
+              <a:rPr/>
               <a:t>Tebrikler! 🎉</a:t>
             </a:r>
           </a:p>
@@ -8880,12 +9388,21 @@
           <a:noFill/>
         </p:spPr>
         <p:txBody>
-          <a:bodyPr wrap="square">
+          <a:bodyPr wrap="square" tIns="25400" bIns="25400" lIns="63500" rIns="63500">
             <a:spAutoFit/>
           </a:bodyPr>
           <a:lstStyle/>
           <a:p>
             <a:pPr algn="ctr">
+              <a:lnSpc>
+                <a:spcPct val="85000"/>
+              </a:lnSpc>
+              <a:spcBef>
+                <a:spcPts val="200"/>
+              </a:spcBef>
+              <a:spcAft>
+                <a:spcPts val="200"/>
+              </a:spcAft>
               <a:defRPr sz="2800">
                 <a:solidFill>
                   <a:srgbClr val="FFFFFF"/>
@@ -8893,6 +9410,7 @@
               </a:defRPr>
             </a:pPr>
             <a:r>
+              <a:rPr/>
               <a:t>Ünite 1'i Tamamladınız - Artık Veri Analistsiniz!</a:t>
             </a:r>
           </a:p>
@@ -8928,10 +9446,19 @@
         </p:nvSpPr>
         <p:spPr/>
         <p:txBody>
-          <a:bodyPr wrap="square"/>
+          <a:bodyPr wrap="square" tIns="25400" bIns="25400" lIns="63500" rIns="63500"/>
           <a:lstStyle/>
           <a:p>
             <a:pPr>
+              <a:lnSpc>
+                <a:spcPct val="85000"/>
+              </a:lnSpc>
+              <a:spcBef>
+                <a:spcPts val="200"/>
+              </a:spcBef>
+              <a:spcAft>
+                <a:spcPts val="200"/>
+              </a:spcAft>
               <a:defRPr sz="4000" b="1">
                 <a:solidFill>
                   <a:srgbClr val="764BA2"/>
@@ -8939,6 +9466,7 @@
               </a:defRPr>
             </a:pPr>
             <a:r>
+              <a:rPr/>
               <a:t>📚 Ünitenin Konuları</a:t>
             </a:r>
           </a:p>
@@ -8978,7 +9506,7 @@
           <a:noFill/>
         </p:spPr>
         <p:txBody>
-          <a:bodyPr wrap="square">
+          <a:bodyPr wrap="square" tIns="25400" bIns="25400" lIns="63500" rIns="63500">
             <a:spAutoFit/>
           </a:bodyPr>
           <a:lstStyle/>
@@ -8995,10 +9523,13 @@
           <a:p>
             <a:pPr>
               <a:lnSpc>
-                <a:spcPct val="90000"/>
-              </a:lnSpc>
-              <a:spcAft>
-                <a:spcPts val="300"/>
+                <a:spcPct val="85000"/>
+              </a:lnSpc>
+              <a:spcBef>
+                <a:spcPts val="200"/>
+              </a:spcBef>
+              <a:spcAft>
+                <a:spcPts val="200"/>
               </a:spcAft>
               <a:defRPr sz="2000"/>
             </a:pPr>
@@ -9021,10 +9552,13 @@
           <a:p>
             <a:pPr>
               <a:lnSpc>
-                <a:spcPct val="90000"/>
-              </a:lnSpc>
-              <a:spcAft>
-                <a:spcPts val="300"/>
+                <a:spcPct val="85000"/>
+              </a:lnSpc>
+              <a:spcBef>
+                <a:spcPts val="200"/>
+              </a:spcBef>
+              <a:spcAft>
+                <a:spcPts val="200"/>
               </a:spcAft>
               <a:defRPr sz="2000" b="1"/>
             </a:pPr>
@@ -9036,10 +9570,13 @@
           <a:p>
             <a:pPr>
               <a:lnSpc>
-                <a:spcPct val="90000"/>
-              </a:lnSpc>
-              <a:spcAft>
-                <a:spcPts val="300"/>
+                <a:spcPct val="85000"/>
+              </a:lnSpc>
+              <a:spcBef>
+                <a:spcPts val="200"/>
+              </a:spcBef>
+              <a:spcAft>
+                <a:spcPts val="200"/>
               </a:spcAft>
               <a:defRPr sz="2000" b="1"/>
             </a:pPr>
@@ -9051,10 +9588,13 @@
           <a:p>
             <a:pPr>
               <a:lnSpc>
-                <a:spcPct val="90000"/>
-              </a:lnSpc>
-              <a:spcAft>
-                <a:spcPts val="300"/>
+                <a:spcPct val="85000"/>
+              </a:lnSpc>
+              <a:spcBef>
+                <a:spcPts val="200"/>
+              </a:spcBef>
+              <a:spcAft>
+                <a:spcPts val="200"/>
               </a:spcAft>
               <a:defRPr sz="2000" b="1"/>
             </a:pPr>
@@ -9066,10 +9606,13 @@
           <a:p>
             <a:pPr>
               <a:lnSpc>
-                <a:spcPct val="90000"/>
-              </a:lnSpc>
-              <a:spcAft>
-                <a:spcPts val="300"/>
+                <a:spcPct val="85000"/>
+              </a:lnSpc>
+              <a:spcBef>
+                <a:spcPts val="200"/>
+              </a:spcBef>
+              <a:spcAft>
+                <a:spcPts val="200"/>
               </a:spcAft>
               <a:defRPr sz="2000" b="1"/>
             </a:pPr>
@@ -9081,10 +9624,13 @@
           <a:p>
             <a:pPr>
               <a:lnSpc>
-                <a:spcPct val="90000"/>
-              </a:lnSpc>
-              <a:spcAft>
-                <a:spcPts val="300"/>
+                <a:spcPct val="85000"/>
+              </a:lnSpc>
+              <a:spcBef>
+                <a:spcPts val="200"/>
+              </a:spcBef>
+              <a:spcAft>
+                <a:spcPts val="200"/>
               </a:spcAft>
               <a:defRPr sz="2000" b="1"/>
             </a:pPr>
@@ -9096,10 +9642,13 @@
           <a:p>
             <a:pPr>
               <a:lnSpc>
-                <a:spcPct val="90000"/>
-              </a:lnSpc>
-              <a:spcAft>
-                <a:spcPts val="300"/>
+                <a:spcPct val="85000"/>
+              </a:lnSpc>
+              <a:spcBef>
+                <a:spcPts val="200"/>
+              </a:spcBef>
+              <a:spcAft>
+                <a:spcPts val="200"/>
               </a:spcAft>
               <a:defRPr sz="2000" b="1"/>
             </a:pPr>
@@ -9111,10 +9660,13 @@
           <a:p>
             <a:pPr>
               <a:lnSpc>
-                <a:spcPct val="90000"/>
-              </a:lnSpc>
-              <a:spcAft>
-                <a:spcPts val="300"/>
+                <a:spcPct val="85000"/>
+              </a:lnSpc>
+              <a:spcBef>
+                <a:spcPts val="200"/>
+              </a:spcBef>
+              <a:spcAft>
+                <a:spcPts val="200"/>
               </a:spcAft>
               <a:defRPr sz="2000" b="1"/>
             </a:pPr>
@@ -9126,10 +9678,13 @@
           <a:p>
             <a:pPr>
               <a:lnSpc>
-                <a:spcPct val="90000"/>
-              </a:lnSpc>
-              <a:spcAft>
-                <a:spcPts val="300"/>
+                <a:spcPct val="85000"/>
+              </a:lnSpc>
+              <a:spcBef>
+                <a:spcPts val="200"/>
+              </a:spcBef>
+              <a:spcAft>
+                <a:spcPts val="200"/>
               </a:spcAft>
               <a:defRPr sz="2000" b="1"/>
             </a:pPr>
@@ -9141,10 +9696,13 @@
           <a:p>
             <a:pPr>
               <a:lnSpc>
-                <a:spcPct val="90000"/>
-              </a:lnSpc>
-              <a:spcAft>
-                <a:spcPts val="300"/>
+                <a:spcPct val="85000"/>
+              </a:lnSpc>
+              <a:spcBef>
+                <a:spcPts val="200"/>
+              </a:spcBef>
+              <a:spcAft>
+                <a:spcPts val="200"/>
               </a:spcAft>
               <a:defRPr sz="2000" b="1"/>
             </a:pPr>
@@ -9156,10 +9714,13 @@
           <a:p>
             <a:pPr>
               <a:lnSpc>
-                <a:spcPct val="90000"/>
-              </a:lnSpc>
-              <a:spcAft>
-                <a:spcPts val="300"/>
+                <a:spcPct val="85000"/>
+              </a:lnSpc>
+              <a:spcBef>
+                <a:spcPts val="200"/>
+              </a:spcBef>
+              <a:spcAft>
+                <a:spcPts val="200"/>
               </a:spcAft>
               <a:defRPr sz="2000" b="1"/>
             </a:pPr>
@@ -9171,10 +9732,13 @@
           <a:p>
             <a:pPr>
               <a:lnSpc>
-                <a:spcPct val="90000"/>
-              </a:lnSpc>
-              <a:spcAft>
-                <a:spcPts val="300"/>
+                <a:spcPct val="85000"/>
+              </a:lnSpc>
+              <a:spcBef>
+                <a:spcPts val="200"/>
+              </a:spcBef>
+              <a:spcAft>
+                <a:spcPts val="200"/>
               </a:spcAft>
               <a:defRPr sz="2000" b="1"/>
             </a:pPr>
@@ -9197,10 +9761,13 @@
           <a:p>
             <a:pPr>
               <a:lnSpc>
-                <a:spcPct val="90000"/>
-              </a:lnSpc>
-              <a:spcAft>
-                <a:spcPts val="300"/>
+                <a:spcPct val="85000"/>
+              </a:lnSpc>
+              <a:spcBef>
+                <a:spcPts val="200"/>
+              </a:spcBef>
+              <a:spcAft>
+                <a:spcPts val="200"/>
               </a:spcAft>
               <a:defRPr sz="2000"/>
             </a:pPr>
@@ -9212,10 +9779,13 @@
           <a:p>
             <a:pPr>
               <a:lnSpc>
-                <a:spcPct val="90000"/>
-              </a:lnSpc>
-              <a:spcAft>
-                <a:spcPts val="300"/>
+                <a:spcPct val="85000"/>
+              </a:lnSpc>
+              <a:spcBef>
+                <a:spcPts val="200"/>
+              </a:spcBef>
+              <a:spcAft>
+                <a:spcPts val="200"/>
               </a:spcAft>
               <a:defRPr sz="2000" b="1"/>
             </a:pPr>
@@ -9256,10 +9826,19 @@
         </p:nvSpPr>
         <p:spPr/>
         <p:txBody>
-          <a:bodyPr wrap="square"/>
+          <a:bodyPr wrap="square" tIns="25400" bIns="25400" lIns="63500" rIns="63500"/>
           <a:lstStyle/>
           <a:p>
             <a:pPr>
+              <a:lnSpc>
+                <a:spcPct val="85000"/>
+              </a:lnSpc>
+              <a:spcBef>
+                <a:spcPts val="200"/>
+              </a:spcBef>
+              <a:spcAft>
+                <a:spcPts val="200"/>
+              </a:spcAft>
               <a:defRPr sz="4000" b="1">
                 <a:solidFill>
                   <a:srgbClr val="764BA2"/>
@@ -9267,6 +9846,7 @@
               </a:defRPr>
             </a:pPr>
             <a:r>
+              <a:rPr/>
               <a:t>📊 Veri Nedir?</a:t>
             </a:r>
           </a:p>
@@ -9306,7 +9886,7 @@
           <a:noFill/>
         </p:spPr>
         <p:txBody>
-          <a:bodyPr wrap="square">
+          <a:bodyPr wrap="square" tIns="25400" bIns="25400" lIns="63500" rIns="63500">
             <a:spAutoFit/>
           </a:bodyPr>
           <a:lstStyle/>
@@ -9323,10 +9903,13 @@
           <a:p>
             <a:pPr>
               <a:lnSpc>
-                <a:spcPct val="90000"/>
-              </a:lnSpc>
-              <a:spcAft>
-                <a:spcPts val="300"/>
+                <a:spcPct val="85000"/>
+              </a:lnSpc>
+              <a:spcBef>
+                <a:spcPts val="200"/>
+              </a:spcBef>
+              <a:spcAft>
+                <a:spcPts val="200"/>
               </a:spcAft>
               <a:defRPr sz="2000"/>
             </a:pPr>
@@ -9349,10 +9932,13 @@
           <a:p>
             <a:pPr>
               <a:lnSpc>
-                <a:spcPct val="90000"/>
-              </a:lnSpc>
-              <a:spcAft>
-                <a:spcPts val="300"/>
+                <a:spcPct val="85000"/>
+              </a:lnSpc>
+              <a:spcBef>
+                <a:spcPts val="200"/>
+              </a:spcBef>
+              <a:spcAft>
+                <a:spcPts val="200"/>
               </a:spcAft>
               <a:defRPr sz="2000" b="1"/>
             </a:pPr>
@@ -9364,10 +9950,13 @@
           <a:p>
             <a:pPr lvl="1">
               <a:lnSpc>
-                <a:spcPct val="90000"/>
-              </a:lnSpc>
-              <a:spcAft>
-                <a:spcPts val="300"/>
+                <a:spcPct val="85000"/>
+              </a:lnSpc>
+              <a:spcBef>
+                <a:spcPts val="200"/>
+              </a:spcBef>
+              <a:spcAft>
+                <a:spcPts val="200"/>
               </a:spcAft>
               <a:defRPr sz="1800"/>
             </a:pPr>
@@ -9379,10 +9968,13 @@
           <a:p>
             <a:pPr lvl="1">
               <a:lnSpc>
-                <a:spcPct val="90000"/>
-              </a:lnSpc>
-              <a:spcAft>
-                <a:spcPts val="300"/>
+                <a:spcPct val="85000"/>
+              </a:lnSpc>
+              <a:spcBef>
+                <a:spcPts val="200"/>
+              </a:spcBef>
+              <a:spcAft>
+                <a:spcPts val="200"/>
               </a:spcAft>
               <a:defRPr sz="1800"/>
             </a:pPr>
@@ -9394,10 +9986,13 @@
           <a:p>
             <a:pPr lvl="1">
               <a:lnSpc>
-                <a:spcPct val="90000"/>
-              </a:lnSpc>
-              <a:spcAft>
-                <a:spcPts val="300"/>
+                <a:spcPct val="85000"/>
+              </a:lnSpc>
+              <a:spcBef>
+                <a:spcPts val="200"/>
+              </a:spcBef>
+              <a:spcAft>
+                <a:spcPts val="200"/>
               </a:spcAft>
               <a:defRPr sz="1800"/>
             </a:pPr>
@@ -9409,10 +10004,13 @@
           <a:p>
             <a:pPr lvl="1">
               <a:lnSpc>
-                <a:spcPct val="90000"/>
-              </a:lnSpc>
-              <a:spcAft>
-                <a:spcPts val="300"/>
+                <a:spcPct val="85000"/>
+              </a:lnSpc>
+              <a:spcBef>
+                <a:spcPts val="200"/>
+              </a:spcBef>
+              <a:spcAft>
+                <a:spcPts val="200"/>
               </a:spcAft>
               <a:defRPr sz="1800"/>
             </a:pPr>
@@ -9435,10 +10033,13 @@
           <a:p>
             <a:pPr>
               <a:lnSpc>
-                <a:spcPct val="90000"/>
-              </a:lnSpc>
-              <a:spcAft>
-                <a:spcPts val="300"/>
+                <a:spcPct val="85000"/>
+              </a:lnSpc>
+              <a:spcBef>
+                <a:spcPts val="200"/>
+              </a:spcBef>
+              <a:spcAft>
+                <a:spcPts val="200"/>
               </a:spcAft>
               <a:defRPr sz="2000" b="1"/>
             </a:pPr>
@@ -9461,10 +10062,13 @@
           <a:p>
             <a:pPr>
               <a:lnSpc>
-                <a:spcPct val="90000"/>
-              </a:lnSpc>
-              <a:spcAft>
-                <a:spcPts val="300"/>
+                <a:spcPct val="85000"/>
+              </a:lnSpc>
+              <a:spcBef>
+                <a:spcPts val="200"/>
+              </a:spcBef>
+              <a:spcAft>
+                <a:spcPts val="200"/>
               </a:spcAft>
               <a:defRPr sz="2000"/>
             </a:pPr>
@@ -9476,10 +10080,13 @@
           <a:p>
             <a:pPr lvl="1">
               <a:lnSpc>
-                <a:spcPct val="90000"/>
-              </a:lnSpc>
-              <a:spcAft>
-                <a:spcPts val="300"/>
+                <a:spcPct val="85000"/>
+              </a:lnSpc>
+              <a:spcBef>
+                <a:spcPts val="200"/>
+              </a:spcBef>
+              <a:spcAft>
+                <a:spcPts val="200"/>
               </a:spcAft>
               <a:defRPr sz="1800"/>
             </a:pPr>
@@ -9491,10 +10098,13 @@
           <a:p>
             <a:pPr lvl="1">
               <a:lnSpc>
-                <a:spcPct val="90000"/>
-              </a:lnSpc>
-              <a:spcAft>
-                <a:spcPts val="300"/>
+                <a:spcPct val="85000"/>
+              </a:lnSpc>
+              <a:spcBef>
+                <a:spcPts val="200"/>
+              </a:spcBef>
+              <a:spcAft>
+                <a:spcPts val="200"/>
               </a:spcAft>
               <a:defRPr sz="1800"/>
             </a:pPr>
@@ -9517,10 +10127,13 @@
           <a:p>
             <a:pPr>
               <a:lnSpc>
-                <a:spcPct val="90000"/>
-              </a:lnSpc>
-              <a:spcAft>
-                <a:spcPts val="300"/>
+                <a:spcPct val="85000"/>
+              </a:lnSpc>
+              <a:spcBef>
+                <a:spcPts val="200"/>
+              </a:spcBef>
+              <a:spcAft>
+                <a:spcPts val="200"/>
               </a:spcAft>
               <a:defRPr sz="2000" b="1"/>
             </a:pPr>
@@ -9532,10 +10145,13 @@
           <a:p>
             <a:pPr lvl="1">
               <a:lnSpc>
-                <a:spcPct val="90000"/>
-              </a:lnSpc>
-              <a:spcAft>
-                <a:spcPts val="300"/>
+                <a:spcPct val="85000"/>
+              </a:lnSpc>
+              <a:spcBef>
+                <a:spcPts val="200"/>
+              </a:spcBef>
+              <a:spcAft>
+                <a:spcPts val="200"/>
               </a:spcAft>
               <a:defRPr sz="1800"/>
             </a:pPr>
@@ -9547,10 +10163,13 @@
           <a:p>
             <a:pPr lvl="1">
               <a:lnSpc>
-                <a:spcPct val="90000"/>
-              </a:lnSpc>
-              <a:spcAft>
-                <a:spcPts val="300"/>
+                <a:spcPct val="85000"/>
+              </a:lnSpc>
+              <a:spcBef>
+                <a:spcPts val="200"/>
+              </a:spcBef>
+              <a:spcAft>
+                <a:spcPts val="200"/>
               </a:spcAft>
               <a:defRPr sz="1800"/>
             </a:pPr>
@@ -9573,10 +10192,13 @@
           <a:p>
             <a:pPr>
               <a:lnSpc>
-                <a:spcPct val="90000"/>
-              </a:lnSpc>
-              <a:spcAft>
-                <a:spcPts val="300"/>
+                <a:spcPct val="85000"/>
+              </a:lnSpc>
+              <a:spcBef>
+                <a:spcPts val="200"/>
+              </a:spcBef>
+              <a:spcAft>
+                <a:spcPts val="200"/>
               </a:spcAft>
               <a:defRPr sz="2000" b="1"/>
             </a:pPr>
@@ -9599,10 +10221,13 @@
           <a:p>
             <a:pPr>
               <a:lnSpc>
-                <a:spcPct val="90000"/>
-              </a:lnSpc>
-              <a:spcAft>
-                <a:spcPts val="300"/>
+                <a:spcPct val="85000"/>
+              </a:lnSpc>
+              <a:spcBef>
+                <a:spcPts val="200"/>
+              </a:spcBef>
+              <a:spcAft>
+                <a:spcPts val="200"/>
               </a:spcAft>
               <a:defRPr sz="2000" b="1"/>
             </a:pPr>
@@ -9614,10 +10239,13 @@
           <a:p>
             <a:pPr lvl="1">
               <a:lnSpc>
-                <a:spcPct val="90000"/>
-              </a:lnSpc>
-              <a:spcAft>
-                <a:spcPts val="300"/>
+                <a:spcPct val="85000"/>
+              </a:lnSpc>
+              <a:spcBef>
+                <a:spcPts val="200"/>
+              </a:spcBef>
+              <a:spcAft>
+                <a:spcPts val="200"/>
               </a:spcAft>
               <a:defRPr sz="1800"/>
             </a:pPr>
@@ -9629,10 +10257,13 @@
           <a:p>
             <a:pPr lvl="1">
               <a:lnSpc>
-                <a:spcPct val="90000"/>
-              </a:lnSpc>
-              <a:spcAft>
-                <a:spcPts val="300"/>
+                <a:spcPct val="85000"/>
+              </a:lnSpc>
+              <a:spcBef>
+                <a:spcPts val="200"/>
+              </a:spcBef>
+              <a:spcAft>
+                <a:spcPts val="200"/>
               </a:spcAft>
               <a:defRPr sz="1800"/>
             </a:pPr>
@@ -9644,10 +10275,13 @@
           <a:p>
             <a:pPr lvl="1">
               <a:lnSpc>
-                <a:spcPct val="90000"/>
-              </a:lnSpc>
-              <a:spcAft>
-                <a:spcPts val="300"/>
+                <a:spcPct val="85000"/>
+              </a:lnSpc>
+              <a:spcBef>
+                <a:spcPts val="200"/>
+              </a:spcBef>
+              <a:spcAft>
+                <a:spcPts val="200"/>
               </a:spcAft>
               <a:defRPr sz="1800"/>
             </a:pPr>
@@ -9688,10 +10322,19 @@
         </p:nvSpPr>
         <p:spPr/>
         <p:txBody>
-          <a:bodyPr wrap="square"/>
+          <a:bodyPr wrap="square" tIns="25400" bIns="25400" lIns="63500" rIns="63500"/>
           <a:lstStyle/>
           <a:p>
             <a:pPr>
+              <a:lnSpc>
+                <a:spcPct val="85000"/>
+              </a:lnSpc>
+              <a:spcBef>
+                <a:spcPts val="200"/>
+              </a:spcBef>
+              <a:spcAft>
+                <a:spcPts val="200"/>
+              </a:spcAft>
               <a:defRPr sz="4000" b="1">
                 <a:solidFill>
                   <a:srgbClr val="764BA2"/>
@@ -9699,6 +10342,7 @@
               </a:defRPr>
             </a:pPr>
             <a:r>
+              <a:rPr/>
               <a:t>🔍 Veri Toplama Yöntemleri</a:t>
             </a:r>
           </a:p>
@@ -9738,7 +10382,7 @@
           <a:noFill/>
         </p:spPr>
         <p:txBody>
-          <a:bodyPr wrap="square">
+          <a:bodyPr wrap="square" tIns="25400" bIns="25400" lIns="63500" rIns="63500">
             <a:spAutoFit/>
           </a:bodyPr>
           <a:lstStyle/>
@@ -9755,6 +10399,24 @@
           <a:p>
             <a:pPr>
               <a:lnSpc>
+                <a:spcPct val="85000"/>
+              </a:lnSpc>
+              <a:spcBef>
+                <a:spcPts val="200"/>
+              </a:spcBef>
+              <a:spcAft>
+                <a:spcPts val="200"/>
+              </a:spcAft>
+              <a:defRPr sz="2000"/>
+            </a:pPr>
+            <a:r>
+              <a:rPr sz="1300"/>
+              <a:t>Veriyi nereden ve nasıl toplarız?</a:t>
+            </a:r>
+          </a:p>
+          <a:p>
+            <a:pPr>
+              <a:lnSpc>
                 <a:spcPct val="90000"/>
               </a:lnSpc>
               <a:spcAft>
@@ -9762,9 +10424,23 @@
               </a:spcAft>
               <a:defRPr sz="2000"/>
             </a:pPr>
-            <a:r>
-              <a:rPr sz="1300"/>
-              <a:t>Veriyi nereden ve nasıl toplarız?</a:t>
+          </a:p>
+          <a:p>
+            <a:pPr>
+              <a:lnSpc>
+                <a:spcPct val="85000"/>
+              </a:lnSpc>
+              <a:spcBef>
+                <a:spcPts val="200"/>
+              </a:spcBef>
+              <a:spcAft>
+                <a:spcPts val="200"/>
+              </a:spcAft>
+              <a:defRPr sz="2000" b="1"/>
+            </a:pPr>
+            <a:r>
+              <a:rPr sz="1300"/>
+              <a:t>✅ Veri Toplama Yöntemleri:</a:t>
             </a:r>
           </a:p>
           <a:p>
@@ -9781,331 +10457,356 @@
           <a:p>
             <a:pPr>
               <a:lnSpc>
+                <a:spcPct val="85000"/>
+              </a:lnSpc>
+              <a:spcBef>
+                <a:spcPts val="200"/>
+              </a:spcBef>
+              <a:spcAft>
+                <a:spcPts val="200"/>
+              </a:spcAft>
+              <a:defRPr sz="2000"/>
+            </a:pPr>
+            <a:r>
+              <a:rPr sz="1300"/>
+              <a:t>📋 Anket:</a:t>
+            </a:r>
+          </a:p>
+          <a:p>
+            <a:pPr lvl="1">
+              <a:lnSpc>
+                <a:spcPct val="85000"/>
+              </a:lnSpc>
+              <a:spcBef>
+                <a:spcPts val="200"/>
+              </a:spcBef>
+              <a:spcAft>
+                <a:spcPts val="200"/>
+              </a:spcAft>
+              <a:defRPr sz="1800"/>
+            </a:pPr>
+            <a:r>
+              <a:rPr sz="1300"/>
+              <a:t>    • Sorular sor, cevapları topla</a:t>
+            </a:r>
+          </a:p>
+          <a:p>
+            <a:pPr lvl="1">
+              <a:lnSpc>
+                <a:spcPct val="85000"/>
+              </a:lnSpc>
+              <a:spcBef>
+                <a:spcPts val="200"/>
+              </a:spcBef>
+              <a:spcAft>
+                <a:spcPts val="200"/>
+              </a:spcAft>
+              <a:defRPr sz="1800"/>
+            </a:pPr>
+            <a:r>
+              <a:rPr sz="1300"/>
+              <a:t>    • Örnek: 'Favori renginiz nedir?'</a:t>
+            </a:r>
+          </a:p>
+          <a:p>
+            <a:pPr>
+              <a:lnSpc>
                 <a:spcPct val="90000"/>
               </a:lnSpc>
               <a:spcAft>
                 <a:spcPts val="300"/>
               </a:spcAft>
+              <a:defRPr sz="2000"/>
+            </a:pPr>
+          </a:p>
+          <a:p>
+            <a:pPr>
+              <a:lnSpc>
+                <a:spcPct val="85000"/>
+              </a:lnSpc>
+              <a:spcBef>
+                <a:spcPts val="200"/>
+              </a:spcBef>
+              <a:spcAft>
+                <a:spcPts val="200"/>
+              </a:spcAft>
+              <a:defRPr sz="2000"/>
+            </a:pPr>
+            <a:r>
+              <a:rPr sz="1300"/>
+              <a:t>👀 Gözlem:</a:t>
+            </a:r>
+          </a:p>
+          <a:p>
+            <a:pPr lvl="1">
+              <a:lnSpc>
+                <a:spcPct val="85000"/>
+              </a:lnSpc>
+              <a:spcBef>
+                <a:spcPts val="200"/>
+              </a:spcBef>
+              <a:spcAft>
+                <a:spcPts val="200"/>
+              </a:spcAft>
+              <a:defRPr sz="1800"/>
+            </a:pPr>
+            <a:r>
+              <a:rPr sz="1300"/>
+              <a:t>    • İzle ve kaydet</a:t>
+            </a:r>
+          </a:p>
+          <a:p>
+            <a:pPr lvl="1">
+              <a:lnSpc>
+                <a:spcPct val="85000"/>
+              </a:lnSpc>
+              <a:spcBef>
+                <a:spcPts val="200"/>
+              </a:spcBef>
+              <a:spcAft>
+                <a:spcPts val="200"/>
+              </a:spcAft>
+              <a:defRPr sz="1800"/>
+            </a:pPr>
+            <a:r>
+              <a:rPr sz="1300"/>
+              <a:t>    • Örnek: Trafikteki araç sayısı</a:t>
+            </a:r>
+          </a:p>
+          <a:p>
+            <a:pPr>
+              <a:lnSpc>
+                <a:spcPct val="90000"/>
+              </a:lnSpc>
+              <a:spcAft>
+                <a:spcPts val="300"/>
+              </a:spcAft>
+              <a:defRPr sz="2000"/>
+            </a:pPr>
+          </a:p>
+          <a:p>
+            <a:pPr>
+              <a:lnSpc>
+                <a:spcPct val="85000"/>
+              </a:lnSpc>
+              <a:spcBef>
+                <a:spcPts val="200"/>
+              </a:spcBef>
+              <a:spcAft>
+                <a:spcPts val="200"/>
+              </a:spcAft>
+              <a:defRPr sz="2000"/>
+            </a:pPr>
+            <a:r>
+              <a:rPr sz="1300"/>
+              <a:t>🧪 Deney:</a:t>
+            </a:r>
+          </a:p>
+          <a:p>
+            <a:pPr lvl="1">
+              <a:lnSpc>
+                <a:spcPct val="85000"/>
+              </a:lnSpc>
+              <a:spcBef>
+                <a:spcPts val="200"/>
+              </a:spcBef>
+              <a:spcAft>
+                <a:spcPts val="200"/>
+              </a:spcAft>
+              <a:defRPr sz="1800"/>
+            </a:pPr>
+            <a:r>
+              <a:rPr sz="1300"/>
+              <a:t>    • Test yap, sonuçları kaydet</a:t>
+            </a:r>
+          </a:p>
+          <a:p>
+            <a:pPr lvl="1">
+              <a:lnSpc>
+                <a:spcPct val="85000"/>
+              </a:lnSpc>
+              <a:spcBef>
+                <a:spcPts val="200"/>
+              </a:spcBef>
+              <a:spcAft>
+                <a:spcPts val="200"/>
+              </a:spcAft>
+              <a:defRPr sz="1800"/>
+            </a:pPr>
+            <a:r>
+              <a:rPr sz="1300"/>
+              <a:t>    • Örnek: Bitki büyümesi ölçümü</a:t>
+            </a:r>
+          </a:p>
+          <a:p>
+            <a:pPr>
+              <a:lnSpc>
+                <a:spcPct val="90000"/>
+              </a:lnSpc>
+              <a:spcAft>
+                <a:spcPts val="300"/>
+              </a:spcAft>
+              <a:defRPr sz="2000"/>
+            </a:pPr>
+          </a:p>
+          <a:p>
+            <a:pPr>
+              <a:lnSpc>
+                <a:spcPct val="85000"/>
+              </a:lnSpc>
+              <a:spcBef>
+                <a:spcPts val="200"/>
+              </a:spcBef>
+              <a:spcAft>
+                <a:spcPts val="200"/>
+              </a:spcAft>
+              <a:defRPr sz="2000"/>
+            </a:pPr>
+            <a:r>
+              <a:rPr sz="1300"/>
+              <a:t>📱 Sensörler:</a:t>
+            </a:r>
+          </a:p>
+          <a:p>
+            <a:pPr lvl="1">
+              <a:lnSpc>
+                <a:spcPct val="85000"/>
+              </a:lnSpc>
+              <a:spcBef>
+                <a:spcPts val="200"/>
+              </a:spcBef>
+              <a:spcAft>
+                <a:spcPts val="200"/>
+              </a:spcAft>
+              <a:defRPr sz="1800"/>
+            </a:pPr>
+            <a:r>
+              <a:rPr sz="1300"/>
+              <a:t>    • Otomatik veri toplama</a:t>
+            </a:r>
+          </a:p>
+          <a:p>
+            <a:pPr lvl="1">
+              <a:lnSpc>
+                <a:spcPct val="85000"/>
+              </a:lnSpc>
+              <a:spcBef>
+                <a:spcPts val="200"/>
+              </a:spcBef>
+              <a:spcAft>
+                <a:spcPts val="200"/>
+              </a:spcAft>
+              <a:defRPr sz="1800"/>
+            </a:pPr>
+            <a:r>
+              <a:rPr sz="1300"/>
+              <a:t>    • Örnek: Sıcaklık sensörü</a:t>
+            </a:r>
+          </a:p>
+          <a:p>
+            <a:pPr>
+              <a:lnSpc>
+                <a:spcPct val="90000"/>
+              </a:lnSpc>
+              <a:spcAft>
+                <a:spcPts val="300"/>
+              </a:spcAft>
+              <a:defRPr sz="2000"/>
+            </a:pPr>
+          </a:p>
+          <a:p>
+            <a:pPr>
+              <a:lnSpc>
+                <a:spcPct val="85000"/>
+              </a:lnSpc>
+              <a:spcBef>
+                <a:spcPts val="200"/>
+              </a:spcBef>
+              <a:spcAft>
+                <a:spcPts val="200"/>
+              </a:spcAft>
+              <a:defRPr sz="2000"/>
+            </a:pPr>
+            <a:r>
+              <a:rPr sz="1300"/>
+              <a:t>🌐 İnternet:</a:t>
+            </a:r>
+          </a:p>
+          <a:p>
+            <a:pPr lvl="1">
+              <a:lnSpc>
+                <a:spcPct val="85000"/>
+              </a:lnSpc>
+              <a:spcBef>
+                <a:spcPts val="200"/>
+              </a:spcBef>
+              <a:spcAft>
+                <a:spcPts val="200"/>
+              </a:spcAft>
+              <a:defRPr sz="1800"/>
+            </a:pPr>
+            <a:r>
+              <a:rPr sz="1300"/>
+              <a:t>    • Hazır veri setleri</a:t>
+            </a:r>
+          </a:p>
+          <a:p>
+            <a:pPr lvl="1">
+              <a:lnSpc>
+                <a:spcPct val="85000"/>
+              </a:lnSpc>
+              <a:spcBef>
+                <a:spcPts val="200"/>
+              </a:spcBef>
+              <a:spcAft>
+                <a:spcPts val="200"/>
+              </a:spcAft>
+              <a:defRPr sz="1800"/>
+            </a:pPr>
+            <a:r>
+              <a:rPr sz="1300"/>
+              <a:t>    • Örnek: Hava durumu verileri</a:t>
+            </a:r>
+          </a:p>
+          <a:p>
+            <a:pPr>
+              <a:lnSpc>
+                <a:spcPct val="90000"/>
+              </a:lnSpc>
+              <a:spcAft>
+                <a:spcPts val="300"/>
+              </a:spcAft>
+              <a:defRPr sz="2000"/>
+            </a:pPr>
+          </a:p>
+          <a:p>
+            <a:pPr>
+              <a:lnSpc>
+                <a:spcPct val="85000"/>
+              </a:lnSpc>
+              <a:spcBef>
+                <a:spcPts val="200"/>
+              </a:spcBef>
+              <a:spcAft>
+                <a:spcPts val="200"/>
+              </a:spcAft>
               <a:defRPr sz="2000" b="1"/>
             </a:pPr>
             <a:r>
               <a:rPr sz="1300"/>
-              <a:t>✅ Veri Toplama Yöntemleri:</a:t>
-            </a:r>
-          </a:p>
-          <a:p>
-            <a:pPr>
-              <a:lnSpc>
-                <a:spcPct val="90000"/>
-              </a:lnSpc>
-              <a:spcAft>
-                <a:spcPts val="300"/>
-              </a:spcAft>
-              <a:defRPr sz="2000"/>
-            </a:pPr>
-          </a:p>
-          <a:p>
-            <a:pPr>
-              <a:lnSpc>
-                <a:spcPct val="90000"/>
-              </a:lnSpc>
-              <a:spcAft>
-                <a:spcPts val="300"/>
-              </a:spcAft>
-              <a:defRPr sz="2000"/>
-            </a:pPr>
-            <a:r>
-              <a:rPr sz="1300"/>
-              <a:t>📋 Anket:</a:t>
-            </a:r>
-          </a:p>
-          <a:p>
-            <a:pPr lvl="1">
-              <a:lnSpc>
-                <a:spcPct val="90000"/>
-              </a:lnSpc>
-              <a:spcAft>
-                <a:spcPts val="300"/>
-              </a:spcAft>
-              <a:defRPr sz="1800"/>
-            </a:pPr>
-            <a:r>
-              <a:rPr sz="1300"/>
-              <a:t>    • Sorular sor, cevapları topla</a:t>
-            </a:r>
-          </a:p>
-          <a:p>
-            <a:pPr lvl="1">
-              <a:lnSpc>
-                <a:spcPct val="90000"/>
-              </a:lnSpc>
-              <a:spcAft>
-                <a:spcPts val="300"/>
-              </a:spcAft>
-              <a:defRPr sz="1800"/>
-            </a:pPr>
-            <a:r>
-              <a:rPr sz="1300"/>
-              <a:t>    • Örnek: 'Favori renginiz nedir?'</a:t>
-            </a:r>
-          </a:p>
-          <a:p>
-            <a:pPr>
-              <a:lnSpc>
-                <a:spcPct val="90000"/>
-              </a:lnSpc>
-              <a:spcAft>
-                <a:spcPts val="300"/>
-              </a:spcAft>
-              <a:defRPr sz="2000"/>
-            </a:pPr>
-          </a:p>
-          <a:p>
-            <a:pPr>
-              <a:lnSpc>
-                <a:spcPct val="90000"/>
-              </a:lnSpc>
-              <a:spcAft>
-                <a:spcPts val="300"/>
-              </a:spcAft>
-              <a:defRPr sz="2000"/>
-            </a:pPr>
-            <a:r>
-              <a:rPr sz="1300"/>
-              <a:t>👀 Gözlem:</a:t>
-            </a:r>
-          </a:p>
-          <a:p>
-            <a:pPr lvl="1">
-              <a:lnSpc>
-                <a:spcPct val="90000"/>
-              </a:lnSpc>
-              <a:spcAft>
-                <a:spcPts val="300"/>
-              </a:spcAft>
-              <a:defRPr sz="1800"/>
-            </a:pPr>
-            <a:r>
-              <a:rPr sz="1300"/>
-              <a:t>    • İzle ve kaydet</a:t>
-            </a:r>
-          </a:p>
-          <a:p>
-            <a:pPr lvl="1">
-              <a:lnSpc>
-                <a:spcPct val="90000"/>
-              </a:lnSpc>
-              <a:spcAft>
-                <a:spcPts val="300"/>
-              </a:spcAft>
-              <a:defRPr sz="1800"/>
-            </a:pPr>
-            <a:r>
-              <a:rPr sz="1300"/>
-              <a:t>    • Örnek: Trafikteki araç sayısı</a:t>
-            </a:r>
-          </a:p>
-          <a:p>
-            <a:pPr>
-              <a:lnSpc>
-                <a:spcPct val="90000"/>
-              </a:lnSpc>
-              <a:spcAft>
-                <a:spcPts val="300"/>
-              </a:spcAft>
-              <a:defRPr sz="2000"/>
-            </a:pPr>
-          </a:p>
-          <a:p>
-            <a:pPr>
-              <a:lnSpc>
-                <a:spcPct val="90000"/>
-              </a:lnSpc>
-              <a:spcAft>
-                <a:spcPts val="300"/>
-              </a:spcAft>
-              <a:defRPr sz="2000"/>
-            </a:pPr>
-            <a:r>
-              <a:rPr sz="1300"/>
-              <a:t>🧪 Deney:</a:t>
-            </a:r>
-          </a:p>
-          <a:p>
-            <a:pPr lvl="1">
-              <a:lnSpc>
-                <a:spcPct val="90000"/>
-              </a:lnSpc>
-              <a:spcAft>
-                <a:spcPts val="300"/>
-              </a:spcAft>
-              <a:defRPr sz="1800"/>
-            </a:pPr>
-            <a:r>
-              <a:rPr sz="1300"/>
-              <a:t>    • Test yap, sonuçları kaydet</a:t>
-            </a:r>
-          </a:p>
-          <a:p>
-            <a:pPr lvl="1">
-              <a:lnSpc>
-                <a:spcPct val="90000"/>
-              </a:lnSpc>
-              <a:spcAft>
-                <a:spcPts val="300"/>
-              </a:spcAft>
-              <a:defRPr sz="1800"/>
-            </a:pPr>
-            <a:r>
-              <a:rPr sz="1300"/>
-              <a:t>    • Örnek: Bitki büyümesi ölçümü</a:t>
-            </a:r>
-          </a:p>
-          <a:p>
-            <a:pPr>
-              <a:lnSpc>
-                <a:spcPct val="90000"/>
-              </a:lnSpc>
-              <a:spcAft>
-                <a:spcPts val="300"/>
-              </a:spcAft>
-              <a:defRPr sz="2000"/>
-            </a:pPr>
-          </a:p>
-          <a:p>
-            <a:pPr>
-              <a:lnSpc>
-                <a:spcPct val="90000"/>
-              </a:lnSpc>
-              <a:spcAft>
-                <a:spcPts val="300"/>
-              </a:spcAft>
-              <a:defRPr sz="2000"/>
-            </a:pPr>
-            <a:r>
-              <a:rPr sz="1300"/>
-              <a:t>📱 Sensörler:</a:t>
-            </a:r>
-          </a:p>
-          <a:p>
-            <a:pPr lvl="1">
-              <a:lnSpc>
-                <a:spcPct val="90000"/>
-              </a:lnSpc>
-              <a:spcAft>
-                <a:spcPts val="300"/>
-              </a:spcAft>
-              <a:defRPr sz="1800"/>
-            </a:pPr>
-            <a:r>
-              <a:rPr sz="1300"/>
-              <a:t>    • Otomatik veri toplama</a:t>
-            </a:r>
-          </a:p>
-          <a:p>
-            <a:pPr lvl="1">
-              <a:lnSpc>
-                <a:spcPct val="90000"/>
-              </a:lnSpc>
-              <a:spcAft>
-                <a:spcPts val="300"/>
-              </a:spcAft>
-              <a:defRPr sz="1800"/>
-            </a:pPr>
-            <a:r>
-              <a:rPr sz="1300"/>
-              <a:t>    • Örnek: Sıcaklık sensörü</a:t>
-            </a:r>
-          </a:p>
-          <a:p>
-            <a:pPr>
-              <a:lnSpc>
-                <a:spcPct val="90000"/>
-              </a:lnSpc>
-              <a:spcAft>
-                <a:spcPts val="300"/>
-              </a:spcAft>
-              <a:defRPr sz="2000"/>
-            </a:pPr>
-          </a:p>
-          <a:p>
-            <a:pPr>
-              <a:lnSpc>
-                <a:spcPct val="90000"/>
-              </a:lnSpc>
-              <a:spcAft>
-                <a:spcPts val="300"/>
-              </a:spcAft>
-              <a:defRPr sz="2000"/>
-            </a:pPr>
-            <a:r>
-              <a:rPr sz="1300"/>
-              <a:t>🌐 İnternet:</a:t>
-            </a:r>
-          </a:p>
-          <a:p>
-            <a:pPr lvl="1">
-              <a:lnSpc>
-                <a:spcPct val="90000"/>
-              </a:lnSpc>
-              <a:spcAft>
-                <a:spcPts val="300"/>
-              </a:spcAft>
-              <a:defRPr sz="1800"/>
-            </a:pPr>
-            <a:r>
-              <a:rPr sz="1300"/>
-              <a:t>    • Hazır veri setleri</a:t>
-            </a:r>
-          </a:p>
-          <a:p>
-            <a:pPr lvl="1">
-              <a:lnSpc>
-                <a:spcPct val="90000"/>
-              </a:lnSpc>
-              <a:spcAft>
-                <a:spcPts val="300"/>
-              </a:spcAft>
-              <a:defRPr sz="1800"/>
-            </a:pPr>
-            <a:r>
-              <a:rPr sz="1300"/>
-              <a:t>    • Örnek: Hava durumu verileri</a:t>
-            </a:r>
-          </a:p>
-          <a:p>
-            <a:pPr>
-              <a:lnSpc>
-                <a:spcPct val="90000"/>
-              </a:lnSpc>
-              <a:spcAft>
-                <a:spcPts val="300"/>
-              </a:spcAft>
-              <a:defRPr sz="2000"/>
-            </a:pPr>
-          </a:p>
-          <a:p>
-            <a:pPr>
-              <a:lnSpc>
-                <a:spcPct val="90000"/>
-              </a:lnSpc>
-              <a:spcAft>
-                <a:spcPts val="300"/>
-              </a:spcAft>
-              <a:defRPr sz="2000" b="1"/>
-            </a:pPr>
-            <a:r>
-              <a:rPr sz="1300"/>
               <a:t>💡 Veri toplama planlı olmalı:</a:t>
             </a:r>
           </a:p>
           <a:p>
             <a:pPr lvl="1">
               <a:lnSpc>
-                <a:spcPct val="90000"/>
-              </a:lnSpc>
-              <a:spcAft>
-                <a:spcPts val="300"/>
+                <a:spcPct val="85000"/>
+              </a:lnSpc>
+              <a:spcBef>
+                <a:spcPts val="200"/>
+              </a:spcBef>
+              <a:spcAft>
+                <a:spcPts val="200"/>
               </a:spcAft>
               <a:defRPr sz="1800"/>
             </a:pPr>
@@ -10117,10 +10818,13 @@
           <a:p>
             <a:pPr lvl="1">
               <a:lnSpc>
-                <a:spcPct val="90000"/>
-              </a:lnSpc>
-              <a:spcAft>
-                <a:spcPts val="300"/>
+                <a:spcPct val="85000"/>
+              </a:lnSpc>
+              <a:spcBef>
+                <a:spcPts val="200"/>
+              </a:spcBef>
+              <a:spcAft>
+                <a:spcPts val="200"/>
               </a:spcAft>
               <a:defRPr sz="1800"/>
             </a:pPr>
@@ -10132,10 +10836,13 @@
           <a:p>
             <a:pPr lvl="1">
               <a:lnSpc>
-                <a:spcPct val="90000"/>
-              </a:lnSpc>
-              <a:spcAft>
-                <a:spcPts val="300"/>
+                <a:spcPct val="85000"/>
+              </a:lnSpc>
+              <a:spcBef>
+                <a:spcPts val="200"/>
+              </a:spcBef>
+              <a:spcAft>
+                <a:spcPts val="200"/>
               </a:spcAft>
               <a:defRPr sz="1800"/>
             </a:pPr>
@@ -10176,10 +10883,19 @@
         </p:nvSpPr>
         <p:spPr/>
         <p:txBody>
-          <a:bodyPr wrap="square"/>
+          <a:bodyPr wrap="square" tIns="25400" bIns="25400" lIns="63500" rIns="63500"/>
           <a:lstStyle/>
           <a:p>
             <a:pPr>
+              <a:lnSpc>
+                <a:spcPct val="85000"/>
+              </a:lnSpc>
+              <a:spcBef>
+                <a:spcPts val="200"/>
+              </a:spcBef>
+              <a:spcAft>
+                <a:spcPts val="200"/>
+              </a:spcAft>
               <a:defRPr sz="4000" b="1">
                 <a:solidFill>
                   <a:srgbClr val="764BA2"/>
@@ -10187,6 +10903,7 @@
               </a:defRPr>
             </a:pPr>
             <a:r>
+              <a:rPr/>
               <a:t>📊 Veri Türleri</a:t>
             </a:r>
           </a:p>
@@ -10226,7 +10943,7 @@
           <a:noFill/>
         </p:spPr>
         <p:txBody>
-          <a:bodyPr wrap="square">
+          <a:bodyPr wrap="square" tIns="25400" bIns="25400" lIns="63500" rIns="63500">
             <a:spAutoFit/>
           </a:bodyPr>
           <a:lstStyle/>
@@ -10243,10 +10960,13 @@
           <a:p>
             <a:pPr>
               <a:lnSpc>
-                <a:spcPct val="90000"/>
-              </a:lnSpc>
-              <a:spcAft>
-                <a:spcPts val="300"/>
+                <a:spcPct val="85000"/>
+              </a:lnSpc>
+              <a:spcBef>
+                <a:spcPts val="200"/>
+              </a:spcBef>
+              <a:spcAft>
+                <a:spcPts val="200"/>
               </a:spcAft>
               <a:defRPr sz="2000"/>
             </a:pPr>
@@ -10269,10 +10989,13 @@
           <a:p>
             <a:pPr>
               <a:lnSpc>
-                <a:spcPct val="90000"/>
-              </a:lnSpc>
-              <a:spcAft>
-                <a:spcPts val="300"/>
+                <a:spcPct val="85000"/>
+              </a:lnSpc>
+              <a:spcBef>
+                <a:spcPts val="200"/>
+              </a:spcBef>
+              <a:spcAft>
+                <a:spcPts val="200"/>
               </a:spcAft>
               <a:defRPr sz="2000" b="1"/>
             </a:pPr>
@@ -10295,10 +11018,13 @@
           <a:p>
             <a:pPr>
               <a:lnSpc>
-                <a:spcPct val="90000"/>
-              </a:lnSpc>
-              <a:spcAft>
-                <a:spcPts val="300"/>
+                <a:spcPct val="85000"/>
+              </a:lnSpc>
+              <a:spcBef>
+                <a:spcPts val="200"/>
+              </a:spcBef>
+              <a:spcAft>
+                <a:spcPts val="200"/>
               </a:spcAft>
               <a:defRPr sz="2000"/>
             </a:pPr>
@@ -10310,10 +11036,13 @@
           <a:p>
             <a:pPr lvl="1">
               <a:lnSpc>
-                <a:spcPct val="90000"/>
-              </a:lnSpc>
-              <a:spcAft>
-                <a:spcPts val="300"/>
+                <a:spcPct val="85000"/>
+              </a:lnSpc>
+              <a:spcBef>
+                <a:spcPts val="200"/>
+              </a:spcBef>
+              <a:spcAft>
+                <a:spcPts val="200"/>
               </a:spcAft>
               <a:defRPr sz="1800"/>
             </a:pPr>
@@ -10325,10 +11054,13 @@
           <a:p>
             <a:pPr lvl="1">
               <a:lnSpc>
-                <a:spcPct val="90000"/>
-              </a:lnSpc>
-              <a:spcAft>
-                <a:spcPts val="300"/>
+                <a:spcPct val="85000"/>
+              </a:lnSpc>
+              <a:spcBef>
+                <a:spcPts val="200"/>
+              </a:spcBef>
+              <a:spcAft>
+                <a:spcPts val="200"/>
               </a:spcAft>
               <a:defRPr sz="1800"/>
             </a:pPr>
@@ -10351,10 +11083,13 @@
           <a:p>
             <a:pPr>
               <a:lnSpc>
-                <a:spcPct val="90000"/>
-              </a:lnSpc>
-              <a:spcAft>
-                <a:spcPts val="300"/>
+                <a:spcPct val="85000"/>
+              </a:lnSpc>
+              <a:spcBef>
+                <a:spcPts val="200"/>
+              </a:spcBef>
+              <a:spcAft>
+                <a:spcPts val="200"/>
               </a:spcAft>
               <a:defRPr sz="2000"/>
             </a:pPr>
@@ -10366,10 +11101,13 @@
           <a:p>
             <a:pPr lvl="1">
               <a:lnSpc>
-                <a:spcPct val="90000"/>
-              </a:lnSpc>
-              <a:spcAft>
-                <a:spcPts val="300"/>
+                <a:spcPct val="85000"/>
+              </a:lnSpc>
+              <a:spcBef>
+                <a:spcPts val="200"/>
+              </a:spcBef>
+              <a:spcAft>
+                <a:spcPts val="200"/>
               </a:spcAft>
               <a:defRPr sz="1800"/>
             </a:pPr>
@@ -10381,10 +11119,13 @@
           <a:p>
             <a:pPr lvl="1">
               <a:lnSpc>
-                <a:spcPct val="90000"/>
-              </a:lnSpc>
-              <a:spcAft>
-                <a:spcPts val="300"/>
+                <a:spcPct val="85000"/>
+              </a:lnSpc>
+              <a:spcBef>
+                <a:spcPts val="200"/>
+              </a:spcBef>
+              <a:spcAft>
+                <a:spcPts val="200"/>
               </a:spcAft>
               <a:defRPr sz="1800"/>
             </a:pPr>
@@ -10407,10 +11148,13 @@
           <a:p>
             <a:pPr>
               <a:lnSpc>
-                <a:spcPct val="90000"/>
-              </a:lnSpc>
-              <a:spcAft>
-                <a:spcPts val="300"/>
+                <a:spcPct val="85000"/>
+              </a:lnSpc>
+              <a:spcBef>
+                <a:spcPts val="200"/>
+              </a:spcBef>
+              <a:spcAft>
+                <a:spcPts val="200"/>
               </a:spcAft>
               <a:defRPr sz="2000" b="1"/>
             </a:pPr>
@@ -10433,10 +11177,13 @@
           <a:p>
             <a:pPr>
               <a:lnSpc>
-                <a:spcPct val="90000"/>
-              </a:lnSpc>
-              <a:spcAft>
-                <a:spcPts val="300"/>
+                <a:spcPct val="85000"/>
+              </a:lnSpc>
+              <a:spcBef>
+                <a:spcPts val="200"/>
+              </a:spcBef>
+              <a:spcAft>
+                <a:spcPts val="200"/>
               </a:spcAft>
               <a:defRPr sz="2000"/>
             </a:pPr>
@@ -10448,10 +11195,13 @@
           <a:p>
             <a:pPr lvl="1">
               <a:lnSpc>
-                <a:spcPct val="90000"/>
-              </a:lnSpc>
-              <a:spcAft>
-                <a:spcPts val="300"/>
+                <a:spcPct val="85000"/>
+              </a:lnSpc>
+              <a:spcBef>
+                <a:spcPts val="200"/>
+              </a:spcBef>
+              <a:spcAft>
+                <a:spcPts val="200"/>
               </a:spcAft>
               <a:defRPr sz="1800"/>
             </a:pPr>
@@ -10463,10 +11213,13 @@
           <a:p>
             <a:pPr lvl="1">
               <a:lnSpc>
-                <a:spcPct val="90000"/>
-              </a:lnSpc>
-              <a:spcAft>
-                <a:spcPts val="300"/>
+                <a:spcPct val="85000"/>
+              </a:lnSpc>
+              <a:spcBef>
+                <a:spcPts val="200"/>
+              </a:spcBef>
+              <a:spcAft>
+                <a:spcPts val="200"/>
               </a:spcAft>
               <a:defRPr sz="1800"/>
             </a:pPr>
@@ -10489,10 +11242,13 @@
           <a:p>
             <a:pPr>
               <a:lnSpc>
-                <a:spcPct val="90000"/>
-              </a:lnSpc>
-              <a:spcAft>
-                <a:spcPts val="300"/>
+                <a:spcPct val="85000"/>
+              </a:lnSpc>
+              <a:spcBef>
+                <a:spcPts val="200"/>
+              </a:spcBef>
+              <a:spcAft>
+                <a:spcPts val="200"/>
               </a:spcAft>
               <a:defRPr sz="2000"/>
             </a:pPr>
@@ -10504,10 +11260,13 @@
           <a:p>
             <a:pPr lvl="1">
               <a:lnSpc>
-                <a:spcPct val="90000"/>
-              </a:lnSpc>
-              <a:spcAft>
-                <a:spcPts val="300"/>
+                <a:spcPct val="85000"/>
+              </a:lnSpc>
+              <a:spcBef>
+                <a:spcPts val="200"/>
+              </a:spcBef>
+              <a:spcAft>
+                <a:spcPts val="200"/>
               </a:spcAft>
               <a:defRPr sz="1800"/>
             </a:pPr>
@@ -10519,10 +11278,13 @@
           <a:p>
             <a:pPr lvl="1">
               <a:lnSpc>
-                <a:spcPct val="90000"/>
-              </a:lnSpc>
-              <a:spcAft>
-                <a:spcPts val="300"/>
+                <a:spcPct val="85000"/>
+              </a:lnSpc>
+              <a:spcBef>
+                <a:spcPts val="200"/>
+              </a:spcBef>
+              <a:spcAft>
+                <a:spcPts val="200"/>
               </a:spcAft>
               <a:defRPr sz="1800"/>
             </a:pPr>
@@ -10545,10 +11307,13 @@
           <a:p>
             <a:pPr>
               <a:lnSpc>
-                <a:spcPct val="90000"/>
-              </a:lnSpc>
-              <a:spcAft>
-                <a:spcPts val="300"/>
+                <a:spcPct val="85000"/>
+              </a:lnSpc>
+              <a:spcBef>
+                <a:spcPts val="200"/>
+              </a:spcBef>
+              <a:spcAft>
+                <a:spcPts val="200"/>
               </a:spcAft>
               <a:defRPr sz="2000" b="1"/>
             </a:pPr>
@@ -10560,10 +11325,13 @@
           <a:p>
             <a:pPr lvl="1">
               <a:lnSpc>
-                <a:spcPct val="90000"/>
-              </a:lnSpc>
-              <a:spcAft>
-                <a:spcPts val="300"/>
+                <a:spcPct val="85000"/>
+              </a:lnSpc>
+              <a:spcBef>
+                <a:spcPts val="200"/>
+              </a:spcBef>
+              <a:spcAft>
+                <a:spcPts val="200"/>
               </a:spcAft>
               <a:defRPr sz="1800"/>
             </a:pPr>
@@ -10575,10 +11343,13 @@
           <a:p>
             <a:pPr lvl="1">
               <a:lnSpc>
-                <a:spcPct val="90000"/>
-              </a:lnSpc>
-              <a:spcAft>
-                <a:spcPts val="300"/>
+                <a:spcPct val="85000"/>
+              </a:lnSpc>
+              <a:spcBef>
+                <a:spcPts val="200"/>
+              </a:spcBef>
+              <a:spcAft>
+                <a:spcPts val="200"/>
               </a:spcAft>
               <a:defRPr sz="1800"/>
             </a:pPr>
@@ -10590,10 +11361,13 @@
           <a:p>
             <a:pPr lvl="1">
               <a:lnSpc>
-                <a:spcPct val="90000"/>
-              </a:lnSpc>
-              <a:spcAft>
-                <a:spcPts val="300"/>
+                <a:spcPct val="85000"/>
+              </a:lnSpc>
+              <a:spcBef>
+                <a:spcPts val="200"/>
+              </a:spcBef>
+              <a:spcAft>
+                <a:spcPts val="200"/>
               </a:spcAft>
               <a:defRPr sz="1800"/>
             </a:pPr>
@@ -10634,10 +11408,19 @@
         </p:nvSpPr>
         <p:spPr/>
         <p:txBody>
-          <a:bodyPr wrap="square"/>
+          <a:bodyPr wrap="square" tIns="25400" bIns="25400" lIns="63500" rIns="63500"/>
           <a:lstStyle/>
           <a:p>
             <a:pPr>
+              <a:lnSpc>
+                <a:spcPct val="85000"/>
+              </a:lnSpc>
+              <a:spcBef>
+                <a:spcPts val="200"/>
+              </a:spcBef>
+              <a:spcAft>
+                <a:spcPts val="200"/>
+              </a:spcAft>
               <a:defRPr sz="4000" b="1">
                 <a:solidFill>
                   <a:srgbClr val="764BA2"/>
@@ -10645,6 +11428,7 @@
               </a:defRPr>
             </a:pPr>
             <a:r>
+              <a:rPr/>
               <a:t>📋 Veri Düzenleme</a:t>
             </a:r>
           </a:p>
@@ -10684,7 +11468,7 @@
           <a:noFill/>
         </p:spPr>
         <p:txBody>
-          <a:bodyPr wrap="square">
+          <a:bodyPr wrap="square" tIns="25400" bIns="25400" lIns="63500" rIns="63500">
             <a:spAutoFit/>
           </a:bodyPr>
           <a:lstStyle/>
@@ -10701,6 +11485,24 @@
           <a:p>
             <a:pPr>
               <a:lnSpc>
+                <a:spcPct val="85000"/>
+              </a:lnSpc>
+              <a:spcBef>
+                <a:spcPts val="200"/>
+              </a:spcBef>
+              <a:spcAft>
+                <a:spcPts val="200"/>
+              </a:spcAft>
+              <a:defRPr sz="2000"/>
+            </a:pPr>
+            <a:r>
+              <a:rPr sz="1300"/>
+              <a:t>Toplanan veriyi düzenli hale getirmek</a:t>
+            </a:r>
+          </a:p>
+          <a:p>
+            <a:pPr>
+              <a:lnSpc>
                 <a:spcPct val="90000"/>
               </a:lnSpc>
               <a:spcAft>
@@ -10708,9 +11510,23 @@
               </a:spcAft>
               <a:defRPr sz="2000"/>
             </a:pPr>
-            <a:r>
-              <a:rPr sz="1300"/>
-              <a:t>Toplanan veriyi düzenli hale getirmek</a:t>
+          </a:p>
+          <a:p>
+            <a:pPr>
+              <a:lnSpc>
+                <a:spcPct val="85000"/>
+              </a:lnSpc>
+              <a:spcBef>
+                <a:spcPts val="200"/>
+              </a:spcBef>
+              <a:spcAft>
+                <a:spcPts val="200"/>
+              </a:spcAft>
+              <a:defRPr sz="2000" b="1"/>
+            </a:pPr>
+            <a:r>
+              <a:rPr sz="1300"/>
+              <a:t>✅ Veri Düzenleme Adımları:</a:t>
             </a:r>
           </a:p>
           <a:p>
@@ -10727,16 +11543,315 @@
           <a:p>
             <a:pPr>
               <a:lnSpc>
+                <a:spcPct val="85000"/>
+              </a:lnSpc>
+              <a:spcBef>
+                <a:spcPts val="200"/>
+              </a:spcBef>
+              <a:spcAft>
+                <a:spcPts val="200"/>
+              </a:spcAft>
+              <a:defRPr sz="2000"/>
+            </a:pPr>
+            <a:r>
+              <a:rPr sz="1300"/>
+              <a:t>1️⃣ Temizleme:</a:t>
+            </a:r>
+          </a:p>
+          <a:p>
+            <a:pPr lvl="1">
+              <a:lnSpc>
+                <a:spcPct val="85000"/>
+              </a:lnSpc>
+              <a:spcBef>
+                <a:spcPts val="200"/>
+              </a:spcBef>
+              <a:spcAft>
+                <a:spcPts val="200"/>
+              </a:spcAft>
+              <a:defRPr sz="1800"/>
+            </a:pPr>
+            <a:r>
+              <a:rPr sz="1300"/>
+              <a:t>    • Hatalı verileri bul</a:t>
+            </a:r>
+          </a:p>
+          <a:p>
+            <a:pPr lvl="1">
+              <a:lnSpc>
+                <a:spcPct val="85000"/>
+              </a:lnSpc>
+              <a:spcBef>
+                <a:spcPts val="200"/>
+              </a:spcBef>
+              <a:spcAft>
+                <a:spcPts val="200"/>
+              </a:spcAft>
+              <a:defRPr sz="1800"/>
+            </a:pPr>
+            <a:r>
+              <a:rPr sz="1300"/>
+              <a:t>    • Eksik verileri tamamla veya çıkar</a:t>
+            </a:r>
+          </a:p>
+          <a:p>
+            <a:pPr lvl="1">
+              <a:lnSpc>
+                <a:spcPct val="85000"/>
+              </a:lnSpc>
+              <a:spcBef>
+                <a:spcPts val="200"/>
+              </a:spcBef>
+              <a:spcAft>
+                <a:spcPts val="200"/>
+              </a:spcAft>
+              <a:defRPr sz="1800"/>
+            </a:pPr>
+            <a:r>
+              <a:rPr sz="1300"/>
+              <a:t>    • Tekrar edenleri sil</a:t>
+            </a:r>
+          </a:p>
+          <a:p>
+            <a:pPr>
+              <a:lnSpc>
                 <a:spcPct val="90000"/>
               </a:lnSpc>
               <a:spcAft>
                 <a:spcPts val="300"/>
               </a:spcAft>
+              <a:defRPr sz="2000"/>
+            </a:pPr>
+          </a:p>
+          <a:p>
+            <a:pPr>
+              <a:lnSpc>
+                <a:spcPct val="85000"/>
+              </a:lnSpc>
+              <a:spcBef>
+                <a:spcPts val="200"/>
+              </a:spcBef>
+              <a:spcAft>
+                <a:spcPts val="200"/>
+              </a:spcAft>
+              <a:defRPr sz="2000"/>
+            </a:pPr>
+            <a:r>
+              <a:rPr sz="1300"/>
+              <a:t>2️⃣ Sıralama:</a:t>
+            </a:r>
+          </a:p>
+          <a:p>
+            <a:pPr lvl="1">
+              <a:lnSpc>
+                <a:spcPct val="85000"/>
+              </a:lnSpc>
+              <a:spcBef>
+                <a:spcPts val="200"/>
+              </a:spcBef>
+              <a:spcAft>
+                <a:spcPts val="200"/>
+              </a:spcAft>
+              <a:defRPr sz="1800"/>
+            </a:pPr>
+            <a:r>
+              <a:rPr sz="1300"/>
+              <a:t>    • Küçükten büyüğe</a:t>
+            </a:r>
+          </a:p>
+          <a:p>
+            <a:pPr lvl="1">
+              <a:lnSpc>
+                <a:spcPct val="85000"/>
+              </a:lnSpc>
+              <a:spcBef>
+                <a:spcPts val="200"/>
+              </a:spcBef>
+              <a:spcAft>
+                <a:spcPts val="200"/>
+              </a:spcAft>
+              <a:defRPr sz="1800"/>
+            </a:pPr>
+            <a:r>
+              <a:rPr sz="1300"/>
+              <a:t>    • A'dan Z'ye</a:t>
+            </a:r>
+          </a:p>
+          <a:p>
+            <a:pPr>
+              <a:lnSpc>
+                <a:spcPct val="90000"/>
+              </a:lnSpc>
+              <a:spcAft>
+                <a:spcPts val="300"/>
+              </a:spcAft>
+              <a:defRPr sz="2000"/>
+            </a:pPr>
+          </a:p>
+          <a:p>
+            <a:pPr>
+              <a:lnSpc>
+                <a:spcPct val="85000"/>
+              </a:lnSpc>
+              <a:spcBef>
+                <a:spcPts val="200"/>
+              </a:spcBef>
+              <a:spcAft>
+                <a:spcPts val="200"/>
+              </a:spcAft>
+              <a:defRPr sz="2000"/>
+            </a:pPr>
+            <a:r>
+              <a:rPr sz="1300"/>
+              <a:t>3️⃣ Gruplama:</a:t>
+            </a:r>
+          </a:p>
+          <a:p>
+            <a:pPr lvl="1">
+              <a:lnSpc>
+                <a:spcPct val="85000"/>
+              </a:lnSpc>
+              <a:spcBef>
+                <a:spcPts val="200"/>
+              </a:spcBef>
+              <a:spcAft>
+                <a:spcPts val="200"/>
+              </a:spcAft>
+              <a:defRPr sz="1800"/>
+            </a:pPr>
+            <a:r>
+              <a:rPr sz="1300"/>
+              <a:t>    • Benzer verileri bir araya getir</a:t>
+            </a:r>
+          </a:p>
+          <a:p>
+            <a:pPr lvl="1">
+              <a:lnSpc>
+                <a:spcPct val="85000"/>
+              </a:lnSpc>
+              <a:spcBef>
+                <a:spcPts val="200"/>
+              </a:spcBef>
+              <a:spcAft>
+                <a:spcPts val="200"/>
+              </a:spcAft>
+              <a:defRPr sz="1800"/>
+            </a:pPr>
+            <a:r>
+              <a:rPr sz="1300"/>
+              <a:t>    • Örnek: Yaş grupları (0-10, 11-20, 21-30)</a:t>
+            </a:r>
+          </a:p>
+          <a:p>
+            <a:pPr>
+              <a:lnSpc>
+                <a:spcPct val="90000"/>
+              </a:lnSpc>
+              <a:spcAft>
+                <a:spcPts val="300"/>
+              </a:spcAft>
+              <a:defRPr sz="2000"/>
+            </a:pPr>
+          </a:p>
+          <a:p>
+            <a:pPr>
+              <a:lnSpc>
+                <a:spcPct val="85000"/>
+              </a:lnSpc>
+              <a:spcBef>
+                <a:spcPts val="200"/>
+              </a:spcBef>
+              <a:spcAft>
+                <a:spcPts val="200"/>
+              </a:spcAft>
+              <a:defRPr sz="2000"/>
+            </a:pPr>
+            <a:r>
+              <a:rPr sz="1300"/>
+              <a:t>4️⃣ Tabloya Dönüştürme:</a:t>
+            </a:r>
+          </a:p>
+          <a:p>
+            <a:pPr lvl="1">
+              <a:lnSpc>
+                <a:spcPct val="85000"/>
+              </a:lnSpc>
+              <a:spcBef>
+                <a:spcPts val="200"/>
+              </a:spcBef>
+              <a:spcAft>
+                <a:spcPts val="200"/>
+              </a:spcAft>
+              <a:defRPr sz="1800"/>
+            </a:pPr>
+            <a:r>
+              <a:rPr sz="1300"/>
+              <a:t>    • Satır ve sütunlar</a:t>
+            </a:r>
+          </a:p>
+          <a:p>
+            <a:pPr lvl="1">
+              <a:lnSpc>
+                <a:spcPct val="85000"/>
+              </a:lnSpc>
+              <a:spcBef>
+                <a:spcPts val="200"/>
+              </a:spcBef>
+              <a:spcAft>
+                <a:spcPts val="200"/>
+              </a:spcAft>
+              <a:defRPr sz="1800"/>
+            </a:pPr>
+            <a:r>
+              <a:rPr sz="1300"/>
+              <a:t>    • Başlıklar ekle</a:t>
+            </a:r>
+          </a:p>
+          <a:p>
+            <a:pPr>
+              <a:lnSpc>
+                <a:spcPct val="90000"/>
+              </a:lnSpc>
+              <a:spcAft>
+                <a:spcPts val="300"/>
+              </a:spcAft>
+              <a:defRPr sz="2000"/>
+            </a:pPr>
+          </a:p>
+          <a:p>
+            <a:pPr>
+              <a:lnSpc>
+                <a:spcPct val="85000"/>
+              </a:lnSpc>
+              <a:spcBef>
+                <a:spcPts val="200"/>
+              </a:spcBef>
+              <a:spcAft>
+                <a:spcPts val="200"/>
+              </a:spcAft>
               <a:defRPr sz="2000" b="1"/>
             </a:pPr>
             <a:r>
               <a:rPr sz="1300"/>
-              <a:t>✅ Veri Düzenleme Adımları:</a:t>
+              <a:t>📌 Örnek Ham Veri:</a:t>
+            </a:r>
+          </a:p>
+          <a:p>
+            <a:pPr>
+              <a:lnSpc>
+                <a:spcPct val="85000"/>
+              </a:lnSpc>
+              <a:spcBef>
+                <a:spcPts val="200"/>
+              </a:spcBef>
+              <a:spcAft>
+                <a:spcPts val="200"/>
+              </a:spcAft>
+              <a:defRPr sz="2000"/>
+            </a:pPr>
+            <a:r>
+              <a:rPr sz="1300"/>
+              <a:t>Ahmet:15, Ayşe:18, 12, Mehmet:20, ??:16</a:t>
             </a:r>
           </a:p>
           <a:p>
@@ -10753,305 +11868,31 @@
           <a:p>
             <a:pPr>
               <a:lnSpc>
-                <a:spcPct val="90000"/>
-              </a:lnSpc>
-              <a:spcAft>
-                <a:spcPts val="300"/>
-              </a:spcAft>
-              <a:defRPr sz="2000"/>
-            </a:pPr>
-            <a:r>
-              <a:rPr sz="1300"/>
-              <a:t>1️⃣ Temizleme:</a:t>
-            </a:r>
-          </a:p>
-          <a:p>
-            <a:pPr lvl="1">
-              <a:lnSpc>
-                <a:spcPct val="90000"/>
-              </a:lnSpc>
-              <a:spcAft>
-                <a:spcPts val="300"/>
-              </a:spcAft>
-              <a:defRPr sz="1800"/>
-            </a:pPr>
-            <a:r>
-              <a:rPr sz="1300"/>
-              <a:t>    • Hatalı verileri bul</a:t>
-            </a:r>
-          </a:p>
-          <a:p>
-            <a:pPr lvl="1">
-              <a:lnSpc>
-                <a:spcPct val="90000"/>
-              </a:lnSpc>
-              <a:spcAft>
-                <a:spcPts val="300"/>
-              </a:spcAft>
-              <a:defRPr sz="1800"/>
-            </a:pPr>
-            <a:r>
-              <a:rPr sz="1300"/>
-              <a:t>    • Eksik verileri tamamla veya çıkar</a:t>
-            </a:r>
-          </a:p>
-          <a:p>
-            <a:pPr lvl="1">
-              <a:lnSpc>
-                <a:spcPct val="90000"/>
-              </a:lnSpc>
-              <a:spcAft>
-                <a:spcPts val="300"/>
-              </a:spcAft>
-              <a:defRPr sz="1800"/>
-            </a:pPr>
-            <a:r>
-              <a:rPr sz="1300"/>
-              <a:t>    • Tekrar edenleri sil</a:t>
-            </a:r>
-          </a:p>
-          <a:p>
-            <a:pPr>
-              <a:lnSpc>
-                <a:spcPct val="90000"/>
-              </a:lnSpc>
-              <a:spcAft>
-                <a:spcPts val="300"/>
-              </a:spcAft>
-              <a:defRPr sz="2000"/>
-            </a:pPr>
-          </a:p>
-          <a:p>
-            <a:pPr>
-              <a:lnSpc>
-                <a:spcPct val="90000"/>
-              </a:lnSpc>
-              <a:spcAft>
-                <a:spcPts val="300"/>
-              </a:spcAft>
-              <a:defRPr sz="2000"/>
-            </a:pPr>
-            <a:r>
-              <a:rPr sz="1300"/>
-              <a:t>2️⃣ Sıralama:</a:t>
-            </a:r>
-          </a:p>
-          <a:p>
-            <a:pPr lvl="1">
-              <a:lnSpc>
-                <a:spcPct val="90000"/>
-              </a:lnSpc>
-              <a:spcAft>
-                <a:spcPts val="300"/>
-              </a:spcAft>
-              <a:defRPr sz="1800"/>
-            </a:pPr>
-            <a:r>
-              <a:rPr sz="1300"/>
-              <a:t>    • Küçükten büyüğe</a:t>
-            </a:r>
-          </a:p>
-          <a:p>
-            <a:pPr lvl="1">
-              <a:lnSpc>
-                <a:spcPct val="90000"/>
-              </a:lnSpc>
-              <a:spcAft>
-                <a:spcPts val="300"/>
-              </a:spcAft>
-              <a:defRPr sz="1800"/>
-            </a:pPr>
-            <a:r>
-              <a:rPr sz="1300"/>
-              <a:t>    • A'dan Z'ye</a:t>
-            </a:r>
-          </a:p>
-          <a:p>
-            <a:pPr>
-              <a:lnSpc>
-                <a:spcPct val="90000"/>
-              </a:lnSpc>
-              <a:spcAft>
-                <a:spcPts val="300"/>
-              </a:spcAft>
-              <a:defRPr sz="2000"/>
-            </a:pPr>
-          </a:p>
-          <a:p>
-            <a:pPr>
-              <a:lnSpc>
-                <a:spcPct val="90000"/>
-              </a:lnSpc>
-              <a:spcAft>
-                <a:spcPts val="300"/>
-              </a:spcAft>
-              <a:defRPr sz="2000"/>
-            </a:pPr>
-            <a:r>
-              <a:rPr sz="1300"/>
-              <a:t>3️⃣ Gruplama:</a:t>
-            </a:r>
-          </a:p>
-          <a:p>
-            <a:pPr lvl="1">
-              <a:lnSpc>
-                <a:spcPct val="90000"/>
-              </a:lnSpc>
-              <a:spcAft>
-                <a:spcPts val="300"/>
-              </a:spcAft>
-              <a:defRPr sz="1800"/>
-            </a:pPr>
-            <a:r>
-              <a:rPr sz="1300"/>
-              <a:t>    • Benzer verileri bir araya getir</a:t>
-            </a:r>
-          </a:p>
-          <a:p>
-            <a:pPr lvl="1">
-              <a:lnSpc>
-                <a:spcPct val="90000"/>
-              </a:lnSpc>
-              <a:spcAft>
-                <a:spcPts val="300"/>
-              </a:spcAft>
-              <a:defRPr sz="1800"/>
-            </a:pPr>
-            <a:r>
-              <a:rPr sz="1300"/>
-              <a:t>    • Örnek: Yaş grupları (0-10, 11-20, 21-30)</a:t>
-            </a:r>
-          </a:p>
-          <a:p>
-            <a:pPr>
-              <a:lnSpc>
-                <a:spcPct val="90000"/>
-              </a:lnSpc>
-              <a:spcAft>
-                <a:spcPts val="300"/>
-              </a:spcAft>
-              <a:defRPr sz="2000"/>
-            </a:pPr>
-          </a:p>
-          <a:p>
-            <a:pPr>
-              <a:lnSpc>
-                <a:spcPct val="90000"/>
-              </a:lnSpc>
-              <a:spcAft>
-                <a:spcPts val="300"/>
-              </a:spcAft>
-              <a:defRPr sz="2000"/>
-            </a:pPr>
-            <a:r>
-              <a:rPr sz="1300"/>
-              <a:t>4️⃣ Tabloya Dönüştürme:</a:t>
-            </a:r>
-          </a:p>
-          <a:p>
-            <a:pPr lvl="1">
-              <a:lnSpc>
-                <a:spcPct val="90000"/>
-              </a:lnSpc>
-              <a:spcAft>
-                <a:spcPts val="300"/>
-              </a:spcAft>
-              <a:defRPr sz="1800"/>
-            </a:pPr>
-            <a:r>
-              <a:rPr sz="1300"/>
-              <a:t>    • Satır ve sütunlar</a:t>
-            </a:r>
-          </a:p>
-          <a:p>
-            <a:pPr lvl="1">
-              <a:lnSpc>
-                <a:spcPct val="90000"/>
-              </a:lnSpc>
-              <a:spcAft>
-                <a:spcPts val="300"/>
-              </a:spcAft>
-              <a:defRPr sz="1800"/>
-            </a:pPr>
-            <a:r>
-              <a:rPr sz="1300"/>
-              <a:t>    • Başlıklar ekle</a:t>
-            </a:r>
-          </a:p>
-          <a:p>
-            <a:pPr>
-              <a:lnSpc>
-                <a:spcPct val="90000"/>
-              </a:lnSpc>
-              <a:spcAft>
-                <a:spcPts val="300"/>
-              </a:spcAft>
-              <a:defRPr sz="2000"/>
-            </a:pPr>
-          </a:p>
-          <a:p>
-            <a:pPr>
-              <a:lnSpc>
-                <a:spcPct val="90000"/>
-              </a:lnSpc>
-              <a:spcAft>
-                <a:spcPts val="300"/>
+                <a:spcPct val="85000"/>
+              </a:lnSpc>
+              <a:spcBef>
+                <a:spcPts val="200"/>
+              </a:spcBef>
+              <a:spcAft>
+                <a:spcPts val="200"/>
               </a:spcAft>
               <a:defRPr sz="2000" b="1"/>
             </a:pPr>
             <a:r>
               <a:rPr sz="1300"/>
-              <a:t>📌 Örnek Ham Veri:</a:t>
-            </a:r>
-          </a:p>
-          <a:p>
-            <a:pPr>
-              <a:lnSpc>
-                <a:spcPct val="90000"/>
-              </a:lnSpc>
-              <a:spcAft>
-                <a:spcPts val="300"/>
-              </a:spcAft>
-              <a:defRPr sz="2000"/>
-            </a:pPr>
-            <a:r>
-              <a:rPr sz="1300"/>
-              <a:t>Ahmet:15, Ayşe:18, 12, Mehmet:20, ??:16</a:t>
-            </a:r>
-          </a:p>
-          <a:p>
-            <a:pPr>
-              <a:lnSpc>
-                <a:spcPct val="90000"/>
-              </a:lnSpc>
-              <a:spcAft>
-                <a:spcPts val="300"/>
-              </a:spcAft>
-              <a:defRPr sz="2000"/>
-            </a:pPr>
-          </a:p>
-          <a:p>
-            <a:pPr>
-              <a:lnSpc>
-                <a:spcPct val="90000"/>
-              </a:lnSpc>
-              <a:spcAft>
-                <a:spcPts val="300"/>
-              </a:spcAft>
-              <a:defRPr sz="2000" b="1"/>
-            </a:pPr>
-            <a:r>
-              <a:rPr sz="1300"/>
               <a:t>📌 Düzenlenmiş:</a:t>
             </a:r>
           </a:p>
           <a:p>
             <a:pPr>
               <a:lnSpc>
-                <a:spcPct val="90000"/>
-              </a:lnSpc>
-              <a:spcAft>
-                <a:spcPts val="300"/>
+                <a:spcPct val="85000"/>
+              </a:lnSpc>
+              <a:spcBef>
+                <a:spcPts val="200"/>
+              </a:spcBef>
+              <a:spcAft>
+                <a:spcPts val="200"/>
               </a:spcAft>
               <a:defRPr sz="2000"/>
             </a:pPr>
@@ -11063,10 +11904,13 @@
           <a:p>
             <a:pPr>
               <a:lnSpc>
-                <a:spcPct val="90000"/>
-              </a:lnSpc>
-              <a:spcAft>
-                <a:spcPts val="300"/>
+                <a:spcPct val="85000"/>
+              </a:lnSpc>
+              <a:spcBef>
+                <a:spcPts val="200"/>
+              </a:spcBef>
+              <a:spcAft>
+                <a:spcPts val="200"/>
               </a:spcAft>
               <a:defRPr sz="2000"/>
             </a:pPr>
@@ -11078,10 +11922,13 @@
           <a:p>
             <a:pPr>
               <a:lnSpc>
-                <a:spcPct val="90000"/>
-              </a:lnSpc>
-              <a:spcAft>
-                <a:spcPts val="300"/>
+                <a:spcPct val="85000"/>
+              </a:lnSpc>
+              <a:spcBef>
+                <a:spcPts val="200"/>
+              </a:spcBef>
+              <a:spcAft>
+                <a:spcPts val="200"/>
               </a:spcAft>
               <a:defRPr sz="2000"/>
             </a:pPr>
@@ -11093,10 +11940,13 @@
           <a:p>
             <a:pPr>
               <a:lnSpc>
-                <a:spcPct val="90000"/>
-              </a:lnSpc>
-              <a:spcAft>
-                <a:spcPts val="300"/>
+                <a:spcPct val="85000"/>
+              </a:lnSpc>
+              <a:spcBef>
+                <a:spcPts val="200"/>
+              </a:spcBef>
+              <a:spcAft>
+                <a:spcPts val="200"/>
               </a:spcAft>
               <a:defRPr sz="2000"/>
             </a:pPr>
@@ -11137,10 +11987,19 @@
         </p:nvSpPr>
         <p:spPr/>
         <p:txBody>
-          <a:bodyPr wrap="square"/>
+          <a:bodyPr wrap="square" tIns="25400" bIns="25400" lIns="63500" rIns="63500"/>
           <a:lstStyle/>
           <a:p>
             <a:pPr>
+              <a:lnSpc>
+                <a:spcPct val="85000"/>
+              </a:lnSpc>
+              <a:spcBef>
+                <a:spcPts val="200"/>
+              </a:spcBef>
+              <a:spcAft>
+                <a:spcPts val="200"/>
+              </a:spcAft>
               <a:defRPr sz="4000" b="1">
                 <a:solidFill>
                   <a:srgbClr val="764BA2"/>
@@ -11148,6 +12007,7 @@
               </a:defRPr>
             </a:pPr>
             <a:r>
+              <a:rPr/>
               <a:t>📊 Grafik Türleri</a:t>
             </a:r>
           </a:p>
@@ -11187,7 +12047,7 @@
           <a:noFill/>
         </p:spPr>
         <p:txBody>
-          <a:bodyPr wrap="square">
+          <a:bodyPr wrap="square" tIns="25400" bIns="25400" lIns="63500" rIns="63500">
             <a:spAutoFit/>
           </a:bodyPr>
           <a:lstStyle/>
@@ -11204,6 +12064,24 @@
           <a:p>
             <a:pPr>
               <a:lnSpc>
+                <a:spcPct val="85000"/>
+              </a:lnSpc>
+              <a:spcBef>
+                <a:spcPts val="200"/>
+              </a:spcBef>
+              <a:spcAft>
+                <a:spcPts val="200"/>
+              </a:spcAft>
+              <a:defRPr sz="2000"/>
+            </a:pPr>
+            <a:r>
+              <a:rPr sz="1300"/>
+              <a:t>Veriyi görsel olarak göstermek</a:t>
+            </a:r>
+          </a:p>
+          <a:p>
+            <a:pPr>
+              <a:lnSpc>
                 <a:spcPct val="90000"/>
               </a:lnSpc>
               <a:spcAft>
@@ -11211,9 +12089,23 @@
               </a:spcAft>
               <a:defRPr sz="2000"/>
             </a:pPr>
-            <a:r>
-              <a:rPr sz="1300"/>
-              <a:t>Veriyi görsel olarak göstermek</a:t>
+          </a:p>
+          <a:p>
+            <a:pPr>
+              <a:lnSpc>
+                <a:spcPct val="85000"/>
+              </a:lnSpc>
+              <a:spcBef>
+                <a:spcPts val="200"/>
+              </a:spcBef>
+              <a:spcAft>
+                <a:spcPts val="200"/>
+              </a:spcAft>
+              <a:defRPr sz="2000" b="1"/>
+            </a:pPr>
+            <a:r>
+              <a:rPr sz="1300"/>
+              <a:t>✅ Temel Grafik Türleri:</a:t>
             </a:r>
           </a:p>
           <a:p>
@@ -11230,331 +12122,356 @@
           <a:p>
             <a:pPr>
               <a:lnSpc>
+                <a:spcPct val="85000"/>
+              </a:lnSpc>
+              <a:spcBef>
+                <a:spcPts val="200"/>
+              </a:spcBef>
+              <a:spcAft>
+                <a:spcPts val="200"/>
+              </a:spcAft>
+              <a:defRPr sz="2000"/>
+            </a:pPr>
+            <a:r>
+              <a:rPr sz="1300"/>
+              <a:t>📊 Sütun Grafiği (Bar Chart):</a:t>
+            </a:r>
+          </a:p>
+          <a:p>
+            <a:pPr lvl="1">
+              <a:lnSpc>
+                <a:spcPct val="85000"/>
+              </a:lnSpc>
+              <a:spcBef>
+                <a:spcPts val="200"/>
+              </a:spcBef>
+              <a:spcAft>
+                <a:spcPts val="200"/>
+              </a:spcAft>
+              <a:defRPr sz="1800"/>
+            </a:pPr>
+            <a:r>
+              <a:rPr sz="1300"/>
+              <a:t>    • Kategorileri karşılaştırma</a:t>
+            </a:r>
+          </a:p>
+          <a:p>
+            <a:pPr lvl="1">
+              <a:lnSpc>
+                <a:spcPct val="85000"/>
+              </a:lnSpc>
+              <a:spcBef>
+                <a:spcPts val="200"/>
+              </a:spcBef>
+              <a:spcAft>
+                <a:spcPts val="200"/>
+              </a:spcAft>
+              <a:defRPr sz="1800"/>
+            </a:pPr>
+            <a:r>
+              <a:rPr sz="1300"/>
+              <a:t>    • Örnek: Şehirlere göre nüfus</a:t>
+            </a:r>
+          </a:p>
+          <a:p>
+            <a:pPr>
+              <a:lnSpc>
                 <a:spcPct val="90000"/>
               </a:lnSpc>
               <a:spcAft>
                 <a:spcPts val="300"/>
               </a:spcAft>
+              <a:defRPr sz="2000"/>
+            </a:pPr>
+          </a:p>
+          <a:p>
+            <a:pPr>
+              <a:lnSpc>
+                <a:spcPct val="85000"/>
+              </a:lnSpc>
+              <a:spcBef>
+                <a:spcPts val="200"/>
+              </a:spcBef>
+              <a:spcAft>
+                <a:spcPts val="200"/>
+              </a:spcAft>
+              <a:defRPr sz="2000"/>
+            </a:pPr>
+            <a:r>
+              <a:rPr sz="1300"/>
+              <a:t>📈 Çizgi Grafiği (Line Chart):</a:t>
+            </a:r>
+          </a:p>
+          <a:p>
+            <a:pPr lvl="1">
+              <a:lnSpc>
+                <a:spcPct val="85000"/>
+              </a:lnSpc>
+              <a:spcBef>
+                <a:spcPts val="200"/>
+              </a:spcBef>
+              <a:spcAft>
+                <a:spcPts val="200"/>
+              </a:spcAft>
+              <a:defRPr sz="1800"/>
+            </a:pPr>
+            <a:r>
+              <a:rPr sz="1300"/>
+              <a:t>    • Zamana göre değişim</a:t>
+            </a:r>
+          </a:p>
+          <a:p>
+            <a:pPr lvl="1">
+              <a:lnSpc>
+                <a:spcPct val="85000"/>
+              </a:lnSpc>
+              <a:spcBef>
+                <a:spcPts val="200"/>
+              </a:spcBef>
+              <a:spcAft>
+                <a:spcPts val="200"/>
+              </a:spcAft>
+              <a:defRPr sz="1800"/>
+            </a:pPr>
+            <a:r>
+              <a:rPr sz="1300"/>
+              <a:t>    • Örnek: Aylara göre sıcaklık</a:t>
+            </a:r>
+          </a:p>
+          <a:p>
+            <a:pPr>
+              <a:lnSpc>
+                <a:spcPct val="90000"/>
+              </a:lnSpc>
+              <a:spcAft>
+                <a:spcPts val="300"/>
+              </a:spcAft>
+              <a:defRPr sz="2000"/>
+            </a:pPr>
+          </a:p>
+          <a:p>
+            <a:pPr>
+              <a:lnSpc>
+                <a:spcPct val="85000"/>
+              </a:lnSpc>
+              <a:spcBef>
+                <a:spcPts val="200"/>
+              </a:spcBef>
+              <a:spcAft>
+                <a:spcPts val="200"/>
+              </a:spcAft>
+              <a:defRPr sz="2000"/>
+            </a:pPr>
+            <a:r>
+              <a:rPr sz="1300"/>
+              <a:t>🥧 Pasta Grafiği (Pie Chart):</a:t>
+            </a:r>
+          </a:p>
+          <a:p>
+            <a:pPr lvl="1">
+              <a:lnSpc>
+                <a:spcPct val="85000"/>
+              </a:lnSpc>
+              <a:spcBef>
+                <a:spcPts val="200"/>
+              </a:spcBef>
+              <a:spcAft>
+                <a:spcPts val="200"/>
+              </a:spcAft>
+              <a:defRPr sz="1800"/>
+            </a:pPr>
+            <a:r>
+              <a:rPr sz="1300"/>
+              <a:t>    • Yüzdeler, oranlar</a:t>
+            </a:r>
+          </a:p>
+          <a:p>
+            <a:pPr lvl="1">
+              <a:lnSpc>
+                <a:spcPct val="85000"/>
+              </a:lnSpc>
+              <a:spcBef>
+                <a:spcPts val="200"/>
+              </a:spcBef>
+              <a:spcAft>
+                <a:spcPts val="200"/>
+              </a:spcAft>
+              <a:defRPr sz="1800"/>
+            </a:pPr>
+            <a:r>
+              <a:rPr sz="1300"/>
+              <a:t>    • Örnek: Bütçe dağılımı</a:t>
+            </a:r>
+          </a:p>
+          <a:p>
+            <a:pPr>
+              <a:lnSpc>
+                <a:spcPct val="90000"/>
+              </a:lnSpc>
+              <a:spcAft>
+                <a:spcPts val="300"/>
+              </a:spcAft>
+              <a:defRPr sz="2000"/>
+            </a:pPr>
+          </a:p>
+          <a:p>
+            <a:pPr>
+              <a:lnSpc>
+                <a:spcPct val="85000"/>
+              </a:lnSpc>
+              <a:spcBef>
+                <a:spcPts val="200"/>
+              </a:spcBef>
+              <a:spcAft>
+                <a:spcPts val="200"/>
+              </a:spcAft>
+              <a:defRPr sz="2000"/>
+            </a:pPr>
+            <a:r>
+              <a:rPr sz="1300"/>
+              <a:t>📊 Dağılım Grafiği (Scatter Plot):</a:t>
+            </a:r>
+          </a:p>
+          <a:p>
+            <a:pPr lvl="1">
+              <a:lnSpc>
+                <a:spcPct val="85000"/>
+              </a:lnSpc>
+              <a:spcBef>
+                <a:spcPts val="200"/>
+              </a:spcBef>
+              <a:spcAft>
+                <a:spcPts val="200"/>
+              </a:spcAft>
+              <a:defRPr sz="1800"/>
+            </a:pPr>
+            <a:r>
+              <a:rPr sz="1300"/>
+              <a:t>    • İki değişken arasındaki ilişki</a:t>
+            </a:r>
+          </a:p>
+          <a:p>
+            <a:pPr lvl="1">
+              <a:lnSpc>
+                <a:spcPct val="85000"/>
+              </a:lnSpc>
+              <a:spcBef>
+                <a:spcPts val="200"/>
+              </a:spcBef>
+              <a:spcAft>
+                <a:spcPts val="200"/>
+              </a:spcAft>
+              <a:defRPr sz="1800"/>
+            </a:pPr>
+            <a:r>
+              <a:rPr sz="1300"/>
+              <a:t>    • Örnek: Boy-Kilo ilişkisi</a:t>
+            </a:r>
+          </a:p>
+          <a:p>
+            <a:pPr>
+              <a:lnSpc>
+                <a:spcPct val="90000"/>
+              </a:lnSpc>
+              <a:spcAft>
+                <a:spcPts val="300"/>
+              </a:spcAft>
+              <a:defRPr sz="2000"/>
+            </a:pPr>
+          </a:p>
+          <a:p>
+            <a:pPr>
+              <a:lnSpc>
+                <a:spcPct val="85000"/>
+              </a:lnSpc>
+              <a:spcBef>
+                <a:spcPts val="200"/>
+              </a:spcBef>
+              <a:spcAft>
+                <a:spcPts val="200"/>
+              </a:spcAft>
+              <a:defRPr sz="2000"/>
+            </a:pPr>
+            <a:r>
+              <a:rPr sz="1300"/>
+              <a:t>📊 Histogram:</a:t>
+            </a:r>
+          </a:p>
+          <a:p>
+            <a:pPr lvl="1">
+              <a:lnSpc>
+                <a:spcPct val="85000"/>
+              </a:lnSpc>
+              <a:spcBef>
+                <a:spcPts val="200"/>
+              </a:spcBef>
+              <a:spcAft>
+                <a:spcPts val="200"/>
+              </a:spcAft>
+              <a:defRPr sz="1800"/>
+            </a:pPr>
+            <a:r>
+              <a:rPr sz="1300"/>
+              <a:t>    • Veri dağılımı</a:t>
+            </a:r>
+          </a:p>
+          <a:p>
+            <a:pPr lvl="1">
+              <a:lnSpc>
+                <a:spcPct val="85000"/>
+              </a:lnSpc>
+              <a:spcBef>
+                <a:spcPts val="200"/>
+              </a:spcBef>
+              <a:spcAft>
+                <a:spcPts val="200"/>
+              </a:spcAft>
+              <a:defRPr sz="1800"/>
+            </a:pPr>
+            <a:r>
+              <a:rPr sz="1300"/>
+              <a:t>    • Örnek: Sınav not dağılımı</a:t>
+            </a:r>
+          </a:p>
+          <a:p>
+            <a:pPr>
+              <a:lnSpc>
+                <a:spcPct val="90000"/>
+              </a:lnSpc>
+              <a:spcAft>
+                <a:spcPts val="300"/>
+              </a:spcAft>
+              <a:defRPr sz="2000"/>
+            </a:pPr>
+          </a:p>
+          <a:p>
+            <a:pPr>
+              <a:lnSpc>
+                <a:spcPct val="85000"/>
+              </a:lnSpc>
+              <a:spcBef>
+                <a:spcPts val="200"/>
+              </a:spcBef>
+              <a:spcAft>
+                <a:spcPts val="200"/>
+              </a:spcAft>
               <a:defRPr sz="2000" b="1"/>
             </a:pPr>
             <a:r>
               <a:rPr sz="1300"/>
-              <a:t>✅ Temel Grafik Türleri:</a:t>
-            </a:r>
-          </a:p>
-          <a:p>
-            <a:pPr>
-              <a:lnSpc>
-                <a:spcPct val="90000"/>
-              </a:lnSpc>
-              <a:spcAft>
-                <a:spcPts val="300"/>
-              </a:spcAft>
-              <a:defRPr sz="2000"/>
-            </a:pPr>
-          </a:p>
-          <a:p>
-            <a:pPr>
-              <a:lnSpc>
-                <a:spcPct val="90000"/>
-              </a:lnSpc>
-              <a:spcAft>
-                <a:spcPts val="300"/>
-              </a:spcAft>
-              <a:defRPr sz="2000"/>
-            </a:pPr>
-            <a:r>
-              <a:rPr sz="1300"/>
-              <a:t>📊 Sütun Grafiği (Bar Chart):</a:t>
-            </a:r>
-          </a:p>
-          <a:p>
-            <a:pPr lvl="1">
-              <a:lnSpc>
-                <a:spcPct val="90000"/>
-              </a:lnSpc>
-              <a:spcAft>
-                <a:spcPts val="300"/>
-              </a:spcAft>
-              <a:defRPr sz="1800"/>
-            </a:pPr>
-            <a:r>
-              <a:rPr sz="1300"/>
-              <a:t>    • Kategorileri karşılaştırma</a:t>
-            </a:r>
-          </a:p>
-          <a:p>
-            <a:pPr lvl="1">
-              <a:lnSpc>
-                <a:spcPct val="90000"/>
-              </a:lnSpc>
-              <a:spcAft>
-                <a:spcPts val="300"/>
-              </a:spcAft>
-              <a:defRPr sz="1800"/>
-            </a:pPr>
-            <a:r>
-              <a:rPr sz="1300"/>
-              <a:t>    • Örnek: Şehirlere göre nüfus</a:t>
-            </a:r>
-          </a:p>
-          <a:p>
-            <a:pPr>
-              <a:lnSpc>
-                <a:spcPct val="90000"/>
-              </a:lnSpc>
-              <a:spcAft>
-                <a:spcPts val="300"/>
-              </a:spcAft>
-              <a:defRPr sz="2000"/>
-            </a:pPr>
-          </a:p>
-          <a:p>
-            <a:pPr>
-              <a:lnSpc>
-                <a:spcPct val="90000"/>
-              </a:lnSpc>
-              <a:spcAft>
-                <a:spcPts val="300"/>
-              </a:spcAft>
-              <a:defRPr sz="2000"/>
-            </a:pPr>
-            <a:r>
-              <a:rPr sz="1300"/>
-              <a:t>📈 Çizgi Grafiği (Line Chart):</a:t>
-            </a:r>
-          </a:p>
-          <a:p>
-            <a:pPr lvl="1">
-              <a:lnSpc>
-                <a:spcPct val="90000"/>
-              </a:lnSpc>
-              <a:spcAft>
-                <a:spcPts val="300"/>
-              </a:spcAft>
-              <a:defRPr sz="1800"/>
-            </a:pPr>
-            <a:r>
-              <a:rPr sz="1300"/>
-              <a:t>    • Zamana göre değişim</a:t>
-            </a:r>
-          </a:p>
-          <a:p>
-            <a:pPr lvl="1">
-              <a:lnSpc>
-                <a:spcPct val="90000"/>
-              </a:lnSpc>
-              <a:spcAft>
-                <a:spcPts val="300"/>
-              </a:spcAft>
-              <a:defRPr sz="1800"/>
-            </a:pPr>
-            <a:r>
-              <a:rPr sz="1300"/>
-              <a:t>    • Örnek: Aylara göre sıcaklık</a:t>
-            </a:r>
-          </a:p>
-          <a:p>
-            <a:pPr>
-              <a:lnSpc>
-                <a:spcPct val="90000"/>
-              </a:lnSpc>
-              <a:spcAft>
-                <a:spcPts val="300"/>
-              </a:spcAft>
-              <a:defRPr sz="2000"/>
-            </a:pPr>
-          </a:p>
-          <a:p>
-            <a:pPr>
-              <a:lnSpc>
-                <a:spcPct val="90000"/>
-              </a:lnSpc>
-              <a:spcAft>
-                <a:spcPts val="300"/>
-              </a:spcAft>
-              <a:defRPr sz="2000"/>
-            </a:pPr>
-            <a:r>
-              <a:rPr sz="1300"/>
-              <a:t>🥧 Pasta Grafiği (Pie Chart):</a:t>
-            </a:r>
-          </a:p>
-          <a:p>
-            <a:pPr lvl="1">
-              <a:lnSpc>
-                <a:spcPct val="90000"/>
-              </a:lnSpc>
-              <a:spcAft>
-                <a:spcPts val="300"/>
-              </a:spcAft>
-              <a:defRPr sz="1800"/>
-            </a:pPr>
-            <a:r>
-              <a:rPr sz="1300"/>
-              <a:t>    • Yüzdeler, oranlar</a:t>
-            </a:r>
-          </a:p>
-          <a:p>
-            <a:pPr lvl="1">
-              <a:lnSpc>
-                <a:spcPct val="90000"/>
-              </a:lnSpc>
-              <a:spcAft>
-                <a:spcPts val="300"/>
-              </a:spcAft>
-              <a:defRPr sz="1800"/>
-            </a:pPr>
-            <a:r>
-              <a:rPr sz="1300"/>
-              <a:t>    • Örnek: Bütçe dağılımı</a:t>
-            </a:r>
-          </a:p>
-          <a:p>
-            <a:pPr>
-              <a:lnSpc>
-                <a:spcPct val="90000"/>
-              </a:lnSpc>
-              <a:spcAft>
-                <a:spcPts val="300"/>
-              </a:spcAft>
-              <a:defRPr sz="2000"/>
-            </a:pPr>
-          </a:p>
-          <a:p>
-            <a:pPr>
-              <a:lnSpc>
-                <a:spcPct val="90000"/>
-              </a:lnSpc>
-              <a:spcAft>
-                <a:spcPts val="300"/>
-              </a:spcAft>
-              <a:defRPr sz="2000"/>
-            </a:pPr>
-            <a:r>
-              <a:rPr sz="1300"/>
-              <a:t>📊 Dağılım Grafiği (Scatter Plot):</a:t>
-            </a:r>
-          </a:p>
-          <a:p>
-            <a:pPr lvl="1">
-              <a:lnSpc>
-                <a:spcPct val="90000"/>
-              </a:lnSpc>
-              <a:spcAft>
-                <a:spcPts val="300"/>
-              </a:spcAft>
-              <a:defRPr sz="1800"/>
-            </a:pPr>
-            <a:r>
-              <a:rPr sz="1300"/>
-              <a:t>    • İki değişken arasındaki ilişki</a:t>
-            </a:r>
-          </a:p>
-          <a:p>
-            <a:pPr lvl="1">
-              <a:lnSpc>
-                <a:spcPct val="90000"/>
-              </a:lnSpc>
-              <a:spcAft>
-                <a:spcPts val="300"/>
-              </a:spcAft>
-              <a:defRPr sz="1800"/>
-            </a:pPr>
-            <a:r>
-              <a:rPr sz="1300"/>
-              <a:t>    • Örnek: Boy-Kilo ilişkisi</a:t>
-            </a:r>
-          </a:p>
-          <a:p>
-            <a:pPr>
-              <a:lnSpc>
-                <a:spcPct val="90000"/>
-              </a:lnSpc>
-              <a:spcAft>
-                <a:spcPts val="300"/>
-              </a:spcAft>
-              <a:defRPr sz="2000"/>
-            </a:pPr>
-          </a:p>
-          <a:p>
-            <a:pPr>
-              <a:lnSpc>
-                <a:spcPct val="90000"/>
-              </a:lnSpc>
-              <a:spcAft>
-                <a:spcPts val="300"/>
-              </a:spcAft>
-              <a:defRPr sz="2000"/>
-            </a:pPr>
-            <a:r>
-              <a:rPr sz="1300"/>
-              <a:t>📊 Histogram:</a:t>
-            </a:r>
-          </a:p>
-          <a:p>
-            <a:pPr lvl="1">
-              <a:lnSpc>
-                <a:spcPct val="90000"/>
-              </a:lnSpc>
-              <a:spcAft>
-                <a:spcPts val="300"/>
-              </a:spcAft>
-              <a:defRPr sz="1800"/>
-            </a:pPr>
-            <a:r>
-              <a:rPr sz="1300"/>
-              <a:t>    • Veri dağılımı</a:t>
-            </a:r>
-          </a:p>
-          <a:p>
-            <a:pPr lvl="1">
-              <a:lnSpc>
-                <a:spcPct val="90000"/>
-              </a:lnSpc>
-              <a:spcAft>
-                <a:spcPts val="300"/>
-              </a:spcAft>
-              <a:defRPr sz="1800"/>
-            </a:pPr>
-            <a:r>
-              <a:rPr sz="1300"/>
-              <a:t>    • Örnek: Sınav not dağılımı</a:t>
-            </a:r>
-          </a:p>
-          <a:p>
-            <a:pPr>
-              <a:lnSpc>
-                <a:spcPct val="90000"/>
-              </a:lnSpc>
-              <a:spcAft>
-                <a:spcPts val="300"/>
-              </a:spcAft>
-              <a:defRPr sz="2000"/>
-            </a:pPr>
-          </a:p>
-          <a:p>
-            <a:pPr>
-              <a:lnSpc>
-                <a:spcPct val="90000"/>
-              </a:lnSpc>
-              <a:spcAft>
-                <a:spcPts val="300"/>
-              </a:spcAft>
-              <a:defRPr sz="2000" b="1"/>
-            </a:pPr>
-            <a:r>
-              <a:rPr sz="1300"/>
               <a:t>💡 Doğru grafik seçimi önemli!</a:t>
             </a:r>
           </a:p>
           <a:p>
             <a:pPr lvl="1">
               <a:lnSpc>
-                <a:spcPct val="90000"/>
-              </a:lnSpc>
-              <a:spcAft>
-                <a:spcPts val="300"/>
+                <a:spcPct val="85000"/>
+              </a:lnSpc>
+              <a:spcBef>
+                <a:spcPts val="200"/>
+              </a:spcBef>
+              <a:spcAft>
+                <a:spcPts val="200"/>
               </a:spcAft>
               <a:defRPr sz="1800"/>
             </a:pPr>
@@ -11566,10 +12483,13 @@
           <a:p>
             <a:pPr lvl="1">
               <a:lnSpc>
-                <a:spcPct val="90000"/>
-              </a:lnSpc>
-              <a:spcAft>
-                <a:spcPts val="300"/>
+                <a:spcPct val="85000"/>
+              </a:lnSpc>
+              <a:spcBef>
+                <a:spcPts val="200"/>
+              </a:spcBef>
+              <a:spcAft>
+                <a:spcPts val="200"/>
               </a:spcAft>
               <a:defRPr sz="1800"/>
             </a:pPr>
@@ -11581,10 +12501,13 @@
           <a:p>
             <a:pPr lvl="1">
               <a:lnSpc>
-                <a:spcPct val="90000"/>
-              </a:lnSpc>
-              <a:spcAft>
-                <a:spcPts val="300"/>
+                <a:spcPct val="85000"/>
+              </a:lnSpc>
+              <a:spcBef>
+                <a:spcPts val="200"/>
+              </a:spcBef>
+              <a:spcAft>
+                <a:spcPts val="200"/>
               </a:spcAft>
               <a:defRPr sz="1800"/>
             </a:pPr>
@@ -11625,10 +12548,19 @@
         </p:nvSpPr>
         <p:spPr/>
         <p:txBody>
-          <a:bodyPr wrap="square"/>
+          <a:bodyPr wrap="square" tIns="25400" bIns="25400" lIns="63500" rIns="63500"/>
           <a:lstStyle/>
           <a:p>
             <a:pPr>
+              <a:lnSpc>
+                <a:spcPct val="85000"/>
+              </a:lnSpc>
+              <a:spcBef>
+                <a:spcPts val="200"/>
+              </a:spcBef>
+              <a:spcAft>
+                <a:spcPts val="200"/>
+              </a:spcAft>
               <a:defRPr sz="4000" b="1">
                 <a:solidFill>
                   <a:srgbClr val="764BA2"/>
@@ -11636,6 +12568,7 @@
               </a:defRPr>
             </a:pPr>
             <a:r>
+              <a:rPr/>
               <a:t>🎨 Veri Görselleştirme</a:t>
             </a:r>
           </a:p>
@@ -11675,7 +12608,7 @@
           <a:noFill/>
         </p:spPr>
         <p:txBody>
-          <a:bodyPr wrap="square">
+          <a:bodyPr wrap="square" tIns="25400" bIns="25400" lIns="63500" rIns="63500">
             <a:spAutoFit/>
           </a:bodyPr>
           <a:lstStyle/>
@@ -11692,6 +12625,24 @@
           <a:p>
             <a:pPr>
               <a:lnSpc>
+                <a:spcPct val="85000"/>
+              </a:lnSpc>
+              <a:spcBef>
+                <a:spcPts val="200"/>
+              </a:spcBef>
+              <a:spcAft>
+                <a:spcPts val="200"/>
+              </a:spcAft>
+              <a:defRPr sz="2000"/>
+            </a:pPr>
+            <a:r>
+              <a:rPr sz="1300"/>
+              <a:t>Neden görselleştirme?</a:t>
+            </a:r>
+          </a:p>
+          <a:p>
+            <a:pPr>
+              <a:lnSpc>
                 <a:spcPct val="90000"/>
               </a:lnSpc>
               <a:spcAft>
@@ -11699,9 +12650,95 @@
               </a:spcAft>
               <a:defRPr sz="2000"/>
             </a:pPr>
-            <a:r>
-              <a:rPr sz="1300"/>
-              <a:t>Neden görselleştirme?</a:t>
+          </a:p>
+          <a:p>
+            <a:pPr>
+              <a:lnSpc>
+                <a:spcPct val="85000"/>
+              </a:lnSpc>
+              <a:spcBef>
+                <a:spcPts val="200"/>
+              </a:spcBef>
+              <a:spcAft>
+                <a:spcPts val="200"/>
+              </a:spcAft>
+              <a:defRPr sz="2000" b="1"/>
+            </a:pPr>
+            <a:r>
+              <a:rPr sz="1300"/>
+              <a:t>✅ Görselleştirme Faydaları:</a:t>
+            </a:r>
+          </a:p>
+          <a:p>
+            <a:pPr lvl="1">
+              <a:lnSpc>
+                <a:spcPct val="85000"/>
+              </a:lnSpc>
+              <a:spcBef>
+                <a:spcPts val="200"/>
+              </a:spcBef>
+              <a:spcAft>
+                <a:spcPts val="200"/>
+              </a:spcAft>
+              <a:defRPr sz="1800"/>
+            </a:pPr>
+            <a:r>
+              <a:rPr sz="1300"/>
+              <a:t>    • Hızlı anlama</a:t>
+            </a:r>
+          </a:p>
+          <a:p>
+            <a:pPr lvl="1">
+              <a:lnSpc>
+                <a:spcPct val="85000"/>
+              </a:lnSpc>
+              <a:spcBef>
+                <a:spcPts val="200"/>
+              </a:spcBef>
+              <a:spcAft>
+                <a:spcPts val="200"/>
+              </a:spcAft>
+              <a:defRPr sz="1800"/>
+            </a:pPr>
+            <a:r>
+              <a:rPr sz="1300"/>
+              <a:t>    • Kalıpları görme</a:t>
+            </a:r>
+          </a:p>
+          <a:p>
+            <a:pPr lvl="1">
+              <a:lnSpc>
+                <a:spcPct val="85000"/>
+              </a:lnSpc>
+              <a:spcBef>
+                <a:spcPts val="200"/>
+              </a:spcBef>
+              <a:spcAft>
+                <a:spcPts val="200"/>
+              </a:spcAft>
+              <a:defRPr sz="1800"/>
+            </a:pPr>
+            <a:r>
+              <a:rPr sz="1300"/>
+              <a:t>    • Karşılaştırma kolaylığı</a:t>
+            </a:r>
+          </a:p>
+          <a:p>
+            <a:pPr lvl="1">
+              <a:lnSpc>
+                <a:spcPct val="85000"/>
+              </a:lnSpc>
+              <a:spcBef>
+                <a:spcPts val="200"/>
+              </a:spcBef>
+              <a:spcAft>
+                <a:spcPts val="200"/>
+              </a:spcAft>
+              <a:defRPr sz="1800"/>
+            </a:pPr>
+            <a:r>
+              <a:rPr sz="1300"/>
+              <a:t>    • İletişim</a:t>
             </a:r>
           </a:p>
           <a:p>
@@ -11718,361 +12755,320 @@
           <a:p>
             <a:pPr>
               <a:lnSpc>
+                <a:spcPct val="85000"/>
+              </a:lnSpc>
+              <a:spcBef>
+                <a:spcPts val="200"/>
+              </a:spcBef>
+              <a:spcAft>
+                <a:spcPts val="200"/>
+              </a:spcAft>
+              <a:defRPr sz="2000" b="1"/>
+            </a:pPr>
+            <a:r>
+              <a:rPr sz="1300"/>
+              <a:t>📌 İyi Görselleştirme:</a:t>
+            </a:r>
+          </a:p>
+          <a:p>
+            <a:pPr>
+              <a:lnSpc>
                 <a:spcPct val="90000"/>
               </a:lnSpc>
               <a:spcAft>
                 <a:spcPts val="300"/>
               </a:spcAft>
+              <a:defRPr sz="2000"/>
+            </a:pPr>
+          </a:p>
+          <a:p>
+            <a:pPr>
+              <a:lnSpc>
+                <a:spcPct val="85000"/>
+              </a:lnSpc>
+              <a:spcBef>
+                <a:spcPts val="200"/>
+              </a:spcBef>
+              <a:spcAft>
+                <a:spcPts val="200"/>
+              </a:spcAft>
               <a:defRPr sz="2000" b="1"/>
             </a:pPr>
             <a:r>
               <a:rPr sz="1300"/>
-              <a:t>✅ Görselleştirme Faydaları:</a:t>
-            </a:r>
-          </a:p>
-          <a:p>
-            <a:pPr lvl="1">
+              <a:t>✅ Basit:</a:t>
+            </a:r>
+          </a:p>
+          <a:p>
+            <a:pPr lvl="1">
+              <a:lnSpc>
+                <a:spcPct val="85000"/>
+              </a:lnSpc>
+              <a:spcBef>
+                <a:spcPts val="200"/>
+              </a:spcBef>
+              <a:spcAft>
+                <a:spcPts val="200"/>
+              </a:spcAft>
+              <a:defRPr sz="1800"/>
+            </a:pPr>
+            <a:r>
+              <a:rPr sz="1300"/>
+              <a:t>    • Karmaşık olmasın</a:t>
+            </a:r>
+          </a:p>
+          <a:p>
+            <a:pPr lvl="1">
+              <a:lnSpc>
+                <a:spcPct val="85000"/>
+              </a:lnSpc>
+              <a:spcBef>
+                <a:spcPts val="200"/>
+              </a:spcBef>
+              <a:spcAft>
+                <a:spcPts val="200"/>
+              </a:spcAft>
+              <a:defRPr sz="1800"/>
+            </a:pPr>
+            <a:r>
+              <a:rPr sz="1300"/>
+              <a:t>    • Ana mesaj net olsun</a:t>
+            </a:r>
+          </a:p>
+          <a:p>
+            <a:pPr>
               <a:lnSpc>
                 <a:spcPct val="90000"/>
               </a:lnSpc>
               <a:spcAft>
                 <a:spcPts val="300"/>
               </a:spcAft>
-              <a:defRPr sz="1800"/>
-            </a:pPr>
-            <a:r>
-              <a:rPr sz="1300"/>
-              <a:t>    • Hızlı anlama</a:t>
-            </a:r>
-          </a:p>
-          <a:p>
-            <a:pPr lvl="1">
+              <a:defRPr sz="2000"/>
+            </a:pPr>
+          </a:p>
+          <a:p>
+            <a:pPr>
+              <a:lnSpc>
+                <a:spcPct val="85000"/>
+              </a:lnSpc>
+              <a:spcBef>
+                <a:spcPts val="200"/>
+              </a:spcBef>
+              <a:spcAft>
+                <a:spcPts val="200"/>
+              </a:spcAft>
+              <a:defRPr sz="2000" b="1"/>
+            </a:pPr>
+            <a:r>
+              <a:rPr sz="1300"/>
+              <a:t>✅ Açık:</a:t>
+            </a:r>
+          </a:p>
+          <a:p>
+            <a:pPr lvl="1">
+              <a:lnSpc>
+                <a:spcPct val="85000"/>
+              </a:lnSpc>
+              <a:spcBef>
+                <a:spcPts val="200"/>
+              </a:spcBef>
+              <a:spcAft>
+                <a:spcPts val="200"/>
+              </a:spcAft>
+              <a:defRPr sz="1800"/>
+            </a:pPr>
+            <a:r>
+              <a:rPr sz="1300"/>
+              <a:t>    • Başlık var mı?</a:t>
+            </a:r>
+          </a:p>
+          <a:p>
+            <a:pPr lvl="1">
+              <a:lnSpc>
+                <a:spcPct val="85000"/>
+              </a:lnSpc>
+              <a:spcBef>
+                <a:spcPts val="200"/>
+              </a:spcBef>
+              <a:spcAft>
+                <a:spcPts val="200"/>
+              </a:spcAft>
+              <a:defRPr sz="1800"/>
+            </a:pPr>
+            <a:r>
+              <a:rPr sz="1300"/>
+              <a:t>    • Eksen etiketleri var mı?</a:t>
+            </a:r>
+          </a:p>
+          <a:p>
+            <a:pPr lvl="1">
+              <a:lnSpc>
+                <a:spcPct val="85000"/>
+              </a:lnSpc>
+              <a:spcBef>
+                <a:spcPts val="200"/>
+              </a:spcBef>
+              <a:spcAft>
+                <a:spcPts val="200"/>
+              </a:spcAft>
+              <a:defRPr sz="1800"/>
+            </a:pPr>
+            <a:r>
+              <a:rPr sz="1300"/>
+              <a:t>    • Lejant (açıklama) var mı?</a:t>
+            </a:r>
+          </a:p>
+          <a:p>
+            <a:pPr>
               <a:lnSpc>
                 <a:spcPct val="90000"/>
               </a:lnSpc>
               <a:spcAft>
                 <a:spcPts val="300"/>
               </a:spcAft>
-              <a:defRPr sz="1800"/>
-            </a:pPr>
-            <a:r>
-              <a:rPr sz="1300"/>
-              <a:t>    • Kalıpları görme</a:t>
-            </a:r>
-          </a:p>
-          <a:p>
-            <a:pPr lvl="1">
+              <a:defRPr sz="2000"/>
+            </a:pPr>
+          </a:p>
+          <a:p>
+            <a:pPr>
+              <a:lnSpc>
+                <a:spcPct val="85000"/>
+              </a:lnSpc>
+              <a:spcBef>
+                <a:spcPts val="200"/>
+              </a:spcBef>
+              <a:spcAft>
+                <a:spcPts val="200"/>
+              </a:spcAft>
+              <a:defRPr sz="2000" b="1"/>
+            </a:pPr>
+            <a:r>
+              <a:rPr sz="1300"/>
+              <a:t>✅ Doğru:</a:t>
+            </a:r>
+          </a:p>
+          <a:p>
+            <a:pPr lvl="1">
+              <a:lnSpc>
+                <a:spcPct val="85000"/>
+              </a:lnSpc>
+              <a:spcBef>
+                <a:spcPts val="200"/>
+              </a:spcBef>
+              <a:spcAft>
+                <a:spcPts val="200"/>
+              </a:spcAft>
+              <a:defRPr sz="1800"/>
+            </a:pPr>
+            <a:r>
+              <a:rPr sz="1300"/>
+              <a:t>    • Yanıltıcı olmasın</a:t>
+            </a:r>
+          </a:p>
+          <a:p>
+            <a:pPr lvl="1">
+              <a:lnSpc>
+                <a:spcPct val="85000"/>
+              </a:lnSpc>
+              <a:spcBef>
+                <a:spcPts val="200"/>
+              </a:spcBef>
+              <a:spcAft>
+                <a:spcPts val="200"/>
+              </a:spcAft>
+              <a:defRPr sz="1800"/>
+            </a:pPr>
+            <a:r>
+              <a:rPr sz="1300"/>
+              <a:t>    • Ölçek doğru mu?</a:t>
+            </a:r>
+          </a:p>
+          <a:p>
+            <a:pPr>
               <a:lnSpc>
                 <a:spcPct val="90000"/>
               </a:lnSpc>
               <a:spcAft>
                 <a:spcPts val="300"/>
               </a:spcAft>
-              <a:defRPr sz="1800"/>
-            </a:pPr>
-            <a:r>
-              <a:rPr sz="1300"/>
-              <a:t>    • Karşılaştırma kolaylığı</a:t>
-            </a:r>
-          </a:p>
-          <a:p>
-            <a:pPr lvl="1">
+              <a:defRPr sz="2000"/>
+            </a:pPr>
+          </a:p>
+          <a:p>
+            <a:pPr>
+              <a:lnSpc>
+                <a:spcPct val="85000"/>
+              </a:lnSpc>
+              <a:spcBef>
+                <a:spcPts val="200"/>
+              </a:spcBef>
+              <a:spcAft>
+                <a:spcPts val="200"/>
+              </a:spcAft>
+              <a:defRPr sz="2000" b="1"/>
+            </a:pPr>
+            <a:r>
+              <a:rPr sz="1300"/>
+              <a:t>✅ Renkli:</a:t>
+            </a:r>
+          </a:p>
+          <a:p>
+            <a:pPr lvl="1">
+              <a:lnSpc>
+                <a:spcPct val="85000"/>
+              </a:lnSpc>
+              <a:spcBef>
+                <a:spcPts val="200"/>
+              </a:spcBef>
+              <a:spcAft>
+                <a:spcPts val="200"/>
+              </a:spcAft>
+              <a:defRPr sz="1800"/>
+            </a:pPr>
+            <a:r>
+              <a:rPr sz="1300"/>
+              <a:t>    • Renk kodlama kullan</a:t>
+            </a:r>
+          </a:p>
+          <a:p>
+            <a:pPr lvl="1">
+              <a:lnSpc>
+                <a:spcPct val="85000"/>
+              </a:lnSpc>
+              <a:spcBef>
+                <a:spcPts val="200"/>
+              </a:spcBef>
+              <a:spcAft>
+                <a:spcPts val="200"/>
+              </a:spcAft>
+              <a:defRPr sz="1800"/>
+            </a:pPr>
+            <a:r>
+              <a:rPr sz="1300"/>
+              <a:t>    • Ama çok fazla renk kullanma</a:t>
+            </a:r>
+          </a:p>
+          <a:p>
+            <a:pPr>
               <a:lnSpc>
                 <a:spcPct val="90000"/>
               </a:lnSpc>
               <a:spcAft>
                 <a:spcPts val="300"/>
               </a:spcAft>
-              <a:defRPr sz="1800"/>
-            </a:pPr>
-            <a:r>
-              <a:rPr sz="1300"/>
-              <a:t>    • İletişim</a:t>
-            </a:r>
-          </a:p>
-          <a:p>
-            <a:pPr>
-              <a:lnSpc>
-                <a:spcPct val="90000"/>
-              </a:lnSpc>
-              <a:spcAft>
-                <a:spcPts val="300"/>
-              </a:spcAft>
-              <a:defRPr sz="2000"/>
-            </a:pPr>
-          </a:p>
-          <a:p>
-            <a:pPr>
-              <a:lnSpc>
-                <a:spcPct val="90000"/>
-              </a:lnSpc>
-              <a:spcAft>
-                <a:spcPts val="300"/>
-              </a:spcAft>
-              <a:defRPr sz="2000" b="1"/>
-            </a:pPr>
-            <a:r>
-              <a:rPr sz="1300"/>
-              <a:t>📌 İyi Görselleştirme:</a:t>
-            </a:r>
-          </a:p>
-          <a:p>
-            <a:pPr>
-              <a:lnSpc>
-                <a:spcPct val="90000"/>
-              </a:lnSpc>
-              <a:spcAft>
-                <a:spcPts val="300"/>
-              </a:spcAft>
-              <a:defRPr sz="2000"/>
-            </a:pPr>
-          </a:p>
-          <a:p>
-            <a:pPr>
-              <a:lnSpc>
-                <a:spcPct val="90000"/>
-              </a:lnSpc>
-              <a:spcAft>
-                <a:spcPts val="300"/>
-              </a:spcAft>
-              <a:defRPr sz="2000" b="1"/>
-            </a:pPr>
-            <a:r>
-              <a:rPr sz="1300"/>
-              <a:t>✅ Basit:</a:t>
-            </a:r>
-          </a:p>
-          <a:p>
-            <a:pPr lvl="1">
-              <a:lnSpc>
-                <a:spcPct val="90000"/>
-              </a:lnSpc>
-              <a:spcAft>
-                <a:spcPts val="300"/>
-              </a:spcAft>
-              <a:defRPr sz="1800"/>
-            </a:pPr>
-            <a:r>
-              <a:rPr sz="1300"/>
-              <a:t>    • Karmaşık olmasın</a:t>
-            </a:r>
-          </a:p>
-          <a:p>
-            <a:pPr lvl="1">
-              <a:lnSpc>
-                <a:spcPct val="90000"/>
-              </a:lnSpc>
-              <a:spcAft>
-                <a:spcPts val="300"/>
-              </a:spcAft>
-              <a:defRPr sz="1800"/>
-            </a:pPr>
-            <a:r>
-              <a:rPr sz="1300"/>
-              <a:t>    • Ana mesaj net olsun</a:t>
-            </a:r>
-          </a:p>
-          <a:p>
-            <a:pPr>
-              <a:lnSpc>
-                <a:spcPct val="90000"/>
-              </a:lnSpc>
-              <a:spcAft>
-                <a:spcPts val="300"/>
-              </a:spcAft>
-              <a:defRPr sz="2000"/>
-            </a:pPr>
-          </a:p>
-          <a:p>
-            <a:pPr>
-              <a:lnSpc>
-                <a:spcPct val="90000"/>
-              </a:lnSpc>
-              <a:spcAft>
-                <a:spcPts val="300"/>
-              </a:spcAft>
-              <a:defRPr sz="2000" b="1"/>
-            </a:pPr>
-            <a:r>
-              <a:rPr sz="1300"/>
-              <a:t>✅ Açık:</a:t>
-            </a:r>
-          </a:p>
-          <a:p>
-            <a:pPr lvl="1">
-              <a:lnSpc>
-                <a:spcPct val="90000"/>
-              </a:lnSpc>
-              <a:spcAft>
-                <a:spcPts val="300"/>
-              </a:spcAft>
-              <a:defRPr sz="1800"/>
-            </a:pPr>
-            <a:r>
-              <a:rPr sz="1300"/>
-              <a:t>    • Başlık var mı?</a:t>
-            </a:r>
-          </a:p>
-          <a:p>
-            <a:pPr lvl="1">
-              <a:lnSpc>
-                <a:spcPct val="90000"/>
-              </a:lnSpc>
-              <a:spcAft>
-                <a:spcPts val="300"/>
-              </a:spcAft>
-              <a:defRPr sz="1800"/>
-            </a:pPr>
-            <a:r>
-              <a:rPr sz="1300"/>
-              <a:t>    • Eksen etiketleri var mı?</a:t>
-            </a:r>
-          </a:p>
-          <a:p>
-            <a:pPr lvl="1">
-              <a:lnSpc>
-                <a:spcPct val="90000"/>
-              </a:lnSpc>
-              <a:spcAft>
-                <a:spcPts val="300"/>
-              </a:spcAft>
-              <a:defRPr sz="1800"/>
-            </a:pPr>
-            <a:r>
-              <a:rPr sz="1300"/>
-              <a:t>    • Lejant (açıklama) var mı?</a:t>
-            </a:r>
-          </a:p>
-          <a:p>
-            <a:pPr>
-              <a:lnSpc>
-                <a:spcPct val="90000"/>
-              </a:lnSpc>
-              <a:spcAft>
-                <a:spcPts val="300"/>
-              </a:spcAft>
-              <a:defRPr sz="2000"/>
-            </a:pPr>
-          </a:p>
-          <a:p>
-            <a:pPr>
-              <a:lnSpc>
-                <a:spcPct val="90000"/>
-              </a:lnSpc>
-              <a:spcAft>
-                <a:spcPts val="300"/>
-              </a:spcAft>
-              <a:defRPr sz="2000" b="1"/>
-            </a:pPr>
-            <a:r>
-              <a:rPr sz="1300"/>
-              <a:t>✅ Doğru:</a:t>
-            </a:r>
-          </a:p>
-          <a:p>
-            <a:pPr lvl="1">
-              <a:lnSpc>
-                <a:spcPct val="90000"/>
-              </a:lnSpc>
-              <a:spcAft>
-                <a:spcPts val="300"/>
-              </a:spcAft>
-              <a:defRPr sz="1800"/>
-            </a:pPr>
-            <a:r>
-              <a:rPr sz="1300"/>
-              <a:t>    • Yanıltıcı olmasın</a:t>
-            </a:r>
-          </a:p>
-          <a:p>
-            <a:pPr lvl="1">
-              <a:lnSpc>
-                <a:spcPct val="90000"/>
-              </a:lnSpc>
-              <a:spcAft>
-                <a:spcPts val="300"/>
-              </a:spcAft>
-              <a:defRPr sz="1800"/>
-            </a:pPr>
-            <a:r>
-              <a:rPr sz="1300"/>
-              <a:t>    • Ölçek doğru mu?</a:t>
-            </a:r>
-          </a:p>
-          <a:p>
-            <a:pPr>
-              <a:lnSpc>
-                <a:spcPct val="90000"/>
-              </a:lnSpc>
-              <a:spcAft>
-                <a:spcPts val="300"/>
-              </a:spcAft>
-              <a:defRPr sz="2000"/>
-            </a:pPr>
-          </a:p>
-          <a:p>
-            <a:pPr>
-              <a:lnSpc>
-                <a:spcPct val="90000"/>
-              </a:lnSpc>
-              <a:spcAft>
-                <a:spcPts val="300"/>
-              </a:spcAft>
-              <a:defRPr sz="2000" b="1"/>
-            </a:pPr>
-            <a:r>
-              <a:rPr sz="1300"/>
-              <a:t>✅ Renkli:</a:t>
-            </a:r>
-          </a:p>
-          <a:p>
-            <a:pPr lvl="1">
-              <a:lnSpc>
-                <a:spcPct val="90000"/>
-              </a:lnSpc>
-              <a:spcAft>
-                <a:spcPts val="300"/>
-              </a:spcAft>
-              <a:defRPr sz="1800"/>
-            </a:pPr>
-            <a:r>
-              <a:rPr sz="1300"/>
-              <a:t>    • Renk kodlama kullan</a:t>
-            </a:r>
-          </a:p>
-          <a:p>
-            <a:pPr lvl="1">
-              <a:lnSpc>
-                <a:spcPct val="90000"/>
-              </a:lnSpc>
-              <a:spcAft>
-                <a:spcPts val="300"/>
-              </a:spcAft>
-              <a:defRPr sz="1800"/>
-            </a:pPr>
-            <a:r>
-              <a:rPr sz="1300"/>
-              <a:t>    • Ama çok fazla renk kullanma</a:t>
-            </a:r>
-          </a:p>
-          <a:p>
-            <a:pPr>
-              <a:lnSpc>
-                <a:spcPct val="90000"/>
-              </a:lnSpc>
-              <a:spcAft>
-                <a:spcPts val="300"/>
-              </a:spcAft>
-              <a:defRPr sz="2000"/>
-            </a:pPr>
-          </a:p>
-          <a:p>
-            <a:pPr>
-              <a:lnSpc>
-                <a:spcPct val="90000"/>
-              </a:lnSpc>
-              <a:spcAft>
-                <a:spcPts val="300"/>
+              <a:defRPr sz="2000"/>
+            </a:pPr>
+          </a:p>
+          <a:p>
+            <a:pPr>
+              <a:lnSpc>
+                <a:spcPct val="85000"/>
+              </a:lnSpc>
+              <a:spcBef>
+                <a:spcPts val="200"/>
+              </a:spcBef>
+              <a:spcAft>
+                <a:spcPts val="200"/>
               </a:spcAft>
               <a:defRPr sz="2000"/>
             </a:pPr>
@@ -12084,10 +13080,13 @@
           <a:p>
             <a:pPr lvl="1">
               <a:lnSpc>
-                <a:spcPct val="90000"/>
-              </a:lnSpc>
-              <a:spcAft>
-                <a:spcPts val="300"/>
+                <a:spcPct val="85000"/>
+              </a:lnSpc>
+              <a:spcBef>
+                <a:spcPts val="200"/>
+              </a:spcBef>
+              <a:spcAft>
+                <a:spcPts val="200"/>
               </a:spcAft>
               <a:defRPr sz="1800"/>
             </a:pPr>
@@ -12099,10 +13098,13 @@
           <a:p>
             <a:pPr lvl="1">
               <a:lnSpc>
-                <a:spcPct val="90000"/>
-              </a:lnSpc>
-              <a:spcAft>
-                <a:spcPts val="300"/>
+                <a:spcPct val="85000"/>
+              </a:lnSpc>
+              <a:spcBef>
+                <a:spcPts val="200"/>
+              </a:spcBef>
+              <a:spcAft>
+                <a:spcPts val="200"/>
               </a:spcAft>
               <a:defRPr sz="1800"/>
             </a:pPr>
@@ -12114,10 +13116,13 @@
           <a:p>
             <a:pPr lvl="1">
               <a:lnSpc>
-                <a:spcPct val="90000"/>
-              </a:lnSpc>
-              <a:spcAft>
-                <a:spcPts val="300"/>
+                <a:spcPct val="85000"/>
+              </a:lnSpc>
+              <a:spcBef>
+                <a:spcPts val="200"/>
+              </a:spcBef>
+              <a:spcAft>
+                <a:spcPts val="200"/>
               </a:spcAft>
               <a:defRPr sz="1800"/>
             </a:pPr>
@@ -12158,10 +13163,19 @@
         </p:nvSpPr>
         <p:spPr/>
         <p:txBody>
-          <a:bodyPr wrap="square"/>
+          <a:bodyPr wrap="square" tIns="25400" bIns="25400" lIns="63500" rIns="63500"/>
           <a:lstStyle/>
           <a:p>
             <a:pPr>
+              <a:lnSpc>
+                <a:spcPct val="85000"/>
+              </a:lnSpc>
+              <a:spcBef>
+                <a:spcPts val="200"/>
+              </a:spcBef>
+              <a:spcAft>
+                <a:spcPts val="200"/>
+              </a:spcAft>
               <a:defRPr sz="4000" b="1">
                 <a:solidFill>
                   <a:srgbClr val="764BA2"/>
@@ -12169,6 +13183,7 @@
               </a:defRPr>
             </a:pPr>
             <a:r>
+              <a:rPr/>
               <a:t>💻 Excel/Sheets ile Tablo Oluşturma</a:t>
             </a:r>
           </a:p>
@@ -12208,7 +13223,7 @@
           <a:noFill/>
         </p:spPr>
         <p:txBody>
-          <a:bodyPr wrap="square">
+          <a:bodyPr wrap="square" tIns="25400" bIns="25400" lIns="63500" rIns="63500">
             <a:spAutoFit/>
           </a:bodyPr>
           <a:lstStyle/>
@@ -12225,6 +13240,24 @@
           <a:p>
             <a:pPr>
               <a:lnSpc>
+                <a:spcPct val="85000"/>
+              </a:lnSpc>
+              <a:spcBef>
+                <a:spcPts val="200"/>
+              </a:spcBef>
+              <a:spcAft>
+                <a:spcPts val="200"/>
+              </a:spcAft>
+              <a:defRPr sz="2000"/>
+            </a:pPr>
+            <a:r>
+              <a:rPr sz="1300"/>
+              <a:t>Tablolama programları veri için çok kullanışlı!</a:t>
+            </a:r>
+          </a:p>
+          <a:p>
+            <a:pPr>
+              <a:lnSpc>
                 <a:spcPct val="90000"/>
               </a:lnSpc>
               <a:spcAft>
@@ -12232,9 +13265,95 @@
               </a:spcAft>
               <a:defRPr sz="2000"/>
             </a:pPr>
-            <a:r>
-              <a:rPr sz="1300"/>
-              <a:t>Tablolama programları veri için çok kullanışlı!</a:t>
+          </a:p>
+          <a:p>
+            <a:pPr>
+              <a:lnSpc>
+                <a:spcPct val="85000"/>
+              </a:lnSpc>
+              <a:spcBef>
+                <a:spcPts val="200"/>
+              </a:spcBef>
+              <a:spcAft>
+                <a:spcPts val="200"/>
+              </a:spcAft>
+              <a:defRPr sz="2000" b="1"/>
+            </a:pPr>
+            <a:r>
+              <a:rPr sz="1300"/>
+              <a:t>✅ Temel Kavramlar:</a:t>
+            </a:r>
+          </a:p>
+          <a:p>
+            <a:pPr lvl="1">
+              <a:lnSpc>
+                <a:spcPct val="85000"/>
+              </a:lnSpc>
+              <a:spcBef>
+                <a:spcPts val="200"/>
+              </a:spcBef>
+              <a:spcAft>
+                <a:spcPts val="200"/>
+              </a:spcAft>
+              <a:defRPr sz="1800"/>
+            </a:pPr>
+            <a:r>
+              <a:rPr sz="1300"/>
+              <a:t>    • Hücre: Tek bir veri kutusu (A1, B2)</a:t>
+            </a:r>
+          </a:p>
+          <a:p>
+            <a:pPr lvl="1">
+              <a:lnSpc>
+                <a:spcPct val="85000"/>
+              </a:lnSpc>
+              <a:spcBef>
+                <a:spcPts val="200"/>
+              </a:spcBef>
+              <a:spcAft>
+                <a:spcPts val="200"/>
+              </a:spcAft>
+              <a:defRPr sz="1800"/>
+            </a:pPr>
+            <a:r>
+              <a:rPr sz="1300"/>
+              <a:t>    • Satır: Yatay</a:t>
+            </a:r>
+          </a:p>
+          <a:p>
+            <a:pPr lvl="1">
+              <a:lnSpc>
+                <a:spcPct val="85000"/>
+              </a:lnSpc>
+              <a:spcBef>
+                <a:spcPts val="200"/>
+              </a:spcBef>
+              <a:spcAft>
+                <a:spcPts val="200"/>
+              </a:spcAft>
+              <a:defRPr sz="1800"/>
+            </a:pPr>
+            <a:r>
+              <a:rPr sz="1300"/>
+              <a:t>    • Sütun: Dikey</a:t>
+            </a:r>
+          </a:p>
+          <a:p>
+            <a:pPr lvl="1">
+              <a:lnSpc>
+                <a:spcPct val="85000"/>
+              </a:lnSpc>
+              <a:spcBef>
+                <a:spcPts val="200"/>
+              </a:spcBef>
+              <a:spcAft>
+                <a:spcPts val="200"/>
+              </a:spcAft>
+              <a:defRPr sz="1800"/>
+            </a:pPr>
+            <a:r>
+              <a:rPr sz="1300"/>
+              <a:t>    • Formül: Hesaplamalar</a:t>
             </a:r>
           </a:p>
           <a:p>
@@ -12251,372 +13370,331 @@
           <a:p>
             <a:pPr>
               <a:lnSpc>
+                <a:spcPct val="85000"/>
+              </a:lnSpc>
+              <a:spcBef>
+                <a:spcPts val="200"/>
+              </a:spcBef>
+              <a:spcAft>
+                <a:spcPts val="200"/>
+              </a:spcAft>
+              <a:defRPr sz="2000" b="1"/>
+            </a:pPr>
+            <a:r>
+              <a:rPr sz="1300"/>
+              <a:t>📌 Tablo Oluşturma Adımları:</a:t>
+            </a:r>
+          </a:p>
+          <a:p>
+            <a:pPr>
+              <a:lnSpc>
                 <a:spcPct val="90000"/>
               </a:lnSpc>
               <a:spcAft>
                 <a:spcPts val="300"/>
               </a:spcAft>
+              <a:defRPr sz="2000"/>
+            </a:pPr>
+          </a:p>
+          <a:p>
+            <a:pPr>
+              <a:lnSpc>
+                <a:spcPct val="85000"/>
+              </a:lnSpc>
+              <a:spcBef>
+                <a:spcPts val="200"/>
+              </a:spcBef>
+              <a:spcAft>
+                <a:spcPts val="200"/>
+              </a:spcAft>
+              <a:defRPr sz="2000"/>
+            </a:pPr>
+            <a:r>
+              <a:rPr sz="1300"/>
+              <a:t>1️⃣ Başlıkları Yaz:</a:t>
+            </a:r>
+          </a:p>
+          <a:p>
+            <a:pPr lvl="1">
+              <a:lnSpc>
+                <a:spcPct val="85000"/>
+              </a:lnSpc>
+              <a:spcBef>
+                <a:spcPts val="200"/>
+              </a:spcBef>
+              <a:spcAft>
+                <a:spcPts val="200"/>
+              </a:spcAft>
+              <a:defRPr sz="1800"/>
+            </a:pPr>
+            <a:r>
+              <a:rPr sz="1300"/>
+              <a:t>    • İlk satıra sütun adları</a:t>
+            </a:r>
+          </a:p>
+          <a:p>
+            <a:pPr>
+              <a:lnSpc>
+                <a:spcPct val="90000"/>
+              </a:lnSpc>
+              <a:spcAft>
+                <a:spcPts val="300"/>
+              </a:spcAft>
+              <a:defRPr sz="2000"/>
+            </a:pPr>
+          </a:p>
+          <a:p>
+            <a:pPr>
+              <a:lnSpc>
+                <a:spcPct val="85000"/>
+              </a:lnSpc>
+              <a:spcBef>
+                <a:spcPts val="200"/>
+              </a:spcBef>
+              <a:spcAft>
+                <a:spcPts val="200"/>
+              </a:spcAft>
+              <a:defRPr sz="2000"/>
+            </a:pPr>
+            <a:r>
+              <a:rPr sz="1300"/>
+              <a:t>2️⃣ Verileri Gir:</a:t>
+            </a:r>
+          </a:p>
+          <a:p>
+            <a:pPr lvl="1">
+              <a:lnSpc>
+                <a:spcPct val="85000"/>
+              </a:lnSpc>
+              <a:spcBef>
+                <a:spcPts val="200"/>
+              </a:spcBef>
+              <a:spcAft>
+                <a:spcPts val="200"/>
+              </a:spcAft>
+              <a:defRPr sz="1800"/>
+            </a:pPr>
+            <a:r>
+              <a:rPr sz="1300"/>
+              <a:t>    • Her satıra bir kayıt</a:t>
+            </a:r>
+          </a:p>
+          <a:p>
+            <a:pPr>
+              <a:lnSpc>
+                <a:spcPct val="90000"/>
+              </a:lnSpc>
+              <a:spcAft>
+                <a:spcPts val="300"/>
+              </a:spcAft>
+              <a:defRPr sz="2000"/>
+            </a:pPr>
+          </a:p>
+          <a:p>
+            <a:pPr>
+              <a:lnSpc>
+                <a:spcPct val="85000"/>
+              </a:lnSpc>
+              <a:spcBef>
+                <a:spcPts val="200"/>
+              </a:spcBef>
+              <a:spcAft>
+                <a:spcPts val="200"/>
+              </a:spcAft>
+              <a:defRPr sz="2000"/>
+            </a:pPr>
+            <a:r>
+              <a:rPr sz="1300"/>
+              <a:t>3️⃣ Biçimlendir:</a:t>
+            </a:r>
+          </a:p>
+          <a:p>
+            <a:pPr lvl="1">
+              <a:lnSpc>
+                <a:spcPct val="85000"/>
+              </a:lnSpc>
+              <a:spcBef>
+                <a:spcPts val="200"/>
+              </a:spcBef>
+              <a:spcAft>
+                <a:spcPts val="200"/>
+              </a:spcAft>
+              <a:defRPr sz="1800"/>
+            </a:pPr>
+            <a:r>
+              <a:rPr sz="1300"/>
+              <a:t>    • Kalın başlıklar</a:t>
+            </a:r>
+          </a:p>
+          <a:p>
+            <a:pPr lvl="1">
+              <a:lnSpc>
+                <a:spcPct val="85000"/>
+              </a:lnSpc>
+              <a:spcBef>
+                <a:spcPts val="200"/>
+              </a:spcBef>
+              <a:spcAft>
+                <a:spcPts val="200"/>
+              </a:spcAft>
+              <a:defRPr sz="1800"/>
+            </a:pPr>
+            <a:r>
+              <a:rPr sz="1300"/>
+              <a:t>    • Kenarlıklar ekle</a:t>
+            </a:r>
+          </a:p>
+          <a:p>
+            <a:pPr lvl="1">
+              <a:lnSpc>
+                <a:spcPct val="85000"/>
+              </a:lnSpc>
+              <a:spcBef>
+                <a:spcPts val="200"/>
+              </a:spcBef>
+              <a:spcAft>
+                <a:spcPts val="200"/>
+              </a:spcAft>
+              <a:defRPr sz="1800"/>
+            </a:pPr>
+            <a:r>
+              <a:rPr sz="1300"/>
+              <a:t>    • Renkler kullan</a:t>
+            </a:r>
+          </a:p>
+          <a:p>
+            <a:pPr>
+              <a:lnSpc>
+                <a:spcPct val="90000"/>
+              </a:lnSpc>
+              <a:spcAft>
+                <a:spcPts val="300"/>
+              </a:spcAft>
+              <a:defRPr sz="2000"/>
+            </a:pPr>
+          </a:p>
+          <a:p>
+            <a:pPr>
+              <a:lnSpc>
+                <a:spcPct val="85000"/>
+              </a:lnSpc>
+              <a:spcBef>
+                <a:spcPts val="200"/>
+              </a:spcBef>
+              <a:spcAft>
+                <a:spcPts val="200"/>
+              </a:spcAft>
+              <a:defRPr sz="2000"/>
+            </a:pPr>
+            <a:r>
+              <a:rPr sz="1300"/>
+              <a:t>4️⃣ Sırala:</a:t>
+            </a:r>
+          </a:p>
+          <a:p>
+            <a:pPr lvl="1">
+              <a:lnSpc>
+                <a:spcPct val="85000"/>
+              </a:lnSpc>
+              <a:spcBef>
+                <a:spcPts val="200"/>
+              </a:spcBef>
+              <a:spcAft>
+                <a:spcPts val="200"/>
+              </a:spcAft>
+              <a:defRPr sz="1800"/>
+            </a:pPr>
+            <a:r>
+              <a:rPr sz="1300"/>
+              <a:t>    • Veri → Sırala</a:t>
+            </a:r>
+          </a:p>
+          <a:p>
+            <a:pPr>
+              <a:lnSpc>
+                <a:spcPct val="90000"/>
+              </a:lnSpc>
+              <a:spcAft>
+                <a:spcPts val="300"/>
+              </a:spcAft>
+              <a:defRPr sz="2000"/>
+            </a:pPr>
+          </a:p>
+          <a:p>
+            <a:pPr>
+              <a:lnSpc>
+                <a:spcPct val="85000"/>
+              </a:lnSpc>
+              <a:spcBef>
+                <a:spcPts val="200"/>
+              </a:spcBef>
+              <a:spcAft>
+                <a:spcPts val="200"/>
+              </a:spcAft>
+              <a:defRPr sz="2000"/>
+            </a:pPr>
+            <a:r>
+              <a:rPr sz="1300"/>
+              <a:t>5️⃣ Filtrele:</a:t>
+            </a:r>
+          </a:p>
+          <a:p>
+            <a:pPr lvl="1">
+              <a:lnSpc>
+                <a:spcPct val="85000"/>
+              </a:lnSpc>
+              <a:spcBef>
+                <a:spcPts val="200"/>
+              </a:spcBef>
+              <a:spcAft>
+                <a:spcPts val="200"/>
+              </a:spcAft>
+              <a:defRPr sz="1800"/>
+            </a:pPr>
+            <a:r>
+              <a:rPr sz="1300"/>
+              <a:t>    • Belirli verileri göster</a:t>
+            </a:r>
+          </a:p>
+          <a:p>
+            <a:pPr>
+              <a:lnSpc>
+                <a:spcPct val="90000"/>
+              </a:lnSpc>
+              <a:spcAft>
+                <a:spcPts val="300"/>
+              </a:spcAft>
+              <a:defRPr sz="2000"/>
+            </a:pPr>
+          </a:p>
+          <a:p>
+            <a:pPr>
+              <a:lnSpc>
+                <a:spcPct val="85000"/>
+              </a:lnSpc>
+              <a:spcBef>
+                <a:spcPts val="200"/>
+              </a:spcBef>
+              <a:spcAft>
+                <a:spcPts val="200"/>
+              </a:spcAft>
               <a:defRPr sz="2000" b="1"/>
             </a:pPr>
             <a:r>
               <a:rPr sz="1300"/>
-              <a:t>✅ Temel Kavramlar:</a:t>
-            </a:r>
-          </a:p>
-          <a:p>
-            <a:pPr lvl="1">
-              <a:lnSpc>
-                <a:spcPct val="90000"/>
-              </a:lnSpc>
-              <a:spcAft>
-                <a:spcPts val="300"/>
-              </a:spcAft>
-              <a:defRPr sz="1800"/>
-            </a:pPr>
-            <a:r>
-              <a:rPr sz="1300"/>
-              <a:t>    • Hücre: Tek bir veri kutusu (A1, B2)</a:t>
-            </a:r>
-          </a:p>
-          <a:p>
-            <a:pPr lvl="1">
-              <a:lnSpc>
-                <a:spcPct val="90000"/>
-              </a:lnSpc>
-              <a:spcAft>
-                <a:spcPts val="300"/>
-              </a:spcAft>
-              <a:defRPr sz="1800"/>
-            </a:pPr>
-            <a:r>
-              <a:rPr sz="1300"/>
-              <a:t>    • Satır: Yatay</a:t>
-            </a:r>
-          </a:p>
-          <a:p>
-            <a:pPr lvl="1">
-              <a:lnSpc>
-                <a:spcPct val="90000"/>
-              </a:lnSpc>
-              <a:spcAft>
-                <a:spcPts val="300"/>
-              </a:spcAft>
-              <a:defRPr sz="1800"/>
-            </a:pPr>
-            <a:r>
-              <a:rPr sz="1300"/>
-              <a:t>    • Sütun: Dikey</a:t>
-            </a:r>
-          </a:p>
-          <a:p>
-            <a:pPr lvl="1">
-              <a:lnSpc>
-                <a:spcPct val="90000"/>
-              </a:lnSpc>
-              <a:spcAft>
-                <a:spcPts val="300"/>
-              </a:spcAft>
-              <a:defRPr sz="1800"/>
-            </a:pPr>
-            <a:r>
-              <a:rPr sz="1300"/>
-              <a:t>    • Formül: Hesaplamalar</a:t>
-            </a:r>
-          </a:p>
-          <a:p>
-            <a:pPr>
-              <a:lnSpc>
-                <a:spcPct val="90000"/>
-              </a:lnSpc>
-              <a:spcAft>
-                <a:spcPts val="300"/>
-              </a:spcAft>
-              <a:defRPr sz="2000"/>
-            </a:pPr>
-          </a:p>
-          <a:p>
-            <a:pPr>
-              <a:lnSpc>
-                <a:spcPct val="90000"/>
-              </a:lnSpc>
-              <a:spcAft>
-                <a:spcPts val="300"/>
-              </a:spcAft>
-              <a:defRPr sz="2000" b="1"/>
-            </a:pPr>
-            <a:r>
-              <a:rPr sz="1300"/>
-              <a:t>📌 Tablo Oluşturma Adımları:</a:t>
-            </a:r>
-          </a:p>
-          <a:p>
-            <a:pPr>
-              <a:lnSpc>
-                <a:spcPct val="90000"/>
-              </a:lnSpc>
-              <a:spcAft>
-                <a:spcPts val="300"/>
-              </a:spcAft>
-              <a:defRPr sz="2000"/>
-            </a:pPr>
-          </a:p>
-          <a:p>
-            <a:pPr>
-              <a:lnSpc>
-                <a:spcPct val="90000"/>
-              </a:lnSpc>
-              <a:spcAft>
-                <a:spcPts val="300"/>
-              </a:spcAft>
-              <a:defRPr sz="2000"/>
-            </a:pPr>
-            <a:r>
-              <a:rPr sz="1300"/>
-              <a:t>1️⃣ Başlıkları Yaz:</a:t>
-            </a:r>
-          </a:p>
-          <a:p>
-            <a:pPr lvl="1">
-              <a:lnSpc>
-                <a:spcPct val="90000"/>
-              </a:lnSpc>
-              <a:spcAft>
-                <a:spcPts val="300"/>
-              </a:spcAft>
-              <a:defRPr sz="1800"/>
-            </a:pPr>
-            <a:r>
-              <a:rPr sz="1300"/>
-              <a:t>    • İlk satıra sütun adları</a:t>
-            </a:r>
-          </a:p>
-          <a:p>
-            <a:pPr>
-              <a:lnSpc>
-                <a:spcPct val="90000"/>
-              </a:lnSpc>
-              <a:spcAft>
-                <a:spcPts val="300"/>
-              </a:spcAft>
-              <a:defRPr sz="2000"/>
-            </a:pPr>
-          </a:p>
-          <a:p>
-            <a:pPr>
-              <a:lnSpc>
-                <a:spcPct val="90000"/>
-              </a:lnSpc>
-              <a:spcAft>
-                <a:spcPts val="300"/>
-              </a:spcAft>
-              <a:defRPr sz="2000"/>
-            </a:pPr>
-            <a:r>
-              <a:rPr sz="1300"/>
-              <a:t>2️⃣ Verileri Gir:</a:t>
-            </a:r>
-          </a:p>
-          <a:p>
-            <a:pPr lvl="1">
-              <a:lnSpc>
-                <a:spcPct val="90000"/>
-              </a:lnSpc>
-              <a:spcAft>
-                <a:spcPts val="300"/>
-              </a:spcAft>
-              <a:defRPr sz="1800"/>
-            </a:pPr>
-            <a:r>
-              <a:rPr sz="1300"/>
-              <a:t>    • Her satıra bir kayıt</a:t>
-            </a:r>
-          </a:p>
-          <a:p>
-            <a:pPr>
-              <a:lnSpc>
-                <a:spcPct val="90000"/>
-              </a:lnSpc>
-              <a:spcAft>
-                <a:spcPts val="300"/>
-              </a:spcAft>
-              <a:defRPr sz="2000"/>
-            </a:pPr>
-          </a:p>
-          <a:p>
-            <a:pPr>
-              <a:lnSpc>
-                <a:spcPct val="90000"/>
-              </a:lnSpc>
-              <a:spcAft>
-                <a:spcPts val="300"/>
-              </a:spcAft>
-              <a:defRPr sz="2000"/>
-            </a:pPr>
-            <a:r>
-              <a:rPr sz="1300"/>
-              <a:t>3️⃣ Biçimlendir:</a:t>
-            </a:r>
-          </a:p>
-          <a:p>
-            <a:pPr lvl="1">
-              <a:lnSpc>
-                <a:spcPct val="90000"/>
-              </a:lnSpc>
-              <a:spcAft>
-                <a:spcPts val="300"/>
-              </a:spcAft>
-              <a:defRPr sz="1800"/>
-            </a:pPr>
-            <a:r>
-              <a:rPr sz="1300"/>
-              <a:t>    • Kalın başlıklar</a:t>
-            </a:r>
-          </a:p>
-          <a:p>
-            <a:pPr lvl="1">
-              <a:lnSpc>
-                <a:spcPct val="90000"/>
-              </a:lnSpc>
-              <a:spcAft>
-                <a:spcPts val="300"/>
-              </a:spcAft>
-              <a:defRPr sz="1800"/>
-            </a:pPr>
-            <a:r>
-              <a:rPr sz="1300"/>
-              <a:t>    • Kenarlıklar ekle</a:t>
-            </a:r>
-          </a:p>
-          <a:p>
-            <a:pPr lvl="1">
-              <a:lnSpc>
-                <a:spcPct val="90000"/>
-              </a:lnSpc>
-              <a:spcAft>
-                <a:spcPts val="300"/>
-              </a:spcAft>
-              <a:defRPr sz="1800"/>
-            </a:pPr>
-            <a:r>
-              <a:rPr sz="1300"/>
-              <a:t>    • Renkler kullan</a:t>
-            </a:r>
-          </a:p>
-          <a:p>
-            <a:pPr>
-              <a:lnSpc>
-                <a:spcPct val="90000"/>
-              </a:lnSpc>
-              <a:spcAft>
-                <a:spcPts val="300"/>
-              </a:spcAft>
-              <a:defRPr sz="2000"/>
-            </a:pPr>
-          </a:p>
-          <a:p>
-            <a:pPr>
-              <a:lnSpc>
-                <a:spcPct val="90000"/>
-              </a:lnSpc>
-              <a:spcAft>
-                <a:spcPts val="300"/>
-              </a:spcAft>
-              <a:defRPr sz="2000"/>
-            </a:pPr>
-            <a:r>
-              <a:rPr sz="1300"/>
-              <a:t>4️⃣ Sırala:</a:t>
-            </a:r>
-          </a:p>
-          <a:p>
-            <a:pPr lvl="1">
-              <a:lnSpc>
-                <a:spcPct val="90000"/>
-              </a:lnSpc>
-              <a:spcAft>
-                <a:spcPts val="300"/>
-              </a:spcAft>
-              <a:defRPr sz="1800"/>
-            </a:pPr>
-            <a:r>
-              <a:rPr sz="1300"/>
-              <a:t>    • Veri → Sırala</a:t>
-            </a:r>
-          </a:p>
-          <a:p>
-            <a:pPr>
-              <a:lnSpc>
-                <a:spcPct val="90000"/>
-              </a:lnSpc>
-              <a:spcAft>
-                <a:spcPts val="300"/>
-              </a:spcAft>
-              <a:defRPr sz="2000"/>
-            </a:pPr>
-          </a:p>
-          <a:p>
-            <a:pPr>
-              <a:lnSpc>
-                <a:spcPct val="90000"/>
-              </a:lnSpc>
-              <a:spcAft>
-                <a:spcPts val="300"/>
-              </a:spcAft>
-              <a:defRPr sz="2000"/>
-            </a:pPr>
-            <a:r>
-              <a:rPr sz="1300"/>
-              <a:t>5️⃣ Filtrele:</a:t>
-            </a:r>
-          </a:p>
-          <a:p>
-            <a:pPr lvl="1">
-              <a:lnSpc>
-                <a:spcPct val="90000"/>
-              </a:lnSpc>
-              <a:spcAft>
-                <a:spcPts val="300"/>
-              </a:spcAft>
-              <a:defRPr sz="1800"/>
-            </a:pPr>
-            <a:r>
-              <a:rPr sz="1300"/>
-              <a:t>    • Belirli verileri göster</a:t>
-            </a:r>
-          </a:p>
-          <a:p>
-            <a:pPr>
-              <a:lnSpc>
-                <a:spcPct val="90000"/>
-              </a:lnSpc>
-              <a:spcAft>
-                <a:spcPts val="300"/>
-              </a:spcAft>
-              <a:defRPr sz="2000"/>
-            </a:pPr>
-          </a:p>
-          <a:p>
-            <a:pPr>
-              <a:lnSpc>
-                <a:spcPct val="90000"/>
-              </a:lnSpc>
-              <a:spcAft>
-                <a:spcPts val="300"/>
-              </a:spcAft>
-              <a:defRPr sz="2000" b="1"/>
-            </a:pPr>
-            <a:r>
-              <a:rPr sz="1300"/>
               <a:t>💡 Kısayollar:</a:t>
             </a:r>
           </a:p>
           <a:p>
             <a:pPr lvl="1">
               <a:lnSpc>
-                <a:spcPct val="90000"/>
-              </a:lnSpc>
-              <a:spcAft>
-                <a:spcPts val="300"/>
+                <a:spcPct val="85000"/>
+              </a:lnSpc>
+              <a:spcBef>
+                <a:spcPts val="200"/>
+              </a:spcBef>
+              <a:spcAft>
+                <a:spcPts val="200"/>
               </a:spcAft>
               <a:defRPr sz="1800"/>
             </a:pPr>
@@ -12628,10 +13706,13 @@
           <a:p>
             <a:pPr lvl="1">
               <a:lnSpc>
-                <a:spcPct val="90000"/>
-              </a:lnSpc>
-              <a:spcAft>
-                <a:spcPts val="300"/>
+                <a:spcPct val="85000"/>
+              </a:lnSpc>
+              <a:spcBef>
+                <a:spcPts val="200"/>
+              </a:spcBef>
+              <a:spcAft>
+                <a:spcPts val="200"/>
               </a:spcAft>
               <a:defRPr sz="1800"/>
             </a:pPr>
@@ -12643,10 +13724,13 @@
           <a:p>
             <a:pPr lvl="1">
               <a:lnSpc>
-                <a:spcPct val="90000"/>
-              </a:lnSpc>
-              <a:spcAft>
-                <a:spcPts val="300"/>
+                <a:spcPct val="85000"/>
+              </a:lnSpc>
+              <a:spcBef>
+                <a:spcPts val="200"/>
+              </a:spcBef>
+              <a:spcAft>
+                <a:spcPts val="200"/>
               </a:spcAft>
               <a:defRPr sz="1800"/>
             </a:pPr>
